--- a/presentation/Graph-of-Shots_new.pptx
+++ b/presentation/Graph-of-Shots_new.pptx
@@ -4,21 +4,24 @@
   <p:sldMasterIdLst>
     <p:sldMasterId id="2147483648" r:id="rId1"/>
   </p:sldMasterIdLst>
+  <p:notesMasterIdLst>
+    <p:notesMasterId r:id="rId14"/>
+  </p:notesMasterIdLst>
   <p:sldIdLst>
-    <p:sldId id="256" r:id="rId7"/>
-    <p:sldId id="257" r:id="rId9"/>
-    <p:sldId id="258" r:id="rId10"/>
-    <p:sldId id="259" r:id="rId11"/>
-    <p:sldId id="260" r:id="rId12"/>
-    <p:sldId id="261" r:id="rId13"/>
-    <p:sldId id="262" r:id="rId14"/>
-    <p:sldId id="263" r:id="rId15"/>
-    <p:sldId id="264" r:id="rId16"/>
-    <p:sldId id="265" r:id="rId17"/>
-    <p:sldId id="266" r:id="rId18"/>
-    <p:sldId id="267" r:id="rId19"/>
+    <p:sldId id="256" r:id="rId2"/>
+    <p:sldId id="257" r:id="rId3"/>
+    <p:sldId id="259" r:id="rId4"/>
+    <p:sldId id="260" r:id="rId5"/>
+    <p:sldId id="265" r:id="rId6"/>
+    <p:sldId id="261" r:id="rId7"/>
+    <p:sldId id="262" r:id="rId8"/>
+    <p:sldId id="258" r:id="rId9"/>
+    <p:sldId id="263" r:id="rId10"/>
+    <p:sldId id="264" r:id="rId11"/>
+    <p:sldId id="266" r:id="rId12"/>
+    <p:sldId id="267" r:id="rId13"/>
   </p:sldIdLst>
-  <p:sldSz cx="12191695" cy="6858000" type="screen4x3"/>
+  <p:sldSz cx="12192000" cy="6858000"/>
   <p:notesSz cx="6858000" cy="9144000"/>
   <p:defaultTextStyle>
     <a:defPPr>
@@ -115,11 +118,27 @@
       </a:defRPr>
     </a:lvl9pPr>
   </p:defaultTextStyle>
+  <p:extLst>
+    <p:ext uri="{EFAFB233-063F-42B5-8137-9DF3F51BA10A}">
+      <p15:sldGuideLst xmlns:p15="http://schemas.microsoft.com/office/powerpoint/2012/main">
+        <p15:guide id="1" orient="horz" pos="2160">
+          <p15:clr>
+            <a:srgbClr val="A4A3A4"/>
+          </p15:clr>
+        </p15:guide>
+        <p15:guide id="2" pos="2880">
+          <p15:clr>
+            <a:srgbClr val="A4A3A4"/>
+          </p15:clr>
+        </p15:guide>
+      </p15:sldGuideLst>
+    </p:ext>
+  </p:extLst>
 </p:presentation>
 </file>
 
 <file path=ppt/notesMasters/notesMaster1.xml><?xml version="1.0" encoding="utf-8"?>
-<p:notesMaster xmlns:a="http://schemas.openxmlformats.org/drawingml/2006/main" xmlns:p="http://schemas.openxmlformats.org/presentationml/2006/main" xmlns:r="http://schemas.openxmlformats.org/officeDocument/2006/relationships">
+<p:notesMaster xmlns:a="http://schemas.openxmlformats.org/drawingml/2006/main" xmlns:r="http://schemas.openxmlformats.org/officeDocument/2006/relationships" xmlns:p="http://schemas.openxmlformats.org/presentationml/2006/main">
   <p:cSld>
     <p:bg>
       <p:bgRef idx="1001">
@@ -140,241 +159,16 @@
           <a:chExt cx="0" cy="0"/>
         </a:xfrm>
       </p:grpSpPr>
-      <p:sp>
-        <p:nvSpPr>
-          <p:cNvPr id="2" name="Header Placeholder 1"/>
-          <p:cNvSpPr>
-            <a:spLocks noGrp="1"/>
-          </p:cNvSpPr>
-          <p:nvPr>
-            <p:ph type="hdr" sz="quarter"/>
-          </p:nvPr>
-        </p:nvSpPr>
-        <p:spPr>
-          <a:xfrm>
-            <a:off x="0" y="0"/>
-            <a:ext cx="2971800" cy="457200"/>
-          </a:xfrm>
-          <a:prstGeom prst="rect">
-            <a:avLst/>
-          </a:prstGeom>
-        </p:spPr>
-        <p:txBody>
-          <a:bodyPr vert="horz" lIns="91440" tIns="45720" rIns="91440" bIns="45720" rtlCol="0"/>
-          <a:lstStyle>
-            <a:lvl1pPr algn="l">
-              <a:defRPr sz="1200"/>
-            </a:lvl1pPr>
-          </a:lstStyle>
-          <a:p>
-            <a:endParaRPr lang="en-US"/>
-          </a:p>
-        </p:txBody>
-      </p:sp>
-      <p:sp>
-        <p:nvSpPr>
-          <p:cNvPr id="3" name="Date Placeholder 2"/>
-          <p:cNvSpPr>
-            <a:spLocks noGrp="1"/>
-          </p:cNvSpPr>
-          <p:nvPr>
-            <p:ph type="dt" idx="1"/>
-          </p:nvPr>
-        </p:nvSpPr>
-        <p:spPr>
-          <a:xfrm>
-            <a:off x="3884613" y="0"/>
-            <a:ext cx="2971800" cy="457200"/>
-          </a:xfrm>
-          <a:prstGeom prst="rect">
-            <a:avLst/>
-          </a:prstGeom>
-        </p:spPr>
-        <p:txBody>
-          <a:bodyPr vert="horz" lIns="91440" tIns="45720" rIns="91440" bIns="45720" rtlCol="0"/>
-          <a:lstStyle>
-            <a:lvl1pPr algn="r">
-              <a:defRPr sz="1200"/>
-            </a:lvl1pPr>
-          </a:lstStyle>
-          <a:p>
-            <a:fld id="{0F89C1C7-3DCD-1040-A9CF-14679D8B5DDD}" type="datetimeFigureOut">
-              <a:rPr lang="en-US" smtClean="0"/>
-              <a:t>10/17/16</a:t>
-            </a:fld>
-            <a:endParaRPr lang="en-US"/>
-          </a:p>
-        </p:txBody>
-      </p:sp>
-      <p:sp>
-        <p:nvSpPr>
-          <p:cNvPr id="4" name="Slide Image Placeholder 3"/>
-          <p:cNvSpPr>
-            <a:spLocks noGrp="1" noRot="1" noChangeAspect="1"/>
-          </p:cNvSpPr>
-          <p:nvPr>
-            <p:ph type="sldImg" idx="2"/>
-          </p:nvPr>
-        </p:nvSpPr>
-        <p:spPr>
-          <a:xfrm>
-            <a:off x="1143000" y="685800"/>
-            <a:ext cx="4572000" cy="3429000"/>
-          </a:xfrm>
-          <a:prstGeom prst="rect">
-            <a:avLst/>
-          </a:prstGeom>
-          <a:noFill/>
-          <a:ln w="12700">
-            <a:solidFill>
-              <a:prstClr val="black"/>
-            </a:solidFill>
-          </a:ln>
-        </p:spPr>
-        <p:txBody>
-          <a:bodyPr vert="horz" lIns="91440" tIns="45720" rIns="91440" bIns="45720" rtlCol="0" anchor="ctr"/>
-          <a:lstStyle/>
-          <a:p>
-            <a:endParaRPr lang="en-US"/>
-          </a:p>
-        </p:txBody>
-      </p:sp>
-      <p:sp>
-        <p:nvSpPr>
-          <p:cNvPr id="5" name="Notes Placeholder 4"/>
-          <p:cNvSpPr>
-            <a:spLocks noGrp="1"/>
-          </p:cNvSpPr>
-          <p:nvPr>
-            <p:ph type="body" sz="quarter" idx="3"/>
-          </p:nvPr>
-        </p:nvSpPr>
-        <p:spPr>
-          <a:xfrm>
-            <a:off x="685800" y="4343400"/>
-            <a:ext cx="5486400" cy="4114800"/>
-          </a:xfrm>
-          <a:prstGeom prst="rect">
-            <a:avLst/>
-          </a:prstGeom>
-        </p:spPr>
-        <p:txBody>
-          <a:bodyPr vert="horz" lIns="91440" tIns="45720" rIns="91440" bIns="45720" rtlCol="0"/>
-          <a:lstStyle/>
-          <a:p>
-            <a:pPr lvl="0"/>
-            <a:r>
-              <a:rPr lang="en-US" smtClean="0"/>
-              <a:t>Click to edit Master text styles</a:t>
-            </a:r>
-          </a:p>
-          <a:p>
-            <a:pPr lvl="1"/>
-            <a:r>
-              <a:rPr lang="en-US" smtClean="0"/>
-              <a:t>Second level</a:t>
-            </a:r>
-          </a:p>
-          <a:p>
-            <a:pPr lvl="2"/>
-            <a:r>
-              <a:rPr lang="en-US" smtClean="0"/>
-              <a:t>Third level</a:t>
-            </a:r>
-          </a:p>
-          <a:p>
-            <a:pPr lvl="3"/>
-            <a:r>
-              <a:rPr lang="en-US" smtClean="0"/>
-              <a:t>Fourth level</a:t>
-            </a:r>
-          </a:p>
-          <a:p>
-            <a:pPr lvl="4"/>
-            <a:r>
-              <a:rPr lang="en-US" smtClean="0"/>
-              <a:t>Fifth level</a:t>
-            </a:r>
-            <a:endParaRPr lang="en-US"/>
-          </a:p>
-        </p:txBody>
-      </p:sp>
-      <p:sp>
-        <p:nvSpPr>
-          <p:cNvPr id="6" name="Footer Placeholder 5"/>
-          <p:cNvSpPr>
-            <a:spLocks noGrp="1"/>
-          </p:cNvSpPr>
-          <p:nvPr>
-            <p:ph type="ftr" sz="quarter" idx="4"/>
-          </p:nvPr>
-        </p:nvSpPr>
-        <p:spPr>
-          <a:xfrm>
-            <a:off x="0" y="8685213"/>
-            <a:ext cx="2971800" cy="457200"/>
-          </a:xfrm>
-          <a:prstGeom prst="rect">
-            <a:avLst/>
-          </a:prstGeom>
-        </p:spPr>
-        <p:txBody>
-          <a:bodyPr vert="horz" lIns="91440" tIns="45720" rIns="91440" bIns="45720" rtlCol="0" anchor="b"/>
-          <a:lstStyle>
-            <a:lvl1pPr algn="l">
-              <a:defRPr sz="1200"/>
-            </a:lvl1pPr>
-          </a:lstStyle>
-          <a:p>
-            <a:endParaRPr lang="en-US"/>
-          </a:p>
-        </p:txBody>
-      </p:sp>
-      <p:sp>
-        <p:nvSpPr>
-          <p:cNvPr id="7" name="Slide Number Placeholder 6"/>
-          <p:cNvSpPr>
-            <a:spLocks noGrp="1"/>
-          </p:cNvSpPr>
-          <p:nvPr>
-            <p:ph type="sldNum" sz="quarter" idx="5"/>
-          </p:nvPr>
-        </p:nvSpPr>
-        <p:spPr>
-          <a:xfrm>
-            <a:off x="3884613" y="8685213"/>
-            <a:ext cx="2971800" cy="457200"/>
-          </a:xfrm>
-          <a:prstGeom prst="rect">
-            <a:avLst/>
-          </a:prstGeom>
-        </p:spPr>
-        <p:txBody>
-          <a:bodyPr vert="horz" lIns="91440" tIns="45720" rIns="91440" bIns="45720" rtlCol="0" anchor="b"/>
-          <a:lstStyle>
-            <a:lvl1pPr algn="r">
-              <a:defRPr sz="1200"/>
-            </a:lvl1pPr>
-          </a:lstStyle>
-          <a:p>
-            <a:fld id="{BB5E49A5-4136-284D-997B-48E1D791AD67}" type="slidenum">
-              <a:rPr lang="en-US" smtClean="0"/>
-              <a:t>‹#›</a:t>
-            </a:fld>
-            <a:endParaRPr lang="en-US"/>
-          </a:p>
-        </p:txBody>
-      </p:sp>
     </p:spTree>
     <p:extLst>
       <p:ext uri="{BB962C8B-B14F-4D97-AF65-F5344CB8AC3E}">
-        <p14:creationId xmlns:p14="http://schemas.microsoft.com/office/powerpoint/2010/main" val="2623252185"/>
+        <p14:creationId xmlns:p14="http://schemas.microsoft.com/office/powerpoint/2010/main" val="3787734296"/>
       </p:ext>
     </p:extLst>
   </p:cSld>
   <p:clrMap bg1="lt1" tx1="dk1" bg2="lt2" tx2="dk2" accent1="accent1" accent2="accent2" accent3="accent3" accent4="accent4" accent5="accent5" accent6="accent6" hlink="hlink" folHlink="folHlink"/>
   <p:notesStyle>
-    <a:lvl1pPr marL="0" algn="l" defTabSz="457200" rtl="0" eaLnBrk="1" latinLnBrk="0" hangingPunct="1">
+    <a:lvl1pPr marL="0" algn="l" defTabSz="914400" rtl="0" eaLnBrk="1" latinLnBrk="0" hangingPunct="1">
       <a:defRPr sz="1200" kern="1200">
         <a:solidFill>
           <a:schemeClr val="tx1"/>
@@ -384,7 +178,7 @@
         <a:cs typeface="+mn-cs"/>
       </a:defRPr>
     </a:lvl1pPr>
-    <a:lvl2pPr marL="457200" algn="l" defTabSz="457200" rtl="0" eaLnBrk="1" latinLnBrk="0" hangingPunct="1">
+    <a:lvl2pPr marL="457200" algn="l" defTabSz="914400" rtl="0" eaLnBrk="1" latinLnBrk="0" hangingPunct="1">
       <a:defRPr sz="1200" kern="1200">
         <a:solidFill>
           <a:schemeClr val="tx1"/>
@@ -394,7 +188,7 @@
         <a:cs typeface="+mn-cs"/>
       </a:defRPr>
     </a:lvl2pPr>
-    <a:lvl3pPr marL="914400" algn="l" defTabSz="457200" rtl="0" eaLnBrk="1" latinLnBrk="0" hangingPunct="1">
+    <a:lvl3pPr marL="914400" algn="l" defTabSz="914400" rtl="0" eaLnBrk="1" latinLnBrk="0" hangingPunct="1">
       <a:defRPr sz="1200" kern="1200">
         <a:solidFill>
           <a:schemeClr val="tx1"/>
@@ -404,7 +198,7 @@
         <a:cs typeface="+mn-cs"/>
       </a:defRPr>
     </a:lvl3pPr>
-    <a:lvl4pPr marL="1371600" algn="l" defTabSz="457200" rtl="0" eaLnBrk="1" latinLnBrk="0" hangingPunct="1">
+    <a:lvl4pPr marL="1371600" algn="l" defTabSz="914400" rtl="0" eaLnBrk="1" latinLnBrk="0" hangingPunct="1">
       <a:defRPr sz="1200" kern="1200">
         <a:solidFill>
           <a:schemeClr val="tx1"/>
@@ -414,7 +208,7 @@
         <a:cs typeface="+mn-cs"/>
       </a:defRPr>
     </a:lvl4pPr>
-    <a:lvl5pPr marL="1828800" algn="l" defTabSz="457200" rtl="0" eaLnBrk="1" latinLnBrk="0" hangingPunct="1">
+    <a:lvl5pPr marL="1828800" algn="l" defTabSz="914400" rtl="0" eaLnBrk="1" latinLnBrk="0" hangingPunct="1">
       <a:defRPr sz="1200" kern="1200">
         <a:solidFill>
           <a:schemeClr val="tx1"/>
@@ -424,7 +218,7 @@
         <a:cs typeface="+mn-cs"/>
       </a:defRPr>
     </a:lvl5pPr>
-    <a:lvl6pPr marL="2286000" algn="l" defTabSz="457200" rtl="0" eaLnBrk="1" latinLnBrk="0" hangingPunct="1">
+    <a:lvl6pPr marL="2286000" algn="l" defTabSz="914400" rtl="0" eaLnBrk="1" latinLnBrk="0" hangingPunct="1">
       <a:defRPr sz="1200" kern="1200">
         <a:solidFill>
           <a:schemeClr val="tx1"/>
@@ -434,7 +228,7 @@
         <a:cs typeface="+mn-cs"/>
       </a:defRPr>
     </a:lvl6pPr>
-    <a:lvl7pPr marL="2743200" algn="l" defTabSz="457200" rtl="0" eaLnBrk="1" latinLnBrk="0" hangingPunct="1">
+    <a:lvl7pPr marL="2743200" algn="l" defTabSz="914400" rtl="0" eaLnBrk="1" latinLnBrk="0" hangingPunct="1">
       <a:defRPr sz="1200" kern="1200">
         <a:solidFill>
           <a:schemeClr val="tx1"/>
@@ -444,7 +238,7 @@
         <a:cs typeface="+mn-cs"/>
       </a:defRPr>
     </a:lvl7pPr>
-    <a:lvl8pPr marL="3200400" algn="l" defTabSz="457200" rtl="0" eaLnBrk="1" latinLnBrk="0" hangingPunct="1">
+    <a:lvl8pPr marL="3200400" algn="l" defTabSz="914400" rtl="0" eaLnBrk="1" latinLnBrk="0" hangingPunct="1">
       <a:defRPr sz="1200" kern="1200">
         <a:solidFill>
           <a:schemeClr val="tx1"/>
@@ -454,7 +248,7 @@
         <a:cs typeface="+mn-cs"/>
       </a:defRPr>
     </a:lvl8pPr>
-    <a:lvl9pPr marL="3657600" algn="l" defTabSz="457200" rtl="0" eaLnBrk="1" latinLnBrk="0" hangingPunct="1">
+    <a:lvl9pPr marL="3657600" algn="l" defTabSz="914400" rtl="0" eaLnBrk="1" latinLnBrk="0" hangingPunct="1">
       <a:defRPr sz="1200" kern="1200">
         <a:solidFill>
           <a:schemeClr val="tx1"/>
@@ -469,7 +263,7 @@
 </file>
 
 <file path=ppt/notesSlides/notesSlide1.xml><?xml version="1.0" encoding="utf-8"?>
-<p:notes xmlns:a="http://schemas.openxmlformats.org/drawingml/2006/main" xmlns:p="http://schemas.openxmlformats.org/presentationml/2006/main" xmlns:r="http://schemas.openxmlformats.org/officeDocument/2006/relationships">
+<p:notes xmlns:a="http://schemas.openxmlformats.org/drawingml/2006/main" xmlns:r="http://schemas.openxmlformats.org/officeDocument/2006/relationships" xmlns:p="http://schemas.openxmlformats.org/presentationml/2006/main">
   <p:cSld>
     <p:spTree>
       <p:nvGrpSpPr>
@@ -489,7 +283,7 @@
         <p:nvSpPr>
           <p:cNvPr id="2" name="Slide Image Placeholder 1"/>
           <p:cNvSpPr>
-            <a:spLocks noGrp="1"/>
+            <a:spLocks noGrp="1" noRot="1" noChangeAspect="1"/>
           </p:cNvSpPr>
           <p:nvPr>
             <p:ph type="sldImg" idx="2"/>
@@ -504,7 +298,7 @@
             <a:spLocks noGrp="1"/>
           </p:cNvSpPr>
           <p:nvPr>
-            <p:ph type="body" idx="3" sz="quarter"/>
+            <p:ph type="body" sz="quarter" idx="3"/>
           </p:nvPr>
         </p:nvSpPr>
         <p:spPr/>
@@ -525,7 +319,7 @@
             <a:spLocks noGrp="1"/>
           </p:cNvSpPr>
           <p:nvPr>
-            <p:ph type="sldNum" idx="5" sz="quarter"/>
+            <p:ph type="sldNum" sz="quarter" idx="5"/>
           </p:nvPr>
         </p:nvSpPr>
         <p:spPr/>
@@ -539,7 +333,7 @@
 </file>
 
 <file path=ppt/notesSlides/notesSlide10.xml><?xml version="1.0" encoding="utf-8"?>
-<p:notes xmlns:a="http://schemas.openxmlformats.org/drawingml/2006/main" xmlns:p="http://schemas.openxmlformats.org/presentationml/2006/main" xmlns:r="http://schemas.openxmlformats.org/officeDocument/2006/relationships">
+<p:notes xmlns:a="http://schemas.openxmlformats.org/drawingml/2006/main" xmlns:r="http://schemas.openxmlformats.org/officeDocument/2006/relationships" xmlns:p="http://schemas.openxmlformats.org/presentationml/2006/main">
   <p:cSld>
     <p:spTree>
       <p:nvGrpSpPr>
@@ -559,7 +353,7 @@
         <p:nvSpPr>
           <p:cNvPr id="2" name="Slide Image Placeholder 1"/>
           <p:cNvSpPr>
-            <a:spLocks noGrp="1"/>
+            <a:spLocks noGrp="1" noRot="1" noChangeAspect="1"/>
           </p:cNvSpPr>
           <p:nvPr>
             <p:ph type="sldImg" idx="2"/>
@@ -574,7 +368,7 @@
             <a:spLocks noGrp="1"/>
           </p:cNvSpPr>
           <p:nvPr>
-            <p:ph type="body" idx="3" sz="quarter"/>
+            <p:ph type="body" sz="quarter" idx="3"/>
           </p:nvPr>
         </p:nvSpPr>
         <p:spPr/>
@@ -583,7 +377,7 @@
           <a:lstStyle/>
           <a:p>
             <a:r>
-              <a:t>v2: diagnosis (one strip) → 5 modifications (card row) → target (banner). Self-contained.</a:t>
+              <a:t>Ablation summary + sample-efficiency curve.</a:t>
             </a:r>
           </a:p>
         </p:txBody>
@@ -595,7 +389,7 @@
             <a:spLocks noGrp="1"/>
           </p:cNvSpPr>
           <p:nvPr>
-            <p:ph type="sldNum" idx="5" sz="quarter"/>
+            <p:ph type="sldNum" sz="quarter" idx="5"/>
           </p:nvPr>
         </p:nvSpPr>
         <p:spPr/>
@@ -609,7 +403,7 @@
 </file>
 
 <file path=ppt/notesSlides/notesSlide11.xml><?xml version="1.0" encoding="utf-8"?>
-<p:notes xmlns:a="http://schemas.openxmlformats.org/drawingml/2006/main" xmlns:p="http://schemas.openxmlformats.org/presentationml/2006/main" xmlns:r="http://schemas.openxmlformats.org/officeDocument/2006/relationships">
+<p:notes xmlns:a="http://schemas.openxmlformats.org/drawingml/2006/main" xmlns:r="http://schemas.openxmlformats.org/officeDocument/2006/relationships" xmlns:p="http://schemas.openxmlformats.org/presentationml/2006/main">
   <p:cSld>
     <p:spTree>
       <p:nvGrpSpPr>
@@ -629,7 +423,7 @@
         <p:nvSpPr>
           <p:cNvPr id="2" name="Slide Image Placeholder 1"/>
           <p:cNvSpPr>
-            <a:spLocks noGrp="1"/>
+            <a:spLocks noGrp="1" noRot="1" noChangeAspect="1"/>
           </p:cNvSpPr>
           <p:nvPr>
             <p:ph type="sldImg" idx="2"/>
@@ -644,7 +438,7 @@
             <a:spLocks noGrp="1"/>
           </p:cNvSpPr>
           <p:nvPr>
-            <p:ph type="body" idx="3" sz="quarter"/>
+            <p:ph type="body" sz="quarter" idx="3"/>
           </p:nvPr>
         </p:nvSpPr>
         <p:spPr/>
@@ -665,7 +459,7 @@
             <a:spLocks noGrp="1"/>
           </p:cNvSpPr>
           <p:nvPr>
-            <p:ph type="sldNum" idx="5" sz="quarter"/>
+            <p:ph type="sldNum" sz="quarter" idx="5"/>
           </p:nvPr>
         </p:nvSpPr>
         <p:spPr/>
@@ -679,7 +473,7 @@
 </file>
 
 <file path=ppt/notesSlides/notesSlide12.xml><?xml version="1.0" encoding="utf-8"?>
-<p:notes xmlns:a="http://schemas.openxmlformats.org/drawingml/2006/main" xmlns:p="http://schemas.openxmlformats.org/presentationml/2006/main" xmlns:r="http://schemas.openxmlformats.org/officeDocument/2006/relationships">
+<p:notes xmlns:a="http://schemas.openxmlformats.org/drawingml/2006/main" xmlns:r="http://schemas.openxmlformats.org/officeDocument/2006/relationships" xmlns:p="http://schemas.openxmlformats.org/presentationml/2006/main">
   <p:cSld>
     <p:spTree>
       <p:nvGrpSpPr>
@@ -699,7 +493,7 @@
         <p:nvSpPr>
           <p:cNvPr id="2" name="Slide Image Placeholder 1"/>
           <p:cNvSpPr>
-            <a:spLocks noGrp="1"/>
+            <a:spLocks noGrp="1" noRot="1" noChangeAspect="1"/>
           </p:cNvSpPr>
           <p:nvPr>
             <p:ph type="sldImg" idx="2"/>
@@ -714,7 +508,7 @@
             <a:spLocks noGrp="1"/>
           </p:cNvSpPr>
           <p:nvPr>
-            <p:ph type="body" idx="3" sz="quarter"/>
+            <p:ph type="body" sz="quarter" idx="3"/>
           </p:nvPr>
         </p:nvSpPr>
         <p:spPr/>
@@ -735,7 +529,7 @@
             <a:spLocks noGrp="1"/>
           </p:cNvSpPr>
           <p:nvPr>
-            <p:ph type="sldNum" idx="5" sz="quarter"/>
+            <p:ph type="sldNum" sz="quarter" idx="5"/>
           </p:nvPr>
         </p:nvSpPr>
         <p:spPr/>
@@ -749,7 +543,7 @@
 </file>
 
 <file path=ppt/notesSlides/notesSlide2.xml><?xml version="1.0" encoding="utf-8"?>
-<p:notes xmlns:a="http://schemas.openxmlformats.org/drawingml/2006/main" xmlns:p="http://schemas.openxmlformats.org/presentationml/2006/main" xmlns:r="http://schemas.openxmlformats.org/officeDocument/2006/relationships">
+<p:notes xmlns:a="http://schemas.openxmlformats.org/drawingml/2006/main" xmlns:r="http://schemas.openxmlformats.org/officeDocument/2006/relationships" xmlns:p="http://schemas.openxmlformats.org/presentationml/2006/main">
   <p:cSld>
     <p:spTree>
       <p:nvGrpSpPr>
@@ -769,7 +563,7 @@
         <p:nvSpPr>
           <p:cNvPr id="2" name="Slide Image Placeholder 1"/>
           <p:cNvSpPr>
-            <a:spLocks noGrp="1"/>
+            <a:spLocks noGrp="1" noRot="1" noChangeAspect="1"/>
           </p:cNvSpPr>
           <p:nvPr>
             <p:ph type="sldImg" idx="2"/>
@@ -784,7 +578,7 @@
             <a:spLocks noGrp="1"/>
           </p:cNvSpPr>
           <p:nvPr>
-            <p:ph type="body" idx="3" sz="quarter"/>
+            <p:ph type="body" sz="quarter" idx="3"/>
           </p:nvPr>
         </p:nvSpPr>
         <p:spPr/>
@@ -805,7 +599,7 @@
             <a:spLocks noGrp="1"/>
           </p:cNvSpPr>
           <p:nvPr>
-            <p:ph type="sldNum" idx="5" sz="quarter"/>
+            <p:ph type="sldNum" sz="quarter" idx="5"/>
           </p:nvPr>
         </p:nvSpPr>
         <p:spPr/>
@@ -819,7 +613,7 @@
 </file>
 
 <file path=ppt/notesSlides/notesSlide3.xml><?xml version="1.0" encoding="utf-8"?>
-<p:notes xmlns:a="http://schemas.openxmlformats.org/drawingml/2006/main" xmlns:p="http://schemas.openxmlformats.org/presentationml/2006/main" xmlns:r="http://schemas.openxmlformats.org/officeDocument/2006/relationships">
+<p:notes xmlns:a="http://schemas.openxmlformats.org/drawingml/2006/main" xmlns:r="http://schemas.openxmlformats.org/officeDocument/2006/relationships" xmlns:p="http://schemas.openxmlformats.org/presentationml/2006/main">
   <p:cSld>
     <p:spTree>
       <p:nvGrpSpPr>
@@ -839,7 +633,7 @@
         <p:nvSpPr>
           <p:cNvPr id="2" name="Slide Image Placeholder 1"/>
           <p:cNvSpPr>
-            <a:spLocks noGrp="1"/>
+            <a:spLocks noGrp="1" noRot="1" noChangeAspect="1"/>
           </p:cNvSpPr>
           <p:nvPr>
             <p:ph type="sldImg" idx="2"/>
@@ -854,7 +648,7 @@
             <a:spLocks noGrp="1"/>
           </p:cNvSpPr>
           <p:nvPr>
-            <p:ph type="body" idx="3" sz="quarter"/>
+            <p:ph type="body" sz="quarter" idx="3"/>
           </p:nvPr>
         </p:nvSpPr>
         <p:spPr/>
@@ -863,7 +657,7 @@
           <a:lstStyle/>
           <a:p>
             <a:r>
-              <a:t>Task-level disjoint split; 673 valid tasks across 4 datasets.</a:t>
+              <a:t>ProtoNet: metric-based prototypes. FOMAML: first-order adaptation (PyG-stable).</a:t>
             </a:r>
           </a:p>
         </p:txBody>
@@ -875,7 +669,7 @@
             <a:spLocks noGrp="1"/>
           </p:cNvSpPr>
           <p:nvPr>
-            <p:ph type="sldNum" idx="5" sz="quarter"/>
+            <p:ph type="sldNum" sz="quarter" idx="5"/>
           </p:nvPr>
         </p:nvSpPr>
         <p:spPr/>
@@ -889,7 +683,7 @@
 </file>
 
 <file path=ppt/notesSlides/notesSlide4.xml><?xml version="1.0" encoding="utf-8"?>
-<p:notes xmlns:a="http://schemas.openxmlformats.org/drawingml/2006/main" xmlns:p="http://schemas.openxmlformats.org/presentationml/2006/main" xmlns:r="http://schemas.openxmlformats.org/officeDocument/2006/relationships">
+<p:notes xmlns:a="http://schemas.openxmlformats.org/drawingml/2006/main" xmlns:r="http://schemas.openxmlformats.org/officeDocument/2006/relationships" xmlns:p="http://schemas.openxmlformats.org/presentationml/2006/main">
   <p:cSld>
     <p:spTree>
       <p:nvGrpSpPr>
@@ -909,7 +703,7 @@
         <p:nvSpPr>
           <p:cNvPr id="2" name="Slide Image Placeholder 1"/>
           <p:cNvSpPr>
-            <a:spLocks noGrp="1"/>
+            <a:spLocks noGrp="1" noRot="1" noChangeAspect="1"/>
           </p:cNvSpPr>
           <p:nvPr>
             <p:ph type="sldImg" idx="2"/>
@@ -924,7 +718,7 @@
             <a:spLocks noGrp="1"/>
           </p:cNvSpPr>
           <p:nvPr>
-            <p:ph type="body" idx="3" sz="quarter"/>
+            <p:ph type="body" sz="quarter" idx="3"/>
           </p:nvPr>
         </p:nvSpPr>
         <p:spPr/>
@@ -933,7 +727,7 @@
           <a:lstStyle/>
           <a:p>
             <a:r>
-              <a:t>ProtoNet: metric-based prototypes. FOMAML: first-order adaptation (PyG-stable).</a:t>
+              <a:t>Key insight: inter-molecule relations within an episode are a strong signal. A meta-graph lets us use it.</a:t>
             </a:r>
           </a:p>
         </p:txBody>
@@ -945,7 +739,7 @@
             <a:spLocks noGrp="1"/>
           </p:cNvSpPr>
           <p:nvPr>
-            <p:ph type="sldNum" idx="5" sz="quarter"/>
+            <p:ph type="sldNum" sz="quarter" idx="5"/>
           </p:nvPr>
         </p:nvSpPr>
         <p:spPr/>
@@ -959,7 +753,7 @@
 </file>
 
 <file path=ppt/notesSlides/notesSlide5.xml><?xml version="1.0" encoding="utf-8"?>
-<p:notes xmlns:a="http://schemas.openxmlformats.org/drawingml/2006/main" xmlns:p="http://schemas.openxmlformats.org/presentationml/2006/main" xmlns:r="http://schemas.openxmlformats.org/officeDocument/2006/relationships">
+<p:notes xmlns:a="http://schemas.openxmlformats.org/drawingml/2006/main" xmlns:r="http://schemas.openxmlformats.org/officeDocument/2006/relationships" xmlns:p="http://schemas.openxmlformats.org/presentationml/2006/main">
   <p:cSld>
     <p:spTree>
       <p:nvGrpSpPr>
@@ -979,7 +773,7 @@
         <p:nvSpPr>
           <p:cNvPr id="2" name="Slide Image Placeholder 1"/>
           <p:cNvSpPr>
-            <a:spLocks noGrp="1"/>
+            <a:spLocks noGrp="1" noRot="1" noChangeAspect="1"/>
           </p:cNvSpPr>
           <p:nvPr>
             <p:ph type="sldImg" idx="2"/>
@@ -994,7 +788,7 @@
             <a:spLocks noGrp="1"/>
           </p:cNvSpPr>
           <p:nvPr>
-            <p:ph type="body" idx="3" sz="quarter"/>
+            <p:ph type="body" sz="quarter" idx="3"/>
           </p:nvPr>
         </p:nvSpPr>
         <p:spPr/>
@@ -1003,7 +797,7 @@
           <a:lstStyle/>
           <a:p>
             <a:r>
-              <a:t>Key insight: inter-molecule relations within an episode are a strong signal. A meta-graph lets us use it.</a:t>
+              <a:t>v2: diagnosis (one strip) → 5 modifications (card row) → target (banner). Self-contained.</a:t>
             </a:r>
           </a:p>
         </p:txBody>
@@ -1015,7 +809,7 @@
             <a:spLocks noGrp="1"/>
           </p:cNvSpPr>
           <p:nvPr>
-            <p:ph type="sldNum" idx="5" sz="quarter"/>
+            <p:ph type="sldNum" sz="quarter" idx="5"/>
           </p:nvPr>
         </p:nvSpPr>
         <p:spPr/>
@@ -1029,7 +823,7 @@
 </file>
 
 <file path=ppt/notesSlides/notesSlide6.xml><?xml version="1.0" encoding="utf-8"?>
-<p:notes xmlns:a="http://schemas.openxmlformats.org/drawingml/2006/main" xmlns:p="http://schemas.openxmlformats.org/presentationml/2006/main" xmlns:r="http://schemas.openxmlformats.org/officeDocument/2006/relationships">
+<p:notes xmlns:a="http://schemas.openxmlformats.org/drawingml/2006/main" xmlns:r="http://schemas.openxmlformats.org/officeDocument/2006/relationships" xmlns:p="http://schemas.openxmlformats.org/presentationml/2006/main">
   <p:cSld>
     <p:spTree>
       <p:nvGrpSpPr>
@@ -1049,7 +843,7 @@
         <p:nvSpPr>
           <p:cNvPr id="2" name="Slide Image Placeholder 1"/>
           <p:cNvSpPr>
-            <a:spLocks noGrp="1"/>
+            <a:spLocks noGrp="1" noRot="1" noChangeAspect="1"/>
           </p:cNvSpPr>
           <p:nvPr>
             <p:ph type="sldImg" idx="2"/>
@@ -1064,7 +858,7 @@
             <a:spLocks noGrp="1"/>
           </p:cNvSpPr>
           <p:nvPr>
-            <p:ph type="body" idx="3" sz="quarter"/>
+            <p:ph type="body" sz="quarter" idx="3"/>
           </p:nvPr>
         </p:nvSpPr>
         <p:spPr/>
@@ -1085,7 +879,7 @@
             <a:spLocks noGrp="1"/>
           </p:cNvSpPr>
           <p:nvPr>
-            <p:ph type="sldNum" idx="5" sz="quarter"/>
+            <p:ph type="sldNum" sz="quarter" idx="5"/>
           </p:nvPr>
         </p:nvSpPr>
         <p:spPr/>
@@ -1099,7 +893,7 @@
 </file>
 
 <file path=ppt/notesSlides/notesSlide7.xml><?xml version="1.0" encoding="utf-8"?>
-<p:notes xmlns:a="http://schemas.openxmlformats.org/drawingml/2006/main" xmlns:p="http://schemas.openxmlformats.org/presentationml/2006/main" xmlns:r="http://schemas.openxmlformats.org/officeDocument/2006/relationships">
+<p:notes xmlns:a="http://schemas.openxmlformats.org/drawingml/2006/main" xmlns:r="http://schemas.openxmlformats.org/officeDocument/2006/relationships" xmlns:p="http://schemas.openxmlformats.org/presentationml/2006/main">
   <p:cSld>
     <p:spTree>
       <p:nvGrpSpPr>
@@ -1119,7 +913,7 @@
         <p:nvSpPr>
           <p:cNvPr id="2" name="Slide Image Placeholder 1"/>
           <p:cNvSpPr>
-            <a:spLocks noGrp="1"/>
+            <a:spLocks noGrp="1" noRot="1" noChangeAspect="1"/>
           </p:cNvSpPr>
           <p:nvPr>
             <p:ph type="sldImg" idx="2"/>
@@ -1134,7 +928,7 @@
             <a:spLocks noGrp="1"/>
           </p:cNvSpPr>
           <p:nvPr>
-            <p:ph type="body" idx="3" sz="quarter"/>
+            <p:ph type="body" sz="quarter" idx="3"/>
           </p:nvPr>
         </p:nvSpPr>
         <p:spPr/>
@@ -1155,7 +949,7 @@
             <a:spLocks noGrp="1"/>
           </p:cNvSpPr>
           <p:nvPr>
-            <p:ph type="sldNum" idx="5" sz="quarter"/>
+            <p:ph type="sldNum" sz="quarter" idx="5"/>
           </p:nvPr>
         </p:nvSpPr>
         <p:spPr/>
@@ -1169,7 +963,7 @@
 </file>
 
 <file path=ppt/notesSlides/notesSlide8.xml><?xml version="1.0" encoding="utf-8"?>
-<p:notes xmlns:a="http://schemas.openxmlformats.org/drawingml/2006/main" xmlns:p="http://schemas.openxmlformats.org/presentationml/2006/main" xmlns:r="http://schemas.openxmlformats.org/officeDocument/2006/relationships">
+<p:notes xmlns:a="http://schemas.openxmlformats.org/drawingml/2006/main" xmlns:r="http://schemas.openxmlformats.org/officeDocument/2006/relationships" xmlns:p="http://schemas.openxmlformats.org/presentationml/2006/main">
   <p:cSld>
     <p:spTree>
       <p:nvGrpSpPr>
@@ -1189,7 +983,7 @@
         <p:nvSpPr>
           <p:cNvPr id="2" name="Slide Image Placeholder 1"/>
           <p:cNvSpPr>
-            <a:spLocks noGrp="1"/>
+            <a:spLocks noGrp="1" noRot="1" noChangeAspect="1"/>
           </p:cNvSpPr>
           <p:nvPr>
             <p:ph type="sldImg" idx="2"/>
@@ -1204,7 +998,7 @@
             <a:spLocks noGrp="1"/>
           </p:cNvSpPr>
           <p:nvPr>
-            <p:ph type="body" idx="3" sz="quarter"/>
+            <p:ph type="body" sz="quarter" idx="3"/>
           </p:nvPr>
         </p:nvSpPr>
         <p:spPr/>
@@ -1213,7 +1007,7 @@
           <a:lstStyle/>
           <a:p>
             <a:r>
-              <a:t>Main comparison. ProtoNet surprisingly strong.</a:t>
+              <a:t>Task-level disjoint split; 673 valid tasks across 4 datasets.</a:t>
             </a:r>
           </a:p>
         </p:txBody>
@@ -1225,7 +1019,7 @@
             <a:spLocks noGrp="1"/>
           </p:cNvSpPr>
           <p:nvPr>
-            <p:ph type="sldNum" idx="5" sz="quarter"/>
+            <p:ph type="sldNum" sz="quarter" idx="5"/>
           </p:nvPr>
         </p:nvSpPr>
         <p:spPr/>
@@ -1239,7 +1033,7 @@
 </file>
 
 <file path=ppt/notesSlides/notesSlide9.xml><?xml version="1.0" encoding="utf-8"?>
-<p:notes xmlns:a="http://schemas.openxmlformats.org/drawingml/2006/main" xmlns:p="http://schemas.openxmlformats.org/presentationml/2006/main" xmlns:r="http://schemas.openxmlformats.org/officeDocument/2006/relationships">
+<p:notes xmlns:a="http://schemas.openxmlformats.org/drawingml/2006/main" xmlns:r="http://schemas.openxmlformats.org/officeDocument/2006/relationships" xmlns:p="http://schemas.openxmlformats.org/presentationml/2006/main">
   <p:cSld>
     <p:spTree>
       <p:nvGrpSpPr>
@@ -1259,7 +1053,7 @@
         <p:nvSpPr>
           <p:cNvPr id="2" name="Slide Image Placeholder 1"/>
           <p:cNvSpPr>
-            <a:spLocks noGrp="1"/>
+            <a:spLocks noGrp="1" noRot="1" noChangeAspect="1"/>
           </p:cNvSpPr>
           <p:nvPr>
             <p:ph type="sldImg" idx="2"/>
@@ -1274,7 +1068,7 @@
             <a:spLocks noGrp="1"/>
           </p:cNvSpPr>
           <p:nvPr>
-            <p:ph type="body" idx="3" sz="quarter"/>
+            <p:ph type="body" sz="quarter" idx="3"/>
           </p:nvPr>
         </p:nvSpPr>
         <p:spPr/>
@@ -1283,7 +1077,7 @@
           <a:lstStyle/>
           <a:p>
             <a:r>
-              <a:t>Ablation summary + sample-efficiency curve.</a:t>
+              <a:t>Main comparison. ProtoNet surprisingly strong.</a:t>
             </a:r>
           </a:p>
         </p:txBody>
@@ -1295,7 +1089,7 @@
             <a:spLocks noGrp="1"/>
           </p:cNvSpPr>
           <p:nvPr>
-            <p:ph type="sldNum" idx="5" sz="quarter"/>
+            <p:ph type="sldNum" sz="quarter" idx="5"/>
           </p:nvPr>
         </p:nvSpPr>
         <p:spPr/>
@@ -1346,10 +1140,9 @@
           <a:lstStyle/>
           <a:p>
             <a:r>
-              <a:rPr lang="en-US" smtClean="0"/>
+              <a:rPr lang="en-US"/>
               <a:t>Click to edit Master title style</a:t>
             </a:r>
-            <a:endParaRPr lang="en-US"/>
           </a:p>
         </p:txBody>
       </p:sp>
@@ -1465,10 +1258,9 @@
           </a:lstStyle>
           <a:p>
             <a:r>
-              <a:rPr lang="en-US" smtClean="0"/>
+              <a:rPr lang="en-US"/>
               <a:t>Click to edit Master subtitle style</a:t>
             </a:r>
-            <a:endParaRPr lang="en-US"/>
           </a:p>
         </p:txBody>
       </p:sp>
@@ -1489,7 +1281,7 @@
           <a:p>
             <a:fld id="{5BCAD085-E8A6-8845-BD4E-CB4CCA059FC4}" type="datetimeFigureOut">
               <a:rPr lang="en-US" smtClean="0"/>
-              <a:t>1/27/13</a:t>
+              <a:t>4/21/2026</a:t>
             </a:fld>
             <a:endParaRPr lang="en-US"/>
           </a:p>
@@ -1583,10 +1375,9 @@
           <a:lstStyle/>
           <a:p>
             <a:r>
-              <a:rPr lang="en-US" smtClean="0"/>
+              <a:rPr lang="en-US"/>
               <a:t>Click to edit Master title style</a:t>
             </a:r>
-            <a:endParaRPr lang="en-US"/>
           </a:p>
         </p:txBody>
       </p:sp>
@@ -1607,38 +1398,37 @@
           <a:p>
             <a:pPr lvl="0"/>
             <a:r>
-              <a:rPr lang="en-US" smtClean="0"/>
+              <a:rPr lang="en-US"/>
               <a:t>Click to edit Master text styles</a:t>
             </a:r>
           </a:p>
           <a:p>
             <a:pPr lvl="1"/>
             <a:r>
-              <a:rPr lang="en-US" smtClean="0"/>
+              <a:rPr lang="en-US"/>
               <a:t>Second level</a:t>
             </a:r>
           </a:p>
           <a:p>
             <a:pPr lvl="2"/>
             <a:r>
-              <a:rPr lang="en-US" smtClean="0"/>
+              <a:rPr lang="en-US"/>
               <a:t>Third level</a:t>
             </a:r>
           </a:p>
           <a:p>
             <a:pPr lvl="3"/>
             <a:r>
-              <a:rPr lang="en-US" smtClean="0"/>
+              <a:rPr lang="en-US"/>
               <a:t>Fourth level</a:t>
             </a:r>
           </a:p>
           <a:p>
             <a:pPr lvl="4"/>
             <a:r>
-              <a:rPr lang="en-US" smtClean="0"/>
+              <a:rPr lang="en-US"/>
               <a:t>Fifth level</a:t>
             </a:r>
-            <a:endParaRPr lang="en-US"/>
           </a:p>
         </p:txBody>
       </p:sp>
@@ -1659,7 +1449,7 @@
           <a:p>
             <a:fld id="{5BCAD085-E8A6-8845-BD4E-CB4CCA059FC4}" type="datetimeFigureOut">
               <a:rPr lang="en-US" smtClean="0"/>
-              <a:t>1/27/13</a:t>
+              <a:t>4/21/2026</a:t>
             </a:fld>
             <a:endParaRPr lang="en-US"/>
           </a:p>
@@ -1758,10 +1548,9 @@
           <a:lstStyle/>
           <a:p>
             <a:r>
-              <a:rPr lang="en-US" smtClean="0"/>
+              <a:rPr lang="en-US"/>
               <a:t>Click to edit Master title style</a:t>
             </a:r>
-            <a:endParaRPr lang="en-US"/>
           </a:p>
         </p:txBody>
       </p:sp>
@@ -1787,38 +1576,37 @@
           <a:p>
             <a:pPr lvl="0"/>
             <a:r>
-              <a:rPr lang="en-US" smtClean="0"/>
+              <a:rPr lang="en-US"/>
               <a:t>Click to edit Master text styles</a:t>
             </a:r>
           </a:p>
           <a:p>
             <a:pPr lvl="1"/>
             <a:r>
-              <a:rPr lang="en-US" smtClean="0"/>
+              <a:rPr lang="en-US"/>
               <a:t>Second level</a:t>
             </a:r>
           </a:p>
           <a:p>
             <a:pPr lvl="2"/>
             <a:r>
-              <a:rPr lang="en-US" smtClean="0"/>
+              <a:rPr lang="en-US"/>
               <a:t>Third level</a:t>
             </a:r>
           </a:p>
           <a:p>
             <a:pPr lvl="3"/>
             <a:r>
-              <a:rPr lang="en-US" smtClean="0"/>
+              <a:rPr lang="en-US"/>
               <a:t>Fourth level</a:t>
             </a:r>
           </a:p>
           <a:p>
             <a:pPr lvl="4"/>
             <a:r>
-              <a:rPr lang="en-US" smtClean="0"/>
+              <a:rPr lang="en-US"/>
               <a:t>Fifth level</a:t>
             </a:r>
-            <a:endParaRPr lang="en-US"/>
           </a:p>
         </p:txBody>
       </p:sp>
@@ -1839,7 +1627,7 @@
           <a:p>
             <a:fld id="{5BCAD085-E8A6-8845-BD4E-CB4CCA059FC4}" type="datetimeFigureOut">
               <a:rPr lang="en-US" smtClean="0"/>
-              <a:t>1/27/13</a:t>
+              <a:t>4/21/2026</a:t>
             </a:fld>
             <a:endParaRPr lang="en-US"/>
           </a:p>
@@ -1933,10 +1721,9 @@
           <a:lstStyle/>
           <a:p>
             <a:r>
-              <a:rPr lang="en-US" smtClean="0"/>
+              <a:rPr lang="en-US"/>
               <a:t>Click to edit Master title style</a:t>
             </a:r>
-            <a:endParaRPr lang="en-US"/>
           </a:p>
         </p:txBody>
       </p:sp>
@@ -1957,38 +1744,37 @@
           <a:p>
             <a:pPr lvl="0"/>
             <a:r>
-              <a:rPr lang="en-US" smtClean="0"/>
+              <a:rPr lang="en-US"/>
               <a:t>Click to edit Master text styles</a:t>
             </a:r>
           </a:p>
           <a:p>
             <a:pPr lvl="1"/>
             <a:r>
-              <a:rPr lang="en-US" smtClean="0"/>
+              <a:rPr lang="en-US"/>
               <a:t>Second level</a:t>
             </a:r>
           </a:p>
           <a:p>
             <a:pPr lvl="2"/>
             <a:r>
-              <a:rPr lang="en-US" smtClean="0"/>
+              <a:rPr lang="en-US"/>
               <a:t>Third level</a:t>
             </a:r>
           </a:p>
           <a:p>
             <a:pPr lvl="3"/>
             <a:r>
-              <a:rPr lang="en-US" smtClean="0"/>
+              <a:rPr lang="en-US"/>
               <a:t>Fourth level</a:t>
             </a:r>
           </a:p>
           <a:p>
             <a:pPr lvl="4"/>
             <a:r>
-              <a:rPr lang="en-US" smtClean="0"/>
+              <a:rPr lang="en-US"/>
               <a:t>Fifth level</a:t>
             </a:r>
-            <a:endParaRPr lang="en-US"/>
           </a:p>
         </p:txBody>
       </p:sp>
@@ -2009,7 +1795,7 @@
           <a:p>
             <a:fld id="{5BCAD085-E8A6-8845-BD4E-CB4CCA059FC4}" type="datetimeFigureOut">
               <a:rPr lang="en-US" smtClean="0"/>
-              <a:t>1/27/13</a:t>
+              <a:t>4/21/2026</a:t>
             </a:fld>
             <a:endParaRPr lang="en-US"/>
           </a:p>
@@ -2112,10 +1898,9 @@
           </a:lstStyle>
           <a:p>
             <a:r>
-              <a:rPr lang="en-US" smtClean="0"/>
+              <a:rPr lang="en-US"/>
               <a:t>Click to edit Master title style</a:t>
             </a:r>
-            <a:endParaRPr lang="en-US"/>
           </a:p>
         </p:txBody>
       </p:sp>
@@ -2232,7 +2017,7 @@
           <a:p>
             <a:pPr lvl="0"/>
             <a:r>
-              <a:rPr lang="en-US" smtClean="0"/>
+              <a:rPr lang="en-US"/>
               <a:t>Click to edit Master text styles</a:t>
             </a:r>
           </a:p>
@@ -2255,7 +2040,7 @@
           <a:p>
             <a:fld id="{5BCAD085-E8A6-8845-BD4E-CB4CCA059FC4}" type="datetimeFigureOut">
               <a:rPr lang="en-US" smtClean="0"/>
-              <a:t>1/27/13</a:t>
+              <a:t>4/21/2026</a:t>
             </a:fld>
             <a:endParaRPr lang="en-US"/>
           </a:p>
@@ -2349,10 +2134,9 @@
           <a:lstStyle/>
           <a:p>
             <a:r>
-              <a:rPr lang="en-US" smtClean="0"/>
+              <a:rPr lang="en-US"/>
               <a:t>Click to edit Master title style</a:t>
             </a:r>
-            <a:endParaRPr lang="en-US"/>
           </a:p>
         </p:txBody>
       </p:sp>
@@ -2406,38 +2190,37 @@
           <a:p>
             <a:pPr lvl="0"/>
             <a:r>
-              <a:rPr lang="en-US" smtClean="0"/>
+              <a:rPr lang="en-US"/>
               <a:t>Click to edit Master text styles</a:t>
             </a:r>
           </a:p>
           <a:p>
             <a:pPr lvl="1"/>
             <a:r>
-              <a:rPr lang="en-US" smtClean="0"/>
+              <a:rPr lang="en-US"/>
               <a:t>Second level</a:t>
             </a:r>
           </a:p>
           <a:p>
             <a:pPr lvl="2"/>
             <a:r>
-              <a:rPr lang="en-US" smtClean="0"/>
+              <a:rPr lang="en-US"/>
               <a:t>Third level</a:t>
             </a:r>
           </a:p>
           <a:p>
             <a:pPr lvl="3"/>
             <a:r>
-              <a:rPr lang="en-US" smtClean="0"/>
+              <a:rPr lang="en-US"/>
               <a:t>Fourth level</a:t>
             </a:r>
           </a:p>
           <a:p>
             <a:pPr lvl="4"/>
             <a:r>
-              <a:rPr lang="en-US" smtClean="0"/>
+              <a:rPr lang="en-US"/>
               <a:t>Fifth level</a:t>
             </a:r>
-            <a:endParaRPr lang="en-US"/>
           </a:p>
         </p:txBody>
       </p:sp>
@@ -2491,38 +2274,37 @@
           <a:p>
             <a:pPr lvl="0"/>
             <a:r>
-              <a:rPr lang="en-US" smtClean="0"/>
+              <a:rPr lang="en-US"/>
               <a:t>Click to edit Master text styles</a:t>
             </a:r>
           </a:p>
           <a:p>
             <a:pPr lvl="1"/>
             <a:r>
-              <a:rPr lang="en-US" smtClean="0"/>
+              <a:rPr lang="en-US"/>
               <a:t>Second level</a:t>
             </a:r>
           </a:p>
           <a:p>
             <a:pPr lvl="2"/>
             <a:r>
-              <a:rPr lang="en-US" smtClean="0"/>
+              <a:rPr lang="en-US"/>
               <a:t>Third level</a:t>
             </a:r>
           </a:p>
           <a:p>
             <a:pPr lvl="3"/>
             <a:r>
-              <a:rPr lang="en-US" smtClean="0"/>
+              <a:rPr lang="en-US"/>
               <a:t>Fourth level</a:t>
             </a:r>
           </a:p>
           <a:p>
             <a:pPr lvl="4"/>
             <a:r>
-              <a:rPr lang="en-US" smtClean="0"/>
+              <a:rPr lang="en-US"/>
               <a:t>Fifth level</a:t>
             </a:r>
-            <a:endParaRPr lang="en-US"/>
           </a:p>
         </p:txBody>
       </p:sp>
@@ -2543,7 +2325,7 @@
           <a:p>
             <a:fld id="{5BCAD085-E8A6-8845-BD4E-CB4CCA059FC4}" type="datetimeFigureOut">
               <a:rPr lang="en-US" smtClean="0"/>
-              <a:t>1/27/13</a:t>
+              <a:t>4/21/2026</a:t>
             </a:fld>
             <a:endParaRPr lang="en-US"/>
           </a:p>
@@ -2641,10 +2423,9 @@
           </a:lstStyle>
           <a:p>
             <a:r>
-              <a:rPr lang="en-US" smtClean="0"/>
+              <a:rPr lang="en-US"/>
               <a:t>Click to edit Master title style</a:t>
             </a:r>
-            <a:endParaRPr lang="en-US"/>
           </a:p>
         </p:txBody>
       </p:sp>
@@ -2707,7 +2488,7 @@
           <a:p>
             <a:pPr lvl="0"/>
             <a:r>
-              <a:rPr lang="en-US" smtClean="0"/>
+              <a:rPr lang="en-US"/>
               <a:t>Click to edit Master text styles</a:t>
             </a:r>
           </a:p>
@@ -2763,38 +2544,37 @@
           <a:p>
             <a:pPr lvl="0"/>
             <a:r>
-              <a:rPr lang="en-US" smtClean="0"/>
+              <a:rPr lang="en-US"/>
               <a:t>Click to edit Master text styles</a:t>
             </a:r>
           </a:p>
           <a:p>
             <a:pPr lvl="1"/>
             <a:r>
-              <a:rPr lang="en-US" smtClean="0"/>
+              <a:rPr lang="en-US"/>
               <a:t>Second level</a:t>
             </a:r>
           </a:p>
           <a:p>
             <a:pPr lvl="2"/>
             <a:r>
-              <a:rPr lang="en-US" smtClean="0"/>
+              <a:rPr lang="en-US"/>
               <a:t>Third level</a:t>
             </a:r>
           </a:p>
           <a:p>
             <a:pPr lvl="3"/>
             <a:r>
-              <a:rPr lang="en-US" smtClean="0"/>
+              <a:rPr lang="en-US"/>
               <a:t>Fourth level</a:t>
             </a:r>
           </a:p>
           <a:p>
             <a:pPr lvl="4"/>
             <a:r>
-              <a:rPr lang="en-US" smtClean="0"/>
+              <a:rPr lang="en-US"/>
               <a:t>Fifth level</a:t>
             </a:r>
-            <a:endParaRPr lang="en-US"/>
           </a:p>
         </p:txBody>
       </p:sp>
@@ -2857,7 +2637,7 @@
           <a:p>
             <a:pPr lvl="0"/>
             <a:r>
-              <a:rPr lang="en-US" smtClean="0"/>
+              <a:rPr lang="en-US"/>
               <a:t>Click to edit Master text styles</a:t>
             </a:r>
           </a:p>
@@ -2913,38 +2693,37 @@
           <a:p>
             <a:pPr lvl="0"/>
             <a:r>
-              <a:rPr lang="en-US" smtClean="0"/>
+              <a:rPr lang="en-US"/>
               <a:t>Click to edit Master text styles</a:t>
             </a:r>
           </a:p>
           <a:p>
             <a:pPr lvl="1"/>
             <a:r>
-              <a:rPr lang="en-US" smtClean="0"/>
+              <a:rPr lang="en-US"/>
               <a:t>Second level</a:t>
             </a:r>
           </a:p>
           <a:p>
             <a:pPr lvl="2"/>
             <a:r>
-              <a:rPr lang="en-US" smtClean="0"/>
+              <a:rPr lang="en-US"/>
               <a:t>Third level</a:t>
             </a:r>
           </a:p>
           <a:p>
             <a:pPr lvl="3"/>
             <a:r>
-              <a:rPr lang="en-US" smtClean="0"/>
+              <a:rPr lang="en-US"/>
               <a:t>Fourth level</a:t>
             </a:r>
           </a:p>
           <a:p>
             <a:pPr lvl="4"/>
             <a:r>
-              <a:rPr lang="en-US" smtClean="0"/>
+              <a:rPr lang="en-US"/>
               <a:t>Fifth level</a:t>
             </a:r>
-            <a:endParaRPr lang="en-US"/>
           </a:p>
         </p:txBody>
       </p:sp>
@@ -2965,7 +2744,7 @@
           <a:p>
             <a:fld id="{5BCAD085-E8A6-8845-BD4E-CB4CCA059FC4}" type="datetimeFigureOut">
               <a:rPr lang="en-US" smtClean="0"/>
-              <a:t>1/27/13</a:t>
+              <a:t>4/21/2026</a:t>
             </a:fld>
             <a:endParaRPr lang="en-US"/>
           </a:p>
@@ -3059,10 +2838,9 @@
           <a:lstStyle/>
           <a:p>
             <a:r>
-              <a:rPr lang="en-US" smtClean="0"/>
+              <a:rPr lang="en-US"/>
               <a:t>Click to edit Master title style</a:t>
             </a:r>
-            <a:endParaRPr lang="en-US"/>
           </a:p>
         </p:txBody>
       </p:sp>
@@ -3083,7 +2861,7 @@
           <a:p>
             <a:fld id="{5BCAD085-E8A6-8845-BD4E-CB4CCA059FC4}" type="datetimeFigureOut">
               <a:rPr lang="en-US" smtClean="0"/>
-              <a:t>1/27/13</a:t>
+              <a:t>4/21/2026</a:t>
             </a:fld>
             <a:endParaRPr lang="en-US"/>
           </a:p>
@@ -3178,7 +2956,7 @@
           <a:p>
             <a:fld id="{5BCAD085-E8A6-8845-BD4E-CB4CCA059FC4}" type="datetimeFigureOut">
               <a:rPr lang="en-US" smtClean="0"/>
-              <a:t>1/27/13</a:t>
+              <a:t>4/21/2026</a:t>
             </a:fld>
             <a:endParaRPr lang="en-US"/>
           </a:p>
@@ -3281,10 +3059,9 @@
           </a:lstStyle>
           <a:p>
             <a:r>
-              <a:rPr lang="en-US" smtClean="0"/>
+              <a:rPr lang="en-US"/>
               <a:t>Click to edit Master title style</a:t>
             </a:r>
-            <a:endParaRPr lang="en-US"/>
           </a:p>
         </p:txBody>
       </p:sp>
@@ -3338,38 +3115,37 @@
           <a:p>
             <a:pPr lvl="0"/>
             <a:r>
-              <a:rPr lang="en-US" smtClean="0"/>
+              <a:rPr lang="en-US"/>
               <a:t>Click to edit Master text styles</a:t>
             </a:r>
           </a:p>
           <a:p>
             <a:pPr lvl="1"/>
             <a:r>
-              <a:rPr lang="en-US" smtClean="0"/>
+              <a:rPr lang="en-US"/>
               <a:t>Second level</a:t>
             </a:r>
           </a:p>
           <a:p>
             <a:pPr lvl="2"/>
             <a:r>
-              <a:rPr lang="en-US" smtClean="0"/>
+              <a:rPr lang="en-US"/>
               <a:t>Third level</a:t>
             </a:r>
           </a:p>
           <a:p>
             <a:pPr lvl="3"/>
             <a:r>
-              <a:rPr lang="en-US" smtClean="0"/>
+              <a:rPr lang="en-US"/>
               <a:t>Fourth level</a:t>
             </a:r>
           </a:p>
           <a:p>
             <a:pPr lvl="4"/>
             <a:r>
-              <a:rPr lang="en-US" smtClean="0"/>
+              <a:rPr lang="en-US"/>
               <a:t>Fifth level</a:t>
             </a:r>
-            <a:endParaRPr lang="en-US"/>
           </a:p>
         </p:txBody>
       </p:sp>
@@ -3432,7 +3208,7 @@
           <a:p>
             <a:pPr lvl="0"/>
             <a:r>
-              <a:rPr lang="en-US" smtClean="0"/>
+              <a:rPr lang="en-US"/>
               <a:t>Click to edit Master text styles</a:t>
             </a:r>
           </a:p>
@@ -3455,7 +3231,7 @@
           <a:p>
             <a:fld id="{5BCAD085-E8A6-8845-BD4E-CB4CCA059FC4}" type="datetimeFigureOut">
               <a:rPr lang="en-US" smtClean="0"/>
-              <a:t>1/27/13</a:t>
+              <a:t>4/21/2026</a:t>
             </a:fld>
             <a:endParaRPr lang="en-US"/>
           </a:p>
@@ -3558,10 +3334,9 @@
           </a:lstStyle>
           <a:p>
             <a:r>
-              <a:rPr lang="en-US" smtClean="0"/>
+              <a:rPr lang="en-US"/>
               <a:t>Click to edit Master title style</a:t>
             </a:r>
-            <a:endParaRPr lang="en-US"/>
           </a:p>
         </p:txBody>
       </p:sp>
@@ -3685,7 +3460,7 @@
           <a:p>
             <a:pPr lvl="0"/>
             <a:r>
-              <a:rPr lang="en-US" smtClean="0"/>
+              <a:rPr lang="en-US"/>
               <a:t>Click to edit Master text styles</a:t>
             </a:r>
           </a:p>
@@ -3708,7 +3483,7 @@
           <a:p>
             <a:fld id="{5BCAD085-E8A6-8845-BD4E-CB4CCA059FC4}" type="datetimeFigureOut">
               <a:rPr lang="en-US" smtClean="0"/>
-              <a:t>1/27/13</a:t>
+              <a:t>4/21/2026</a:t>
             </a:fld>
             <a:endParaRPr lang="en-US"/>
           </a:p>
@@ -3817,10 +3592,9 @@
           <a:lstStyle/>
           <a:p>
             <a:r>
-              <a:rPr lang="en-US" smtClean="0"/>
+              <a:rPr lang="en-US"/>
               <a:t>Click to edit Master title style</a:t>
             </a:r>
-            <a:endParaRPr lang="en-US"/>
           </a:p>
         </p:txBody>
       </p:sp>
@@ -3851,38 +3625,37 @@
           <a:p>
             <a:pPr lvl="0"/>
             <a:r>
-              <a:rPr lang="en-US" smtClean="0"/>
+              <a:rPr lang="en-US"/>
               <a:t>Click to edit Master text styles</a:t>
             </a:r>
           </a:p>
           <a:p>
             <a:pPr lvl="1"/>
             <a:r>
-              <a:rPr lang="en-US" smtClean="0"/>
+              <a:rPr lang="en-US"/>
               <a:t>Second level</a:t>
             </a:r>
           </a:p>
           <a:p>
             <a:pPr lvl="2"/>
             <a:r>
-              <a:rPr lang="en-US" smtClean="0"/>
+              <a:rPr lang="en-US"/>
               <a:t>Third level</a:t>
             </a:r>
           </a:p>
           <a:p>
             <a:pPr lvl="3"/>
             <a:r>
-              <a:rPr lang="en-US" smtClean="0"/>
+              <a:rPr lang="en-US"/>
               <a:t>Fourth level</a:t>
             </a:r>
           </a:p>
           <a:p>
             <a:pPr lvl="4"/>
             <a:r>
-              <a:rPr lang="en-US" smtClean="0"/>
+              <a:rPr lang="en-US"/>
               <a:t>Fifth level</a:t>
             </a:r>
-            <a:endParaRPr lang="en-US"/>
           </a:p>
         </p:txBody>
       </p:sp>
@@ -3921,7 +3694,7 @@
           <a:p>
             <a:fld id="{5BCAD085-E8A6-8845-BD4E-CB4CCA059FC4}" type="datetimeFigureOut">
               <a:rPr lang="en-US" smtClean="0"/>
-              <a:t>1/27/13</a:t>
+              <a:t>4/21/2026</a:t>
             </a:fld>
             <a:endParaRPr lang="en-US"/>
           </a:p>
@@ -4280,7 +4053,7 @@
 </file>
 
 <file path=ppt/slides/slide1.xml><?xml version="1.0" encoding="utf-8"?>
-<p:sld xmlns:a="http://schemas.openxmlformats.org/drawingml/2006/main" xmlns:p="http://schemas.openxmlformats.org/presentationml/2006/main" xmlns:r="http://schemas.openxmlformats.org/officeDocument/2006/relationships">
+<p:sld xmlns:a="http://schemas.openxmlformats.org/drawingml/2006/main" xmlns:r="http://schemas.openxmlformats.org/officeDocument/2006/relationships" xmlns:p="http://schemas.openxmlformats.org/presentationml/2006/main">
   <p:cSld>
     <p:bg>
       <p:bgPr>
@@ -4296,7 +4069,14 @@
         <p:cNvGrpSpPr/>
         <p:nvPr/>
       </p:nvGrpSpPr>
-      <p:grpSpPr/>
+      <p:grpSpPr>
+        <a:xfrm>
+          <a:off x="0" y="0"/>
+          <a:ext cx="0" cy="0"/>
+          <a:chOff x="0" y="0"/>
+          <a:chExt cx="0" cy="0"/>
+        </a:xfrm>
+      </p:grpSpPr>
       <p:sp>
         <p:nvSpPr>
           <p:cNvPr id="2" name="Rectangle 1"/>
@@ -4334,10 +4114,11 @@
           </a:fontRef>
         </p:style>
         <p:txBody>
-          <a:bodyPr rtlCol="0" anchor="ctr" lIns="45720" rIns="45720" tIns="27432" bIns="27432" wrap="square"/>
+          <a:bodyPr wrap="square" lIns="45720" tIns="27432" rIns="45720" bIns="27432" rtlCol="0" anchor="ctr"/>
           <a:lstStyle/>
           <a:p>
             <a:pPr algn="ctr"/>
+            <a:endParaRPr/>
           </a:p>
         </p:txBody>
       </p:sp>
@@ -4358,7 +4139,7 @@
           <a:noFill/>
         </p:spPr>
         <p:txBody>
-          <a:bodyPr wrap="square" lIns="45720" rIns="45720" tIns="27432" bIns="27432" anchor="t">
+          <a:bodyPr wrap="square" lIns="45720" tIns="27432" rIns="45720" bIns="27432" anchor="t">
             <a:spAutoFit/>
           </a:bodyPr>
           <a:lstStyle/>
@@ -4393,7 +4174,7 @@
           <a:noFill/>
         </p:spPr>
         <p:txBody>
-          <a:bodyPr wrap="square" lIns="45720" rIns="45720" tIns="27432" bIns="27432" anchor="t">
+          <a:bodyPr wrap="square" lIns="45720" tIns="27432" rIns="45720" bIns="27432" anchor="t">
             <a:spAutoFit/>
           </a:bodyPr>
           <a:lstStyle/>
@@ -4428,14 +4209,14 @@
           <a:noFill/>
         </p:spPr>
         <p:txBody>
-          <a:bodyPr wrap="square" lIns="45720" rIns="45720" tIns="27432" bIns="27432" anchor="t">
+          <a:bodyPr wrap="square" lIns="45720" tIns="27432" rIns="45720" bIns="27432" anchor="t">
             <a:spAutoFit/>
           </a:bodyPr>
           <a:lstStyle/>
           <a:p>
             <a:pPr algn="l"/>
             <a:r>
-              <a:rPr sz="2800" b="0" i="1">
+              <a:rPr sz="2800" b="0" i="1" dirty="0">
                 <a:solidFill>
                   <a:srgbClr val="CADCFC"/>
                 </a:solidFill>
@@ -4463,7 +4244,7 @@
           <a:noFill/>
         </p:spPr>
         <p:txBody>
-          <a:bodyPr wrap="square" lIns="45720" rIns="45720" tIns="27432" bIns="27432" anchor="t">
+          <a:bodyPr wrap="square" lIns="45720" tIns="27432" rIns="45720" bIns="27432" anchor="t">
             <a:spAutoFit/>
           </a:bodyPr>
           <a:lstStyle/>
@@ -4483,13 +4264,13 @@
       </p:sp>
       <p:sp>
         <p:nvSpPr>
-          <p:cNvPr id="7" name="TextBox 6"/>
+          <p:cNvPr id="8" name="TextBox 7"/>
           <p:cNvSpPr txBox="1"/>
           <p:nvPr/>
         </p:nvSpPr>
         <p:spPr>
           <a:xfrm>
-            <a:off x="502920" y="4800600"/>
+            <a:off x="502920" y="5257800"/>
             <a:ext cx="11185855" cy="365760"/>
           </a:xfrm>
           <a:prstGeom prst="rect">
@@ -4498,48 +4279,13 @@
           <a:noFill/>
         </p:spPr>
         <p:txBody>
-          <a:bodyPr wrap="square" lIns="45720" rIns="45720" tIns="27432" bIns="27432" anchor="t">
+          <a:bodyPr wrap="square" lIns="45720" tIns="27432" rIns="45720" bIns="27432" anchor="t">
             <a:spAutoFit/>
           </a:bodyPr>
           <a:lstStyle/>
           <a:p>
             <a:pPr algn="l"/>
             <a:r>
-              <a:rPr sz="1600" b="1" i="0">
-                <a:solidFill>
-                  <a:srgbClr val="FFFFFF"/>
-                </a:solidFill>
-                <a:latin typeface="Calibri"/>
-              </a:rPr>
-              <a:t>Speaker: Mingjia Shi</a:t>
-            </a:r>
-          </a:p>
-        </p:txBody>
-      </p:sp>
-      <p:sp>
-        <p:nvSpPr>
-          <p:cNvPr id="8" name="TextBox 7"/>
-          <p:cNvSpPr txBox="1"/>
-          <p:nvPr/>
-        </p:nvSpPr>
-        <p:spPr>
-          <a:xfrm>
-            <a:off x="502920" y="5257800"/>
-            <a:ext cx="11185855" cy="365760"/>
-          </a:xfrm>
-          <a:prstGeom prst="rect">
-            <a:avLst/>
-          </a:prstGeom>
-          <a:noFill/>
-        </p:spPr>
-        <p:txBody>
-          <a:bodyPr wrap="square" lIns="45720" rIns="45720" tIns="27432" bIns="27432" anchor="t">
-            <a:spAutoFit/>
-          </a:bodyPr>
-          <a:lstStyle/>
-          <a:p>
-            <a:pPr algn="l"/>
-            <a:r>
               <a:rPr sz="1400" b="0" i="1">
                 <a:solidFill>
                   <a:srgbClr val="CADCFC"/>
@@ -4568,7 +4314,7 @@
           <a:noFill/>
         </p:spPr>
         <p:txBody>
-          <a:bodyPr wrap="square" lIns="45720" rIns="45720" tIns="27432" bIns="27432" anchor="t">
+          <a:bodyPr wrap="square" lIns="45720" tIns="27432" rIns="45720" bIns="27432" anchor="t">
             <a:spAutoFit/>
           </a:bodyPr>
           <a:lstStyle/>
@@ -4595,7 +4341,7 @@
 </file>
 
 <file path=ppt/slides/slide10.xml><?xml version="1.0" encoding="utf-8"?>
-<p:sld xmlns:a="http://schemas.openxmlformats.org/drawingml/2006/main" xmlns:p="http://schemas.openxmlformats.org/presentationml/2006/main" xmlns:r="http://schemas.openxmlformats.org/officeDocument/2006/relationships">
+<p:sld xmlns:a="http://schemas.openxmlformats.org/drawingml/2006/main" xmlns:r="http://schemas.openxmlformats.org/officeDocument/2006/relationships" xmlns:p="http://schemas.openxmlformats.org/presentationml/2006/main">
   <p:cSld>
     <p:bg>
       <p:bgPr>
@@ -4611,7 +4357,14 @@
         <p:cNvGrpSpPr/>
         <p:nvPr/>
       </p:nvGrpSpPr>
-      <p:grpSpPr/>
+      <p:grpSpPr>
+        <a:xfrm>
+          <a:off x="0" y="0"/>
+          <a:ext cx="0" cy="0"/>
+          <a:chOff x="0" y="0"/>
+          <a:chExt cx="0" cy="0"/>
+        </a:xfrm>
+      </p:grpSpPr>
       <p:sp>
         <p:nvSpPr>
           <p:cNvPr id="2" name="Rectangle 1"/>
@@ -4649,10 +4402,11 @@
           </a:fontRef>
         </p:style>
         <p:txBody>
-          <a:bodyPr rtlCol="0" anchor="ctr" lIns="45720" rIns="45720" tIns="27432" bIns="27432" wrap="square"/>
+          <a:bodyPr wrap="square" lIns="45720" tIns="27432" rIns="45720" bIns="27432" rtlCol="0" anchor="ctr"/>
           <a:lstStyle/>
           <a:p>
             <a:pPr algn="ctr"/>
+            <a:endParaRPr/>
           </a:p>
         </p:txBody>
       </p:sp>
@@ -4693,7 +4447,7 @@
           </a:fontRef>
         </p:style>
         <p:txBody>
-          <a:bodyPr rtlCol="0" anchor="ctr" lIns="45720" rIns="45720" tIns="27432" bIns="27432" wrap="square"/>
+          <a:bodyPr wrap="square" lIns="45720" tIns="27432" rIns="45720" bIns="27432" rtlCol="0" anchor="ctr"/>
           <a:lstStyle/>
           <a:p>
             <a:pPr algn="ctr"/>
@@ -4704,7 +4458,7 @@
                 </a:solidFill>
                 <a:latin typeface="Calibri"/>
               </a:rPr>
-              <a:t>RESULTS v2</a:t>
+              <a:t>RESULTS</a:t>
             </a:r>
           </a:p>
         </p:txBody>
@@ -4726,7 +4480,7 @@
           <a:noFill/>
         </p:spPr>
         <p:txBody>
-          <a:bodyPr wrap="square" lIns="45720" rIns="45720" tIns="27432" bIns="27432" anchor="t">
+          <a:bodyPr wrap="square" lIns="45720" tIns="27432" rIns="45720" bIns="27432" anchor="t">
             <a:spAutoFit/>
           </a:bodyPr>
           <a:lstStyle/>
@@ -4739,7 +4493,7 @@
                 </a:solidFill>
                 <a:latin typeface="Calibri"/>
               </a:rPr>
-              <a:t>GoS v2 — Diagnosis, Five Modifications, Target</a:t>
+              <a:t>Ablations &amp; Sample Efficiency</a:t>
             </a:r>
           </a:p>
         </p:txBody>
@@ -4761,7 +4515,7 @@
           <a:noFill/>
         </p:spPr>
         <p:txBody>
-          <a:bodyPr wrap="square" lIns="45720" rIns="45720" tIns="27432" bIns="27432" anchor="t">
+          <a:bodyPr wrap="square" lIns="45720" tIns="27432" rIns="45720" bIns="27432" anchor="t">
             <a:spAutoFit/>
           </a:bodyPr>
           <a:lstStyle/>
@@ -4774,7 +4528,7 @@
                 </a:solidFill>
                 <a:latin typeface="Calibri"/>
               </a:rPr>
-              <a:t>10 / 12</a:t>
+              <a:t>9 / 12</a:t>
             </a:r>
           </a:p>
         </p:txBody>
@@ -4796,7 +4550,7 @@
           <a:noFill/>
         </p:spPr>
         <p:txBody>
-          <a:bodyPr wrap="square" lIns="45720" rIns="45720" tIns="27432" bIns="27432" anchor="t">
+          <a:bodyPr wrap="square" lIns="45720" tIns="27432" rIns="45720" bIns="27432" anchor="t">
             <a:spAutoFit/>
           </a:bodyPr>
           <a:lstStyle/>
@@ -4814,183 +4568,64 @@
           </a:p>
         </p:txBody>
       </p:sp>
-      <p:sp>
-        <p:nvSpPr>
-          <p:cNvPr id="7" name="Rounded Rectangle 6"/>
+      <p:pic>
+        <p:nvPicPr>
+          <p:cNvPr id="7" name="Picture 6" descr="fig3_ablations.png"/>
+          <p:cNvPicPr>
+            <a:picLocks noChangeAspect="1"/>
+          </p:cNvPicPr>
+          <p:nvPr/>
+        </p:nvPicPr>
+        <p:blipFill>
+          <a:blip r:embed="rId3"/>
+          <a:stretch>
+            <a:fillRect/>
+          </a:stretch>
+        </p:blipFill>
+        <p:spPr>
+          <a:xfrm>
+            <a:off x="457200" y="1645920"/>
+            <a:ext cx="6858000" cy="3130207"/>
+          </a:xfrm>
+          <a:prstGeom prst="rect">
+            <a:avLst/>
+          </a:prstGeom>
+        </p:spPr>
+      </p:pic>
+      <p:pic>
+        <p:nvPicPr>
+          <p:cNvPr id="8" name="Picture 7" descr="fig4_sample_eff.png"/>
+          <p:cNvPicPr>
+            <a:picLocks noChangeAspect="1"/>
+          </p:cNvPicPr>
+          <p:nvPr/>
+        </p:nvPicPr>
+        <p:blipFill>
+          <a:blip r:embed="rId4"/>
+          <a:stretch>
+            <a:fillRect/>
+          </a:stretch>
+        </p:blipFill>
+        <p:spPr>
+          <a:xfrm>
+            <a:off x="7315200" y="1645920"/>
+            <a:ext cx="4572000" cy="2989531"/>
+          </a:xfrm>
+          <a:prstGeom prst="rect">
+            <a:avLst/>
+          </a:prstGeom>
+        </p:spPr>
+      </p:pic>
+      <p:sp>
+        <p:nvSpPr>
+          <p:cNvPr id="9" name="Rounded Rectangle 8"/>
           <p:cNvSpPr/>
           <p:nvPr/>
         </p:nvSpPr>
         <p:spPr>
           <a:xfrm>
-            <a:off x="502920" y="1691640"/>
+            <a:off x="502920" y="5303520"/>
             <a:ext cx="11185855" cy="1005840"/>
-          </a:xfrm>
-          <a:prstGeom prst="roundRect">
-            <a:avLst/>
-          </a:prstGeom>
-          <a:solidFill>
-            <a:srgbClr val="F96167"/>
-          </a:solidFill>
-          <a:ln>
-            <a:noFill/>
-          </a:ln>
-          <a:effectLst/>
-        </p:spPr>
-        <p:style>
-          <a:lnRef idx="1">
-            <a:schemeClr val="accent1"/>
-          </a:lnRef>
-          <a:fillRef idx="3">
-            <a:schemeClr val="accent1"/>
-          </a:fillRef>
-          <a:effectRef idx="2">
-            <a:schemeClr val="accent1"/>
-          </a:effectRef>
-          <a:fontRef idx="minor">
-            <a:schemeClr val="lt1"/>
-          </a:fontRef>
-        </p:style>
-        <p:txBody>
-          <a:bodyPr rtlCol="0" anchor="ctr" lIns="45720" rIns="45720" tIns="27432" bIns="27432" wrap="square"/>
-          <a:lstStyle/>
-          <a:p>
-            <a:pPr algn="ctr"/>
-          </a:p>
-        </p:txBody>
-      </p:sp>
-      <p:sp>
-        <p:nvSpPr>
-          <p:cNvPr id="8" name="TextBox 7"/>
-          <p:cNvSpPr txBox="1"/>
-          <p:nvPr/>
-        </p:nvSpPr>
-        <p:spPr>
-          <a:xfrm>
-            <a:off x="731520" y="1783080"/>
-            <a:ext cx="11185855" cy="365760"/>
-          </a:xfrm>
-          <a:prstGeom prst="rect">
-            <a:avLst/>
-          </a:prstGeom>
-          <a:noFill/>
-        </p:spPr>
-        <p:txBody>
-          <a:bodyPr wrap="square" lIns="45720" rIns="45720" tIns="27432" bIns="27432" anchor="t">
-            <a:spAutoFit/>
-          </a:bodyPr>
-          <a:lstStyle/>
-          <a:p>
-            <a:pPr algn="l"/>
-            <a:r>
-              <a:rPr sz="1200" b="1" i="0">
-                <a:solidFill>
-                  <a:srgbClr val="FFFFFF"/>
-                </a:solidFill>
-                <a:latin typeface="Calibri"/>
-              </a:rPr>
-              <a:t>DIAGNOSIS</a:t>
-            </a:r>
-          </a:p>
-        </p:txBody>
-      </p:sp>
-      <p:sp>
-        <p:nvSpPr>
-          <p:cNvPr id="9" name="TextBox 8"/>
-          <p:cNvSpPr txBox="1"/>
-          <p:nvPr/>
-        </p:nvSpPr>
-        <p:spPr>
-          <a:xfrm>
-            <a:off x="731520" y="2194560"/>
-            <a:ext cx="10728655" cy="548640"/>
-          </a:xfrm>
-          <a:prstGeom prst="rect">
-            <a:avLst/>
-          </a:prstGeom>
-          <a:noFill/>
-        </p:spPr>
-        <p:txBody>
-          <a:bodyPr wrap="square" lIns="45720" rIns="45720" tIns="27432" bIns="27432" anchor="t">
-            <a:spAutoFit/>
-          </a:bodyPr>
-          <a:lstStyle/>
-          <a:p>
-            <a:pPr algn="l"/>
-            <a:r>
-              <a:rPr sz="1200" b="0" i="1">
-                <a:solidFill>
-                  <a:srgbClr val="FFFFFF"/>
-                </a:solidFill>
-                <a:latin typeface="Calibri"/>
-              </a:rPr>
-              <a:t>k-NN k=3 &gt; 5 &gt; 10 &gt; 100 → over-smoothing.    ProtoNet 0.716 &gt; GoS 0.572 → meta-GNN hurts a good embedding.    Affinity variants differ by &lt; 2 pp → expressivity is not the bottleneck.</a:t>
-            </a:r>
-          </a:p>
-        </p:txBody>
-      </p:sp>
-      <p:sp>
-        <p:nvSpPr>
-          <p:cNvPr id="10" name="Rounded Rectangle 9"/>
-          <p:cNvSpPr/>
-          <p:nvPr/>
-        </p:nvSpPr>
-        <p:spPr>
-          <a:xfrm>
-            <a:off x="502920" y="2926080"/>
-            <a:ext cx="2149388" cy="594360"/>
-          </a:xfrm>
-          <a:prstGeom prst="roundRect">
-            <a:avLst/>
-          </a:prstGeom>
-          <a:solidFill>
-            <a:srgbClr val="1E2761"/>
-          </a:solidFill>
-          <a:ln>
-            <a:noFill/>
-          </a:ln>
-          <a:effectLst/>
-        </p:spPr>
-        <p:style>
-          <a:lnRef idx="1">
-            <a:schemeClr val="accent1"/>
-          </a:lnRef>
-          <a:fillRef idx="3">
-            <a:schemeClr val="accent1"/>
-          </a:fillRef>
-          <a:effectRef idx="2">
-            <a:schemeClr val="accent1"/>
-          </a:effectRef>
-          <a:fontRef idx="minor">
-            <a:schemeClr val="lt1"/>
-          </a:fontRef>
-        </p:style>
-        <p:txBody>
-          <a:bodyPr rtlCol="0" anchor="ctr" lIns="45720" rIns="45720" tIns="27432" bIns="27432" wrap="square"/>
-          <a:lstStyle/>
-          <a:p>
-            <a:pPr algn="ctr"/>
-            <a:r>
-              <a:rPr sz="2000" b="1" i="0">
-                <a:solidFill>
-                  <a:srgbClr val="FFFFFF"/>
-                </a:solidFill>
-                <a:latin typeface="Calibri"/>
-              </a:rPr>
-              <a:t>M1</a:t>
-            </a:r>
-          </a:p>
-        </p:txBody>
-      </p:sp>
-      <p:sp>
-        <p:nvSpPr>
-          <p:cNvPr id="11" name="Rounded Rectangle 10"/>
-          <p:cNvSpPr/>
-          <p:nvPr/>
-        </p:nvSpPr>
-        <p:spPr>
-          <a:xfrm>
-            <a:off x="502920" y="3584448"/>
-            <a:ext cx="2149388" cy="2011680"/>
           </a:xfrm>
           <a:prstGeom prst="roundRect">
             <a:avLst/>
@@ -5018,580 +4653,80 @@
           </a:fontRef>
         </p:style>
         <p:txBody>
-          <a:bodyPr rtlCol="0" anchor="ctr" tIns="27432" bIns="27432" wrap="square"/>
+          <a:bodyPr wrap="square" lIns="45720" tIns="27432" rIns="45720" bIns="27432" rtlCol="0" anchor="ctr"/>
           <a:lstStyle/>
           <a:p>
             <a:pPr algn="ctr"/>
+            <a:endParaRPr/>
+          </a:p>
+        </p:txBody>
+      </p:sp>
+      <p:sp>
+        <p:nvSpPr>
+          <p:cNvPr id="10" name="TextBox 9"/>
+          <p:cNvSpPr txBox="1"/>
+          <p:nvPr/>
+        </p:nvSpPr>
+        <p:spPr>
+          <a:xfrm>
+            <a:off x="731520" y="5394960"/>
+            <a:ext cx="11185855" cy="365760"/>
+          </a:xfrm>
+          <a:prstGeom prst="rect">
+            <a:avLst/>
+          </a:prstGeom>
+          <a:noFill/>
+        </p:spPr>
+        <p:txBody>
+          <a:bodyPr wrap="square" lIns="45720" tIns="27432" rIns="45720" bIns="27432" anchor="t">
+            <a:spAutoFit/>
+          </a:bodyPr>
+          <a:lstStyle/>
+          <a:p>
+            <a:pPr algn="l"/>
             <a:r>
               <a:rPr sz="1200" b="1" i="0">
                 <a:solidFill>
-                  <a:srgbClr val="1E2761"/>
-                </a:solidFill>
-                <a:latin typeface="Calibri"/>
-              </a:rPr>
-              <a:t>Residual
-prototype</a:t>
-            </a:r>
-          </a:p>
-          <a:p>
-            <a:pPr algn="ctr">
-              <a:spcBef>
-                <a:spcPts val="600"/>
-              </a:spcBef>
-            </a:pPr>
-            <a:r>
-              <a:rPr sz="1000" b="0" i="1">
+                  <a:srgbClr val="F96167"/>
+                </a:solidFill>
+                <a:latin typeface="Calibri"/>
+              </a:rPr>
+              <a:t>KEY FINDINGS</a:t>
+            </a:r>
+          </a:p>
+        </p:txBody>
+      </p:sp>
+      <p:sp>
+        <p:nvSpPr>
+          <p:cNvPr id="11" name="TextBox 10"/>
+          <p:cNvSpPr txBox="1"/>
+          <p:nvPr/>
+        </p:nvSpPr>
+        <p:spPr>
+          <a:xfrm>
+            <a:off x="731520" y="5760720"/>
+            <a:ext cx="10728655" cy="548640"/>
+          </a:xfrm>
+          <a:prstGeom prst="rect">
+            <a:avLst/>
+          </a:prstGeom>
+          <a:noFill/>
+        </p:spPr>
+        <p:txBody>
+          <a:bodyPr wrap="square" lIns="45720" tIns="27432" rIns="45720" bIns="27432" anchor="t">
+            <a:spAutoFit/>
+          </a:bodyPr>
+          <a:lstStyle/>
+          <a:p>
+            <a:pPr algn="l"/>
+            <a:r>
+              <a:rPr sz="1200" b="0" i="1">
                 <a:solidFill>
                   <a:srgbClr val="36454F"/>
                 </a:solidFill>
                 <a:latin typeface="Calibri"/>
               </a:rPr>
-              <a:t>α c_enc + (1−α) c_gnn</a:t>
-            </a:r>
-          </a:p>
-        </p:txBody>
-      </p:sp>
-      <p:sp>
-        <p:nvSpPr>
-          <p:cNvPr id="12" name="Rounded Rectangle 11"/>
-          <p:cNvSpPr/>
-          <p:nvPr/>
-        </p:nvSpPr>
-        <p:spPr>
-          <a:xfrm>
-            <a:off x="2762036" y="2926080"/>
-            <a:ext cx="2149388" cy="594360"/>
-          </a:xfrm>
-          <a:prstGeom prst="roundRect">
-            <a:avLst/>
-          </a:prstGeom>
-          <a:solidFill>
-            <a:srgbClr val="1E2761"/>
-          </a:solidFill>
-          <a:ln>
-            <a:noFill/>
-          </a:ln>
-          <a:effectLst/>
-        </p:spPr>
-        <p:style>
-          <a:lnRef idx="1">
-            <a:schemeClr val="accent1"/>
-          </a:lnRef>
-          <a:fillRef idx="3">
-            <a:schemeClr val="accent1"/>
-          </a:fillRef>
-          <a:effectRef idx="2">
-            <a:schemeClr val="accent1"/>
-          </a:effectRef>
-          <a:fontRef idx="minor">
-            <a:schemeClr val="lt1"/>
-          </a:fontRef>
-        </p:style>
-        <p:txBody>
-          <a:bodyPr rtlCol="0" anchor="ctr" lIns="45720" rIns="45720" tIns="27432" bIns="27432" wrap="square"/>
-          <a:lstStyle/>
-          <a:p>
-            <a:pPr algn="ctr"/>
-            <a:r>
-              <a:rPr sz="2000" b="1" i="0">
-                <a:solidFill>
-                  <a:srgbClr val="FFFFFF"/>
-                </a:solidFill>
-                <a:latin typeface="Calibri"/>
-              </a:rPr>
-              <a:t>M2</a:t>
-            </a:r>
-          </a:p>
-        </p:txBody>
-      </p:sp>
-      <p:sp>
-        <p:nvSpPr>
-          <p:cNvPr id="13" name="Rounded Rectangle 12"/>
-          <p:cNvSpPr/>
-          <p:nvPr/>
-        </p:nvSpPr>
-        <p:spPr>
-          <a:xfrm>
-            <a:off x="2762036" y="3584448"/>
-            <a:ext cx="2149388" cy="2011680"/>
-          </a:xfrm>
-          <a:prstGeom prst="roundRect">
-            <a:avLst/>
-          </a:prstGeom>
-          <a:solidFill>
-            <a:srgbClr val="F5F7FA"/>
-          </a:solidFill>
-          <a:ln>
-            <a:noFill/>
-          </a:ln>
-          <a:effectLst/>
-        </p:spPr>
-        <p:style>
-          <a:lnRef idx="1">
-            <a:schemeClr val="accent1"/>
-          </a:lnRef>
-          <a:fillRef idx="3">
-            <a:schemeClr val="accent1"/>
-          </a:fillRef>
-          <a:effectRef idx="2">
-            <a:schemeClr val="accent1"/>
-          </a:effectRef>
-          <a:fontRef idx="minor">
-            <a:schemeClr val="lt1"/>
-          </a:fontRef>
-        </p:style>
-        <p:txBody>
-          <a:bodyPr rtlCol="0" anchor="ctr" tIns="27432" bIns="27432" wrap="square"/>
-          <a:lstStyle/>
-          <a:p>
-            <a:pPr algn="ctr"/>
-            <a:r>
-              <a:rPr sz="1200" b="1" i="0">
-                <a:solidFill>
-                  <a:srgbClr val="1E2761"/>
-                </a:solidFill>
-                <a:latin typeface="Calibri"/>
-              </a:rPr>
-              <a:t>Shallower
-meta-GNN</a:t>
-            </a:r>
-          </a:p>
-          <a:p>
-            <a:pPr algn="ctr">
-              <a:spcBef>
-                <a:spcPts val="600"/>
-              </a:spcBef>
-            </a:pPr>
-            <a:r>
-              <a:rPr sz="1000" b="0" i="1">
-                <a:solidFill>
-                  <a:srgbClr val="36454F"/>
-                </a:solidFill>
-                <a:latin typeface="Calibri"/>
-              </a:rPr>
-              <a:t>1-layer GAT</a:t>
-            </a:r>
-          </a:p>
-        </p:txBody>
-      </p:sp>
-      <p:sp>
-        <p:nvSpPr>
-          <p:cNvPr id="14" name="Rounded Rectangle 13"/>
-          <p:cNvSpPr/>
-          <p:nvPr/>
-        </p:nvSpPr>
-        <p:spPr>
-          <a:xfrm>
-            <a:off x="5021153" y="2926080"/>
-            <a:ext cx="2149388" cy="594360"/>
-          </a:xfrm>
-          <a:prstGeom prst="roundRect">
-            <a:avLst/>
-          </a:prstGeom>
-          <a:solidFill>
-            <a:srgbClr val="1E2761"/>
-          </a:solidFill>
-          <a:ln>
-            <a:noFill/>
-          </a:ln>
-          <a:effectLst/>
-        </p:spPr>
-        <p:style>
-          <a:lnRef idx="1">
-            <a:schemeClr val="accent1"/>
-          </a:lnRef>
-          <a:fillRef idx="3">
-            <a:schemeClr val="accent1"/>
-          </a:fillRef>
-          <a:effectRef idx="2">
-            <a:schemeClr val="accent1"/>
-          </a:effectRef>
-          <a:fontRef idx="minor">
-            <a:schemeClr val="lt1"/>
-          </a:fontRef>
-        </p:style>
-        <p:txBody>
-          <a:bodyPr rtlCol="0" anchor="ctr" lIns="45720" rIns="45720" tIns="27432" bIns="27432" wrap="square"/>
-          <a:lstStyle/>
-          <a:p>
-            <a:pPr algn="ctr"/>
-            <a:r>
-              <a:rPr sz="2000" b="1" i="0">
-                <a:solidFill>
-                  <a:srgbClr val="FFFFFF"/>
-                </a:solidFill>
-                <a:latin typeface="Calibri"/>
-              </a:rPr>
-              <a:t>M3</a:t>
-            </a:r>
-          </a:p>
-        </p:txBody>
-      </p:sp>
-      <p:sp>
-        <p:nvSpPr>
-          <p:cNvPr id="15" name="Rounded Rectangle 14"/>
-          <p:cNvSpPr/>
-          <p:nvPr/>
-        </p:nvSpPr>
-        <p:spPr>
-          <a:xfrm>
-            <a:off x="5021153" y="3584448"/>
-            <a:ext cx="2149388" cy="2011680"/>
-          </a:xfrm>
-          <a:prstGeom prst="roundRect">
-            <a:avLst/>
-          </a:prstGeom>
-          <a:solidFill>
-            <a:srgbClr val="F5F7FA"/>
-          </a:solidFill>
-          <a:ln>
-            <a:noFill/>
-          </a:ln>
-          <a:effectLst/>
-        </p:spPr>
-        <p:style>
-          <a:lnRef idx="1">
-            <a:schemeClr val="accent1"/>
-          </a:lnRef>
-          <a:fillRef idx="3">
-            <a:schemeClr val="accent1"/>
-          </a:fillRef>
-          <a:effectRef idx="2">
-            <a:schemeClr val="accent1"/>
-          </a:effectRef>
-          <a:fontRef idx="minor">
-            <a:schemeClr val="lt1"/>
-          </a:fontRef>
-        </p:style>
-        <p:txBody>
-          <a:bodyPr rtlCol="0" anchor="ctr" tIns="27432" bIns="27432" wrap="square"/>
-          <a:lstStyle/>
-          <a:p>
-            <a:pPr algn="ctr"/>
-            <a:r>
-              <a:rPr sz="1200" b="1" i="0">
-                <a:solidFill>
-                  <a:srgbClr val="1E2761"/>
-                </a:solidFill>
-                <a:latin typeface="Calibri"/>
-              </a:rPr>
-              <a:t>Bipartite
-messaging</a:t>
-            </a:r>
-          </a:p>
-          <a:p>
-            <a:pPr algn="ctr">
-              <a:spcBef>
-                <a:spcPts val="600"/>
-              </a:spcBef>
-            </a:pPr>
-            <a:r>
-              <a:rPr sz="1000" b="0" i="1">
-                <a:solidFill>
-                  <a:srgbClr val="36454F"/>
-                </a:solidFill>
-                <a:latin typeface="Calibri"/>
-              </a:rPr>
-              <a:t>mask query → * edges</a:t>
-            </a:r>
-          </a:p>
-        </p:txBody>
-      </p:sp>
-      <p:sp>
-        <p:nvSpPr>
-          <p:cNvPr id="16" name="Rounded Rectangle 15"/>
-          <p:cNvSpPr/>
-          <p:nvPr/>
-        </p:nvSpPr>
-        <p:spPr>
-          <a:xfrm>
-            <a:off x="7280269" y="2926080"/>
-            <a:ext cx="2149388" cy="594360"/>
-          </a:xfrm>
-          <a:prstGeom prst="roundRect">
-            <a:avLst/>
-          </a:prstGeom>
-          <a:solidFill>
-            <a:srgbClr val="F96167"/>
-          </a:solidFill>
-          <a:ln>
-            <a:noFill/>
-          </a:ln>
-          <a:effectLst/>
-        </p:spPr>
-        <p:style>
-          <a:lnRef idx="1">
-            <a:schemeClr val="accent1"/>
-          </a:lnRef>
-          <a:fillRef idx="3">
-            <a:schemeClr val="accent1"/>
-          </a:fillRef>
-          <a:effectRef idx="2">
-            <a:schemeClr val="accent1"/>
-          </a:effectRef>
-          <a:fontRef idx="minor">
-            <a:schemeClr val="lt1"/>
-          </a:fontRef>
-        </p:style>
-        <p:txBody>
-          <a:bodyPr rtlCol="0" anchor="ctr" lIns="45720" rIns="45720" tIns="27432" bIns="27432" wrap="square"/>
-          <a:lstStyle/>
-          <a:p>
-            <a:pPr algn="ctr"/>
-            <a:r>
-              <a:rPr sz="2000" b="1" i="0">
-                <a:solidFill>
-                  <a:srgbClr val="FFFFFF"/>
-                </a:solidFill>
-                <a:latin typeface="Calibri"/>
-              </a:rPr>
-              <a:t>M4</a:t>
-            </a:r>
-          </a:p>
-        </p:txBody>
-      </p:sp>
-      <p:sp>
-        <p:nvSpPr>
-          <p:cNvPr id="17" name="Rounded Rectangle 16"/>
-          <p:cNvSpPr/>
-          <p:nvPr/>
-        </p:nvSpPr>
-        <p:spPr>
-          <a:xfrm>
-            <a:off x="7280269" y="3584448"/>
-            <a:ext cx="2149388" cy="2011680"/>
-          </a:xfrm>
-          <a:prstGeom prst="roundRect">
-            <a:avLst/>
-          </a:prstGeom>
-          <a:solidFill>
-            <a:srgbClr val="F5F7FA"/>
-          </a:solidFill>
-          <a:ln>
-            <a:noFill/>
-          </a:ln>
-          <a:effectLst/>
-        </p:spPr>
-        <p:style>
-          <a:lnRef idx="1">
-            <a:schemeClr val="accent1"/>
-          </a:lnRef>
-          <a:fillRef idx="3">
-            <a:schemeClr val="accent1"/>
-          </a:fillRef>
-          <a:effectRef idx="2">
-            <a:schemeClr val="accent1"/>
-          </a:effectRef>
-          <a:fontRef idx="minor">
-            <a:schemeClr val="lt1"/>
-          </a:fontRef>
-        </p:style>
-        <p:txBody>
-          <a:bodyPr rtlCol="0" anchor="ctr" tIns="27432" bIns="27432" wrap="square"/>
-          <a:lstStyle/>
-          <a:p>
-            <a:pPr algn="ctr"/>
-            <a:r>
-              <a:rPr sz="1200" b="1" i="0">
-                <a:solidFill>
-                  <a:srgbClr val="1E2761"/>
-                </a:solidFill>
-                <a:latin typeface="Calibri"/>
-              </a:rPr>
-              <a:t>Contrastive
-aux loss</a:t>
-            </a:r>
-          </a:p>
-          <a:p>
-            <a:pPr algn="ctr">
-              <a:spcBef>
-                <a:spcPts val="600"/>
-              </a:spcBef>
-            </a:pPr>
-            <a:r>
-              <a:rPr sz="1000" b="0" i="1">
-                <a:solidFill>
-                  <a:srgbClr val="36454F"/>
-                </a:solidFill>
-                <a:latin typeface="Calibri"/>
-              </a:rPr>
-              <a:t>InfoNCE support–query</a:t>
-            </a:r>
-          </a:p>
-        </p:txBody>
-      </p:sp>
-      <p:sp>
-        <p:nvSpPr>
-          <p:cNvPr id="18" name="Rounded Rectangle 17"/>
-          <p:cNvSpPr/>
-          <p:nvPr/>
-        </p:nvSpPr>
-        <p:spPr>
-          <a:xfrm>
-            <a:off x="9539386" y="2926080"/>
-            <a:ext cx="2149388" cy="594360"/>
-          </a:xfrm>
-          <a:prstGeom prst="roundRect">
-            <a:avLst/>
-          </a:prstGeom>
-          <a:solidFill>
-            <a:srgbClr val="F96167"/>
-          </a:solidFill>
-          <a:ln>
-            <a:noFill/>
-          </a:ln>
-          <a:effectLst/>
-        </p:spPr>
-        <p:style>
-          <a:lnRef idx="1">
-            <a:schemeClr val="accent1"/>
-          </a:lnRef>
-          <a:fillRef idx="3">
-            <a:schemeClr val="accent1"/>
-          </a:fillRef>
-          <a:effectRef idx="2">
-            <a:schemeClr val="accent1"/>
-          </a:effectRef>
-          <a:fontRef idx="minor">
-            <a:schemeClr val="lt1"/>
-          </a:fontRef>
-        </p:style>
-        <p:txBody>
-          <a:bodyPr rtlCol="0" anchor="ctr" lIns="45720" rIns="45720" tIns="27432" bIns="27432" wrap="square"/>
-          <a:lstStyle/>
-          <a:p>
-            <a:pPr algn="ctr"/>
-            <a:r>
-              <a:rPr sz="2000" b="1" i="0">
-                <a:solidFill>
-                  <a:srgbClr val="FFFFFF"/>
-                </a:solidFill>
-                <a:latin typeface="Calibri"/>
-              </a:rPr>
-              <a:t>M5</a:t>
-            </a:r>
-          </a:p>
-        </p:txBody>
-      </p:sp>
-      <p:sp>
-        <p:nvSpPr>
-          <p:cNvPr id="19" name="Rounded Rectangle 18"/>
-          <p:cNvSpPr/>
-          <p:nvPr/>
-        </p:nvSpPr>
-        <p:spPr>
-          <a:xfrm>
-            <a:off x="9539386" y="3584448"/>
-            <a:ext cx="2149388" cy="2011680"/>
-          </a:xfrm>
-          <a:prstGeom prst="roundRect">
-            <a:avLst/>
-          </a:prstGeom>
-          <a:solidFill>
-            <a:srgbClr val="F5F7FA"/>
-          </a:solidFill>
-          <a:ln>
-            <a:noFill/>
-          </a:ln>
-          <a:effectLst/>
-        </p:spPr>
-        <p:style>
-          <a:lnRef idx="1">
-            <a:schemeClr val="accent1"/>
-          </a:lnRef>
-          <a:fillRef idx="3">
-            <a:schemeClr val="accent1"/>
-          </a:fillRef>
-          <a:effectRef idx="2">
-            <a:schemeClr val="accent1"/>
-          </a:effectRef>
-          <a:fontRef idx="minor">
-            <a:schemeClr val="lt1"/>
-          </a:fontRef>
-        </p:style>
-        <p:txBody>
-          <a:bodyPr rtlCol="0" anchor="ctr" tIns="27432" bIns="27432" wrap="square"/>
-          <a:lstStyle/>
-          <a:p>
-            <a:pPr algn="ctr"/>
-            <a:r>
-              <a:rPr sz="1200" b="1" i="0">
-                <a:solidFill>
-                  <a:srgbClr val="1E2761"/>
-                </a:solidFill>
-                <a:latin typeface="Calibri"/>
-              </a:rPr>
-              <a:t>SSL
-pretraining</a:t>
-            </a:r>
-          </a:p>
-          <a:p>
-            <a:pPr algn="ctr">
-              <a:spcBef>
-                <a:spcPts val="600"/>
-              </a:spcBef>
-            </a:pPr>
-            <a:r>
-              <a:rPr sz="1000" b="0" i="1">
-                <a:solidFill>
-                  <a:srgbClr val="36454F"/>
-                </a:solidFill>
-                <a:latin typeface="Calibri"/>
-              </a:rPr>
-              <a:t>MolCLR encoder init</a:t>
-            </a:r>
-          </a:p>
-        </p:txBody>
-      </p:sp>
-      <p:sp>
-        <p:nvSpPr>
-          <p:cNvPr id="20" name="Rounded Rectangle 19"/>
-          <p:cNvSpPr/>
-          <p:nvPr/>
-        </p:nvSpPr>
-        <p:spPr>
-          <a:xfrm>
-            <a:off x="502920" y="5760720"/>
-            <a:ext cx="11185855" cy="731520"/>
-          </a:xfrm>
-          <a:prstGeom prst="roundRect">
-            <a:avLst/>
-          </a:prstGeom>
-          <a:solidFill>
-            <a:srgbClr val="CADCFC"/>
-          </a:solidFill>
-          <a:ln>
-            <a:noFill/>
-          </a:ln>
-          <a:effectLst/>
-        </p:spPr>
-        <p:style>
-          <a:lnRef idx="1">
-            <a:schemeClr val="accent1"/>
-          </a:lnRef>
-          <a:fillRef idx="3">
-            <a:schemeClr val="accent1"/>
-          </a:fillRef>
-          <a:effectRef idx="2">
-            <a:schemeClr val="accent1"/>
-          </a:effectRef>
-          <a:fontRef idx="minor">
-            <a:schemeClr val="lt1"/>
-          </a:fontRef>
-        </p:style>
-        <p:txBody>
-          <a:bodyPr rtlCol="0" anchor="ctr" lIns="45720" rIns="45720" tIns="27432" bIns="27432" wrap="square"/>
-          <a:lstStyle/>
-          <a:p>
-            <a:pPr algn="ctr"/>
-            <a:r>
-              <a:rPr sz="1400" b="1" i="1">
-                <a:solidFill>
-                  <a:srgbClr val="1E2761"/>
-                </a:solidFill>
-                <a:latin typeface="Calibri"/>
-              </a:rPr>
-              <a:t>Safety net: α → 1 recovers ProtoNet.  Composed target: ≥ 0.76 at 5-way 5-shot (≈ +6 pp over ProtoNet).</a:t>
+              <a:t>Affinity barely matters (≤ 2 pp).    kNN matters a lot — k=3 &gt; k=5 &gt; k=10 &gt; dense (over-smoothing).    Both methods scale with K, but ProtoNet scales faster.</a:t>
             </a:r>
           </a:p>
         </p:txBody>
@@ -5605,7 +4740,7 @@
 </file>
 
 <file path=ppt/slides/slide11.xml><?xml version="1.0" encoding="utf-8"?>
-<p:sld xmlns:a="http://schemas.openxmlformats.org/drawingml/2006/main" xmlns:p="http://schemas.openxmlformats.org/presentationml/2006/main" xmlns:r="http://schemas.openxmlformats.org/officeDocument/2006/relationships">
+<p:sld xmlns:a="http://schemas.openxmlformats.org/drawingml/2006/main" xmlns:r="http://schemas.openxmlformats.org/officeDocument/2006/relationships" xmlns:p="http://schemas.openxmlformats.org/presentationml/2006/main">
   <p:cSld>
     <p:bg>
       <p:bgPr>
@@ -5621,7 +4756,14 @@
         <p:cNvGrpSpPr/>
         <p:nvPr/>
       </p:nvGrpSpPr>
-      <p:grpSpPr/>
+      <p:grpSpPr>
+        <a:xfrm>
+          <a:off x="0" y="0"/>
+          <a:ext cx="0" cy="0"/>
+          <a:chOff x="0" y="0"/>
+          <a:chExt cx="0" cy="0"/>
+        </a:xfrm>
+      </p:grpSpPr>
       <p:sp>
         <p:nvSpPr>
           <p:cNvPr id="2" name="Rectangle 1"/>
@@ -5659,10 +4801,11 @@
           </a:fontRef>
         </p:style>
         <p:txBody>
-          <a:bodyPr rtlCol="0" anchor="ctr" lIns="45720" rIns="45720" tIns="27432" bIns="27432" wrap="square"/>
+          <a:bodyPr wrap="square" lIns="45720" tIns="27432" rIns="45720" bIns="27432" rtlCol="0" anchor="ctr"/>
           <a:lstStyle/>
           <a:p>
             <a:pPr algn="ctr"/>
+            <a:endParaRPr/>
           </a:p>
         </p:txBody>
       </p:sp>
@@ -5703,7 +4846,7 @@
           </a:fontRef>
         </p:style>
         <p:txBody>
-          <a:bodyPr rtlCol="0" anchor="ctr" lIns="45720" rIns="45720" tIns="27432" bIns="27432" wrap="square"/>
+          <a:bodyPr wrap="square" lIns="45720" tIns="27432" rIns="45720" bIns="27432" rtlCol="0" anchor="ctr"/>
           <a:lstStyle/>
           <a:p>
             <a:pPr algn="ctr"/>
@@ -5736,7 +4879,7 @@
           <a:noFill/>
         </p:spPr>
         <p:txBody>
-          <a:bodyPr wrap="square" lIns="45720" rIns="45720" tIns="27432" bIns="27432" anchor="t">
+          <a:bodyPr wrap="square" lIns="45720" tIns="27432" rIns="45720" bIns="27432" anchor="t">
             <a:spAutoFit/>
           </a:bodyPr>
           <a:lstStyle/>
@@ -5771,7 +4914,7 @@
           <a:noFill/>
         </p:spPr>
         <p:txBody>
-          <a:bodyPr wrap="square" lIns="45720" rIns="45720" tIns="27432" bIns="27432" anchor="t">
+          <a:bodyPr wrap="square" lIns="45720" tIns="27432" rIns="45720" bIns="27432" anchor="t">
             <a:spAutoFit/>
           </a:bodyPr>
           <a:lstStyle/>
@@ -5806,7 +4949,7 @@
           <a:noFill/>
         </p:spPr>
         <p:txBody>
-          <a:bodyPr wrap="square" lIns="45720" rIns="45720" tIns="27432" bIns="27432" anchor="t">
+          <a:bodyPr wrap="square" lIns="45720" tIns="27432" rIns="45720" bIns="27432" anchor="t">
             <a:spAutoFit/>
           </a:bodyPr>
           <a:lstStyle/>
@@ -5855,7 +4998,7 @@
               </a:spcAft>
             </a:pPr>
             <a:r>
-              <a:rPr sz="1500" b="1" i="0">
+              <a:rPr sz="1500" b="1" i="0" dirty="0">
                 <a:solidFill>
                   <a:srgbClr val="1E2761"/>
                 </a:solidFill>
@@ -5864,7 +5007,7 @@
               <a:t>●  </a:t>
             </a:r>
             <a:r>
-              <a:rPr sz="1500" b="0" i="0">
+              <a:rPr sz="1500" b="0" i="0" dirty="0">
                 <a:solidFill>
                   <a:srgbClr val="36454F"/>
                 </a:solidFill>
@@ -5883,7 +5026,7 @@
               </a:spcAft>
             </a:pPr>
             <a:r>
-              <a:rPr sz="1500" b="1" i="0">
+              <a:rPr sz="1500" b="1" i="0" dirty="0">
                 <a:solidFill>
                   <a:srgbClr val="1E2761"/>
                 </a:solidFill>
@@ -5892,13 +5035,49 @@
               <a:t>●  </a:t>
             </a:r>
             <a:r>
-              <a:rPr sz="1500" b="0" i="0">
+              <a:rPr sz="1500" b="0" i="0" dirty="0">
                 <a:solidFill>
                   <a:srgbClr val="36454F"/>
                 </a:solidFill>
                 <a:latin typeface="Calibri"/>
               </a:rPr>
-              <a:t>A clean metric baseline (ProtoNet) is surprisingly strong on merged MoleculeNet.</a:t>
+              <a:t>A clean metric baseline (</a:t>
+            </a:r>
+            <a:r>
+              <a:rPr sz="1500" b="0" i="0" dirty="0" err="1">
+                <a:solidFill>
+                  <a:srgbClr val="36454F"/>
+                </a:solidFill>
+                <a:latin typeface="Calibri"/>
+              </a:rPr>
+              <a:t>ProtoNet</a:t>
+            </a:r>
+            <a:r>
+              <a:rPr sz="1500" b="0" i="0" dirty="0">
+                <a:solidFill>
+                  <a:srgbClr val="36454F"/>
+                </a:solidFill>
+                <a:latin typeface="Calibri"/>
+              </a:rPr>
+              <a:t>) is surprisingly strong on merged </a:t>
+            </a:r>
+            <a:r>
+              <a:rPr sz="1500" b="0" i="0" dirty="0" err="1">
+                <a:solidFill>
+                  <a:srgbClr val="36454F"/>
+                </a:solidFill>
+                <a:latin typeface="Calibri"/>
+              </a:rPr>
+              <a:t>MoleculeNet</a:t>
+            </a:r>
+            <a:r>
+              <a:rPr sz="1500" b="0" i="0" dirty="0">
+                <a:solidFill>
+                  <a:srgbClr val="36454F"/>
+                </a:solidFill>
+                <a:latin typeface="Calibri"/>
+              </a:rPr>
+              <a:t>.</a:t>
             </a:r>
           </a:p>
           <a:p>
@@ -5911,7 +5090,7 @@
               </a:spcAft>
             </a:pPr>
             <a:r>
-              <a:rPr sz="1500" b="1" i="0">
+              <a:rPr sz="1500" b="1" i="0" dirty="0">
                 <a:solidFill>
                   <a:srgbClr val="1E2761"/>
                 </a:solidFill>
@@ -5920,13 +5099,31 @@
               <a:t>●  </a:t>
             </a:r>
             <a:r>
-              <a:rPr sz="1500" b="0" i="0">
+              <a:rPr sz="1500" b="0" i="0" dirty="0">
                 <a:solidFill>
                   <a:srgbClr val="36454F"/>
                 </a:solidFill>
                 <a:latin typeface="Calibri"/>
               </a:rPr>
-              <a:t>Our Graph-of-Shots beats MAML (+6 pp) but falls short of ProtoNet (−13 pp at 5w5s).</a:t>
+              <a:t>Our Graph-of-Shots beats MAML (+6 pp) but falls short of </a:t>
+            </a:r>
+            <a:r>
+              <a:rPr sz="1500" b="0" i="0" dirty="0" err="1">
+                <a:solidFill>
+                  <a:srgbClr val="36454F"/>
+                </a:solidFill>
+                <a:latin typeface="Calibri"/>
+              </a:rPr>
+              <a:t>ProtoNet</a:t>
+            </a:r>
+            <a:r>
+              <a:rPr sz="1500" b="0" i="0" dirty="0">
+                <a:solidFill>
+                  <a:srgbClr val="36454F"/>
+                </a:solidFill>
+                <a:latin typeface="Calibri"/>
+              </a:rPr>
+              <a:t> (−13 pp at 5w5s).</a:t>
             </a:r>
           </a:p>
           <a:p>
@@ -5939,7 +5136,7 @@
               </a:spcAft>
             </a:pPr>
             <a:r>
-              <a:rPr sz="1500" b="1" i="0">
+              <a:rPr sz="1500" b="1" i="0" dirty="0">
                 <a:solidFill>
                   <a:srgbClr val="1E2761"/>
                 </a:solidFill>
@@ -5948,13 +5145,31 @@
               <a:t>●  </a:t>
             </a:r>
             <a:r>
-              <a:rPr sz="1500" b="0" i="0">
+              <a:rPr sz="1500" b="0" i="0" dirty="0">
                 <a:solidFill>
                   <a:srgbClr val="36454F"/>
                 </a:solidFill>
                 <a:latin typeface="Calibri"/>
               </a:rPr>
-              <a:t>Diagnosis: GCN over-smoothing destroys a representation ProtoNet can already classify.</a:t>
+              <a:t>Diagnosis: GCN over-smoothing destroys a representation </a:t>
+            </a:r>
+            <a:r>
+              <a:rPr sz="1500" b="0" i="0" dirty="0" err="1">
+                <a:solidFill>
+                  <a:srgbClr val="36454F"/>
+                </a:solidFill>
+                <a:latin typeface="Calibri"/>
+              </a:rPr>
+              <a:t>ProtoNet</a:t>
+            </a:r>
+            <a:r>
+              <a:rPr sz="1500" b="0" i="0" dirty="0">
+                <a:solidFill>
+                  <a:srgbClr val="36454F"/>
+                </a:solidFill>
+                <a:latin typeface="Calibri"/>
+              </a:rPr>
+              <a:t> can already classify.</a:t>
             </a:r>
           </a:p>
           <a:p>
@@ -5967,7 +5182,7 @@
               </a:spcAft>
             </a:pPr>
             <a:r>
-              <a:rPr sz="1500" b="1" i="0">
+              <a:rPr sz="1500" b="1" i="0" dirty="0">
                 <a:solidFill>
                   <a:srgbClr val="1E2761"/>
                 </a:solidFill>
@@ -5976,7 +5191,7 @@
               <a:t>●  </a:t>
             </a:r>
             <a:r>
-              <a:rPr sz="1500" b="0" i="0">
+              <a:rPr sz="1500" b="0" i="0" dirty="0">
                 <a:solidFill>
                   <a:srgbClr val="36454F"/>
                 </a:solidFill>
@@ -5995,7 +5210,7 @@
               </a:spcAft>
             </a:pPr>
             <a:r>
-              <a:rPr sz="1500" b="1" i="0">
+              <a:rPr sz="1500" b="1" i="0" dirty="0">
                 <a:solidFill>
                   <a:srgbClr val="1E2761"/>
                 </a:solidFill>
@@ -6004,7 +5219,7 @@
               <a:t>●  </a:t>
             </a:r>
             <a:r>
-              <a:rPr sz="1500" b="0" i="0">
+              <a:rPr sz="1500" b="0" i="0" dirty="0">
                 <a:solidFill>
                   <a:srgbClr val="36454F"/>
                 </a:solidFill>
@@ -6023,7 +5238,7 @@
               </a:spcAft>
             </a:pPr>
             <a:r>
-              <a:rPr sz="1300" b="0" i="0">
+              <a:rPr sz="1300" b="0" i="0" dirty="0">
                 <a:solidFill>
                   <a:srgbClr val="888A90"/>
                 </a:solidFill>
@@ -6032,7 +5247,7 @@
               <a:t>–  </a:t>
             </a:r>
             <a:r>
-              <a:rPr sz="1300" b="0" i="0">
+              <a:rPr sz="1300" b="0" i="0" dirty="0">
                 <a:solidFill>
                   <a:srgbClr val="36454F"/>
                 </a:solidFill>
@@ -6051,7 +5266,7 @@
               </a:spcAft>
             </a:pPr>
             <a:r>
-              <a:rPr sz="1300" b="0" i="0">
+              <a:rPr sz="1300" b="0" i="0" dirty="0">
                 <a:solidFill>
                   <a:srgbClr val="888A90"/>
                 </a:solidFill>
@@ -6060,13 +5275,22 @@
               <a:t>–  </a:t>
             </a:r>
             <a:r>
-              <a:rPr sz="1300" b="0" i="0">
+              <a:rPr sz="1300" b="0" i="0" dirty="0" err="1">
                 <a:solidFill>
                   <a:srgbClr val="36454F"/>
                 </a:solidFill>
                 <a:latin typeface="Calibri"/>
               </a:rPr>
-              <a:t>sparsification &gt; expressivity for meta-graphs (k=3 wins).</a:t>
+              <a:t>sparsification</a:t>
+            </a:r>
+            <a:r>
+              <a:rPr sz="1300" b="0" i="0" dirty="0">
+                <a:solidFill>
+                  <a:srgbClr val="36454F"/>
+                </a:solidFill>
+                <a:latin typeface="Calibri"/>
+              </a:rPr>
+              <a:t> &gt; expressivity for meta-graphs (k=3 wins).</a:t>
             </a:r>
           </a:p>
           <a:p>
@@ -6079,7 +5303,7 @@
               </a:spcAft>
             </a:pPr>
             <a:r>
-              <a:rPr sz="1300" b="0" i="0">
+              <a:rPr sz="1300" b="0" i="0" dirty="0">
                 <a:solidFill>
                   <a:srgbClr val="888A90"/>
                 </a:solidFill>
@@ -6088,7 +5312,7 @@
               <a:t>–  </a:t>
             </a:r>
             <a:r>
-              <a:rPr sz="1300" b="0" i="0">
+              <a:rPr sz="1300" b="0" i="0" dirty="0">
                 <a:solidFill>
                   <a:srgbClr val="36454F"/>
                 </a:solidFill>
@@ -6108,7 +5332,7 @@
 </file>
 
 <file path=ppt/slides/slide12.xml><?xml version="1.0" encoding="utf-8"?>
-<p:sld xmlns:a="http://schemas.openxmlformats.org/drawingml/2006/main" xmlns:p="http://schemas.openxmlformats.org/presentationml/2006/main" xmlns:r="http://schemas.openxmlformats.org/officeDocument/2006/relationships">
+<p:sld xmlns:a="http://schemas.openxmlformats.org/drawingml/2006/main" xmlns:r="http://schemas.openxmlformats.org/officeDocument/2006/relationships" xmlns:p="http://schemas.openxmlformats.org/presentationml/2006/main">
   <p:cSld>
     <p:bg>
       <p:bgPr>
@@ -6124,7 +5348,14 @@
         <p:cNvGrpSpPr/>
         <p:nvPr/>
       </p:nvGrpSpPr>
-      <p:grpSpPr/>
+      <p:grpSpPr>
+        <a:xfrm>
+          <a:off x="0" y="0"/>
+          <a:ext cx="0" cy="0"/>
+          <a:chOff x="0" y="0"/>
+          <a:chExt cx="0" cy="0"/>
+        </a:xfrm>
+      </p:grpSpPr>
       <p:sp>
         <p:nvSpPr>
           <p:cNvPr id="2" name="Rectangle 1"/>
@@ -6162,10 +5393,11 @@
           </a:fontRef>
         </p:style>
         <p:txBody>
-          <a:bodyPr rtlCol="0" anchor="ctr" lIns="45720" rIns="45720" tIns="27432" bIns="27432" wrap="square"/>
+          <a:bodyPr wrap="square" lIns="45720" tIns="27432" rIns="45720" bIns="27432" rtlCol="0" anchor="ctr"/>
           <a:lstStyle/>
           <a:p>
             <a:pPr algn="ctr"/>
+            <a:endParaRPr/>
           </a:p>
         </p:txBody>
       </p:sp>
@@ -6186,7 +5418,7 @@
           <a:noFill/>
         </p:spPr>
         <p:txBody>
-          <a:bodyPr wrap="square" lIns="45720" rIns="45720" tIns="27432" bIns="27432" anchor="t">
+          <a:bodyPr wrap="square" lIns="45720" tIns="27432" rIns="45720" bIns="27432" anchor="t">
             <a:spAutoFit/>
           </a:bodyPr>
           <a:lstStyle/>
@@ -6221,7 +5453,7 @@
           <a:noFill/>
         </p:spPr>
         <p:txBody>
-          <a:bodyPr wrap="square" lIns="45720" rIns="45720" tIns="27432" bIns="27432" anchor="t">
+          <a:bodyPr wrap="square" lIns="45720" tIns="27432" rIns="45720" bIns="27432" anchor="t">
             <a:spAutoFit/>
           </a:bodyPr>
           <a:lstStyle/>
@@ -6241,14 +5473,14 @@
       </p:sp>
       <p:sp>
         <p:nvSpPr>
-          <p:cNvPr id="5" name="TextBox 4"/>
+          <p:cNvPr id="6" name="TextBox 5"/>
           <p:cNvSpPr txBox="1"/>
           <p:nvPr/>
         </p:nvSpPr>
         <p:spPr>
           <a:xfrm>
-            <a:off x="502920" y="4572000"/>
-            <a:ext cx="11185855" cy="457200"/>
+            <a:off x="502920" y="5120640"/>
+            <a:ext cx="11185855" cy="270843"/>
           </a:xfrm>
           <a:prstGeom prst="rect">
             <a:avLst/>
@@ -6256,55 +5488,38 @@
           <a:noFill/>
         </p:spPr>
         <p:txBody>
-          <a:bodyPr wrap="square" lIns="45720" rIns="45720" tIns="27432" bIns="27432" anchor="t">
+          <a:bodyPr wrap="square" lIns="45720" tIns="27432" rIns="45720" bIns="27432" anchor="t">
             <a:spAutoFit/>
           </a:bodyPr>
           <a:lstStyle/>
           <a:p>
             <a:pPr algn="ctr"/>
             <a:r>
-              <a:rPr sz="1800" b="0" i="0">
-                <a:solidFill>
-                  <a:srgbClr val="FFFFFF"/>
-                </a:solidFill>
-                <a:latin typeface="Calibri"/>
-              </a:rPr>
-              <a:t>Code:  github.com/BDeMo/proj-mol</a:t>
-            </a:r>
-          </a:p>
-        </p:txBody>
-      </p:sp>
-      <p:sp>
-        <p:nvSpPr>
-          <p:cNvPr id="6" name="TextBox 5"/>
-          <p:cNvSpPr txBox="1"/>
-          <p:nvPr/>
-        </p:nvSpPr>
-        <p:spPr>
-          <a:xfrm>
-            <a:off x="502920" y="5120640"/>
-            <a:ext cx="11185855" cy="457200"/>
-          </a:xfrm>
-          <a:prstGeom prst="rect">
-            <a:avLst/>
-          </a:prstGeom>
-          <a:noFill/>
-        </p:spPr>
-        <p:txBody>
-          <a:bodyPr wrap="square" lIns="45720" rIns="45720" tIns="27432" bIns="27432" anchor="t">
-            <a:spAutoFit/>
-          </a:bodyPr>
-          <a:lstStyle/>
-          <a:p>
-            <a:pPr algn="ctr"/>
-            <a:r>
-              <a:rPr sz="1400" b="0" i="1">
+              <a:rPr lang="en-US" sz="1400" b="0" i="1" dirty="0" err="1">
                 <a:solidFill>
                   <a:srgbClr val="CADCFC"/>
                 </a:solidFill>
                 <a:latin typeface="Calibri"/>
               </a:rPr>
-              <a:t>Mingjia Shi  ·  University of Virginia</a:t>
+              <a:t>GoS</a:t>
+            </a:r>
+            <a:r>
+              <a:rPr lang="en-US" sz="1400" b="0" i="1" dirty="0">
+                <a:solidFill>
+                  <a:srgbClr val="CADCFC"/>
+                </a:solidFill>
+                <a:latin typeface="Calibri"/>
+              </a:rPr>
+              <a:t> Team </a:t>
+            </a:r>
+            <a:r>
+              <a:rPr sz="1400" b="0" i="1" dirty="0">
+                <a:solidFill>
+                  <a:srgbClr val="CADCFC"/>
+                </a:solidFill>
+                <a:latin typeface="Calibri"/>
+              </a:rPr>
+              <a:t>·  University of Virginia</a:t>
             </a:r>
           </a:p>
         </p:txBody>
@@ -6318,7 +5533,7 @@
 </file>
 
 <file path=ppt/slides/slide2.xml><?xml version="1.0" encoding="utf-8"?>
-<p:sld xmlns:a="http://schemas.openxmlformats.org/drawingml/2006/main" xmlns:p="http://schemas.openxmlformats.org/presentationml/2006/main" xmlns:r="http://schemas.openxmlformats.org/officeDocument/2006/relationships">
+<p:sld xmlns:a="http://schemas.openxmlformats.org/drawingml/2006/main" xmlns:r="http://schemas.openxmlformats.org/officeDocument/2006/relationships" xmlns:p="http://schemas.openxmlformats.org/presentationml/2006/main">
   <p:cSld>
     <p:bg>
       <p:bgPr>
@@ -6334,7 +5549,14 @@
         <p:cNvGrpSpPr/>
         <p:nvPr/>
       </p:nvGrpSpPr>
-      <p:grpSpPr/>
+      <p:grpSpPr>
+        <a:xfrm>
+          <a:off x="0" y="0"/>
+          <a:ext cx="0" cy="0"/>
+          <a:chOff x="0" y="0"/>
+          <a:chExt cx="0" cy="0"/>
+        </a:xfrm>
+      </p:grpSpPr>
       <p:sp>
         <p:nvSpPr>
           <p:cNvPr id="2" name="Rectangle 1"/>
@@ -6372,10 +5594,11 @@
           </a:fontRef>
         </p:style>
         <p:txBody>
-          <a:bodyPr rtlCol="0" anchor="ctr" lIns="45720" rIns="45720" tIns="27432" bIns="27432" wrap="square"/>
+          <a:bodyPr wrap="square" lIns="45720" tIns="27432" rIns="45720" bIns="27432" rtlCol="0" anchor="ctr"/>
           <a:lstStyle/>
           <a:p>
             <a:pPr algn="ctr"/>
+            <a:endParaRPr/>
           </a:p>
         </p:txBody>
       </p:sp>
@@ -6416,7 +5639,7 @@
           </a:fontRef>
         </p:style>
         <p:txBody>
-          <a:bodyPr rtlCol="0" anchor="ctr" lIns="45720" rIns="45720" tIns="27432" bIns="27432" wrap="square"/>
+          <a:bodyPr wrap="square" lIns="45720" tIns="27432" rIns="45720" bIns="27432" rtlCol="0" anchor="ctr"/>
           <a:lstStyle/>
           <a:p>
             <a:pPr algn="ctr"/>
@@ -6449,14 +5672,14 @@
           <a:noFill/>
         </p:spPr>
         <p:txBody>
-          <a:bodyPr wrap="square" lIns="45720" rIns="45720" tIns="27432" bIns="27432" anchor="t">
+          <a:bodyPr wrap="square" lIns="45720" tIns="27432" rIns="45720" bIns="27432" anchor="t">
             <a:spAutoFit/>
           </a:bodyPr>
           <a:lstStyle/>
           <a:p>
             <a:pPr algn="l"/>
             <a:r>
-              <a:rPr sz="2800" b="1" i="0">
+              <a:rPr sz="2800" b="1" i="0" dirty="0">
                 <a:solidFill>
                   <a:srgbClr val="1E2761"/>
                 </a:solidFill>
@@ -6484,7 +5707,7 @@
           <a:noFill/>
         </p:spPr>
         <p:txBody>
-          <a:bodyPr wrap="square" lIns="45720" rIns="45720" tIns="27432" bIns="27432" anchor="t">
+          <a:bodyPr wrap="square" lIns="45720" tIns="27432" rIns="45720" bIns="27432" anchor="t">
             <a:spAutoFit/>
           </a:bodyPr>
           <a:lstStyle/>
@@ -6519,7 +5742,7 @@
           <a:noFill/>
         </p:spPr>
         <p:txBody>
-          <a:bodyPr wrap="square" lIns="45720" rIns="45720" tIns="27432" bIns="27432" anchor="t">
+          <a:bodyPr wrap="square" lIns="45720" tIns="27432" rIns="45720" bIns="27432" anchor="t">
             <a:spAutoFit/>
           </a:bodyPr>
           <a:lstStyle/>
@@ -6568,7 +5791,7 @@
               </a:spcAft>
             </a:pPr>
             <a:r>
-              <a:rPr sz="1600" b="1" i="0">
+              <a:rPr sz="1600" b="1" i="0" dirty="0">
                 <a:solidFill>
                   <a:srgbClr val="1E2761"/>
                 </a:solidFill>
@@ -6577,7 +5800,7 @@
               <a:t>●  </a:t>
             </a:r>
             <a:r>
-              <a:rPr sz="1600" b="0" i="0">
+              <a:rPr sz="1600" b="0" i="0" dirty="0">
                 <a:solidFill>
                   <a:srgbClr val="36454F"/>
                 </a:solidFill>
@@ -6596,7 +5819,7 @@
               </a:spcAft>
             </a:pPr>
             <a:r>
-              <a:rPr sz="1400" b="0" i="0">
+              <a:rPr sz="1400" b="0" i="0" dirty="0">
                 <a:solidFill>
                   <a:srgbClr val="888A90"/>
                 </a:solidFill>
@@ -6605,7 +5828,7 @@
               <a:t>–  </a:t>
             </a:r>
             <a:r>
-              <a:rPr sz="1400" b="0" i="0">
+              <a:rPr sz="1400" b="0" i="0" dirty="0">
                 <a:solidFill>
                   <a:srgbClr val="36454F"/>
                 </a:solidFill>
@@ -6624,7 +5847,7 @@
               </a:spcAft>
             </a:pPr>
             <a:r>
-              <a:rPr sz="1600" b="1" i="0">
+              <a:rPr sz="1600" b="1" i="0" dirty="0">
                 <a:solidFill>
                   <a:srgbClr val="1E2761"/>
                 </a:solidFill>
@@ -6633,7 +5856,7 @@
               <a:t>●  </a:t>
             </a:r>
             <a:r>
-              <a:rPr sz="1600" b="0" i="0">
+              <a:rPr sz="1600" b="0" i="0" dirty="0">
                 <a:solidFill>
                   <a:srgbClr val="36454F"/>
                 </a:solidFill>
@@ -6652,7 +5875,7 @@
               </a:spcAft>
             </a:pPr>
             <a:r>
-              <a:rPr sz="1400" b="0" i="0">
+              <a:rPr sz="1400" b="0" i="0" dirty="0">
                 <a:solidFill>
                   <a:srgbClr val="888A90"/>
                 </a:solidFill>
@@ -6661,7 +5884,7 @@
               <a:t>–  </a:t>
             </a:r>
             <a:r>
-              <a:rPr sz="1400" b="0" i="0">
+              <a:rPr sz="1400" b="0" i="0" dirty="0">
                 <a:solidFill>
                   <a:srgbClr val="36454F"/>
                 </a:solidFill>
@@ -6680,7 +5903,7 @@
               </a:spcAft>
             </a:pPr>
             <a:r>
-              <a:rPr sz="1600" b="1" i="0">
+              <a:rPr sz="1600" b="1" i="0" dirty="0">
                 <a:solidFill>
                   <a:srgbClr val="1E2761"/>
                 </a:solidFill>
@@ -6689,7 +5912,7 @@
               <a:t>●  </a:t>
             </a:r>
             <a:r>
-              <a:rPr sz="1600" b="0" i="0">
+              <a:rPr sz="1600" b="0" i="0" dirty="0">
                 <a:solidFill>
                   <a:srgbClr val="36454F"/>
                 </a:solidFill>
@@ -6708,7 +5931,7 @@
               </a:spcAft>
             </a:pPr>
             <a:r>
-              <a:rPr sz="1400" b="0" i="0">
+              <a:rPr sz="1400" b="0" i="0" dirty="0">
                 <a:solidFill>
                   <a:srgbClr val="888A90"/>
                 </a:solidFill>
@@ -6717,7 +5940,7 @@
               <a:t>–  </a:t>
             </a:r>
             <a:r>
-              <a:rPr sz="1400" b="0" i="0">
+              <a:rPr sz="1400" b="0" i="0" dirty="0">
                 <a:solidFill>
                   <a:srgbClr val="36454F"/>
                 </a:solidFill>
@@ -6736,7 +5959,7 @@
               </a:spcAft>
             </a:pPr>
             <a:r>
-              <a:rPr sz="1600" b="1" i="0">
+              <a:rPr sz="1600" b="1" i="0" dirty="0">
                 <a:solidFill>
                   <a:srgbClr val="1E2761"/>
                 </a:solidFill>
@@ -6745,7 +5968,7 @@
               <a:t>●  </a:t>
             </a:r>
             <a:r>
-              <a:rPr sz="1600" b="0" i="0">
+              <a:rPr sz="1600" b="0" i="0" dirty="0">
                 <a:solidFill>
                   <a:srgbClr val="36454F"/>
                 </a:solidFill>
@@ -6764,7 +5987,7 @@
               </a:spcAft>
             </a:pPr>
             <a:r>
-              <a:rPr sz="1400" b="0" i="0">
+              <a:rPr sz="1400" b="0" i="0" dirty="0">
                 <a:solidFill>
                   <a:srgbClr val="888A90"/>
                 </a:solidFill>
@@ -6773,7 +5996,7 @@
               <a:t>–  </a:t>
             </a:r>
             <a:r>
-              <a:rPr sz="1400" b="0" i="0">
+              <a:rPr sz="1400" b="0" i="0" dirty="0">
                 <a:solidFill>
                   <a:srgbClr val="36454F"/>
                 </a:solidFill>
@@ -6821,10 +6044,11 @@
           </a:fontRef>
         </p:style>
         <p:txBody>
-          <a:bodyPr rtlCol="0" anchor="ctr" lIns="45720" rIns="45720" tIns="27432" bIns="27432" wrap="square"/>
+          <a:bodyPr wrap="square" lIns="45720" tIns="27432" rIns="45720" bIns="27432" rtlCol="0" anchor="ctr"/>
           <a:lstStyle/>
           <a:p>
             <a:pPr algn="ctr"/>
+            <a:endParaRPr/>
           </a:p>
         </p:txBody>
       </p:sp>
@@ -6845,7 +6069,7 @@
           <a:noFill/>
         </p:spPr>
         <p:txBody>
-          <a:bodyPr wrap="square" lIns="45720" rIns="45720" tIns="27432" bIns="27432" anchor="t">
+          <a:bodyPr wrap="square" lIns="45720" tIns="27432" rIns="45720" bIns="27432" anchor="t">
             <a:spAutoFit/>
           </a:bodyPr>
           <a:lstStyle/>
@@ -6880,7 +6104,7 @@
           <a:noFill/>
         </p:spPr>
         <p:txBody>
-          <a:bodyPr wrap="square" lIns="45720" rIns="45720" tIns="27432" bIns="27432" anchor="ctr">
+          <a:bodyPr wrap="square" lIns="45720" tIns="27432" rIns="45720" bIns="27432" anchor="ctr">
             <a:spAutoFit/>
           </a:bodyPr>
           <a:lstStyle/>
@@ -6915,7 +6139,7 @@
           <a:noFill/>
         </p:spPr>
         <p:txBody>
-          <a:bodyPr wrap="square" lIns="45720" rIns="45720" tIns="27432" bIns="27432" anchor="t">
+          <a:bodyPr wrap="square" lIns="45720" tIns="27432" rIns="45720" bIns="27432" anchor="t">
             <a:spAutoFit/>
           </a:bodyPr>
           <a:lstStyle/>
@@ -6970,10 +6194,11 @@
           </a:fontRef>
         </p:style>
         <p:txBody>
-          <a:bodyPr rtlCol="0" anchor="ctr" lIns="45720" rIns="45720" tIns="27432" bIns="27432" wrap="square"/>
+          <a:bodyPr wrap="square" lIns="45720" tIns="27432" rIns="45720" bIns="27432" rtlCol="0" anchor="ctr"/>
           <a:lstStyle/>
           <a:p>
             <a:pPr algn="ctr"/>
+            <a:endParaRPr/>
           </a:p>
         </p:txBody>
       </p:sp>
@@ -6994,7 +6219,7 @@
           <a:noFill/>
         </p:spPr>
         <p:txBody>
-          <a:bodyPr wrap="square" lIns="45720" rIns="45720" tIns="27432" bIns="27432" anchor="t">
+          <a:bodyPr wrap="square" lIns="45720" tIns="27432" rIns="45720" bIns="27432" anchor="t">
             <a:spAutoFit/>
           </a:bodyPr>
           <a:lstStyle/>
@@ -7029,7 +6254,7 @@
           <a:noFill/>
         </p:spPr>
         <p:txBody>
-          <a:bodyPr wrap="square" lIns="45720" rIns="45720" tIns="27432" bIns="27432" anchor="t">
+          <a:bodyPr wrap="square" lIns="45720" tIns="27432" rIns="45720" bIns="27432" anchor="t">
             <a:spAutoFit/>
           </a:bodyPr>
           <a:lstStyle/>
@@ -7056,7 +6281,7 @@
 </file>
 
 <file path=ppt/slides/slide3.xml><?xml version="1.0" encoding="utf-8"?>
-<p:sld xmlns:a="http://schemas.openxmlformats.org/drawingml/2006/main" xmlns:p="http://schemas.openxmlformats.org/presentationml/2006/main" xmlns:r="http://schemas.openxmlformats.org/officeDocument/2006/relationships">
+<p:sld xmlns:a="http://schemas.openxmlformats.org/drawingml/2006/main" xmlns:r="http://schemas.openxmlformats.org/officeDocument/2006/relationships" xmlns:p="http://schemas.openxmlformats.org/presentationml/2006/main">
   <p:cSld>
     <p:bg>
       <p:bgPr>
@@ -7072,7 +6297,14 @@
         <p:cNvGrpSpPr/>
         <p:nvPr/>
       </p:nvGrpSpPr>
-      <p:grpSpPr/>
+      <p:grpSpPr>
+        <a:xfrm>
+          <a:off x="0" y="0"/>
+          <a:ext cx="0" cy="0"/>
+          <a:chOff x="0" y="0"/>
+          <a:chExt cx="0" cy="0"/>
+        </a:xfrm>
+      </p:grpSpPr>
       <p:sp>
         <p:nvSpPr>
           <p:cNvPr id="2" name="Rectangle 1"/>
@@ -7110,10 +6342,11 @@
           </a:fontRef>
         </p:style>
         <p:txBody>
-          <a:bodyPr rtlCol="0" anchor="ctr" lIns="45720" rIns="45720" tIns="27432" bIns="27432" wrap="square"/>
+          <a:bodyPr wrap="square" lIns="45720" tIns="27432" rIns="45720" bIns="27432" rtlCol="0" anchor="ctr"/>
           <a:lstStyle/>
           <a:p>
             <a:pPr algn="ctr"/>
+            <a:endParaRPr/>
           </a:p>
         </p:txBody>
       </p:sp>
@@ -7154,7 +6387,7 @@
           </a:fontRef>
         </p:style>
         <p:txBody>
-          <a:bodyPr rtlCol="0" anchor="ctr" lIns="45720" rIns="45720" tIns="27432" bIns="27432" wrap="square"/>
+          <a:bodyPr wrap="square" lIns="45720" tIns="27432" rIns="45720" bIns="27432" rtlCol="0" anchor="ctr"/>
           <a:lstStyle/>
           <a:p>
             <a:pPr algn="ctr"/>
@@ -7187,20 +6420,38 @@
           <a:noFill/>
         </p:spPr>
         <p:txBody>
-          <a:bodyPr wrap="square" lIns="45720" rIns="45720" tIns="27432" bIns="27432" anchor="t">
+          <a:bodyPr wrap="square" lIns="45720" tIns="27432" rIns="45720" bIns="27432" anchor="t">
             <a:spAutoFit/>
           </a:bodyPr>
           <a:lstStyle/>
           <a:p>
             <a:pPr algn="l"/>
             <a:r>
-              <a:rPr sz="2800" b="1" i="0">
+              <a:rPr sz="2800" b="1" i="0" dirty="0">
                 <a:solidFill>
                   <a:srgbClr val="1E2761"/>
                 </a:solidFill>
                 <a:latin typeface="Calibri"/>
               </a:rPr>
-              <a:t>Episodic Formulation &amp; Task Pool</a:t>
+              <a:t>Baselines — </a:t>
+            </a:r>
+            <a:r>
+              <a:rPr sz="2800" b="1" i="0" dirty="0" err="1">
+                <a:solidFill>
+                  <a:srgbClr val="1E2761"/>
+                </a:solidFill>
+                <a:latin typeface="Calibri"/>
+              </a:rPr>
+              <a:t>ProtoNet</a:t>
+            </a:r>
+            <a:r>
+              <a:rPr sz="2800" b="1" i="0" dirty="0">
+                <a:solidFill>
+                  <a:srgbClr val="1E2761"/>
+                </a:solidFill>
+                <a:latin typeface="Calibri"/>
+              </a:rPr>
+              <a:t> &amp; FOMAML</a:t>
             </a:r>
           </a:p>
         </p:txBody>
@@ -7222,7 +6473,7 @@
           <a:noFill/>
         </p:spPr>
         <p:txBody>
-          <a:bodyPr wrap="square" lIns="45720" rIns="45720" tIns="27432" bIns="27432" anchor="t">
+          <a:bodyPr wrap="square" lIns="45720" tIns="27432" rIns="45720" bIns="27432" anchor="t">
             <a:spAutoFit/>
           </a:bodyPr>
           <a:lstStyle/>
@@ -7235,7 +6486,7 @@
                 </a:solidFill>
                 <a:latin typeface="Calibri"/>
               </a:rPr>
-              <a:t>3 / 12</a:t>
+              <a:t>4 / 12</a:t>
             </a:r>
           </a:p>
         </p:txBody>
@@ -7257,7 +6508,7 @@
           <a:noFill/>
         </p:spPr>
         <p:txBody>
-          <a:bodyPr wrap="square" lIns="45720" rIns="45720" tIns="27432" bIns="27432" anchor="t">
+          <a:bodyPr wrap="square" lIns="45720" tIns="27432" rIns="45720" bIns="27432" anchor="t">
             <a:spAutoFit/>
           </a:bodyPr>
           <a:lstStyle/>
@@ -7277,14 +6528,94 @@
       </p:sp>
       <p:sp>
         <p:nvSpPr>
-          <p:cNvPr id="7" name="TextBox 6"/>
+          <p:cNvPr id="7" name="Rounded Rectangle 6"/>
+          <p:cNvSpPr/>
+          <p:nvPr/>
+        </p:nvSpPr>
+        <p:spPr>
+          <a:xfrm>
+            <a:off x="502920" y="1737360"/>
+            <a:ext cx="5486400" cy="4572000"/>
+          </a:xfrm>
+          <a:prstGeom prst="roundRect">
+            <a:avLst/>
+          </a:prstGeom>
+          <a:solidFill>
+            <a:srgbClr val="CADCFC"/>
+          </a:solidFill>
+          <a:ln>
+            <a:noFill/>
+          </a:ln>
+          <a:effectLst/>
+        </p:spPr>
+        <p:style>
+          <a:lnRef idx="1">
+            <a:schemeClr val="accent1"/>
+          </a:lnRef>
+          <a:fillRef idx="3">
+            <a:schemeClr val="accent1"/>
+          </a:fillRef>
+          <a:effectRef idx="2">
+            <a:schemeClr val="accent1"/>
+          </a:effectRef>
+          <a:fontRef idx="minor">
+            <a:schemeClr val="lt1"/>
+          </a:fontRef>
+        </p:style>
+        <p:txBody>
+          <a:bodyPr wrap="square" lIns="45720" tIns="27432" rIns="45720" bIns="27432" rtlCol="0" anchor="ctr"/>
+          <a:lstStyle/>
+          <a:p>
+            <a:pPr algn="ctr"/>
+            <a:endParaRPr/>
+          </a:p>
+        </p:txBody>
+      </p:sp>
+      <p:sp>
+        <p:nvSpPr>
+          <p:cNvPr id="8" name="TextBox 7"/>
           <p:cNvSpPr txBox="1"/>
           <p:nvPr/>
         </p:nvSpPr>
         <p:spPr>
           <a:xfrm>
-            <a:off x="502920" y="1737360"/>
-            <a:ext cx="7132320" cy="2926080"/>
+            <a:off x="731520" y="1874519"/>
+            <a:ext cx="5486400" cy="365760"/>
+          </a:xfrm>
+          <a:prstGeom prst="rect">
+            <a:avLst/>
+          </a:prstGeom>
+          <a:noFill/>
+        </p:spPr>
+        <p:txBody>
+          <a:bodyPr wrap="square" lIns="45720" tIns="27432" rIns="45720" bIns="27432" anchor="t">
+            <a:spAutoFit/>
+          </a:bodyPr>
+          <a:lstStyle/>
+          <a:p>
+            <a:pPr algn="l"/>
+            <a:r>
+              <a:rPr sz="1600" b="1" i="0" dirty="0">
+                <a:solidFill>
+                  <a:srgbClr val="1E2761"/>
+                </a:solidFill>
+                <a:latin typeface="Calibri"/>
+              </a:rPr>
+              <a:t>Prototypical Network  (metric-based)</a:t>
+            </a:r>
+          </a:p>
+        </p:txBody>
+      </p:sp>
+      <p:sp>
+        <p:nvSpPr>
+          <p:cNvPr id="9" name="TextBox 8"/>
+          <p:cNvSpPr txBox="1"/>
+          <p:nvPr/>
+        </p:nvSpPr>
+        <p:spPr>
+          <a:xfrm>
+            <a:off x="731520" y="2331720"/>
+            <a:ext cx="5029200" cy="1645920"/>
           </a:xfrm>
           <a:prstGeom prst="rect">
             <a:avLst/>
@@ -7306,7 +6637,7 @@
               </a:spcAft>
             </a:pPr>
             <a:r>
-              <a:rPr sz="1500" b="1" i="0">
+              <a:rPr sz="1300" b="1" i="0">
                 <a:solidFill>
                   <a:srgbClr val="1E2761"/>
                 </a:solidFill>
@@ -7315,13 +6646,13 @@
               <a:t>●  </a:t>
             </a:r>
             <a:r>
-              <a:rPr sz="1500" b="0" i="0">
-                <a:solidFill>
-                  <a:srgbClr val="36454F"/>
-                </a:solidFill>
-                <a:latin typeface="Calibri"/>
-              </a:rPr>
-              <a:t>Meta-learning: train across many small tasks that simulate few-shot test conditions.</a:t>
+              <a:rPr sz="1300" b="0" i="0">
+                <a:solidFill>
+                  <a:srgbClr val="1E2761"/>
+                </a:solidFill>
+                <a:latin typeface="Calibri"/>
+              </a:rPr>
+              <a:t>Prototype = mean support embedding per class.</a:t>
             </a:r>
           </a:p>
           <a:p>
@@ -7334,7 +6665,7 @@
               </a:spcAft>
             </a:pPr>
             <a:r>
-              <a:rPr sz="1500" b="1" i="0">
+              <a:rPr sz="1300" b="1" i="0">
                 <a:solidFill>
                   <a:srgbClr val="1E2761"/>
                 </a:solidFill>
@@ -7343,13 +6674,13 @@
               <a:t>●  </a:t>
             </a:r>
             <a:r>
-              <a:rPr sz="1500" b="0" i="0">
-                <a:solidFill>
-                  <a:srgbClr val="36454F"/>
-                </a:solidFill>
-                <a:latin typeface="Calibri"/>
-              </a:rPr>
-              <a:t>Split at the TASK level (not molecule level), with strict label disjointness.</a:t>
+              <a:rPr sz="1300" b="0" i="0">
+                <a:solidFill>
+                  <a:srgbClr val="1E2761"/>
+                </a:solidFill>
+                <a:latin typeface="Calibri"/>
+              </a:rPr>
+              <a:t>Classify query by nearest prototype.</a:t>
             </a:r>
           </a:p>
           <a:p>
@@ -7362,7 +6693,7 @@
               </a:spcAft>
             </a:pPr>
             <a:r>
-              <a:rPr sz="1500" b="1" i="0">
+              <a:rPr sz="1300" b="1" i="0">
                 <a:solidFill>
                   <a:srgbClr val="1E2761"/>
                 </a:solidFill>
@@ -7371,15 +6702,166 @@
               <a:t>●  </a:t>
             </a:r>
             <a:r>
-              <a:rPr sz="1500" b="0" i="0">
-                <a:solidFill>
-                  <a:srgbClr val="36454F"/>
-                </a:solidFill>
-                <a:latin typeface="Calibri"/>
-              </a:rPr>
-              <a:t>Episode τ draws N classes × K support + query set.</a:t>
-            </a:r>
-          </a:p>
+              <a:rPr sz="1300" b="0" i="0">
+                <a:solidFill>
+                  <a:srgbClr val="1E2761"/>
+                </a:solidFill>
+                <a:latin typeface="Calibri"/>
+              </a:rPr>
+              <a:t>No persistent per-class parameters.</a:t>
+            </a:r>
+          </a:p>
+        </p:txBody>
+      </p:sp>
+      <p:pic>
+        <p:nvPicPr>
+          <p:cNvPr id="10" name="Picture 9" descr="f07_1.png"/>
+          <p:cNvPicPr>
+            <a:picLocks noChangeAspect="1"/>
+          </p:cNvPicPr>
+          <p:nvPr/>
+        </p:nvPicPr>
+        <p:blipFill>
+          <a:blip r:embed="rId3"/>
+          <a:stretch>
+            <a:fillRect/>
+          </a:stretch>
+        </p:blipFill>
+        <p:spPr>
+          <a:xfrm>
+            <a:off x="822960" y="4069080"/>
+            <a:ext cx="3840480" cy="545278"/>
+          </a:xfrm>
+          <a:prstGeom prst="rect">
+            <a:avLst/>
+          </a:prstGeom>
+        </p:spPr>
+      </p:pic>
+      <p:pic>
+        <p:nvPicPr>
+          <p:cNvPr id="11" name="Picture 10" descr="f07_2.png"/>
+          <p:cNvPicPr>
+            <a:picLocks noChangeAspect="1"/>
+          </p:cNvPicPr>
+          <p:nvPr/>
+        </p:nvPicPr>
+        <p:blipFill>
+          <a:blip r:embed="rId4"/>
+          <a:stretch>
+            <a:fillRect/>
+          </a:stretch>
+        </p:blipFill>
+        <p:spPr>
+          <a:xfrm>
+            <a:off x="822960" y="5120640"/>
+            <a:ext cx="4937760" cy="701071"/>
+          </a:xfrm>
+          <a:prstGeom prst="rect">
+            <a:avLst/>
+          </a:prstGeom>
+        </p:spPr>
+      </p:pic>
+      <p:sp>
+        <p:nvSpPr>
+          <p:cNvPr id="12" name="Rounded Rectangle 11"/>
+          <p:cNvSpPr/>
+          <p:nvPr/>
+        </p:nvSpPr>
+        <p:spPr>
+          <a:xfrm>
+            <a:off x="6172200" y="1737360"/>
+            <a:ext cx="5486400" cy="4572000"/>
+          </a:xfrm>
+          <a:prstGeom prst="roundRect">
+            <a:avLst/>
+          </a:prstGeom>
+          <a:solidFill>
+            <a:srgbClr val="F5F7FA"/>
+          </a:solidFill>
+          <a:ln>
+            <a:noFill/>
+          </a:ln>
+          <a:effectLst/>
+        </p:spPr>
+        <p:style>
+          <a:lnRef idx="1">
+            <a:schemeClr val="accent1"/>
+          </a:lnRef>
+          <a:fillRef idx="3">
+            <a:schemeClr val="accent1"/>
+          </a:fillRef>
+          <a:effectRef idx="2">
+            <a:schemeClr val="accent1"/>
+          </a:effectRef>
+          <a:fontRef idx="minor">
+            <a:schemeClr val="lt1"/>
+          </a:fontRef>
+        </p:style>
+        <p:txBody>
+          <a:bodyPr wrap="square" lIns="45720" tIns="27432" rIns="45720" bIns="27432" rtlCol="0" anchor="ctr"/>
+          <a:lstStyle/>
+          <a:p>
+            <a:pPr algn="ctr"/>
+            <a:endParaRPr/>
+          </a:p>
+        </p:txBody>
+      </p:sp>
+      <p:sp>
+        <p:nvSpPr>
+          <p:cNvPr id="13" name="TextBox 12"/>
+          <p:cNvSpPr txBox="1"/>
+          <p:nvPr/>
+        </p:nvSpPr>
+        <p:spPr>
+          <a:xfrm>
+            <a:off x="6400800" y="1874519"/>
+            <a:ext cx="5486400" cy="365760"/>
+          </a:xfrm>
+          <a:prstGeom prst="rect">
+            <a:avLst/>
+          </a:prstGeom>
+          <a:noFill/>
+        </p:spPr>
+        <p:txBody>
+          <a:bodyPr wrap="square" lIns="45720" tIns="27432" rIns="45720" bIns="27432" anchor="t">
+            <a:spAutoFit/>
+          </a:bodyPr>
+          <a:lstStyle/>
+          <a:p>
+            <a:pPr algn="l"/>
+            <a:r>
+              <a:rPr sz="1600" b="1" i="0" dirty="0">
+                <a:solidFill>
+                  <a:srgbClr val="F96167"/>
+                </a:solidFill>
+                <a:latin typeface="Calibri"/>
+              </a:rPr>
+              <a:t>FOMAML  (adaptation-based)</a:t>
+            </a:r>
+          </a:p>
+        </p:txBody>
+      </p:sp>
+      <p:sp>
+        <p:nvSpPr>
+          <p:cNvPr id="14" name="TextBox 13"/>
+          <p:cNvSpPr txBox="1"/>
+          <p:nvPr/>
+        </p:nvSpPr>
+        <p:spPr>
+          <a:xfrm>
+            <a:off x="6400800" y="2331720"/>
+            <a:ext cx="5029200" cy="1645920"/>
+          </a:xfrm>
+          <a:prstGeom prst="rect">
+            <a:avLst/>
+          </a:prstGeom>
+          <a:noFill/>
+        </p:spPr>
+        <p:txBody>
+          <a:bodyPr wrap="square" lIns="45720" rIns="45720">
+            <a:spAutoFit/>
+          </a:bodyPr>
+          <a:lstStyle/>
           <a:p>
             <a:pPr algn="l">
               <a:lnSpc>
@@ -7390,7 +6872,7 @@
               </a:spcAft>
             </a:pPr>
             <a:r>
-              <a:rPr sz="1500" b="1" i="0">
+              <a:rPr sz="1300" b="1" i="0">
                 <a:solidFill>
                   <a:srgbClr val="1E2761"/>
                 </a:solidFill>
@@ -7399,35 +6881,91 @@
               <a:t>●  </a:t>
             </a:r>
             <a:r>
-              <a:rPr sz="1500" b="0" i="0">
+              <a:rPr sz="1300" b="0" i="0">
                 <a:solidFill>
                   <a:srgbClr val="36454F"/>
                 </a:solidFill>
                 <a:latin typeface="Calibri"/>
               </a:rPr>
-              <a:t>Configs: 5-way 1-shot · 5-way 5-shot · 10-way 5-shot.</a:t>
+              <a:t>Learn init θ that adapts in a few SGD steps.</a:t>
+            </a:r>
+          </a:p>
+          <a:p>
+            <a:pPr algn="l">
+              <a:lnSpc>
+                <a:spcPct val="120000"/>
+              </a:lnSpc>
+              <a:spcAft>
+                <a:spcPts val="300"/>
+              </a:spcAft>
+            </a:pPr>
+            <a:r>
+              <a:rPr sz="1300" b="1" i="0">
+                <a:solidFill>
+                  <a:srgbClr val="1E2761"/>
+                </a:solidFill>
+                <a:latin typeface="Calibri"/>
+              </a:rPr>
+              <a:t>●  </a:t>
+            </a:r>
+            <a:r>
+              <a:rPr sz="1300" b="0" i="0">
+                <a:solidFill>
+                  <a:srgbClr val="36454F"/>
+                </a:solidFill>
+                <a:latin typeface="Calibri"/>
+              </a:rPr>
+              <a:t>First-order; detach inner loop (PyG-stable).</a:t>
+            </a:r>
+          </a:p>
+          <a:p>
+            <a:pPr algn="l">
+              <a:lnSpc>
+                <a:spcPct val="120000"/>
+              </a:lnSpc>
+              <a:spcAft>
+                <a:spcPts val="300"/>
+              </a:spcAft>
+            </a:pPr>
+            <a:r>
+              <a:rPr sz="1300" b="1" i="0">
+                <a:solidFill>
+                  <a:srgbClr val="1E2761"/>
+                </a:solidFill>
+                <a:latin typeface="Calibri"/>
+              </a:rPr>
+              <a:t>●  </a:t>
+            </a:r>
+            <a:r>
+              <a:rPr sz="1300" b="0" i="0">
+                <a:solidFill>
+                  <a:srgbClr val="36454F"/>
+                </a:solidFill>
+                <a:latin typeface="Calibri"/>
+              </a:rPr>
+              <a:t>Meta-gradient from query pass on original θ.</a:t>
             </a:r>
           </a:p>
         </p:txBody>
       </p:sp>
       <p:pic>
         <p:nvPicPr>
-          <p:cNvPr id="8" name="Picture 7" descr="f05_1.png"/>
+          <p:cNvPr id="15" name="Picture 14" descr="f08_1.png"/>
           <p:cNvPicPr>
             <a:picLocks noChangeAspect="1"/>
           </p:cNvPicPr>
           <p:nvPr/>
         </p:nvPicPr>
         <p:blipFill>
-          <a:blip r:embed="rId2"/>
+          <a:blip r:embed="rId5"/>
           <a:stretch>
             <a:fillRect/>
           </a:stretch>
         </p:blipFill>
         <p:spPr>
           <a:xfrm>
-            <a:off x="731520" y="4480560"/>
-            <a:ext cx="4572000" cy="649140"/>
+            <a:off x="6492240" y="4069080"/>
+            <a:ext cx="4754880" cy="675106"/>
           </a:xfrm>
           <a:prstGeom prst="rect">
             <a:avLst/>
@@ -7436,597 +6974,28 @@
       </p:pic>
       <p:pic>
         <p:nvPicPr>
-          <p:cNvPr id="9" name="Picture 8" descr="f05_2.png"/>
+          <p:cNvPr id="16" name="Picture 15" descr="f08_2.png"/>
           <p:cNvPicPr>
             <a:picLocks noChangeAspect="1"/>
           </p:cNvPicPr>
           <p:nvPr/>
         </p:nvPicPr>
         <p:blipFill>
-          <a:blip r:embed="rId3"/>
+          <a:blip r:embed="rId6"/>
           <a:stretch>
             <a:fillRect/>
           </a:stretch>
         </p:blipFill>
         <p:spPr>
           <a:xfrm>
-            <a:off x="731520" y="5394960"/>
-            <a:ext cx="3291840" cy="467381"/>
+            <a:off x="6492240" y="5120640"/>
+            <a:ext cx="4754880" cy="675106"/>
           </a:xfrm>
           <a:prstGeom prst="rect">
             <a:avLst/>
           </a:prstGeom>
         </p:spPr>
       </p:pic>
-      <p:sp>
-        <p:nvSpPr>
-          <p:cNvPr id="10" name="Rounded Rectangle 9"/>
-          <p:cNvSpPr/>
-          <p:nvPr/>
-        </p:nvSpPr>
-        <p:spPr>
-          <a:xfrm>
-            <a:off x="8046720" y="1737360"/>
-            <a:ext cx="3749039" cy="4480560"/>
-          </a:xfrm>
-          <a:prstGeom prst="roundRect">
-            <a:avLst/>
-          </a:prstGeom>
-          <a:solidFill>
-            <a:srgbClr val="F5F7FA"/>
-          </a:solidFill>
-          <a:ln>
-            <a:noFill/>
-          </a:ln>
-          <a:effectLst/>
-        </p:spPr>
-        <p:style>
-          <a:lnRef idx="1">
-            <a:schemeClr val="accent1"/>
-          </a:lnRef>
-          <a:fillRef idx="3">
-            <a:schemeClr val="accent1"/>
-          </a:fillRef>
-          <a:effectRef idx="2">
-            <a:schemeClr val="accent1"/>
-          </a:effectRef>
-          <a:fontRef idx="minor">
-            <a:schemeClr val="lt1"/>
-          </a:fontRef>
-        </p:style>
-        <p:txBody>
-          <a:bodyPr rtlCol="0" anchor="ctr" lIns="45720" rIns="45720" tIns="27432" bIns="27432" wrap="square"/>
-          <a:lstStyle/>
-          <a:p>
-            <a:pPr algn="ctr"/>
-          </a:p>
-        </p:txBody>
-      </p:sp>
-      <p:sp>
-        <p:nvSpPr>
-          <p:cNvPr id="11" name="TextBox 10"/>
-          <p:cNvSpPr txBox="1"/>
-          <p:nvPr/>
-        </p:nvSpPr>
-        <p:spPr>
-          <a:xfrm>
-            <a:off x="8183879" y="1874519"/>
-            <a:ext cx="3566160" cy="365760"/>
-          </a:xfrm>
-          <a:prstGeom prst="rect">
-            <a:avLst/>
-          </a:prstGeom>
-          <a:noFill/>
-        </p:spPr>
-        <p:txBody>
-          <a:bodyPr wrap="square" lIns="45720" rIns="45720" tIns="27432" bIns="27432" anchor="t">
-            <a:spAutoFit/>
-          </a:bodyPr>
-          <a:lstStyle/>
-          <a:p>
-            <a:pPr algn="l"/>
-            <a:r>
-              <a:rPr sz="1200" b="1" i="0">
-                <a:solidFill>
-                  <a:srgbClr val="1E2761"/>
-                </a:solidFill>
-                <a:latin typeface="Calibri"/>
-              </a:rPr>
-              <a:t>MERGED TASK POOL</a:t>
-            </a:r>
-          </a:p>
-        </p:txBody>
-      </p:sp>
-      <p:sp>
-        <p:nvSpPr>
-          <p:cNvPr id="12" name="TextBox 11"/>
-          <p:cNvSpPr txBox="1"/>
-          <p:nvPr/>
-        </p:nvSpPr>
-        <p:spPr>
-          <a:xfrm>
-            <a:off x="8183879" y="2331720"/>
-            <a:ext cx="1645920" cy="320040"/>
-          </a:xfrm>
-          <a:prstGeom prst="rect">
-            <a:avLst/>
-          </a:prstGeom>
-          <a:noFill/>
-        </p:spPr>
-        <p:txBody>
-          <a:bodyPr wrap="square" lIns="45720" rIns="45720" tIns="27432" bIns="27432" anchor="t">
-            <a:spAutoFit/>
-          </a:bodyPr>
-          <a:lstStyle/>
-          <a:p>
-            <a:pPr algn="l"/>
-            <a:r>
-              <a:rPr sz="1300" b="0" i="0">
-                <a:solidFill>
-                  <a:srgbClr val="1E2761"/>
-                </a:solidFill>
-                <a:latin typeface="Calibri"/>
-              </a:rPr>
-              <a:t>Tox21</a:t>
-            </a:r>
-          </a:p>
-        </p:txBody>
-      </p:sp>
-      <p:sp>
-        <p:nvSpPr>
-          <p:cNvPr id="13" name="TextBox 12"/>
-          <p:cNvSpPr txBox="1"/>
-          <p:nvPr/>
-        </p:nvSpPr>
-        <p:spPr>
-          <a:xfrm>
-            <a:off x="9784080" y="2331720"/>
-            <a:ext cx="2103120" cy="320040"/>
-          </a:xfrm>
-          <a:prstGeom prst="rect">
-            <a:avLst/>
-          </a:prstGeom>
-          <a:noFill/>
-        </p:spPr>
-        <p:txBody>
-          <a:bodyPr wrap="square" lIns="45720" rIns="45720" tIns="27432" bIns="27432" anchor="t">
-            <a:spAutoFit/>
-          </a:bodyPr>
-          <a:lstStyle/>
-          <a:p>
-            <a:pPr algn="l"/>
-            <a:r>
-              <a:rPr sz="1300" b="0" i="0">
-                <a:solidFill>
-                  <a:srgbClr val="36454F"/>
-                </a:solidFill>
-                <a:latin typeface="Calibri"/>
-              </a:rPr>
-              <a:t>12</a:t>
-            </a:r>
-          </a:p>
-        </p:txBody>
-      </p:sp>
-      <p:sp>
-        <p:nvSpPr>
-          <p:cNvPr id="14" name="TextBox 13"/>
-          <p:cNvSpPr txBox="1"/>
-          <p:nvPr/>
-        </p:nvSpPr>
-        <p:spPr>
-          <a:xfrm>
-            <a:off x="8183879" y="2788920"/>
-            <a:ext cx="1645920" cy="320040"/>
-          </a:xfrm>
-          <a:prstGeom prst="rect">
-            <a:avLst/>
-          </a:prstGeom>
-          <a:noFill/>
-        </p:spPr>
-        <p:txBody>
-          <a:bodyPr wrap="square" lIns="45720" rIns="45720" tIns="27432" bIns="27432" anchor="t">
-            <a:spAutoFit/>
-          </a:bodyPr>
-          <a:lstStyle/>
-          <a:p>
-            <a:pPr algn="l"/>
-            <a:r>
-              <a:rPr sz="1300" b="0" i="0">
-                <a:solidFill>
-                  <a:srgbClr val="1E2761"/>
-                </a:solidFill>
-                <a:latin typeface="Calibri"/>
-              </a:rPr>
-              <a:t>ToxCast</a:t>
-            </a:r>
-          </a:p>
-        </p:txBody>
-      </p:sp>
-      <p:sp>
-        <p:nvSpPr>
-          <p:cNvPr id="15" name="TextBox 14"/>
-          <p:cNvSpPr txBox="1"/>
-          <p:nvPr/>
-        </p:nvSpPr>
-        <p:spPr>
-          <a:xfrm>
-            <a:off x="9784080" y="2788920"/>
-            <a:ext cx="2103120" cy="320040"/>
-          </a:xfrm>
-          <a:prstGeom prst="rect">
-            <a:avLst/>
-          </a:prstGeom>
-          <a:noFill/>
-        </p:spPr>
-        <p:txBody>
-          <a:bodyPr wrap="square" lIns="45720" rIns="45720" tIns="27432" bIns="27432" anchor="t">
-            <a:spAutoFit/>
-          </a:bodyPr>
-          <a:lstStyle/>
-          <a:p>
-            <a:pPr algn="l"/>
-            <a:r>
-              <a:rPr sz="1300" b="0" i="0">
-                <a:solidFill>
-                  <a:srgbClr val="36454F"/>
-                </a:solidFill>
-                <a:latin typeface="Calibri"/>
-              </a:rPr>
-              <a:t>617</a:t>
-            </a:r>
-          </a:p>
-        </p:txBody>
-      </p:sp>
-      <p:sp>
-        <p:nvSpPr>
-          <p:cNvPr id="16" name="TextBox 15"/>
-          <p:cNvSpPr txBox="1"/>
-          <p:nvPr/>
-        </p:nvSpPr>
-        <p:spPr>
-          <a:xfrm>
-            <a:off x="8183879" y="3246120"/>
-            <a:ext cx="1645920" cy="320040"/>
-          </a:xfrm>
-          <a:prstGeom prst="rect">
-            <a:avLst/>
-          </a:prstGeom>
-          <a:noFill/>
-        </p:spPr>
-        <p:txBody>
-          <a:bodyPr wrap="square" lIns="45720" rIns="45720" tIns="27432" bIns="27432" anchor="t">
-            <a:spAutoFit/>
-          </a:bodyPr>
-          <a:lstStyle/>
-          <a:p>
-            <a:pPr algn="l"/>
-            <a:r>
-              <a:rPr sz="1300" b="0" i="0">
-                <a:solidFill>
-                  <a:srgbClr val="1E2761"/>
-                </a:solidFill>
-                <a:latin typeface="Calibri"/>
-              </a:rPr>
-              <a:t>MUV</a:t>
-            </a:r>
-          </a:p>
-        </p:txBody>
-      </p:sp>
-      <p:sp>
-        <p:nvSpPr>
-          <p:cNvPr id="17" name="TextBox 16"/>
-          <p:cNvSpPr txBox="1"/>
-          <p:nvPr/>
-        </p:nvSpPr>
-        <p:spPr>
-          <a:xfrm>
-            <a:off x="9784080" y="3246120"/>
-            <a:ext cx="2103120" cy="320040"/>
-          </a:xfrm>
-          <a:prstGeom prst="rect">
-            <a:avLst/>
-          </a:prstGeom>
-          <a:noFill/>
-        </p:spPr>
-        <p:txBody>
-          <a:bodyPr wrap="square" lIns="45720" rIns="45720" tIns="27432" bIns="27432" anchor="t">
-            <a:spAutoFit/>
-          </a:bodyPr>
-          <a:lstStyle/>
-          <a:p>
-            <a:pPr algn="l"/>
-            <a:r>
-              <a:rPr sz="1300" b="0" i="0">
-                <a:solidFill>
-                  <a:srgbClr val="36454F"/>
-                </a:solidFill>
-                <a:latin typeface="Calibri"/>
-              </a:rPr>
-              <a:t>17</a:t>
-            </a:r>
-          </a:p>
-        </p:txBody>
-      </p:sp>
-      <p:sp>
-        <p:nvSpPr>
-          <p:cNvPr id="18" name="TextBox 17"/>
-          <p:cNvSpPr txBox="1"/>
-          <p:nvPr/>
-        </p:nvSpPr>
-        <p:spPr>
-          <a:xfrm>
-            <a:off x="8183879" y="3703320"/>
-            <a:ext cx="1645920" cy="320040"/>
-          </a:xfrm>
-          <a:prstGeom prst="rect">
-            <a:avLst/>
-          </a:prstGeom>
-          <a:noFill/>
-        </p:spPr>
-        <p:txBody>
-          <a:bodyPr wrap="square" lIns="45720" rIns="45720" tIns="27432" bIns="27432" anchor="t">
-            <a:spAutoFit/>
-          </a:bodyPr>
-          <a:lstStyle/>
-          <a:p>
-            <a:pPr algn="l"/>
-            <a:r>
-              <a:rPr sz="1300" b="0" i="0">
-                <a:solidFill>
-                  <a:srgbClr val="1E2761"/>
-                </a:solidFill>
-                <a:latin typeface="Calibri"/>
-              </a:rPr>
-              <a:t>SIDER</a:t>
-            </a:r>
-          </a:p>
-        </p:txBody>
-      </p:sp>
-      <p:sp>
-        <p:nvSpPr>
-          <p:cNvPr id="19" name="TextBox 18"/>
-          <p:cNvSpPr txBox="1"/>
-          <p:nvPr/>
-        </p:nvSpPr>
-        <p:spPr>
-          <a:xfrm>
-            <a:off x="9784080" y="3703320"/>
-            <a:ext cx="2103120" cy="320040"/>
-          </a:xfrm>
-          <a:prstGeom prst="rect">
-            <a:avLst/>
-          </a:prstGeom>
-          <a:noFill/>
-        </p:spPr>
-        <p:txBody>
-          <a:bodyPr wrap="square" lIns="45720" rIns="45720" tIns="27432" bIns="27432" anchor="t">
-            <a:spAutoFit/>
-          </a:bodyPr>
-          <a:lstStyle/>
-          <a:p>
-            <a:pPr algn="l"/>
-            <a:r>
-              <a:rPr sz="1300" b="0" i="0">
-                <a:solidFill>
-                  <a:srgbClr val="36454F"/>
-                </a:solidFill>
-                <a:latin typeface="Calibri"/>
-              </a:rPr>
-              <a:t>27</a:t>
-            </a:r>
-          </a:p>
-        </p:txBody>
-      </p:sp>
-      <p:sp>
-        <p:nvSpPr>
-          <p:cNvPr id="20" name="TextBox 19"/>
-          <p:cNvSpPr txBox="1"/>
-          <p:nvPr/>
-        </p:nvSpPr>
-        <p:spPr>
-          <a:xfrm>
-            <a:off x="8183879" y="4160520"/>
-            <a:ext cx="1645920" cy="320040"/>
-          </a:xfrm>
-          <a:prstGeom prst="rect">
-            <a:avLst/>
-          </a:prstGeom>
-          <a:noFill/>
-        </p:spPr>
-        <p:txBody>
-          <a:bodyPr wrap="square" lIns="45720" rIns="45720" tIns="27432" bIns="27432" anchor="t">
-            <a:spAutoFit/>
-          </a:bodyPr>
-          <a:lstStyle/>
-          <a:p>
-            <a:pPr algn="l"/>
-            <a:r>
-              <a:rPr sz="1300" b="0" i="0">
-                <a:solidFill>
-                  <a:srgbClr val="1E2761"/>
-                </a:solidFill>
-                <a:latin typeface="Calibri"/>
-              </a:rPr>
-              <a:t>—</a:t>
-            </a:r>
-          </a:p>
-        </p:txBody>
-      </p:sp>
-      <p:sp>
-        <p:nvSpPr>
-          <p:cNvPr id="21" name="TextBox 20"/>
-          <p:cNvSpPr txBox="1"/>
-          <p:nvPr/>
-        </p:nvSpPr>
-        <p:spPr>
-          <a:xfrm>
-            <a:off x="9784080" y="4160520"/>
-            <a:ext cx="2103120" cy="320040"/>
-          </a:xfrm>
-          <a:prstGeom prst="rect">
-            <a:avLst/>
-          </a:prstGeom>
-          <a:noFill/>
-        </p:spPr>
-        <p:txBody>
-          <a:bodyPr wrap="square" lIns="45720" rIns="45720" tIns="27432" bIns="27432" anchor="t">
-            <a:spAutoFit/>
-          </a:bodyPr>
-          <a:lstStyle/>
-          <a:p>
-            <a:pPr algn="l"/>
-            <a:r>
-              <a:rPr sz="1300" b="0" i="0">
-                <a:solidFill>
-                  <a:srgbClr val="36454F"/>
-                </a:solidFill>
-                <a:latin typeface="Calibri"/>
-              </a:rPr>
-              <a:t>—</a:t>
-            </a:r>
-          </a:p>
-        </p:txBody>
-      </p:sp>
-      <p:sp>
-        <p:nvSpPr>
-          <p:cNvPr id="22" name="TextBox 21"/>
-          <p:cNvSpPr txBox="1"/>
-          <p:nvPr/>
-        </p:nvSpPr>
-        <p:spPr>
-          <a:xfrm>
-            <a:off x="8183879" y="4617720"/>
-            <a:ext cx="1645920" cy="320040"/>
-          </a:xfrm>
-          <a:prstGeom prst="rect">
-            <a:avLst/>
-          </a:prstGeom>
-          <a:noFill/>
-        </p:spPr>
-        <p:txBody>
-          <a:bodyPr wrap="square" lIns="45720" rIns="45720" tIns="27432" bIns="27432" anchor="t">
-            <a:spAutoFit/>
-          </a:bodyPr>
-          <a:lstStyle/>
-          <a:p>
-            <a:pPr algn="l"/>
-            <a:r>
-              <a:rPr sz="1300" b="1" i="0">
-                <a:solidFill>
-                  <a:srgbClr val="1E2761"/>
-                </a:solidFill>
-                <a:latin typeface="Calibri"/>
-              </a:rPr>
-              <a:t>Total</a:t>
-            </a:r>
-          </a:p>
-        </p:txBody>
-      </p:sp>
-      <p:sp>
-        <p:nvSpPr>
-          <p:cNvPr id="23" name="TextBox 22"/>
-          <p:cNvSpPr txBox="1"/>
-          <p:nvPr/>
-        </p:nvSpPr>
-        <p:spPr>
-          <a:xfrm>
-            <a:off x="9784080" y="4617720"/>
-            <a:ext cx="2103120" cy="320040"/>
-          </a:xfrm>
-          <a:prstGeom prst="rect">
-            <a:avLst/>
-          </a:prstGeom>
-          <a:noFill/>
-        </p:spPr>
-        <p:txBody>
-          <a:bodyPr wrap="square" lIns="45720" rIns="45720" tIns="27432" bIns="27432" anchor="t">
-            <a:spAutoFit/>
-          </a:bodyPr>
-          <a:lstStyle/>
-          <a:p>
-            <a:pPr algn="l"/>
-            <a:r>
-              <a:rPr sz="1300" b="1" i="0">
-                <a:solidFill>
-                  <a:srgbClr val="36454F"/>
-                </a:solidFill>
-                <a:latin typeface="Calibri"/>
-              </a:rPr>
-              <a:t>673</a:t>
-            </a:r>
-          </a:p>
-        </p:txBody>
-      </p:sp>
-      <p:sp>
-        <p:nvSpPr>
-          <p:cNvPr id="24" name="TextBox 23"/>
-          <p:cNvSpPr txBox="1"/>
-          <p:nvPr/>
-        </p:nvSpPr>
-        <p:spPr>
-          <a:xfrm>
-            <a:off x="8183879" y="5074920"/>
-            <a:ext cx="1645920" cy="320040"/>
-          </a:xfrm>
-          <a:prstGeom prst="rect">
-            <a:avLst/>
-          </a:prstGeom>
-          <a:noFill/>
-        </p:spPr>
-        <p:txBody>
-          <a:bodyPr wrap="square" lIns="45720" rIns="45720" tIns="27432" bIns="27432" anchor="t">
-            <a:spAutoFit/>
-          </a:bodyPr>
-          <a:lstStyle/>
-          <a:p>
-            <a:pPr algn="l"/>
-            <a:r>
-              <a:rPr sz="1300" b="1" i="0">
-                <a:solidFill>
-                  <a:srgbClr val="1E2761"/>
-                </a:solidFill>
-                <a:latin typeface="Calibri"/>
-              </a:rPr>
-              <a:t>Split</a:t>
-            </a:r>
-          </a:p>
-        </p:txBody>
-      </p:sp>
-      <p:sp>
-        <p:nvSpPr>
-          <p:cNvPr id="25" name="TextBox 24"/>
-          <p:cNvSpPr txBox="1"/>
-          <p:nvPr/>
-        </p:nvSpPr>
-        <p:spPr>
-          <a:xfrm>
-            <a:off x="9784080" y="5074920"/>
-            <a:ext cx="2103120" cy="320040"/>
-          </a:xfrm>
-          <a:prstGeom prst="rect">
-            <a:avLst/>
-          </a:prstGeom>
-          <a:noFill/>
-        </p:spPr>
-        <p:txBody>
-          <a:bodyPr wrap="square" lIns="45720" rIns="45720" tIns="27432" bIns="27432" anchor="t">
-            <a:spAutoFit/>
-          </a:bodyPr>
-          <a:lstStyle/>
-          <a:p>
-            <a:pPr algn="l"/>
-            <a:r>
-              <a:rPr sz="1300" b="1" i="0">
-                <a:solidFill>
-                  <a:srgbClr val="36454F"/>
-                </a:solidFill>
-                <a:latin typeface="Calibri"/>
-              </a:rPr>
-              <a:t>405 / 134 / 134</a:t>
-            </a:r>
-          </a:p>
-        </p:txBody>
-      </p:sp>
     </p:spTree>
   </p:cSld>
   <p:clrMapOvr>
@@ -8036,7 +7005,7 @@
 </file>
 
 <file path=ppt/slides/slide4.xml><?xml version="1.0" encoding="utf-8"?>
-<p:sld xmlns:a="http://schemas.openxmlformats.org/drawingml/2006/main" xmlns:p="http://schemas.openxmlformats.org/presentationml/2006/main" xmlns:r="http://schemas.openxmlformats.org/officeDocument/2006/relationships">
+<p:sld xmlns:a="http://schemas.openxmlformats.org/drawingml/2006/main" xmlns:r="http://schemas.openxmlformats.org/officeDocument/2006/relationships" xmlns:p="http://schemas.openxmlformats.org/presentationml/2006/main">
   <p:cSld>
     <p:bg>
       <p:bgPr>
@@ -8052,7 +7021,14 @@
         <p:cNvGrpSpPr/>
         <p:nvPr/>
       </p:nvGrpSpPr>
-      <p:grpSpPr/>
+      <p:grpSpPr>
+        <a:xfrm>
+          <a:off x="0" y="0"/>
+          <a:ext cx="0" cy="0"/>
+          <a:chOff x="0" y="0"/>
+          <a:chExt cx="0" cy="0"/>
+        </a:xfrm>
+      </p:grpSpPr>
       <p:sp>
         <p:nvSpPr>
           <p:cNvPr id="2" name="Rectangle 1"/>
@@ -8068,7 +7044,7 @@
             <a:avLst/>
           </a:prstGeom>
           <a:solidFill>
-            <a:srgbClr val="1E2761"/>
+            <a:srgbClr val="F96167"/>
           </a:solidFill>
           <a:ln>
             <a:noFill/>
@@ -8090,10 +7066,11 @@
           </a:fontRef>
         </p:style>
         <p:txBody>
-          <a:bodyPr rtlCol="0" anchor="ctr" lIns="45720" rIns="45720" tIns="27432" bIns="27432" wrap="square"/>
+          <a:bodyPr wrap="square" lIns="45720" tIns="27432" rIns="45720" bIns="27432" rtlCol="0" anchor="ctr"/>
           <a:lstStyle/>
           <a:p>
             <a:pPr algn="ctr"/>
+            <a:endParaRPr/>
           </a:p>
         </p:txBody>
       </p:sp>
@@ -8134,7 +7111,7 @@
           </a:fontRef>
         </p:style>
         <p:txBody>
-          <a:bodyPr rtlCol="0" anchor="ctr" lIns="45720" rIns="45720" tIns="27432" bIns="27432" wrap="square"/>
+          <a:bodyPr wrap="square" lIns="45720" tIns="27432" rIns="45720" bIns="27432" rtlCol="0" anchor="ctr"/>
           <a:lstStyle/>
           <a:p>
             <a:pPr algn="ctr"/>
@@ -8167,7 +7144,7 @@
           <a:noFill/>
         </p:spPr>
         <p:txBody>
-          <a:bodyPr wrap="square" lIns="45720" rIns="45720" tIns="27432" bIns="27432" anchor="t">
+          <a:bodyPr wrap="square" lIns="45720" tIns="27432" rIns="45720" bIns="27432" anchor="t">
             <a:spAutoFit/>
           </a:bodyPr>
           <a:lstStyle/>
@@ -8180,7 +7157,7 @@
                 </a:solidFill>
                 <a:latin typeface="Calibri"/>
               </a:rPr>
-              <a:t>Baselines — ProtoNet &amp; FOMAML</a:t>
+              <a:t>Graph-of-Shots — Pipeline</a:t>
             </a:r>
           </a:p>
         </p:txBody>
@@ -8202,7 +7179,7 @@
           <a:noFill/>
         </p:spPr>
         <p:txBody>
-          <a:bodyPr wrap="square" lIns="45720" rIns="45720" tIns="27432" bIns="27432" anchor="t">
+          <a:bodyPr wrap="square" lIns="45720" tIns="27432" rIns="45720" bIns="27432" anchor="t">
             <a:spAutoFit/>
           </a:bodyPr>
           <a:lstStyle/>
@@ -8215,7 +7192,7 @@
                 </a:solidFill>
                 <a:latin typeface="Calibri"/>
               </a:rPr>
-              <a:t>4 / 12</a:t>
+              <a:t>5 / 12</a:t>
             </a:r>
           </a:p>
         </p:txBody>
@@ -8237,7 +7214,7 @@
           <a:noFill/>
         </p:spPr>
         <p:txBody>
-          <a:bodyPr wrap="square" lIns="45720" rIns="45720" tIns="27432" bIns="27432" anchor="t">
+          <a:bodyPr wrap="square" lIns="45720" tIns="27432" rIns="45720" bIns="27432" anchor="t">
             <a:spAutoFit/>
           </a:bodyPr>
           <a:lstStyle/>
@@ -8257,93 +7234,14 @@
       </p:sp>
       <p:sp>
         <p:nvSpPr>
-          <p:cNvPr id="7" name="Rounded Rectangle 6"/>
-          <p:cNvSpPr/>
-          <p:nvPr/>
-        </p:nvSpPr>
-        <p:spPr>
-          <a:xfrm>
-            <a:off x="502920" y="1737360"/>
-            <a:ext cx="5486400" cy="4572000"/>
-          </a:xfrm>
-          <a:prstGeom prst="roundRect">
-            <a:avLst/>
-          </a:prstGeom>
-          <a:solidFill>
-            <a:srgbClr val="CADCFC"/>
-          </a:solidFill>
-          <a:ln>
-            <a:noFill/>
-          </a:ln>
-          <a:effectLst/>
-        </p:spPr>
-        <p:style>
-          <a:lnRef idx="1">
-            <a:schemeClr val="accent1"/>
-          </a:lnRef>
-          <a:fillRef idx="3">
-            <a:schemeClr val="accent1"/>
-          </a:fillRef>
-          <a:effectRef idx="2">
-            <a:schemeClr val="accent1"/>
-          </a:effectRef>
-          <a:fontRef idx="minor">
-            <a:schemeClr val="lt1"/>
-          </a:fontRef>
-        </p:style>
-        <p:txBody>
-          <a:bodyPr rtlCol="0" anchor="ctr" lIns="45720" rIns="45720" tIns="27432" bIns="27432" wrap="square"/>
-          <a:lstStyle/>
-          <a:p>
-            <a:pPr algn="ctr"/>
-          </a:p>
-        </p:txBody>
-      </p:sp>
-      <p:sp>
-        <p:nvSpPr>
-          <p:cNvPr id="8" name="TextBox 7"/>
+          <p:cNvPr id="7" name="TextBox 6"/>
           <p:cNvSpPr txBox="1"/>
           <p:nvPr/>
         </p:nvSpPr>
         <p:spPr>
           <a:xfrm>
-            <a:off x="731520" y="1874519"/>
-            <a:ext cx="5486400" cy="365760"/>
-          </a:xfrm>
-          <a:prstGeom prst="rect">
-            <a:avLst/>
-          </a:prstGeom>
-          <a:noFill/>
-        </p:spPr>
-        <p:txBody>
-          <a:bodyPr wrap="square" lIns="45720" rIns="45720" tIns="27432" bIns="27432" anchor="t">
-            <a:spAutoFit/>
-          </a:bodyPr>
-          <a:lstStyle/>
-          <a:p>
-            <a:pPr algn="l"/>
-            <a:r>
-              <a:rPr sz="1600" b="1" i="0">
-                <a:solidFill>
-                  <a:srgbClr val="1E2761"/>
-                </a:solidFill>
-                <a:latin typeface="Calibri"/>
-              </a:rPr>
-              <a:t>Prototypical Network  (metric-based)</a:t>
-            </a:r>
-          </a:p>
-        </p:txBody>
-      </p:sp>
-      <p:sp>
-        <p:nvSpPr>
-          <p:cNvPr id="9" name="TextBox 8"/>
-          <p:cNvSpPr txBox="1"/>
-          <p:nvPr/>
-        </p:nvSpPr>
-        <p:spPr>
-          <a:xfrm>
-            <a:off x="731520" y="2331720"/>
-            <a:ext cx="5029200" cy="1645920"/>
+            <a:off x="502920" y="1645920"/>
+            <a:ext cx="11185855" cy="1828800"/>
           </a:xfrm>
           <a:prstGeom prst="rect">
             <a:avLst/>
@@ -8365,7 +7263,7 @@
               </a:spcAft>
             </a:pPr>
             <a:r>
-              <a:rPr sz="1300" b="1" i="0">
+              <a:rPr sz="1500" b="1" i="0">
                 <a:solidFill>
                   <a:srgbClr val="1E2761"/>
                 </a:solidFill>
@@ -8374,13 +7272,13 @@
               <a:t>●  </a:t>
             </a:r>
             <a:r>
-              <a:rPr sz="1300" b="0" i="0">
-                <a:solidFill>
-                  <a:srgbClr val="1E2761"/>
-                </a:solidFill>
-                <a:latin typeface="Calibri"/>
-              </a:rPr>
-              <a:t>Prototype = mean support embedding per class.</a:t>
+              <a:rPr sz="1500" b="0" i="0">
+                <a:solidFill>
+                  <a:srgbClr val="36454F"/>
+                </a:solidFill>
+                <a:latin typeface="Calibri"/>
+              </a:rPr>
+              <a:t>Baselines embed each molecule IN ISOLATION — but within an episode, structurally similar molecules likely share assay activity.</a:t>
             </a:r>
           </a:p>
           <a:p>
@@ -8393,7 +7291,7 @@
               </a:spcAft>
             </a:pPr>
             <a:r>
-              <a:rPr sz="1300" b="1" i="0">
+              <a:rPr sz="1500" b="1" i="0">
                 <a:solidFill>
                   <a:srgbClr val="1E2761"/>
                 </a:solidFill>
@@ -8402,103 +7300,27 @@
               <a:t>●  </a:t>
             </a:r>
             <a:r>
-              <a:rPr sz="1300" b="0" i="0">
-                <a:solidFill>
-                  <a:srgbClr val="1E2761"/>
-                </a:solidFill>
-                <a:latin typeface="Calibri"/>
-              </a:rPr>
-              <a:t>Classify query by nearest prototype.</a:t>
-            </a:r>
-          </a:p>
-          <a:p>
-            <a:pPr algn="l">
-              <a:lnSpc>
-                <a:spcPct val="120000"/>
-              </a:lnSpc>
-              <a:spcAft>
-                <a:spcPts val="300"/>
-              </a:spcAft>
-            </a:pPr>
-            <a:r>
-              <a:rPr sz="1300" b="1" i="0">
-                <a:solidFill>
-                  <a:srgbClr val="1E2761"/>
-                </a:solidFill>
-                <a:latin typeface="Calibri"/>
-              </a:rPr>
-              <a:t>●  </a:t>
-            </a:r>
-            <a:r>
-              <a:rPr sz="1300" b="0" i="0">
-                <a:solidFill>
-                  <a:srgbClr val="1E2761"/>
-                </a:solidFill>
-                <a:latin typeface="Calibri"/>
-              </a:rPr>
-              <a:t>No persistent per-class parameters.</a:t>
-            </a:r>
-          </a:p>
-        </p:txBody>
-      </p:sp>
-      <p:pic>
-        <p:nvPicPr>
-          <p:cNvPr id="10" name="Picture 9" descr="f07_1.png"/>
-          <p:cNvPicPr>
-            <a:picLocks noChangeAspect="1"/>
-          </p:cNvPicPr>
-          <p:nvPr/>
-        </p:nvPicPr>
-        <p:blipFill>
-          <a:blip r:embed="rId2"/>
-          <a:stretch>
-            <a:fillRect/>
-          </a:stretch>
-        </p:blipFill>
-        <p:spPr>
-          <a:xfrm>
-            <a:off x="822960" y="4069080"/>
-            <a:ext cx="3840480" cy="545278"/>
-          </a:xfrm>
-          <a:prstGeom prst="rect">
-            <a:avLst/>
-          </a:prstGeom>
-        </p:spPr>
-      </p:pic>
-      <p:pic>
-        <p:nvPicPr>
-          <p:cNvPr id="11" name="Picture 10" descr="f07_2.png"/>
-          <p:cNvPicPr>
-            <a:picLocks noChangeAspect="1"/>
-          </p:cNvPicPr>
-          <p:nvPr/>
-        </p:nvPicPr>
-        <p:blipFill>
-          <a:blip r:embed="rId3"/>
-          <a:stretch>
-            <a:fillRect/>
-          </a:stretch>
-        </p:blipFill>
-        <p:spPr>
-          <a:xfrm>
-            <a:off x="822960" y="5120640"/>
-            <a:ext cx="4937760" cy="701071"/>
-          </a:xfrm>
-          <a:prstGeom prst="rect">
-            <a:avLst/>
-          </a:prstGeom>
-        </p:spPr>
-      </p:pic>
-      <p:sp>
-        <p:nvSpPr>
-          <p:cNvPr id="12" name="Rounded Rectangle 11"/>
+              <a:rPr sz="1500" b="0" i="0">
+                <a:solidFill>
+                  <a:srgbClr val="36454F"/>
+                </a:solidFill>
+                <a:latin typeface="Calibri"/>
+              </a:rPr>
+              <a:t>Our idea: build a task-specific META-GRAPH over episode molecules, and run a GNN on it — support labels propagate to queries.</a:t>
+            </a:r>
+          </a:p>
+        </p:txBody>
+      </p:sp>
+      <p:sp>
+        <p:nvSpPr>
+          <p:cNvPr id="8" name="Rounded Rectangle 7"/>
           <p:cNvSpPr/>
           <p:nvPr/>
         </p:nvSpPr>
         <p:spPr>
           <a:xfrm>
-            <a:off x="6172200" y="1737360"/>
-            <a:ext cx="5486400" cy="4572000"/>
+            <a:off x="502920" y="3977640"/>
+            <a:ext cx="1635709" cy="1965960"/>
           </a:xfrm>
           <a:prstGeom prst="roundRect">
             <a:avLst/>
@@ -8526,203 +7348,1009 @@
           </a:fontRef>
         </p:style>
         <p:txBody>
-          <a:bodyPr rtlCol="0" anchor="ctr" lIns="45720" rIns="45720" tIns="27432" bIns="27432" wrap="square"/>
+          <a:bodyPr wrap="square" lIns="45720" tIns="27432" rIns="45720" bIns="27432" rtlCol="0" anchor="ctr"/>
           <a:lstStyle/>
           <a:p>
             <a:pPr algn="ctr"/>
-          </a:p>
-        </p:txBody>
-      </p:sp>
-      <p:sp>
-        <p:nvSpPr>
-          <p:cNvPr id="13" name="TextBox 12"/>
-          <p:cNvSpPr txBox="1"/>
-          <p:nvPr/>
-        </p:nvSpPr>
-        <p:spPr>
-          <a:xfrm>
-            <a:off x="6400800" y="1874519"/>
-            <a:ext cx="5486400" cy="365760"/>
-          </a:xfrm>
-          <a:prstGeom prst="rect">
-            <a:avLst/>
-          </a:prstGeom>
-          <a:noFill/>
-        </p:spPr>
-        <p:txBody>
-          <a:bodyPr wrap="square" lIns="45720" rIns="45720" tIns="27432" bIns="27432" anchor="t">
-            <a:spAutoFit/>
-          </a:bodyPr>
-          <a:lstStyle/>
-          <a:p>
-            <a:pPr algn="l"/>
+            <a:r>
+              <a:rPr sz="1200" b="1" i="0">
+                <a:solidFill>
+                  <a:srgbClr val="1E2761"/>
+                </a:solidFill>
+                <a:latin typeface="Calibri"/>
+              </a:rPr>
+              <a:t>
+Encode</a:t>
+            </a:r>
+          </a:p>
+          <a:p>
+            <a:pPr algn="ctr"/>
+            <a:r>
+              <a:rPr sz="1000" b="0" i="1">
+                <a:solidFill>
+                  <a:srgbClr val="36454F"/>
+                </a:solidFill>
+                <a:latin typeface="Calibri"/>
+              </a:rPr>
+              <a:t>MPNN → {h_i}</a:t>
+            </a:r>
+          </a:p>
+        </p:txBody>
+      </p:sp>
+      <p:sp>
+        <p:nvSpPr>
+          <p:cNvPr id="9" name="Oval 8"/>
+          <p:cNvSpPr/>
+          <p:nvPr/>
+        </p:nvSpPr>
+        <p:spPr>
+          <a:xfrm>
+            <a:off x="1069314" y="3726180"/>
+            <a:ext cx="502920" cy="502920"/>
+          </a:xfrm>
+          <a:prstGeom prst="ellipse">
+            <a:avLst/>
+          </a:prstGeom>
+          <a:solidFill>
+            <a:srgbClr val="1E2761"/>
+          </a:solidFill>
+          <a:ln w="15240">
+            <a:solidFill>
+              <a:srgbClr val="FFFFFF"/>
+            </a:solidFill>
+          </a:ln>
+          <a:effectLst/>
+        </p:spPr>
+        <p:style>
+          <a:lnRef idx="1">
+            <a:schemeClr val="accent1"/>
+          </a:lnRef>
+          <a:fillRef idx="3">
+            <a:schemeClr val="accent1"/>
+          </a:fillRef>
+          <a:effectRef idx="2">
+            <a:schemeClr val="accent1"/>
+          </a:effectRef>
+          <a:fontRef idx="minor">
+            <a:schemeClr val="lt1"/>
+          </a:fontRef>
+        </p:style>
+        <p:txBody>
+          <a:bodyPr wrap="square" lIns="45720" tIns="27432" rIns="45720" bIns="27432" rtlCol="0" anchor="ctr"/>
+          <a:lstStyle/>
+          <a:p>
+            <a:pPr algn="ctr"/>
             <a:r>
               <a:rPr sz="1600" b="1" i="0">
                 <a:solidFill>
-                  <a:srgbClr val="F96167"/>
-                </a:solidFill>
-                <a:latin typeface="Calibri"/>
-              </a:rPr>
-              <a:t>FOMAML  (adaptation-based)</a:t>
-            </a:r>
-          </a:p>
-        </p:txBody>
-      </p:sp>
-      <p:sp>
-        <p:nvSpPr>
-          <p:cNvPr id="14" name="TextBox 13"/>
-          <p:cNvSpPr txBox="1"/>
-          <p:nvPr/>
-        </p:nvSpPr>
-        <p:spPr>
-          <a:xfrm>
-            <a:off x="6400800" y="2331720"/>
-            <a:ext cx="5029200" cy="1645920"/>
-          </a:xfrm>
-          <a:prstGeom prst="rect">
-            <a:avLst/>
-          </a:prstGeom>
-          <a:noFill/>
-        </p:spPr>
-        <p:txBody>
-          <a:bodyPr wrap="square" lIns="45720" rIns="45720">
-            <a:spAutoFit/>
-          </a:bodyPr>
-          <a:lstStyle/>
-          <a:p>
-            <a:pPr algn="l">
-              <a:lnSpc>
-                <a:spcPct val="120000"/>
-              </a:lnSpc>
-              <a:spcAft>
-                <a:spcPts val="300"/>
-              </a:spcAft>
-            </a:pPr>
-            <a:r>
-              <a:rPr sz="1300" b="1" i="0">
+                  <a:srgbClr val="FFFFFF"/>
+                </a:solidFill>
+                <a:latin typeface="Calibri"/>
+              </a:rPr>
+              <a:t>1</a:t>
+            </a:r>
+          </a:p>
+        </p:txBody>
+      </p:sp>
+      <p:sp>
+        <p:nvSpPr>
+          <p:cNvPr id="10" name="Right Arrow 9"/>
+          <p:cNvSpPr/>
+          <p:nvPr/>
+        </p:nvSpPr>
+        <p:spPr>
+          <a:xfrm>
+            <a:off x="2156917" y="4663440"/>
+            <a:ext cx="237744" cy="274320"/>
+          </a:xfrm>
+          <a:prstGeom prst="rightArrow">
+            <a:avLst/>
+          </a:prstGeom>
+          <a:solidFill>
+            <a:srgbClr val="1E2761"/>
+          </a:solidFill>
+          <a:ln>
+            <a:noFill/>
+          </a:ln>
+          <a:effectLst/>
+        </p:spPr>
+        <p:style>
+          <a:lnRef idx="1">
+            <a:schemeClr val="accent1"/>
+          </a:lnRef>
+          <a:fillRef idx="3">
+            <a:schemeClr val="accent1"/>
+          </a:fillRef>
+          <a:effectRef idx="2">
+            <a:schemeClr val="accent1"/>
+          </a:effectRef>
+          <a:fontRef idx="minor">
+            <a:schemeClr val="lt1"/>
+          </a:fontRef>
+        </p:style>
+        <p:txBody>
+          <a:bodyPr wrap="square" lIns="45720" tIns="27432" rIns="45720" bIns="27432" rtlCol="0" anchor="ctr"/>
+          <a:lstStyle/>
+          <a:p>
+            <a:pPr algn="ctr"/>
+            <a:endParaRPr/>
+          </a:p>
+        </p:txBody>
+      </p:sp>
+      <p:sp>
+        <p:nvSpPr>
+          <p:cNvPr id="11" name="Rounded Rectangle 10"/>
+          <p:cNvSpPr/>
+          <p:nvPr/>
+        </p:nvSpPr>
+        <p:spPr>
+          <a:xfrm>
+            <a:off x="2412949" y="3977640"/>
+            <a:ext cx="1635709" cy="1965960"/>
+          </a:xfrm>
+          <a:prstGeom prst="roundRect">
+            <a:avLst/>
+          </a:prstGeom>
+          <a:solidFill>
+            <a:srgbClr val="F5F7FA"/>
+          </a:solidFill>
+          <a:ln>
+            <a:noFill/>
+          </a:ln>
+          <a:effectLst/>
+        </p:spPr>
+        <p:style>
+          <a:lnRef idx="1">
+            <a:schemeClr val="accent1"/>
+          </a:lnRef>
+          <a:fillRef idx="3">
+            <a:schemeClr val="accent1"/>
+          </a:fillRef>
+          <a:effectRef idx="2">
+            <a:schemeClr val="accent1"/>
+          </a:effectRef>
+          <a:fontRef idx="minor">
+            <a:schemeClr val="lt1"/>
+          </a:fontRef>
+        </p:style>
+        <p:txBody>
+          <a:bodyPr wrap="square" lIns="45720" tIns="27432" rIns="45720" bIns="27432" rtlCol="0" anchor="ctr"/>
+          <a:lstStyle/>
+          <a:p>
+            <a:pPr algn="ctr"/>
+            <a:r>
+              <a:rPr sz="1200" b="1" i="0">
                 <a:solidFill>
                   <a:srgbClr val="1E2761"/>
                 </a:solidFill>
                 <a:latin typeface="Calibri"/>
               </a:rPr>
-              <a:t>●  </a:t>
-            </a:r>
-            <a:r>
-              <a:rPr sz="1300" b="0" i="0">
+              <a:t>
+Affinity</a:t>
+            </a:r>
+          </a:p>
+          <a:p>
+            <a:pPr algn="ctr"/>
+            <a:r>
+              <a:rPr sz="1000" b="0" i="1">
                 <a:solidFill>
                   <a:srgbClr val="36454F"/>
                 </a:solidFill>
                 <a:latin typeface="Calibri"/>
               </a:rPr>
-              <a:t>Learn init θ that adapts in a few SGD steps.</a:t>
-            </a:r>
-          </a:p>
-          <a:p>
-            <a:pPr algn="l">
-              <a:lnSpc>
-                <a:spcPct val="120000"/>
-              </a:lnSpc>
-              <a:spcAft>
-                <a:spcPts val="300"/>
-              </a:spcAft>
-            </a:pPr>
-            <a:r>
-              <a:rPr sz="1300" b="1" i="0">
+              <a:t>W = g(h_i, h_j)</a:t>
+            </a:r>
+          </a:p>
+        </p:txBody>
+      </p:sp>
+      <p:sp>
+        <p:nvSpPr>
+          <p:cNvPr id="12" name="Oval 11"/>
+          <p:cNvSpPr/>
+          <p:nvPr/>
+        </p:nvSpPr>
+        <p:spPr>
+          <a:xfrm>
+            <a:off x="2979343" y="3726180"/>
+            <a:ext cx="502920" cy="502920"/>
+          </a:xfrm>
+          <a:prstGeom prst="ellipse">
+            <a:avLst/>
+          </a:prstGeom>
+          <a:solidFill>
+            <a:srgbClr val="F96167"/>
+          </a:solidFill>
+          <a:ln w="15240">
+            <a:solidFill>
+              <a:srgbClr val="FFFFFF"/>
+            </a:solidFill>
+          </a:ln>
+          <a:effectLst/>
+        </p:spPr>
+        <p:style>
+          <a:lnRef idx="1">
+            <a:schemeClr val="accent1"/>
+          </a:lnRef>
+          <a:fillRef idx="3">
+            <a:schemeClr val="accent1"/>
+          </a:fillRef>
+          <a:effectRef idx="2">
+            <a:schemeClr val="accent1"/>
+          </a:effectRef>
+          <a:fontRef idx="minor">
+            <a:schemeClr val="lt1"/>
+          </a:fontRef>
+        </p:style>
+        <p:txBody>
+          <a:bodyPr wrap="square" lIns="45720" tIns="27432" rIns="45720" bIns="27432" rtlCol="0" anchor="ctr"/>
+          <a:lstStyle/>
+          <a:p>
+            <a:pPr algn="ctr"/>
+            <a:r>
+              <a:rPr sz="1600" b="1" i="0">
+                <a:solidFill>
+                  <a:srgbClr val="FFFFFF"/>
+                </a:solidFill>
+                <a:latin typeface="Calibri"/>
+              </a:rPr>
+              <a:t>2</a:t>
+            </a:r>
+          </a:p>
+        </p:txBody>
+      </p:sp>
+      <p:sp>
+        <p:nvSpPr>
+          <p:cNvPr id="13" name="Right Arrow 12"/>
+          <p:cNvSpPr/>
+          <p:nvPr/>
+        </p:nvSpPr>
+        <p:spPr>
+          <a:xfrm>
+            <a:off x="4066946" y="4663440"/>
+            <a:ext cx="237744" cy="274320"/>
+          </a:xfrm>
+          <a:prstGeom prst="rightArrow">
+            <a:avLst/>
+          </a:prstGeom>
+          <a:solidFill>
+            <a:srgbClr val="1E2761"/>
+          </a:solidFill>
+          <a:ln>
+            <a:noFill/>
+          </a:ln>
+          <a:effectLst/>
+        </p:spPr>
+        <p:style>
+          <a:lnRef idx="1">
+            <a:schemeClr val="accent1"/>
+          </a:lnRef>
+          <a:fillRef idx="3">
+            <a:schemeClr val="accent1"/>
+          </a:fillRef>
+          <a:effectRef idx="2">
+            <a:schemeClr val="accent1"/>
+          </a:effectRef>
+          <a:fontRef idx="minor">
+            <a:schemeClr val="lt1"/>
+          </a:fontRef>
+        </p:style>
+        <p:txBody>
+          <a:bodyPr wrap="square" lIns="45720" tIns="27432" rIns="45720" bIns="27432" rtlCol="0" anchor="ctr"/>
+          <a:lstStyle/>
+          <a:p>
+            <a:pPr algn="ctr"/>
+            <a:endParaRPr/>
+          </a:p>
+        </p:txBody>
+      </p:sp>
+      <p:sp>
+        <p:nvSpPr>
+          <p:cNvPr id="14" name="Rounded Rectangle 13"/>
+          <p:cNvSpPr/>
+          <p:nvPr/>
+        </p:nvSpPr>
+        <p:spPr>
+          <a:xfrm>
+            <a:off x="4322978" y="3977640"/>
+            <a:ext cx="1635709" cy="1965960"/>
+          </a:xfrm>
+          <a:prstGeom prst="roundRect">
+            <a:avLst/>
+          </a:prstGeom>
+          <a:solidFill>
+            <a:srgbClr val="F5F7FA"/>
+          </a:solidFill>
+          <a:ln>
+            <a:noFill/>
+          </a:ln>
+          <a:effectLst/>
+        </p:spPr>
+        <p:style>
+          <a:lnRef idx="1">
+            <a:schemeClr val="accent1"/>
+          </a:lnRef>
+          <a:fillRef idx="3">
+            <a:schemeClr val="accent1"/>
+          </a:fillRef>
+          <a:effectRef idx="2">
+            <a:schemeClr val="accent1"/>
+          </a:effectRef>
+          <a:fontRef idx="minor">
+            <a:schemeClr val="lt1"/>
+          </a:fontRef>
+        </p:style>
+        <p:txBody>
+          <a:bodyPr wrap="square" lIns="45720" tIns="27432" rIns="45720" bIns="27432" rtlCol="0" anchor="ctr"/>
+          <a:lstStyle/>
+          <a:p>
+            <a:pPr algn="ctr"/>
+            <a:r>
+              <a:rPr sz="1200" b="1" i="0">
                 <a:solidFill>
                   <a:srgbClr val="1E2761"/>
                 </a:solidFill>
                 <a:latin typeface="Calibri"/>
               </a:rPr>
-              <a:t>●  </a:t>
-            </a:r>
-            <a:r>
-              <a:rPr sz="1300" b="0" i="0">
+              <a:t>
+kNN sparsify</a:t>
+            </a:r>
+          </a:p>
+          <a:p>
+            <a:pPr algn="ctr"/>
+            <a:r>
+              <a:rPr sz="1000" b="0" i="1">
                 <a:solidFill>
                   <a:srgbClr val="36454F"/>
                 </a:solidFill>
                 <a:latin typeface="Calibri"/>
               </a:rPr>
-              <a:t>First-order; detach inner loop (PyG-stable).</a:t>
-            </a:r>
-          </a:p>
-          <a:p>
-            <a:pPr algn="l">
-              <a:lnSpc>
-                <a:spcPct val="120000"/>
-              </a:lnSpc>
-              <a:spcAft>
-                <a:spcPts val="300"/>
-              </a:spcAft>
-            </a:pPr>
-            <a:r>
-              <a:rPr sz="1300" b="1" i="0">
+              <a:t>top-k edges</a:t>
+            </a:r>
+          </a:p>
+        </p:txBody>
+      </p:sp>
+      <p:sp>
+        <p:nvSpPr>
+          <p:cNvPr id="15" name="Oval 14"/>
+          <p:cNvSpPr/>
+          <p:nvPr/>
+        </p:nvSpPr>
+        <p:spPr>
+          <a:xfrm>
+            <a:off x="4889372" y="3726180"/>
+            <a:ext cx="502920" cy="502920"/>
+          </a:xfrm>
+          <a:prstGeom prst="ellipse">
+            <a:avLst/>
+          </a:prstGeom>
+          <a:solidFill>
+            <a:srgbClr val="1E2761"/>
+          </a:solidFill>
+          <a:ln w="15240">
+            <a:solidFill>
+              <a:srgbClr val="FFFFFF"/>
+            </a:solidFill>
+          </a:ln>
+          <a:effectLst/>
+        </p:spPr>
+        <p:style>
+          <a:lnRef idx="1">
+            <a:schemeClr val="accent1"/>
+          </a:lnRef>
+          <a:fillRef idx="3">
+            <a:schemeClr val="accent1"/>
+          </a:fillRef>
+          <a:effectRef idx="2">
+            <a:schemeClr val="accent1"/>
+          </a:effectRef>
+          <a:fontRef idx="minor">
+            <a:schemeClr val="lt1"/>
+          </a:fontRef>
+        </p:style>
+        <p:txBody>
+          <a:bodyPr wrap="square" lIns="45720" tIns="27432" rIns="45720" bIns="27432" rtlCol="0" anchor="ctr"/>
+          <a:lstStyle/>
+          <a:p>
+            <a:pPr algn="ctr"/>
+            <a:r>
+              <a:rPr sz="1600" b="1" i="0">
+                <a:solidFill>
+                  <a:srgbClr val="FFFFFF"/>
+                </a:solidFill>
+                <a:latin typeface="Calibri"/>
+              </a:rPr>
+              <a:t>3</a:t>
+            </a:r>
+          </a:p>
+        </p:txBody>
+      </p:sp>
+      <p:sp>
+        <p:nvSpPr>
+          <p:cNvPr id="16" name="Right Arrow 15"/>
+          <p:cNvSpPr/>
+          <p:nvPr/>
+        </p:nvSpPr>
+        <p:spPr>
+          <a:xfrm>
+            <a:off x="5976975" y="4663440"/>
+            <a:ext cx="237744" cy="274320"/>
+          </a:xfrm>
+          <a:prstGeom prst="rightArrow">
+            <a:avLst/>
+          </a:prstGeom>
+          <a:solidFill>
+            <a:srgbClr val="1E2761"/>
+          </a:solidFill>
+          <a:ln>
+            <a:noFill/>
+          </a:ln>
+          <a:effectLst/>
+        </p:spPr>
+        <p:style>
+          <a:lnRef idx="1">
+            <a:schemeClr val="accent1"/>
+          </a:lnRef>
+          <a:fillRef idx="3">
+            <a:schemeClr val="accent1"/>
+          </a:fillRef>
+          <a:effectRef idx="2">
+            <a:schemeClr val="accent1"/>
+          </a:effectRef>
+          <a:fontRef idx="minor">
+            <a:schemeClr val="lt1"/>
+          </a:fontRef>
+        </p:style>
+        <p:txBody>
+          <a:bodyPr wrap="square" lIns="45720" tIns="27432" rIns="45720" bIns="27432" rtlCol="0" anchor="ctr"/>
+          <a:lstStyle/>
+          <a:p>
+            <a:pPr algn="ctr"/>
+            <a:endParaRPr/>
+          </a:p>
+        </p:txBody>
+      </p:sp>
+      <p:sp>
+        <p:nvSpPr>
+          <p:cNvPr id="17" name="Rounded Rectangle 16"/>
+          <p:cNvSpPr/>
+          <p:nvPr/>
+        </p:nvSpPr>
+        <p:spPr>
+          <a:xfrm>
+            <a:off x="6233007" y="3977640"/>
+            <a:ext cx="1635709" cy="1965960"/>
+          </a:xfrm>
+          <a:prstGeom prst="roundRect">
+            <a:avLst/>
+          </a:prstGeom>
+          <a:solidFill>
+            <a:srgbClr val="F5F7FA"/>
+          </a:solidFill>
+          <a:ln>
+            <a:noFill/>
+          </a:ln>
+          <a:effectLst/>
+        </p:spPr>
+        <p:style>
+          <a:lnRef idx="1">
+            <a:schemeClr val="accent1"/>
+          </a:lnRef>
+          <a:fillRef idx="3">
+            <a:schemeClr val="accent1"/>
+          </a:fillRef>
+          <a:effectRef idx="2">
+            <a:schemeClr val="accent1"/>
+          </a:effectRef>
+          <a:fontRef idx="minor">
+            <a:schemeClr val="lt1"/>
+          </a:fontRef>
+        </p:style>
+        <p:txBody>
+          <a:bodyPr wrap="square" lIns="45720" tIns="27432" rIns="45720" bIns="27432" rtlCol="0" anchor="ctr"/>
+          <a:lstStyle/>
+          <a:p>
+            <a:pPr algn="ctr"/>
+            <a:r>
+              <a:rPr sz="1200" b="1" i="0">
                 <a:solidFill>
                   <a:srgbClr val="1E2761"/>
                 </a:solidFill>
                 <a:latin typeface="Calibri"/>
               </a:rPr>
-              <a:t>●  </a:t>
-            </a:r>
-            <a:r>
-              <a:rPr sz="1300" b="0" i="0">
+              <a:t>
+Inject labels</a:t>
+            </a:r>
+          </a:p>
+          <a:p>
+            <a:pPr algn="ctr"/>
+            <a:r>
+              <a:rPr sz="1000" b="0" i="1">
                 <a:solidFill>
                   <a:srgbClr val="36454F"/>
                 </a:solidFill>
                 <a:latin typeface="Calibri"/>
               </a:rPr>
-              <a:t>Meta-gradient from query pass on original θ.</a:t>
-            </a:r>
-          </a:p>
-        </p:txBody>
-      </p:sp>
-      <p:pic>
-        <p:nvPicPr>
-          <p:cNvPr id="15" name="Picture 14" descr="f08_1.png"/>
-          <p:cNvPicPr>
-            <a:picLocks noChangeAspect="1"/>
-          </p:cNvPicPr>
-          <p:nvPr/>
-        </p:nvPicPr>
-        <p:blipFill>
-          <a:blip r:embed="rId4"/>
-          <a:stretch>
-            <a:fillRect/>
-          </a:stretch>
-        </p:blipFill>
-        <p:spPr>
-          <a:xfrm>
-            <a:off x="6492240" y="4069080"/>
-            <a:ext cx="4754880" cy="675106"/>
-          </a:xfrm>
-          <a:prstGeom prst="rect">
-            <a:avLst/>
-          </a:prstGeom>
-        </p:spPr>
-      </p:pic>
-      <p:pic>
-        <p:nvPicPr>
-          <p:cNvPr id="16" name="Picture 15" descr="f08_2.png"/>
-          <p:cNvPicPr>
-            <a:picLocks noChangeAspect="1"/>
-          </p:cNvPicPr>
-          <p:nvPr/>
-        </p:nvPicPr>
-        <p:blipFill>
-          <a:blip r:embed="rId5"/>
-          <a:stretch>
-            <a:fillRect/>
-          </a:stretch>
-        </p:blipFill>
-        <p:spPr>
-          <a:xfrm>
-            <a:off x="6492240" y="5120640"/>
-            <a:ext cx="4754880" cy="675106"/>
-          </a:xfrm>
-          <a:prstGeom prst="rect">
-            <a:avLst/>
-          </a:prstGeom>
-        </p:spPr>
-      </p:pic>
+              <a:t>one-hot support</a:t>
+            </a:r>
+          </a:p>
+        </p:txBody>
+      </p:sp>
+      <p:sp>
+        <p:nvSpPr>
+          <p:cNvPr id="18" name="Oval 17"/>
+          <p:cNvSpPr/>
+          <p:nvPr/>
+        </p:nvSpPr>
+        <p:spPr>
+          <a:xfrm>
+            <a:off x="6799402" y="3726180"/>
+            <a:ext cx="502920" cy="502920"/>
+          </a:xfrm>
+          <a:prstGeom prst="ellipse">
+            <a:avLst/>
+          </a:prstGeom>
+          <a:solidFill>
+            <a:srgbClr val="F96167"/>
+          </a:solidFill>
+          <a:ln w="15240">
+            <a:solidFill>
+              <a:srgbClr val="FFFFFF"/>
+            </a:solidFill>
+          </a:ln>
+          <a:effectLst/>
+        </p:spPr>
+        <p:style>
+          <a:lnRef idx="1">
+            <a:schemeClr val="accent1"/>
+          </a:lnRef>
+          <a:fillRef idx="3">
+            <a:schemeClr val="accent1"/>
+          </a:fillRef>
+          <a:effectRef idx="2">
+            <a:schemeClr val="accent1"/>
+          </a:effectRef>
+          <a:fontRef idx="minor">
+            <a:schemeClr val="lt1"/>
+          </a:fontRef>
+        </p:style>
+        <p:txBody>
+          <a:bodyPr wrap="square" lIns="45720" tIns="27432" rIns="45720" bIns="27432" rtlCol="0" anchor="ctr"/>
+          <a:lstStyle/>
+          <a:p>
+            <a:pPr algn="ctr"/>
+            <a:r>
+              <a:rPr sz="1600" b="1" i="0">
+                <a:solidFill>
+                  <a:srgbClr val="FFFFFF"/>
+                </a:solidFill>
+                <a:latin typeface="Calibri"/>
+              </a:rPr>
+              <a:t>4</a:t>
+            </a:r>
+          </a:p>
+        </p:txBody>
+      </p:sp>
+      <p:sp>
+        <p:nvSpPr>
+          <p:cNvPr id="19" name="Right Arrow 18"/>
+          <p:cNvSpPr/>
+          <p:nvPr/>
+        </p:nvSpPr>
+        <p:spPr>
+          <a:xfrm>
+            <a:off x="7887004" y="4663440"/>
+            <a:ext cx="237744" cy="274320"/>
+          </a:xfrm>
+          <a:prstGeom prst="rightArrow">
+            <a:avLst/>
+          </a:prstGeom>
+          <a:solidFill>
+            <a:srgbClr val="1E2761"/>
+          </a:solidFill>
+          <a:ln>
+            <a:noFill/>
+          </a:ln>
+          <a:effectLst/>
+        </p:spPr>
+        <p:style>
+          <a:lnRef idx="1">
+            <a:schemeClr val="accent1"/>
+          </a:lnRef>
+          <a:fillRef idx="3">
+            <a:schemeClr val="accent1"/>
+          </a:fillRef>
+          <a:effectRef idx="2">
+            <a:schemeClr val="accent1"/>
+          </a:effectRef>
+          <a:fontRef idx="minor">
+            <a:schemeClr val="lt1"/>
+          </a:fontRef>
+        </p:style>
+        <p:txBody>
+          <a:bodyPr wrap="square" lIns="45720" tIns="27432" rIns="45720" bIns="27432" rtlCol="0" anchor="ctr"/>
+          <a:lstStyle/>
+          <a:p>
+            <a:pPr algn="ctr"/>
+            <a:endParaRPr/>
+          </a:p>
+        </p:txBody>
+      </p:sp>
+      <p:sp>
+        <p:nvSpPr>
+          <p:cNvPr id="20" name="Rounded Rectangle 19"/>
+          <p:cNvSpPr/>
+          <p:nvPr/>
+        </p:nvSpPr>
+        <p:spPr>
+          <a:xfrm>
+            <a:off x="8143036" y="3977640"/>
+            <a:ext cx="1635709" cy="1965960"/>
+          </a:xfrm>
+          <a:prstGeom prst="roundRect">
+            <a:avLst/>
+          </a:prstGeom>
+          <a:solidFill>
+            <a:srgbClr val="F5F7FA"/>
+          </a:solidFill>
+          <a:ln>
+            <a:noFill/>
+          </a:ln>
+          <a:effectLst/>
+        </p:spPr>
+        <p:style>
+          <a:lnRef idx="1">
+            <a:schemeClr val="accent1"/>
+          </a:lnRef>
+          <a:fillRef idx="3">
+            <a:schemeClr val="accent1"/>
+          </a:fillRef>
+          <a:effectRef idx="2">
+            <a:schemeClr val="accent1"/>
+          </a:effectRef>
+          <a:fontRef idx="minor">
+            <a:schemeClr val="lt1"/>
+          </a:fontRef>
+        </p:style>
+        <p:txBody>
+          <a:bodyPr wrap="square" lIns="45720" tIns="27432" rIns="45720" bIns="27432" rtlCol="0" anchor="ctr"/>
+          <a:lstStyle/>
+          <a:p>
+            <a:pPr algn="ctr"/>
+            <a:r>
+              <a:rPr sz="1200" b="1" i="0">
+                <a:solidFill>
+                  <a:srgbClr val="1E2761"/>
+                </a:solidFill>
+                <a:latin typeface="Calibri"/>
+              </a:rPr>
+              <a:t>
+Meta-GNN</a:t>
+            </a:r>
+          </a:p>
+          <a:p>
+            <a:pPr algn="ctr"/>
+            <a:r>
+              <a:rPr sz="1000" b="0" i="1">
+                <a:solidFill>
+                  <a:srgbClr val="36454F"/>
+                </a:solidFill>
+                <a:latin typeface="Calibri"/>
+              </a:rPr>
+              <a:t>weighted GCN</a:t>
+            </a:r>
+          </a:p>
+        </p:txBody>
+      </p:sp>
+      <p:sp>
+        <p:nvSpPr>
+          <p:cNvPr id="21" name="Oval 20"/>
+          <p:cNvSpPr/>
+          <p:nvPr/>
+        </p:nvSpPr>
+        <p:spPr>
+          <a:xfrm>
+            <a:off x="8709431" y="3726180"/>
+            <a:ext cx="502920" cy="502920"/>
+          </a:xfrm>
+          <a:prstGeom prst="ellipse">
+            <a:avLst/>
+          </a:prstGeom>
+          <a:solidFill>
+            <a:srgbClr val="1E2761"/>
+          </a:solidFill>
+          <a:ln w="15240">
+            <a:solidFill>
+              <a:srgbClr val="FFFFFF"/>
+            </a:solidFill>
+          </a:ln>
+          <a:effectLst/>
+        </p:spPr>
+        <p:style>
+          <a:lnRef idx="1">
+            <a:schemeClr val="accent1"/>
+          </a:lnRef>
+          <a:fillRef idx="3">
+            <a:schemeClr val="accent1"/>
+          </a:fillRef>
+          <a:effectRef idx="2">
+            <a:schemeClr val="accent1"/>
+          </a:effectRef>
+          <a:fontRef idx="minor">
+            <a:schemeClr val="lt1"/>
+          </a:fontRef>
+        </p:style>
+        <p:txBody>
+          <a:bodyPr wrap="square" lIns="45720" tIns="27432" rIns="45720" bIns="27432" rtlCol="0" anchor="ctr"/>
+          <a:lstStyle/>
+          <a:p>
+            <a:pPr algn="ctr"/>
+            <a:r>
+              <a:rPr sz="1600" b="1" i="0">
+                <a:solidFill>
+                  <a:srgbClr val="FFFFFF"/>
+                </a:solidFill>
+                <a:latin typeface="Calibri"/>
+              </a:rPr>
+              <a:t>5</a:t>
+            </a:r>
+          </a:p>
+        </p:txBody>
+      </p:sp>
+      <p:sp>
+        <p:nvSpPr>
+          <p:cNvPr id="22" name="Right Arrow 21"/>
+          <p:cNvSpPr/>
+          <p:nvPr/>
+        </p:nvSpPr>
+        <p:spPr>
+          <a:xfrm>
+            <a:off x="9797033" y="4663440"/>
+            <a:ext cx="237744" cy="274320"/>
+          </a:xfrm>
+          <a:prstGeom prst="rightArrow">
+            <a:avLst/>
+          </a:prstGeom>
+          <a:solidFill>
+            <a:srgbClr val="1E2761"/>
+          </a:solidFill>
+          <a:ln>
+            <a:noFill/>
+          </a:ln>
+          <a:effectLst/>
+        </p:spPr>
+        <p:style>
+          <a:lnRef idx="1">
+            <a:schemeClr val="accent1"/>
+          </a:lnRef>
+          <a:fillRef idx="3">
+            <a:schemeClr val="accent1"/>
+          </a:fillRef>
+          <a:effectRef idx="2">
+            <a:schemeClr val="accent1"/>
+          </a:effectRef>
+          <a:fontRef idx="minor">
+            <a:schemeClr val="lt1"/>
+          </a:fontRef>
+        </p:style>
+        <p:txBody>
+          <a:bodyPr wrap="square" lIns="45720" tIns="27432" rIns="45720" bIns="27432" rtlCol="0" anchor="ctr"/>
+          <a:lstStyle/>
+          <a:p>
+            <a:pPr algn="ctr"/>
+            <a:endParaRPr/>
+          </a:p>
+        </p:txBody>
+      </p:sp>
+      <p:sp>
+        <p:nvSpPr>
+          <p:cNvPr id="23" name="Rounded Rectangle 22"/>
+          <p:cNvSpPr/>
+          <p:nvPr/>
+        </p:nvSpPr>
+        <p:spPr>
+          <a:xfrm>
+            <a:off x="10053065" y="3977640"/>
+            <a:ext cx="1635709" cy="1965960"/>
+          </a:xfrm>
+          <a:prstGeom prst="roundRect">
+            <a:avLst/>
+          </a:prstGeom>
+          <a:solidFill>
+            <a:srgbClr val="F5F7FA"/>
+          </a:solidFill>
+          <a:ln>
+            <a:noFill/>
+          </a:ln>
+          <a:effectLst/>
+        </p:spPr>
+        <p:style>
+          <a:lnRef idx="1">
+            <a:schemeClr val="accent1"/>
+          </a:lnRef>
+          <a:fillRef idx="3">
+            <a:schemeClr val="accent1"/>
+          </a:fillRef>
+          <a:effectRef idx="2">
+            <a:schemeClr val="accent1"/>
+          </a:effectRef>
+          <a:fontRef idx="minor">
+            <a:schemeClr val="lt1"/>
+          </a:fontRef>
+        </p:style>
+        <p:txBody>
+          <a:bodyPr wrap="square" lIns="45720" tIns="27432" rIns="45720" bIns="27432" rtlCol="0" anchor="ctr"/>
+          <a:lstStyle/>
+          <a:p>
+            <a:pPr algn="ctr"/>
+            <a:r>
+              <a:rPr sz="1200" b="1" i="0" dirty="0">
+                <a:solidFill>
+                  <a:srgbClr val="1E2761"/>
+                </a:solidFill>
+                <a:latin typeface="Calibri"/>
+              </a:rPr>
+              <a:t>
+Prototype head</a:t>
+            </a:r>
+          </a:p>
+          <a:p>
+            <a:pPr algn="ctr"/>
+            <a:r>
+              <a:rPr sz="1000" b="0" i="1" dirty="0">
+                <a:solidFill>
+                  <a:srgbClr val="36454F"/>
+                </a:solidFill>
+                <a:latin typeface="Calibri"/>
+              </a:rPr>
+              <a:t>d(</a:t>
+            </a:r>
+            <a:r>
+              <a:rPr sz="1000" b="0" i="1" dirty="0" err="1">
+                <a:solidFill>
+                  <a:srgbClr val="36454F"/>
+                </a:solidFill>
+                <a:latin typeface="Calibri"/>
+              </a:rPr>
+              <a:t>z_q</a:t>
+            </a:r>
+            <a:r>
+              <a:rPr sz="1000" b="0" i="1" dirty="0">
+                <a:solidFill>
+                  <a:srgbClr val="36454F"/>
+                </a:solidFill>
+                <a:latin typeface="Calibri"/>
+              </a:rPr>
+              <a:t>, </a:t>
+            </a:r>
+            <a:r>
+              <a:rPr sz="1000" b="0" i="1" dirty="0" err="1">
+                <a:solidFill>
+                  <a:srgbClr val="36454F"/>
+                </a:solidFill>
+                <a:latin typeface="Calibri"/>
+              </a:rPr>
+              <a:t>c_n</a:t>
+            </a:r>
+            <a:r>
+              <a:rPr sz="1000" b="0" i="1" dirty="0">
+                <a:solidFill>
+                  <a:srgbClr val="36454F"/>
+                </a:solidFill>
+                <a:latin typeface="Calibri"/>
+              </a:rPr>
+              <a:t>)</a:t>
+            </a:r>
+          </a:p>
+        </p:txBody>
+      </p:sp>
+      <p:sp>
+        <p:nvSpPr>
+          <p:cNvPr id="24" name="Oval 23"/>
+          <p:cNvSpPr/>
+          <p:nvPr/>
+        </p:nvSpPr>
+        <p:spPr>
+          <a:xfrm>
+            <a:off x="10619460" y="3726180"/>
+            <a:ext cx="502920" cy="502920"/>
+          </a:xfrm>
+          <a:prstGeom prst="ellipse">
+            <a:avLst/>
+          </a:prstGeom>
+          <a:solidFill>
+            <a:srgbClr val="F96167"/>
+          </a:solidFill>
+          <a:ln w="15240">
+            <a:solidFill>
+              <a:srgbClr val="FFFFFF"/>
+            </a:solidFill>
+          </a:ln>
+          <a:effectLst/>
+        </p:spPr>
+        <p:style>
+          <a:lnRef idx="1">
+            <a:schemeClr val="accent1"/>
+          </a:lnRef>
+          <a:fillRef idx="3">
+            <a:schemeClr val="accent1"/>
+          </a:fillRef>
+          <a:effectRef idx="2">
+            <a:schemeClr val="accent1"/>
+          </a:effectRef>
+          <a:fontRef idx="minor">
+            <a:schemeClr val="lt1"/>
+          </a:fontRef>
+        </p:style>
+        <p:txBody>
+          <a:bodyPr wrap="square" lIns="45720" tIns="27432" rIns="45720" bIns="27432" rtlCol="0" anchor="ctr"/>
+          <a:lstStyle/>
+          <a:p>
+            <a:pPr algn="ctr"/>
+            <a:r>
+              <a:rPr sz="1600" b="1" i="0">
+                <a:solidFill>
+                  <a:srgbClr val="FFFFFF"/>
+                </a:solidFill>
+                <a:latin typeface="Calibri"/>
+              </a:rPr>
+              <a:t>6</a:t>
+            </a:r>
+          </a:p>
+        </p:txBody>
+      </p:sp>
+      <p:sp>
+        <p:nvSpPr>
+          <p:cNvPr id="25" name="Rounded Rectangle 24"/>
+          <p:cNvSpPr/>
+          <p:nvPr/>
+        </p:nvSpPr>
+        <p:spPr>
+          <a:xfrm>
+            <a:off x="502920" y="6126480"/>
+            <a:ext cx="11185855" cy="457200"/>
+          </a:xfrm>
+          <a:prstGeom prst="roundRect">
+            <a:avLst/>
+          </a:prstGeom>
+          <a:solidFill>
+            <a:srgbClr val="CADCFC"/>
+          </a:solidFill>
+          <a:ln>
+            <a:noFill/>
+          </a:ln>
+          <a:effectLst/>
+        </p:spPr>
+        <p:style>
+          <a:lnRef idx="1">
+            <a:schemeClr val="accent1"/>
+          </a:lnRef>
+          <a:fillRef idx="3">
+            <a:schemeClr val="accent1"/>
+          </a:fillRef>
+          <a:effectRef idx="2">
+            <a:schemeClr val="accent1"/>
+          </a:effectRef>
+          <a:fontRef idx="minor">
+            <a:schemeClr val="lt1"/>
+          </a:fontRef>
+        </p:style>
+        <p:txBody>
+          <a:bodyPr wrap="square" lIns="45720" tIns="27432" rIns="45720" bIns="27432" rtlCol="0" anchor="ctr"/>
+          <a:lstStyle/>
+          <a:p>
+            <a:pPr algn="ctr"/>
+            <a:r>
+              <a:rPr sz="1300" b="1" i="1">
+                <a:solidFill>
+                  <a:srgbClr val="1E2761"/>
+                </a:solidFill>
+                <a:latin typeface="Calibri"/>
+              </a:rPr>
+              <a:t>Encoder φ, affinity g, and meta-GNN trained jointly end-to-end.</a:t>
+            </a:r>
+          </a:p>
+        </p:txBody>
+      </p:sp>
     </p:spTree>
   </p:cSld>
   <p:clrMapOvr>
@@ -8732,7 +8360,7 @@
 </file>
 
 <file path=ppt/slides/slide5.xml><?xml version="1.0" encoding="utf-8"?>
-<p:sld xmlns:a="http://schemas.openxmlformats.org/drawingml/2006/main" xmlns:p="http://schemas.openxmlformats.org/presentationml/2006/main" xmlns:r="http://schemas.openxmlformats.org/officeDocument/2006/relationships">
+<p:sld xmlns:a="http://schemas.openxmlformats.org/drawingml/2006/main" xmlns:r="http://schemas.openxmlformats.org/officeDocument/2006/relationships" xmlns:p="http://schemas.openxmlformats.org/presentationml/2006/main">
   <p:cSld>
     <p:bg>
       <p:bgPr>
@@ -8748,7 +8376,14 @@
         <p:cNvGrpSpPr/>
         <p:nvPr/>
       </p:nvGrpSpPr>
-      <p:grpSpPr/>
+      <p:grpSpPr>
+        <a:xfrm>
+          <a:off x="0" y="0"/>
+          <a:ext cx="0" cy="0"/>
+          <a:chOff x="0" y="0"/>
+          <a:chExt cx="0" cy="0"/>
+        </a:xfrm>
+      </p:grpSpPr>
       <p:sp>
         <p:nvSpPr>
           <p:cNvPr id="2" name="Rectangle 1"/>
@@ -8786,10 +8421,11 @@
           </a:fontRef>
         </p:style>
         <p:txBody>
-          <a:bodyPr rtlCol="0" anchor="ctr" lIns="45720" rIns="45720" tIns="27432" bIns="27432" wrap="square"/>
+          <a:bodyPr wrap="square" lIns="45720" tIns="27432" rIns="45720" bIns="27432" rtlCol="0" anchor="ctr"/>
           <a:lstStyle/>
           <a:p>
             <a:pPr algn="ctr"/>
+            <a:endParaRPr/>
           </a:p>
         </p:txBody>
       </p:sp>
@@ -8830,7 +8466,7 @@
           </a:fontRef>
         </p:style>
         <p:txBody>
-          <a:bodyPr rtlCol="0" anchor="ctr" lIns="45720" rIns="45720" tIns="27432" bIns="27432" wrap="square"/>
+          <a:bodyPr wrap="square" lIns="45720" tIns="27432" rIns="45720" bIns="27432" rtlCol="0" anchor="ctr"/>
           <a:lstStyle/>
           <a:p>
             <a:pPr algn="ctr"/>
@@ -8841,7 +8477,7 @@
                 </a:solidFill>
                 <a:latin typeface="Calibri"/>
               </a:rPr>
-              <a:t>APPROACH</a:t>
+              <a:t>RESULTS v2</a:t>
             </a:r>
           </a:p>
         </p:txBody>
@@ -8863,7 +8499,7 @@
           <a:noFill/>
         </p:spPr>
         <p:txBody>
-          <a:bodyPr wrap="square" lIns="45720" rIns="45720" tIns="27432" bIns="27432" anchor="t">
+          <a:bodyPr wrap="square" lIns="45720" tIns="27432" rIns="45720" bIns="27432" anchor="t">
             <a:spAutoFit/>
           </a:bodyPr>
           <a:lstStyle/>
@@ -8876,7 +8512,7 @@
                 </a:solidFill>
                 <a:latin typeface="Calibri"/>
               </a:rPr>
-              <a:t>Graph-of-Shots — Pipeline</a:t>
+              <a:t>GoS v2 — Diagnosis, Five Modifications, Target</a:t>
             </a:r>
           </a:p>
         </p:txBody>
@@ -8898,7 +8534,7 @@
           <a:noFill/>
         </p:spPr>
         <p:txBody>
-          <a:bodyPr wrap="square" lIns="45720" rIns="45720" tIns="27432" bIns="27432" anchor="t">
+          <a:bodyPr wrap="square" lIns="45720" tIns="27432" rIns="45720" bIns="27432" anchor="t">
             <a:spAutoFit/>
           </a:bodyPr>
           <a:lstStyle/>
@@ -8911,7 +8547,7 @@
                 </a:solidFill>
                 <a:latin typeface="Calibri"/>
               </a:rPr>
-              <a:t>5 / 12</a:t>
+              <a:t>10 / 12</a:t>
             </a:r>
           </a:p>
         </p:txBody>
@@ -8933,7 +8569,7 @@
           <a:noFill/>
         </p:spPr>
         <p:txBody>
-          <a:bodyPr wrap="square" lIns="45720" rIns="45720" tIns="27432" bIns="27432" anchor="t">
+          <a:bodyPr wrap="square" lIns="45720" tIns="27432" rIns="45720" bIns="27432" anchor="t">
             <a:spAutoFit/>
           </a:bodyPr>
           <a:lstStyle/>
@@ -8953,14 +8589,59 @@
       </p:sp>
       <p:sp>
         <p:nvSpPr>
-          <p:cNvPr id="7" name="TextBox 6"/>
+          <p:cNvPr id="7" name="Rounded Rectangle 6"/>
+          <p:cNvSpPr/>
+          <p:nvPr/>
+        </p:nvSpPr>
+        <p:spPr>
+          <a:xfrm>
+            <a:off x="502920" y="1691640"/>
+            <a:ext cx="11185855" cy="1005840"/>
+          </a:xfrm>
+          <a:prstGeom prst="roundRect">
+            <a:avLst/>
+          </a:prstGeom>
+          <a:solidFill>
+            <a:srgbClr val="F96167"/>
+          </a:solidFill>
+          <a:ln>
+            <a:noFill/>
+          </a:ln>
+          <a:effectLst/>
+        </p:spPr>
+        <p:style>
+          <a:lnRef idx="1">
+            <a:schemeClr val="accent1"/>
+          </a:lnRef>
+          <a:fillRef idx="3">
+            <a:schemeClr val="accent1"/>
+          </a:fillRef>
+          <a:effectRef idx="2">
+            <a:schemeClr val="accent1"/>
+          </a:effectRef>
+          <a:fontRef idx="minor">
+            <a:schemeClr val="lt1"/>
+          </a:fontRef>
+        </p:style>
+        <p:txBody>
+          <a:bodyPr wrap="square" lIns="45720" tIns="27432" rIns="45720" bIns="27432" rtlCol="0" anchor="ctr"/>
+          <a:lstStyle/>
+          <a:p>
+            <a:pPr algn="ctr"/>
+            <a:endParaRPr/>
+          </a:p>
+        </p:txBody>
+      </p:sp>
+      <p:sp>
+        <p:nvSpPr>
+          <p:cNvPr id="8" name="TextBox 7"/>
           <p:cNvSpPr txBox="1"/>
           <p:nvPr/>
         </p:nvSpPr>
         <p:spPr>
           <a:xfrm>
-            <a:off x="502920" y="1645920"/>
-            <a:ext cx="11185855" cy="1828800"/>
+            <a:off x="731520" y="1783080"/>
+            <a:ext cx="11185855" cy="365760"/>
           </a:xfrm>
           <a:prstGeom prst="rect">
             <a:avLst/>
@@ -8968,78 +8649,122 @@
           <a:noFill/>
         </p:spPr>
         <p:txBody>
-          <a:bodyPr wrap="square" lIns="45720" rIns="45720">
+          <a:bodyPr wrap="square" lIns="45720" tIns="27432" rIns="45720" bIns="27432" anchor="t">
             <a:spAutoFit/>
           </a:bodyPr>
           <a:lstStyle/>
           <a:p>
-            <a:pPr algn="l">
-              <a:lnSpc>
-                <a:spcPct val="120000"/>
-              </a:lnSpc>
-              <a:spcAft>
-                <a:spcPts val="300"/>
-              </a:spcAft>
-            </a:pPr>
-            <a:r>
-              <a:rPr sz="1500" b="1" i="0">
-                <a:solidFill>
-                  <a:srgbClr val="1E2761"/>
-                </a:solidFill>
-                <a:latin typeface="Calibri"/>
-              </a:rPr>
-              <a:t>●  </a:t>
-            </a:r>
-            <a:r>
-              <a:rPr sz="1500" b="0" i="0">
-                <a:solidFill>
-                  <a:srgbClr val="36454F"/>
-                </a:solidFill>
-                <a:latin typeface="Calibri"/>
-              </a:rPr>
-              <a:t>Baselines embed each molecule IN ISOLATION — but within an episode, structurally similar molecules likely share assay activity.</a:t>
-            </a:r>
-          </a:p>
-          <a:p>
-            <a:pPr algn="l">
-              <a:lnSpc>
-                <a:spcPct val="120000"/>
-              </a:lnSpc>
-              <a:spcAft>
-                <a:spcPts val="300"/>
-              </a:spcAft>
-            </a:pPr>
-            <a:r>
-              <a:rPr sz="1500" b="1" i="0">
-                <a:solidFill>
-                  <a:srgbClr val="1E2761"/>
-                </a:solidFill>
-                <a:latin typeface="Calibri"/>
-              </a:rPr>
-              <a:t>●  </a:t>
-            </a:r>
-            <a:r>
-              <a:rPr sz="1500" b="0" i="0">
-                <a:solidFill>
-                  <a:srgbClr val="36454F"/>
-                </a:solidFill>
-                <a:latin typeface="Calibri"/>
-              </a:rPr>
-              <a:t>Our idea: build a task-specific META-GRAPH over episode molecules, and run a GNN on it — support labels propagate to queries.</a:t>
-            </a:r>
-          </a:p>
-        </p:txBody>
-      </p:sp>
-      <p:sp>
-        <p:nvSpPr>
-          <p:cNvPr id="8" name="Rounded Rectangle 7"/>
+            <a:pPr algn="l"/>
+            <a:r>
+              <a:rPr sz="1200" b="1" i="0">
+                <a:solidFill>
+                  <a:srgbClr val="FFFFFF"/>
+                </a:solidFill>
+                <a:latin typeface="Calibri"/>
+              </a:rPr>
+              <a:t>DIAGNOSIS</a:t>
+            </a:r>
+          </a:p>
+        </p:txBody>
+      </p:sp>
+      <p:sp>
+        <p:nvSpPr>
+          <p:cNvPr id="9" name="TextBox 8"/>
+          <p:cNvSpPr txBox="1"/>
+          <p:nvPr/>
+        </p:nvSpPr>
+        <p:spPr>
+          <a:xfrm>
+            <a:off x="731520" y="2194560"/>
+            <a:ext cx="10728655" cy="548640"/>
+          </a:xfrm>
+          <a:prstGeom prst="rect">
+            <a:avLst/>
+          </a:prstGeom>
+          <a:noFill/>
+        </p:spPr>
+        <p:txBody>
+          <a:bodyPr wrap="square" lIns="45720" tIns="27432" rIns="45720" bIns="27432" anchor="t">
+            <a:spAutoFit/>
+          </a:bodyPr>
+          <a:lstStyle/>
+          <a:p>
+            <a:pPr algn="l"/>
+            <a:r>
+              <a:rPr sz="1200" b="0" i="1">
+                <a:solidFill>
+                  <a:srgbClr val="FFFFFF"/>
+                </a:solidFill>
+                <a:latin typeface="Calibri"/>
+              </a:rPr>
+              <a:t>k-NN k=3 &gt; 5 &gt; 10 &gt; 100 → over-smoothing.    ProtoNet 0.716 &gt; GoS 0.572 → meta-GNN hurts a good embedding.    Affinity variants differ by &lt; 2 pp → expressivity is not the bottleneck.</a:t>
+            </a:r>
+          </a:p>
+        </p:txBody>
+      </p:sp>
+      <p:sp>
+        <p:nvSpPr>
+          <p:cNvPr id="10" name="Rounded Rectangle 9"/>
           <p:cNvSpPr/>
           <p:nvPr/>
         </p:nvSpPr>
         <p:spPr>
           <a:xfrm>
-            <a:off x="502920" y="3977640"/>
-            <a:ext cx="1635709" cy="1965960"/>
+            <a:off x="502920" y="2926080"/>
+            <a:ext cx="2149388" cy="594360"/>
+          </a:xfrm>
+          <a:prstGeom prst="roundRect">
+            <a:avLst/>
+          </a:prstGeom>
+          <a:solidFill>
+            <a:srgbClr val="1E2761"/>
+          </a:solidFill>
+          <a:ln>
+            <a:noFill/>
+          </a:ln>
+          <a:effectLst/>
+        </p:spPr>
+        <p:style>
+          <a:lnRef idx="1">
+            <a:schemeClr val="accent1"/>
+          </a:lnRef>
+          <a:fillRef idx="3">
+            <a:schemeClr val="accent1"/>
+          </a:fillRef>
+          <a:effectRef idx="2">
+            <a:schemeClr val="accent1"/>
+          </a:effectRef>
+          <a:fontRef idx="minor">
+            <a:schemeClr val="lt1"/>
+          </a:fontRef>
+        </p:style>
+        <p:txBody>
+          <a:bodyPr wrap="square" lIns="45720" tIns="27432" rIns="45720" bIns="27432" rtlCol="0" anchor="ctr"/>
+          <a:lstStyle/>
+          <a:p>
+            <a:pPr algn="ctr"/>
+            <a:r>
+              <a:rPr sz="2000" b="1" i="0">
+                <a:solidFill>
+                  <a:srgbClr val="FFFFFF"/>
+                </a:solidFill>
+                <a:latin typeface="Calibri"/>
+              </a:rPr>
+              <a:t>M1</a:t>
+            </a:r>
+          </a:p>
+        </p:txBody>
+      </p:sp>
+      <p:sp>
+        <p:nvSpPr>
+          <p:cNvPr id="11" name="Rounded Rectangle 10"/>
+          <p:cNvSpPr/>
+          <p:nvPr/>
+        </p:nvSpPr>
+        <p:spPr>
+          <a:xfrm>
+            <a:off x="502920" y="3584448"/>
+            <a:ext cx="2149388" cy="2011680"/>
           </a:xfrm>
           <a:prstGeom prst="roundRect">
             <a:avLst/>
@@ -9067,7 +8792,7 @@
           </a:fontRef>
         </p:style>
         <p:txBody>
-          <a:bodyPr rtlCol="0" anchor="ctr" lIns="45720" rIns="45720" tIns="27432" bIns="27432" wrap="square"/>
+          <a:bodyPr wrap="square" tIns="27432" bIns="27432" rtlCol="0" anchor="ctr"/>
           <a:lstStyle/>
           <a:p>
             <a:pPr algn="ctr"/>
@@ -9078,12 +8803,16 @@
                 </a:solidFill>
                 <a:latin typeface="Calibri"/>
               </a:rPr>
-              <a:t>
-Encode</a:t>
-            </a:r>
-          </a:p>
-          <a:p>
-            <a:pPr algn="ctr"/>
+              <a:t>Residual
+prototype</a:t>
+            </a:r>
+          </a:p>
+          <a:p>
+            <a:pPr algn="ctr">
+              <a:spcBef>
+                <a:spcPts val="600"/>
+              </a:spcBef>
+            </a:pPr>
             <a:r>
               <a:rPr sz="1000" b="0" i="1">
                 <a:solidFill>
@@ -9091,78 +8820,23 @@
                 </a:solidFill>
                 <a:latin typeface="Calibri"/>
               </a:rPr>
-              <a:t>MPNN → {h_i}</a:t>
-            </a:r>
-          </a:p>
-        </p:txBody>
-      </p:sp>
-      <p:sp>
-        <p:nvSpPr>
-          <p:cNvPr id="9" name="Oval 8"/>
+              <a:t>α c_enc + (1−α) c_gnn</a:t>
+            </a:r>
+          </a:p>
+        </p:txBody>
+      </p:sp>
+      <p:sp>
+        <p:nvSpPr>
+          <p:cNvPr id="12" name="Rounded Rectangle 11"/>
           <p:cNvSpPr/>
           <p:nvPr/>
         </p:nvSpPr>
         <p:spPr>
           <a:xfrm>
-            <a:off x="1069314" y="3726180"/>
-            <a:ext cx="502920" cy="502920"/>
-          </a:xfrm>
-          <a:prstGeom prst="ellipse">
-            <a:avLst/>
-          </a:prstGeom>
-          <a:solidFill>
-            <a:srgbClr val="1E2761"/>
-          </a:solidFill>
-          <a:ln w="15240">
-            <a:solidFill>
-              <a:srgbClr val="FFFFFF"/>
-            </a:solidFill>
-          </a:ln>
-          <a:effectLst/>
-        </p:spPr>
-        <p:style>
-          <a:lnRef idx="1">
-            <a:schemeClr val="accent1"/>
-          </a:lnRef>
-          <a:fillRef idx="3">
-            <a:schemeClr val="accent1"/>
-          </a:fillRef>
-          <a:effectRef idx="2">
-            <a:schemeClr val="accent1"/>
-          </a:effectRef>
-          <a:fontRef idx="minor">
-            <a:schemeClr val="lt1"/>
-          </a:fontRef>
-        </p:style>
-        <p:txBody>
-          <a:bodyPr rtlCol="0" anchor="ctr" lIns="45720" rIns="45720" tIns="27432" bIns="27432" wrap="square"/>
-          <a:lstStyle/>
-          <a:p>
-            <a:pPr algn="ctr"/>
-            <a:r>
-              <a:rPr sz="1600" b="1" i="0">
-                <a:solidFill>
-                  <a:srgbClr val="FFFFFF"/>
-                </a:solidFill>
-                <a:latin typeface="Calibri"/>
-              </a:rPr>
-              <a:t>1</a:t>
-            </a:r>
-          </a:p>
-        </p:txBody>
-      </p:sp>
-      <p:sp>
-        <p:nvSpPr>
-          <p:cNvPr id="10" name="Right Arrow 9"/>
-          <p:cNvSpPr/>
-          <p:nvPr/>
-        </p:nvSpPr>
-        <p:spPr>
-          <a:xfrm>
-            <a:off x="2156917" y="4663440"/>
-            <a:ext cx="237744" cy="274320"/>
-          </a:xfrm>
-          <a:prstGeom prst="rightArrow">
+            <a:off x="2762036" y="2926080"/>
+            <a:ext cx="2149388" cy="594360"/>
+          </a:xfrm>
+          <a:prstGeom prst="roundRect">
             <a:avLst/>
           </a:prstGeom>
           <a:solidFill>
@@ -9188,23 +8862,32 @@
           </a:fontRef>
         </p:style>
         <p:txBody>
-          <a:bodyPr rtlCol="0" anchor="ctr" lIns="45720" rIns="45720" tIns="27432" bIns="27432" wrap="square"/>
+          <a:bodyPr wrap="square" lIns="45720" tIns="27432" rIns="45720" bIns="27432" rtlCol="0" anchor="ctr"/>
           <a:lstStyle/>
           <a:p>
             <a:pPr algn="ctr"/>
-          </a:p>
-        </p:txBody>
-      </p:sp>
-      <p:sp>
-        <p:nvSpPr>
-          <p:cNvPr id="11" name="Rounded Rectangle 10"/>
+            <a:r>
+              <a:rPr sz="2000" b="1" i="0">
+                <a:solidFill>
+                  <a:srgbClr val="FFFFFF"/>
+                </a:solidFill>
+                <a:latin typeface="Calibri"/>
+              </a:rPr>
+              <a:t>M2</a:t>
+            </a:r>
+          </a:p>
+        </p:txBody>
+      </p:sp>
+      <p:sp>
+        <p:nvSpPr>
+          <p:cNvPr id="13" name="Rounded Rectangle 12"/>
           <p:cNvSpPr/>
           <p:nvPr/>
         </p:nvSpPr>
         <p:spPr>
           <a:xfrm>
-            <a:off x="2412949" y="3977640"/>
-            <a:ext cx="1635709" cy="1965960"/>
+            <a:off x="2762036" y="3584448"/>
+            <a:ext cx="2149388" cy="2011680"/>
           </a:xfrm>
           <a:prstGeom prst="roundRect">
             <a:avLst/>
@@ -9232,7 +8915,7 @@
           </a:fontRef>
         </p:style>
         <p:txBody>
-          <a:bodyPr rtlCol="0" anchor="ctr" lIns="45720" rIns="45720" tIns="27432" bIns="27432" wrap="square"/>
+          <a:bodyPr wrap="square" tIns="27432" bIns="27432" rtlCol="0" anchor="ctr"/>
           <a:lstStyle/>
           <a:p>
             <a:pPr algn="ctr"/>
@@ -9243,12 +8926,16 @@
                 </a:solidFill>
                 <a:latin typeface="Calibri"/>
               </a:rPr>
-              <a:t>
-Affinity</a:t>
-            </a:r>
-          </a:p>
-          <a:p>
-            <a:pPr algn="ctr"/>
+              <a:t>Shallower
+meta-GNN</a:t>
+            </a:r>
+          </a:p>
+          <a:p>
+            <a:pPr algn="ctr">
+              <a:spcBef>
+                <a:spcPts val="600"/>
+              </a:spcBef>
+            </a:pPr>
             <a:r>
               <a:rPr sz="1000" b="0" i="1">
                 <a:solidFill>
@@ -9256,78 +8943,23 @@
                 </a:solidFill>
                 <a:latin typeface="Calibri"/>
               </a:rPr>
-              <a:t>W = g(h_i, h_j)</a:t>
-            </a:r>
-          </a:p>
-        </p:txBody>
-      </p:sp>
-      <p:sp>
-        <p:nvSpPr>
-          <p:cNvPr id="12" name="Oval 11"/>
+              <a:t>1-layer GAT</a:t>
+            </a:r>
+          </a:p>
+        </p:txBody>
+      </p:sp>
+      <p:sp>
+        <p:nvSpPr>
+          <p:cNvPr id="14" name="Rounded Rectangle 13"/>
           <p:cNvSpPr/>
           <p:nvPr/>
         </p:nvSpPr>
         <p:spPr>
           <a:xfrm>
-            <a:off x="2979343" y="3726180"/>
-            <a:ext cx="502920" cy="502920"/>
-          </a:xfrm>
-          <a:prstGeom prst="ellipse">
-            <a:avLst/>
-          </a:prstGeom>
-          <a:solidFill>
-            <a:srgbClr val="F96167"/>
-          </a:solidFill>
-          <a:ln w="15240">
-            <a:solidFill>
-              <a:srgbClr val="FFFFFF"/>
-            </a:solidFill>
-          </a:ln>
-          <a:effectLst/>
-        </p:spPr>
-        <p:style>
-          <a:lnRef idx="1">
-            <a:schemeClr val="accent1"/>
-          </a:lnRef>
-          <a:fillRef idx="3">
-            <a:schemeClr val="accent1"/>
-          </a:fillRef>
-          <a:effectRef idx="2">
-            <a:schemeClr val="accent1"/>
-          </a:effectRef>
-          <a:fontRef idx="minor">
-            <a:schemeClr val="lt1"/>
-          </a:fontRef>
-        </p:style>
-        <p:txBody>
-          <a:bodyPr rtlCol="0" anchor="ctr" lIns="45720" rIns="45720" tIns="27432" bIns="27432" wrap="square"/>
-          <a:lstStyle/>
-          <a:p>
-            <a:pPr algn="ctr"/>
-            <a:r>
-              <a:rPr sz="1600" b="1" i="0">
-                <a:solidFill>
-                  <a:srgbClr val="FFFFFF"/>
-                </a:solidFill>
-                <a:latin typeface="Calibri"/>
-              </a:rPr>
-              <a:t>2</a:t>
-            </a:r>
-          </a:p>
-        </p:txBody>
-      </p:sp>
-      <p:sp>
-        <p:nvSpPr>
-          <p:cNvPr id="13" name="Right Arrow 12"/>
-          <p:cNvSpPr/>
-          <p:nvPr/>
-        </p:nvSpPr>
-        <p:spPr>
-          <a:xfrm>
-            <a:off x="4066946" y="4663440"/>
-            <a:ext cx="237744" cy="274320"/>
-          </a:xfrm>
-          <a:prstGeom prst="rightArrow">
+            <a:off x="5021153" y="2926080"/>
+            <a:ext cx="2149388" cy="594360"/>
+          </a:xfrm>
+          <a:prstGeom prst="roundRect">
             <a:avLst/>
           </a:prstGeom>
           <a:solidFill>
@@ -9353,23 +8985,32 @@
           </a:fontRef>
         </p:style>
         <p:txBody>
-          <a:bodyPr rtlCol="0" anchor="ctr" lIns="45720" rIns="45720" tIns="27432" bIns="27432" wrap="square"/>
+          <a:bodyPr wrap="square" lIns="45720" tIns="27432" rIns="45720" bIns="27432" rtlCol="0" anchor="ctr"/>
           <a:lstStyle/>
           <a:p>
             <a:pPr algn="ctr"/>
-          </a:p>
-        </p:txBody>
-      </p:sp>
-      <p:sp>
-        <p:nvSpPr>
-          <p:cNvPr id="14" name="Rounded Rectangle 13"/>
+            <a:r>
+              <a:rPr sz="2000" b="1" i="0">
+                <a:solidFill>
+                  <a:srgbClr val="FFFFFF"/>
+                </a:solidFill>
+                <a:latin typeface="Calibri"/>
+              </a:rPr>
+              <a:t>M3</a:t>
+            </a:r>
+          </a:p>
+        </p:txBody>
+      </p:sp>
+      <p:sp>
+        <p:nvSpPr>
+          <p:cNvPr id="15" name="Rounded Rectangle 14"/>
           <p:cNvSpPr/>
           <p:nvPr/>
         </p:nvSpPr>
         <p:spPr>
           <a:xfrm>
-            <a:off x="4322978" y="3977640"/>
-            <a:ext cx="1635709" cy="1965960"/>
+            <a:off x="5021153" y="3584448"/>
+            <a:ext cx="2149388" cy="2011680"/>
           </a:xfrm>
           <a:prstGeom prst="roundRect">
             <a:avLst/>
@@ -9397,7 +9038,7 @@
           </a:fontRef>
         </p:style>
         <p:txBody>
-          <a:bodyPr rtlCol="0" anchor="ctr" lIns="45720" rIns="45720" tIns="27432" bIns="27432" wrap="square"/>
+          <a:bodyPr wrap="square" tIns="27432" bIns="27432" rtlCol="0" anchor="ctr"/>
           <a:lstStyle/>
           <a:p>
             <a:pPr algn="ctr"/>
@@ -9408,12 +9049,16 @@
                 </a:solidFill>
                 <a:latin typeface="Calibri"/>
               </a:rPr>
-              <a:t>
-kNN sparsify</a:t>
-            </a:r>
-          </a:p>
-          <a:p>
-            <a:pPr algn="ctr"/>
+              <a:t>Bipartite
+messaging</a:t>
+            </a:r>
+          </a:p>
+          <a:p>
+            <a:pPr algn="ctr">
+              <a:spcBef>
+                <a:spcPts val="600"/>
+              </a:spcBef>
+            </a:pPr>
             <a:r>
               <a:rPr sz="1000" b="0" i="1">
                 <a:solidFill>
@@ -9421,32 +9066,30 @@
                 </a:solidFill>
                 <a:latin typeface="Calibri"/>
               </a:rPr>
-              <a:t>top-k edges</a:t>
-            </a:r>
-          </a:p>
-        </p:txBody>
-      </p:sp>
-      <p:sp>
-        <p:nvSpPr>
-          <p:cNvPr id="15" name="Oval 14"/>
+              <a:t>mask query → * edges</a:t>
+            </a:r>
+          </a:p>
+        </p:txBody>
+      </p:sp>
+      <p:sp>
+        <p:nvSpPr>
+          <p:cNvPr id="16" name="Rounded Rectangle 15"/>
           <p:cNvSpPr/>
           <p:nvPr/>
         </p:nvSpPr>
         <p:spPr>
           <a:xfrm>
-            <a:off x="4889372" y="3726180"/>
-            <a:ext cx="502920" cy="502920"/>
-          </a:xfrm>
-          <a:prstGeom prst="ellipse">
+            <a:off x="7280269" y="2926080"/>
+            <a:ext cx="2149388" cy="594360"/>
+          </a:xfrm>
+          <a:prstGeom prst="roundRect">
             <a:avLst/>
           </a:prstGeom>
           <a:solidFill>
-            <a:srgbClr val="1E2761"/>
+            <a:srgbClr val="F96167"/>
           </a:solidFill>
-          <a:ln w="15240">
-            <a:solidFill>
-              <a:srgbClr val="FFFFFF"/>
-            </a:solidFill>
+          <a:ln>
+            <a:noFill/>
           </a:ln>
           <a:effectLst/>
         </p:spPr>
@@ -9465,63 +9108,19 @@
           </a:fontRef>
         </p:style>
         <p:txBody>
-          <a:bodyPr rtlCol="0" anchor="ctr" lIns="45720" rIns="45720" tIns="27432" bIns="27432" wrap="square"/>
+          <a:bodyPr wrap="square" lIns="45720" tIns="27432" rIns="45720" bIns="27432" rtlCol="0" anchor="ctr"/>
           <a:lstStyle/>
           <a:p>
             <a:pPr algn="ctr"/>
             <a:r>
-              <a:rPr sz="1600" b="1" i="0">
+              <a:rPr sz="2000" b="1" i="0">
                 <a:solidFill>
                   <a:srgbClr val="FFFFFF"/>
                 </a:solidFill>
                 <a:latin typeface="Calibri"/>
               </a:rPr>
-              <a:t>3</a:t>
-            </a:r>
-          </a:p>
-        </p:txBody>
-      </p:sp>
-      <p:sp>
-        <p:nvSpPr>
-          <p:cNvPr id="16" name="Right Arrow 15"/>
-          <p:cNvSpPr/>
-          <p:nvPr/>
-        </p:nvSpPr>
-        <p:spPr>
-          <a:xfrm>
-            <a:off x="5976975" y="4663440"/>
-            <a:ext cx="237744" cy="274320"/>
-          </a:xfrm>
-          <a:prstGeom prst="rightArrow">
-            <a:avLst/>
-          </a:prstGeom>
-          <a:solidFill>
-            <a:srgbClr val="1E2761"/>
-          </a:solidFill>
-          <a:ln>
-            <a:noFill/>
-          </a:ln>
-          <a:effectLst/>
-        </p:spPr>
-        <p:style>
-          <a:lnRef idx="1">
-            <a:schemeClr val="accent1"/>
-          </a:lnRef>
-          <a:fillRef idx="3">
-            <a:schemeClr val="accent1"/>
-          </a:fillRef>
-          <a:effectRef idx="2">
-            <a:schemeClr val="accent1"/>
-          </a:effectRef>
-          <a:fontRef idx="minor">
-            <a:schemeClr val="lt1"/>
-          </a:fontRef>
-        </p:style>
-        <p:txBody>
-          <a:bodyPr rtlCol="0" anchor="ctr" lIns="45720" rIns="45720" tIns="27432" bIns="27432" wrap="square"/>
-          <a:lstStyle/>
-          <a:p>
-            <a:pPr algn="ctr"/>
+              <a:t>M4</a:t>
+            </a:r>
           </a:p>
         </p:txBody>
       </p:sp>
@@ -9533,8 +9132,8 @@
         </p:nvSpPr>
         <p:spPr>
           <a:xfrm>
-            <a:off x="6233007" y="3977640"/>
-            <a:ext cx="1635709" cy="1965960"/>
+            <a:off x="7280269" y="3584448"/>
+            <a:ext cx="2149388" cy="2011680"/>
           </a:xfrm>
           <a:prstGeom prst="roundRect">
             <a:avLst/>
@@ -9562,7 +9161,7 @@
           </a:fontRef>
         </p:style>
         <p:txBody>
-          <a:bodyPr rtlCol="0" anchor="ctr" lIns="45720" rIns="45720" tIns="27432" bIns="27432" wrap="square"/>
+          <a:bodyPr wrap="square" tIns="27432" bIns="27432" rtlCol="0" anchor="ctr"/>
           <a:lstStyle/>
           <a:p>
             <a:pPr algn="ctr"/>
@@ -9573,12 +9172,16 @@
                 </a:solidFill>
                 <a:latin typeface="Calibri"/>
               </a:rPr>
-              <a:t>
-Inject labels</a:t>
-            </a:r>
-          </a:p>
-          <a:p>
-            <a:pPr algn="ctr"/>
+              <a:t>Contrastive
+aux loss</a:t>
+            </a:r>
+          </a:p>
+          <a:p>
+            <a:pPr algn="ctr">
+              <a:spcBef>
+                <a:spcPts val="600"/>
+              </a:spcBef>
+            </a:pPr>
             <a:r>
               <a:rPr sz="1000" b="0" i="1">
                 <a:solidFill>
@@ -9586,32 +9189,30 @@
                 </a:solidFill>
                 <a:latin typeface="Calibri"/>
               </a:rPr>
-              <a:t>one-hot support</a:t>
-            </a:r>
-          </a:p>
-        </p:txBody>
-      </p:sp>
-      <p:sp>
-        <p:nvSpPr>
-          <p:cNvPr id="18" name="Oval 17"/>
+              <a:t>InfoNCE support–query</a:t>
+            </a:r>
+          </a:p>
+        </p:txBody>
+      </p:sp>
+      <p:sp>
+        <p:nvSpPr>
+          <p:cNvPr id="18" name="Rounded Rectangle 17"/>
           <p:cNvSpPr/>
           <p:nvPr/>
         </p:nvSpPr>
         <p:spPr>
           <a:xfrm>
-            <a:off x="6799402" y="3726180"/>
-            <a:ext cx="502920" cy="502920"/>
-          </a:xfrm>
-          <a:prstGeom prst="ellipse">
+            <a:off x="9539386" y="2926080"/>
+            <a:ext cx="2149388" cy="594360"/>
+          </a:xfrm>
+          <a:prstGeom prst="roundRect">
             <a:avLst/>
           </a:prstGeom>
           <a:solidFill>
             <a:srgbClr val="F96167"/>
           </a:solidFill>
-          <a:ln w="15240">
-            <a:solidFill>
-              <a:srgbClr val="FFFFFF"/>
-            </a:solidFill>
+          <a:ln>
+            <a:noFill/>
           </a:ln>
           <a:effectLst/>
         </p:spPr>
@@ -9630,76 +9231,32 @@
           </a:fontRef>
         </p:style>
         <p:txBody>
-          <a:bodyPr rtlCol="0" anchor="ctr" lIns="45720" rIns="45720" tIns="27432" bIns="27432" wrap="square"/>
+          <a:bodyPr wrap="square" lIns="45720" tIns="27432" rIns="45720" bIns="27432" rtlCol="0" anchor="ctr"/>
           <a:lstStyle/>
           <a:p>
             <a:pPr algn="ctr"/>
             <a:r>
-              <a:rPr sz="1600" b="1" i="0">
+              <a:rPr sz="2000" b="1" i="0">
                 <a:solidFill>
                   <a:srgbClr val="FFFFFF"/>
                 </a:solidFill>
                 <a:latin typeface="Calibri"/>
               </a:rPr>
-              <a:t>4</a:t>
-            </a:r>
-          </a:p>
-        </p:txBody>
-      </p:sp>
-      <p:sp>
-        <p:nvSpPr>
-          <p:cNvPr id="19" name="Right Arrow 18"/>
+              <a:t>M5</a:t>
+            </a:r>
+          </a:p>
+        </p:txBody>
+      </p:sp>
+      <p:sp>
+        <p:nvSpPr>
+          <p:cNvPr id="19" name="Rounded Rectangle 18"/>
           <p:cNvSpPr/>
           <p:nvPr/>
         </p:nvSpPr>
         <p:spPr>
           <a:xfrm>
-            <a:off x="7887004" y="4663440"/>
-            <a:ext cx="237744" cy="274320"/>
-          </a:xfrm>
-          <a:prstGeom prst="rightArrow">
-            <a:avLst/>
-          </a:prstGeom>
-          <a:solidFill>
-            <a:srgbClr val="1E2761"/>
-          </a:solidFill>
-          <a:ln>
-            <a:noFill/>
-          </a:ln>
-          <a:effectLst/>
-        </p:spPr>
-        <p:style>
-          <a:lnRef idx="1">
-            <a:schemeClr val="accent1"/>
-          </a:lnRef>
-          <a:fillRef idx="3">
-            <a:schemeClr val="accent1"/>
-          </a:fillRef>
-          <a:effectRef idx="2">
-            <a:schemeClr val="accent1"/>
-          </a:effectRef>
-          <a:fontRef idx="minor">
-            <a:schemeClr val="lt1"/>
-          </a:fontRef>
-        </p:style>
-        <p:txBody>
-          <a:bodyPr rtlCol="0" anchor="ctr" lIns="45720" rIns="45720" tIns="27432" bIns="27432" wrap="square"/>
-          <a:lstStyle/>
-          <a:p>
-            <a:pPr algn="ctr"/>
-          </a:p>
-        </p:txBody>
-      </p:sp>
-      <p:sp>
-        <p:nvSpPr>
-          <p:cNvPr id="20" name="Rounded Rectangle 19"/>
-          <p:cNvSpPr/>
-          <p:nvPr/>
-        </p:nvSpPr>
-        <p:spPr>
-          <a:xfrm>
-            <a:off x="8143036" y="3977640"/>
-            <a:ext cx="1635709" cy="1965960"/>
+            <a:off x="9539386" y="3584448"/>
+            <a:ext cx="2149388" cy="2011680"/>
           </a:xfrm>
           <a:prstGeom prst="roundRect">
             <a:avLst/>
@@ -9727,7 +9284,7 @@
           </a:fontRef>
         </p:style>
         <p:txBody>
-          <a:bodyPr rtlCol="0" anchor="ctr" lIns="45720" rIns="45720" tIns="27432" bIns="27432" wrap="square"/>
+          <a:bodyPr wrap="square" tIns="27432" bIns="27432" rtlCol="0" anchor="ctr"/>
           <a:lstStyle/>
           <a:p>
             <a:pPr algn="ctr"/>
@@ -9738,12 +9295,16 @@
                 </a:solidFill>
                 <a:latin typeface="Calibri"/>
               </a:rPr>
-              <a:t>
-Meta-GNN</a:t>
-            </a:r>
-          </a:p>
-          <a:p>
-            <a:pPr algn="ctr"/>
+              <a:t>SSL
+pretraining</a:t>
+            </a:r>
+          </a:p>
+          <a:p>
+            <a:pPr algn="ctr">
+              <a:spcBef>
+                <a:spcPts val="600"/>
+              </a:spcBef>
+            </a:pPr>
             <a:r>
               <a:rPr sz="1000" b="0" i="1">
                 <a:solidFill>
@@ -9751,241 +9312,21 @@
                 </a:solidFill>
                 <a:latin typeface="Calibri"/>
               </a:rPr>
-              <a:t>weighted GCN</a:t>
-            </a:r>
-          </a:p>
-        </p:txBody>
-      </p:sp>
-      <p:sp>
-        <p:nvSpPr>
-          <p:cNvPr id="21" name="Oval 20"/>
+              <a:t>MolCLR encoder init</a:t>
+            </a:r>
+          </a:p>
+        </p:txBody>
+      </p:sp>
+      <p:sp>
+        <p:nvSpPr>
+          <p:cNvPr id="20" name="Rounded Rectangle 19"/>
           <p:cNvSpPr/>
           <p:nvPr/>
         </p:nvSpPr>
         <p:spPr>
           <a:xfrm>
-            <a:off x="8709431" y="3726180"/>
-            <a:ext cx="502920" cy="502920"/>
-          </a:xfrm>
-          <a:prstGeom prst="ellipse">
-            <a:avLst/>
-          </a:prstGeom>
-          <a:solidFill>
-            <a:srgbClr val="1E2761"/>
-          </a:solidFill>
-          <a:ln w="15240">
-            <a:solidFill>
-              <a:srgbClr val="FFFFFF"/>
-            </a:solidFill>
-          </a:ln>
-          <a:effectLst/>
-        </p:spPr>
-        <p:style>
-          <a:lnRef idx="1">
-            <a:schemeClr val="accent1"/>
-          </a:lnRef>
-          <a:fillRef idx="3">
-            <a:schemeClr val="accent1"/>
-          </a:fillRef>
-          <a:effectRef idx="2">
-            <a:schemeClr val="accent1"/>
-          </a:effectRef>
-          <a:fontRef idx="minor">
-            <a:schemeClr val="lt1"/>
-          </a:fontRef>
-        </p:style>
-        <p:txBody>
-          <a:bodyPr rtlCol="0" anchor="ctr" lIns="45720" rIns="45720" tIns="27432" bIns="27432" wrap="square"/>
-          <a:lstStyle/>
-          <a:p>
-            <a:pPr algn="ctr"/>
-            <a:r>
-              <a:rPr sz="1600" b="1" i="0">
-                <a:solidFill>
-                  <a:srgbClr val="FFFFFF"/>
-                </a:solidFill>
-                <a:latin typeface="Calibri"/>
-              </a:rPr>
-              <a:t>5</a:t>
-            </a:r>
-          </a:p>
-        </p:txBody>
-      </p:sp>
-      <p:sp>
-        <p:nvSpPr>
-          <p:cNvPr id="22" name="Right Arrow 21"/>
-          <p:cNvSpPr/>
-          <p:nvPr/>
-        </p:nvSpPr>
-        <p:spPr>
-          <a:xfrm>
-            <a:off x="9797033" y="4663440"/>
-            <a:ext cx="237744" cy="274320"/>
-          </a:xfrm>
-          <a:prstGeom prst="rightArrow">
-            <a:avLst/>
-          </a:prstGeom>
-          <a:solidFill>
-            <a:srgbClr val="1E2761"/>
-          </a:solidFill>
-          <a:ln>
-            <a:noFill/>
-          </a:ln>
-          <a:effectLst/>
-        </p:spPr>
-        <p:style>
-          <a:lnRef idx="1">
-            <a:schemeClr val="accent1"/>
-          </a:lnRef>
-          <a:fillRef idx="3">
-            <a:schemeClr val="accent1"/>
-          </a:fillRef>
-          <a:effectRef idx="2">
-            <a:schemeClr val="accent1"/>
-          </a:effectRef>
-          <a:fontRef idx="minor">
-            <a:schemeClr val="lt1"/>
-          </a:fontRef>
-        </p:style>
-        <p:txBody>
-          <a:bodyPr rtlCol="0" anchor="ctr" lIns="45720" rIns="45720" tIns="27432" bIns="27432" wrap="square"/>
-          <a:lstStyle/>
-          <a:p>
-            <a:pPr algn="ctr"/>
-          </a:p>
-        </p:txBody>
-      </p:sp>
-      <p:sp>
-        <p:nvSpPr>
-          <p:cNvPr id="23" name="Rounded Rectangle 22"/>
-          <p:cNvSpPr/>
-          <p:nvPr/>
-        </p:nvSpPr>
-        <p:spPr>
-          <a:xfrm>
-            <a:off x="10053065" y="3977640"/>
-            <a:ext cx="1635709" cy="1965960"/>
-          </a:xfrm>
-          <a:prstGeom prst="roundRect">
-            <a:avLst/>
-          </a:prstGeom>
-          <a:solidFill>
-            <a:srgbClr val="F5F7FA"/>
-          </a:solidFill>
-          <a:ln>
-            <a:noFill/>
-          </a:ln>
-          <a:effectLst/>
-        </p:spPr>
-        <p:style>
-          <a:lnRef idx="1">
-            <a:schemeClr val="accent1"/>
-          </a:lnRef>
-          <a:fillRef idx="3">
-            <a:schemeClr val="accent1"/>
-          </a:fillRef>
-          <a:effectRef idx="2">
-            <a:schemeClr val="accent1"/>
-          </a:effectRef>
-          <a:fontRef idx="minor">
-            <a:schemeClr val="lt1"/>
-          </a:fontRef>
-        </p:style>
-        <p:txBody>
-          <a:bodyPr rtlCol="0" anchor="ctr" lIns="45720" rIns="45720" tIns="27432" bIns="27432" wrap="square"/>
-          <a:lstStyle/>
-          <a:p>
-            <a:pPr algn="ctr"/>
-            <a:r>
-              <a:rPr sz="1200" b="1" i="0">
-                <a:solidFill>
-                  <a:srgbClr val="1E2761"/>
-                </a:solidFill>
-                <a:latin typeface="Calibri"/>
-              </a:rPr>
-              <a:t>
-Prototype head</a:t>
-            </a:r>
-          </a:p>
-          <a:p>
-            <a:pPr algn="ctr"/>
-            <a:r>
-              <a:rPr sz="1000" b="0" i="1">
-                <a:solidFill>
-                  <a:srgbClr val="36454F"/>
-                </a:solidFill>
-                <a:latin typeface="Calibri"/>
-              </a:rPr>
-              <a:t>d(z_q, c_n)</a:t>
-            </a:r>
-          </a:p>
-        </p:txBody>
-      </p:sp>
-      <p:sp>
-        <p:nvSpPr>
-          <p:cNvPr id="24" name="Oval 23"/>
-          <p:cNvSpPr/>
-          <p:nvPr/>
-        </p:nvSpPr>
-        <p:spPr>
-          <a:xfrm>
-            <a:off x="10619460" y="3726180"/>
-            <a:ext cx="502920" cy="502920"/>
-          </a:xfrm>
-          <a:prstGeom prst="ellipse">
-            <a:avLst/>
-          </a:prstGeom>
-          <a:solidFill>
-            <a:srgbClr val="F96167"/>
-          </a:solidFill>
-          <a:ln w="15240">
-            <a:solidFill>
-              <a:srgbClr val="FFFFFF"/>
-            </a:solidFill>
-          </a:ln>
-          <a:effectLst/>
-        </p:spPr>
-        <p:style>
-          <a:lnRef idx="1">
-            <a:schemeClr val="accent1"/>
-          </a:lnRef>
-          <a:fillRef idx="3">
-            <a:schemeClr val="accent1"/>
-          </a:fillRef>
-          <a:effectRef idx="2">
-            <a:schemeClr val="accent1"/>
-          </a:effectRef>
-          <a:fontRef idx="minor">
-            <a:schemeClr val="lt1"/>
-          </a:fontRef>
-        </p:style>
-        <p:txBody>
-          <a:bodyPr rtlCol="0" anchor="ctr" lIns="45720" rIns="45720" tIns="27432" bIns="27432" wrap="square"/>
-          <a:lstStyle/>
-          <a:p>
-            <a:pPr algn="ctr"/>
-            <a:r>
-              <a:rPr sz="1600" b="1" i="0">
-                <a:solidFill>
-                  <a:srgbClr val="FFFFFF"/>
-                </a:solidFill>
-                <a:latin typeface="Calibri"/>
-              </a:rPr>
-              <a:t>6</a:t>
-            </a:r>
-          </a:p>
-        </p:txBody>
-      </p:sp>
-      <p:sp>
-        <p:nvSpPr>
-          <p:cNvPr id="25" name="Rounded Rectangle 24"/>
-          <p:cNvSpPr/>
-          <p:nvPr/>
-        </p:nvSpPr>
-        <p:spPr>
-          <a:xfrm>
-            <a:off x="502920" y="6126480"/>
-            <a:ext cx="11185855" cy="457200"/>
+            <a:off x="502920" y="5760720"/>
+            <a:ext cx="11185855" cy="731520"/>
           </a:xfrm>
           <a:prstGeom prst="roundRect">
             <a:avLst/>
@@ -10013,18 +9354,18 @@
           </a:fontRef>
         </p:style>
         <p:txBody>
-          <a:bodyPr rtlCol="0" anchor="ctr" lIns="45720" rIns="45720" tIns="27432" bIns="27432" wrap="square"/>
+          <a:bodyPr wrap="square" lIns="45720" tIns="27432" rIns="45720" bIns="27432" rtlCol="0" anchor="ctr"/>
           <a:lstStyle/>
           <a:p>
             <a:pPr algn="ctr"/>
             <a:r>
-              <a:rPr sz="1300" b="1" i="1">
+              <a:rPr sz="1400" b="1" i="1">
                 <a:solidFill>
                   <a:srgbClr val="1E2761"/>
                 </a:solidFill>
                 <a:latin typeface="Calibri"/>
               </a:rPr>
-              <a:t>Encoder φ, affinity g, and meta-GNN trained jointly end-to-end.</a:t>
+              <a:t>Safety net: α → 1 recovers ProtoNet.  Composed target: ≥ 0.76 at 5-way 5-shot (≈ +6 pp over ProtoNet).</a:t>
             </a:r>
           </a:p>
         </p:txBody>
@@ -10038,7 +9379,7 @@
 </file>
 
 <file path=ppt/slides/slide6.xml><?xml version="1.0" encoding="utf-8"?>
-<p:sld xmlns:a="http://schemas.openxmlformats.org/drawingml/2006/main" xmlns:p="http://schemas.openxmlformats.org/presentationml/2006/main" xmlns:r="http://schemas.openxmlformats.org/officeDocument/2006/relationships">
+<p:sld xmlns:a="http://schemas.openxmlformats.org/drawingml/2006/main" xmlns:r="http://schemas.openxmlformats.org/officeDocument/2006/relationships" xmlns:p="http://schemas.openxmlformats.org/presentationml/2006/main">
   <p:cSld>
     <p:bg>
       <p:bgPr>
@@ -10054,7 +9395,14 @@
         <p:cNvGrpSpPr/>
         <p:nvPr/>
       </p:nvGrpSpPr>
-      <p:grpSpPr/>
+      <p:grpSpPr>
+        <a:xfrm>
+          <a:off x="0" y="0"/>
+          <a:ext cx="0" cy="0"/>
+          <a:chOff x="0" y="0"/>
+          <a:chExt cx="0" cy="0"/>
+        </a:xfrm>
+      </p:grpSpPr>
       <p:sp>
         <p:nvSpPr>
           <p:cNvPr id="2" name="Rectangle 1"/>
@@ -10092,10 +9440,11 @@
           </a:fontRef>
         </p:style>
         <p:txBody>
-          <a:bodyPr rtlCol="0" anchor="ctr" lIns="45720" rIns="45720" tIns="27432" bIns="27432" wrap="square"/>
+          <a:bodyPr wrap="square" lIns="45720" tIns="27432" rIns="45720" bIns="27432" rtlCol="0" anchor="ctr"/>
           <a:lstStyle/>
           <a:p>
             <a:pPr algn="ctr"/>
+            <a:endParaRPr/>
           </a:p>
         </p:txBody>
       </p:sp>
@@ -10136,7 +9485,7 @@
           </a:fontRef>
         </p:style>
         <p:txBody>
-          <a:bodyPr rtlCol="0" anchor="ctr" lIns="45720" rIns="45720" tIns="27432" bIns="27432" wrap="square"/>
+          <a:bodyPr wrap="square" lIns="45720" tIns="27432" rIns="45720" bIns="27432" rtlCol="0" anchor="ctr"/>
           <a:lstStyle/>
           <a:p>
             <a:pPr algn="ctr"/>
@@ -10169,7 +9518,7 @@
           <a:noFill/>
         </p:spPr>
         <p:txBody>
-          <a:bodyPr wrap="square" lIns="45720" rIns="45720" tIns="27432" bIns="27432" anchor="t">
+          <a:bodyPr wrap="square" lIns="45720" tIns="27432" rIns="45720" bIns="27432" anchor="t">
             <a:spAutoFit/>
           </a:bodyPr>
           <a:lstStyle/>
@@ -10204,7 +9553,7 @@
           <a:noFill/>
         </p:spPr>
         <p:txBody>
-          <a:bodyPr wrap="square" lIns="45720" rIns="45720" tIns="27432" bIns="27432" anchor="t">
+          <a:bodyPr wrap="square" lIns="45720" tIns="27432" rIns="45720" bIns="27432" anchor="t">
             <a:spAutoFit/>
           </a:bodyPr>
           <a:lstStyle/>
@@ -10239,7 +9588,7 @@
           <a:noFill/>
         </p:spPr>
         <p:txBody>
-          <a:bodyPr wrap="square" lIns="45720" rIns="45720" tIns="27432" bIns="27432" anchor="t">
+          <a:bodyPr wrap="square" lIns="45720" tIns="27432" rIns="45720" bIns="27432" anchor="t">
             <a:spAutoFit/>
           </a:bodyPr>
           <a:lstStyle/>
@@ -10294,10 +9643,11 @@
           </a:fontRef>
         </p:style>
         <p:txBody>
-          <a:bodyPr rtlCol="0" anchor="ctr" lIns="45720" rIns="45720" tIns="27432" bIns="27432" wrap="square"/>
+          <a:bodyPr wrap="square" lIns="45720" tIns="27432" rIns="45720" bIns="27432" rtlCol="0" anchor="ctr"/>
           <a:lstStyle/>
           <a:p>
             <a:pPr algn="ctr"/>
+            <a:endParaRPr/>
           </a:p>
         </p:txBody>
       </p:sp>
@@ -10318,14 +9668,14 @@
           <a:noFill/>
         </p:spPr>
         <p:txBody>
-          <a:bodyPr wrap="square" lIns="45720" rIns="45720" tIns="27432" bIns="27432" anchor="t">
+          <a:bodyPr wrap="square" lIns="45720" tIns="27432" rIns="45720" bIns="27432" anchor="t">
             <a:spAutoFit/>
           </a:bodyPr>
           <a:lstStyle/>
           <a:p>
             <a:pPr algn="l"/>
             <a:r>
-              <a:rPr sz="1400" b="1" i="0">
+              <a:rPr sz="1400" b="1" i="0" dirty="0">
                 <a:solidFill>
                   <a:srgbClr val="1E2761"/>
                 </a:solidFill>
@@ -10508,7 +9858,7 @@
           <p:nvPr/>
         </p:nvPicPr>
         <p:blipFill>
-          <a:blip r:embed="rId2"/>
+          <a:blip r:embed="rId3"/>
           <a:stretch>
             <a:fillRect/>
           </a:stretch>
@@ -10560,10 +9910,11 @@
           </a:fontRef>
         </p:style>
         <p:txBody>
-          <a:bodyPr rtlCol="0" anchor="ctr" lIns="45720" rIns="45720" tIns="27432" bIns="27432" wrap="square"/>
+          <a:bodyPr wrap="square" lIns="45720" tIns="27432" rIns="45720" bIns="27432" rtlCol="0" anchor="ctr"/>
           <a:lstStyle/>
           <a:p>
             <a:pPr algn="ctr"/>
+            <a:endParaRPr/>
           </a:p>
         </p:txBody>
       </p:sp>
@@ -10584,7 +9935,7 @@
           <a:noFill/>
         </p:spPr>
         <p:txBody>
-          <a:bodyPr wrap="square" lIns="45720" rIns="45720" tIns="27432" bIns="27432" anchor="t">
+          <a:bodyPr wrap="square" lIns="45720" tIns="27432" rIns="45720" bIns="27432" anchor="t">
             <a:spAutoFit/>
           </a:bodyPr>
           <a:lstStyle/>
@@ -10619,7 +9970,7 @@
           <a:noFill/>
         </p:spPr>
         <p:txBody>
-          <a:bodyPr wrap="square" lIns="45720" rIns="45720" tIns="27432" bIns="27432" anchor="ctr">
+          <a:bodyPr wrap="square" lIns="45720" tIns="27432" rIns="45720" bIns="27432" anchor="ctr">
             <a:spAutoFit/>
           </a:bodyPr>
           <a:lstStyle/>
@@ -10640,65 +9991,6 @@
       <p:pic>
         <p:nvPicPr>
           <p:cNvPr id="14" name="Picture 13" descr="f13_1.png"/>
-          <p:cNvPicPr>
-            <a:picLocks noChangeAspect="1"/>
-          </p:cNvPicPr>
-          <p:nvPr/>
-        </p:nvPicPr>
-        <p:blipFill>
-          <a:blip r:embed="rId3"/>
-          <a:stretch>
-            <a:fillRect/>
-          </a:stretch>
-        </p:blipFill>
-        <p:spPr>
-          <a:xfrm>
-            <a:off x="5349240" y="2468880"/>
-            <a:ext cx="2377440" cy="337553"/>
-          </a:xfrm>
-          <a:prstGeom prst="rect">
-            <a:avLst/>
-          </a:prstGeom>
-        </p:spPr>
-      </p:pic>
-      <p:sp>
-        <p:nvSpPr>
-          <p:cNvPr id="15" name="TextBox 14"/>
-          <p:cNvSpPr txBox="1"/>
-          <p:nvPr/>
-        </p:nvSpPr>
-        <p:spPr>
-          <a:xfrm>
-            <a:off x="4434840" y="3246120"/>
-            <a:ext cx="1005840" cy="320040"/>
-          </a:xfrm>
-          <a:prstGeom prst="rect">
-            <a:avLst/>
-          </a:prstGeom>
-          <a:noFill/>
-        </p:spPr>
-        <p:txBody>
-          <a:bodyPr wrap="square" lIns="45720" rIns="45720" tIns="27432" bIns="27432" anchor="ctr">
-            <a:spAutoFit/>
-          </a:bodyPr>
-          <a:lstStyle/>
-          <a:p>
-            <a:pPr algn="l"/>
-            <a:r>
-              <a:rPr sz="1100" b="1" i="0">
-                <a:solidFill>
-                  <a:srgbClr val="F96167"/>
-                </a:solidFill>
-                <a:latin typeface="Calibri"/>
-              </a:rPr>
-              <a:t>bilinear</a:t>
-            </a:r>
-          </a:p>
-        </p:txBody>
-      </p:sp>
-      <p:pic>
-        <p:nvPicPr>
-          <p:cNvPr id="16" name="Picture 15" descr="f13_2.png"/>
           <p:cNvPicPr>
             <a:picLocks noChangeAspect="1"/>
           </p:cNvPicPr>
@@ -10712,7 +10004,7 @@
         </p:blipFill>
         <p:spPr>
           <a:xfrm>
-            <a:off x="5349240" y="3246120"/>
+            <a:off x="5349240" y="2468880"/>
             <a:ext cx="2377440" cy="337553"/>
           </a:xfrm>
           <a:prstGeom prst="rect">
@@ -10722,13 +10014,13 @@
       </p:pic>
       <p:sp>
         <p:nvSpPr>
-          <p:cNvPr id="17" name="TextBox 16"/>
+          <p:cNvPr id="15" name="TextBox 14"/>
           <p:cNvSpPr txBox="1"/>
           <p:nvPr/>
         </p:nvSpPr>
         <p:spPr>
           <a:xfrm>
-            <a:off x="4434840" y="4023360"/>
+            <a:off x="4434840" y="3246120"/>
             <a:ext cx="1005840" cy="320040"/>
           </a:xfrm>
           <a:prstGeom prst="rect">
@@ -10737,7 +10029,7 @@
           <a:noFill/>
         </p:spPr>
         <p:txBody>
-          <a:bodyPr wrap="square" lIns="45720" rIns="45720" tIns="27432" bIns="27432" anchor="ctr">
+          <a:bodyPr wrap="square" lIns="45720" tIns="27432" rIns="45720" bIns="27432" anchor="ctr">
             <a:spAutoFit/>
           </a:bodyPr>
           <a:lstStyle/>
@@ -10750,14 +10042,14 @@
                 </a:solidFill>
                 <a:latin typeface="Calibri"/>
               </a:rPr>
-              <a:t>attention</a:t>
+              <a:t>bilinear</a:t>
             </a:r>
           </a:p>
         </p:txBody>
       </p:sp>
       <p:pic>
         <p:nvPicPr>
-          <p:cNvPr id="18" name="Picture 17" descr="f13_3.png"/>
+          <p:cNvPr id="16" name="Picture 15" descr="f13_2.png"/>
           <p:cNvPicPr>
             <a:picLocks noChangeAspect="1"/>
           </p:cNvPicPr>
@@ -10771,6 +10063,65 @@
         </p:blipFill>
         <p:spPr>
           <a:xfrm>
+            <a:off x="5349240" y="3246120"/>
+            <a:ext cx="2377440" cy="337553"/>
+          </a:xfrm>
+          <a:prstGeom prst="rect">
+            <a:avLst/>
+          </a:prstGeom>
+        </p:spPr>
+      </p:pic>
+      <p:sp>
+        <p:nvSpPr>
+          <p:cNvPr id="17" name="TextBox 16"/>
+          <p:cNvSpPr txBox="1"/>
+          <p:nvPr/>
+        </p:nvSpPr>
+        <p:spPr>
+          <a:xfrm>
+            <a:off x="4434840" y="4023360"/>
+            <a:ext cx="1005840" cy="320040"/>
+          </a:xfrm>
+          <a:prstGeom prst="rect">
+            <a:avLst/>
+          </a:prstGeom>
+          <a:noFill/>
+        </p:spPr>
+        <p:txBody>
+          <a:bodyPr wrap="square" lIns="45720" tIns="27432" rIns="45720" bIns="27432" anchor="ctr">
+            <a:spAutoFit/>
+          </a:bodyPr>
+          <a:lstStyle/>
+          <a:p>
+            <a:pPr algn="l"/>
+            <a:r>
+              <a:rPr sz="1100" b="1" i="0">
+                <a:solidFill>
+                  <a:srgbClr val="F96167"/>
+                </a:solidFill>
+                <a:latin typeface="Calibri"/>
+              </a:rPr>
+              <a:t>attention</a:t>
+            </a:r>
+          </a:p>
+        </p:txBody>
+      </p:sp>
+      <p:pic>
+        <p:nvPicPr>
+          <p:cNvPr id="18" name="Picture 17" descr="f13_3.png"/>
+          <p:cNvPicPr>
+            <a:picLocks noChangeAspect="1"/>
+          </p:cNvPicPr>
+          <p:nvPr/>
+        </p:nvPicPr>
+        <p:blipFill>
+          <a:blip r:embed="rId6"/>
+          <a:stretch>
+            <a:fillRect/>
+          </a:stretch>
+        </p:blipFill>
+        <p:spPr>
+          <a:xfrm>
             <a:off x="5349240" y="4023360"/>
             <a:ext cx="2377440" cy="341195"/>
           </a:xfrm>
@@ -10796,7 +10147,7 @@
           <a:noFill/>
         </p:spPr>
         <p:txBody>
-          <a:bodyPr wrap="square" lIns="45720" rIns="45720" tIns="27432" bIns="27432" anchor="t">
+          <a:bodyPr wrap="square" lIns="45720" tIns="27432" rIns="45720" bIns="27432" anchor="t">
             <a:spAutoFit/>
           </a:bodyPr>
           <a:lstStyle/>
@@ -10851,10 +10202,11 @@
           </a:fontRef>
         </p:style>
         <p:txBody>
-          <a:bodyPr rtlCol="0" anchor="ctr" lIns="45720" rIns="45720" tIns="27432" bIns="27432" wrap="square"/>
+          <a:bodyPr wrap="square" lIns="45720" tIns="27432" rIns="45720" bIns="27432" rtlCol="0" anchor="ctr"/>
           <a:lstStyle/>
           <a:p>
             <a:pPr algn="ctr"/>
+            <a:endParaRPr/>
           </a:p>
         </p:txBody>
       </p:sp>
@@ -10875,7 +10227,7 @@
           <a:noFill/>
         </p:spPr>
         <p:txBody>
-          <a:bodyPr wrap="square" lIns="45720" rIns="45720" tIns="27432" bIns="27432" anchor="t">
+          <a:bodyPr wrap="square" lIns="45720" tIns="27432" rIns="45720" bIns="27432" anchor="t">
             <a:spAutoFit/>
           </a:bodyPr>
           <a:lstStyle/>
@@ -10924,7 +10276,7 @@
               </a:spcAft>
             </a:pPr>
             <a:r>
-              <a:rPr sz="1200" b="1" i="0">
+              <a:rPr sz="1200" b="1" i="0" dirty="0">
                 <a:solidFill>
                   <a:srgbClr val="1E2761"/>
                 </a:solidFill>
@@ -10933,7 +10285,7 @@
               <a:t>●  </a:t>
             </a:r>
             <a:r>
-              <a:rPr sz="1200" b="0" i="0">
+              <a:rPr sz="1200" b="0" i="0" dirty="0">
                 <a:solidFill>
                   <a:srgbClr val="36454F"/>
                 </a:solidFill>
@@ -10952,7 +10304,7 @@
               </a:spcAft>
             </a:pPr>
             <a:r>
-              <a:rPr sz="1200" b="1" i="0">
+              <a:rPr sz="1200" b="1" i="0" dirty="0">
                 <a:solidFill>
                   <a:srgbClr val="1E2761"/>
                 </a:solidFill>
@@ -10961,13 +10313,31 @@
               <a:t>●  </a:t>
             </a:r>
             <a:r>
-              <a:rPr sz="1200" b="0" i="0">
+              <a:rPr sz="1200" b="0" i="0" dirty="0">
                 <a:solidFill>
                   <a:srgbClr val="36454F"/>
                 </a:solidFill>
                 <a:latin typeface="Calibri"/>
               </a:rPr>
-              <a:t>support:  [h_i ; one-hot(y)]</a:t>
+              <a:t>support:  [</a:t>
+            </a:r>
+            <a:r>
+              <a:rPr sz="1200" b="0" i="0" dirty="0" err="1">
+                <a:solidFill>
+                  <a:srgbClr val="36454F"/>
+                </a:solidFill>
+                <a:latin typeface="Calibri"/>
+              </a:rPr>
+              <a:t>h_i</a:t>
+            </a:r>
+            <a:r>
+              <a:rPr sz="1200" b="0" i="0" dirty="0">
+                <a:solidFill>
+                  <a:srgbClr val="36454F"/>
+                </a:solidFill>
+                <a:latin typeface="Calibri"/>
+              </a:rPr>
+              <a:t> ; one-hot(y)]</a:t>
             </a:r>
           </a:p>
           <a:p>
@@ -10980,7 +10350,7 @@
               </a:spcAft>
             </a:pPr>
             <a:r>
-              <a:rPr sz="1200" b="1" i="0">
+              <a:rPr sz="1200" b="1" i="0" dirty="0">
                 <a:solidFill>
                   <a:srgbClr val="1E2761"/>
                 </a:solidFill>
@@ -10989,13 +10359,31 @@
               <a:t>●  </a:t>
             </a:r>
             <a:r>
-              <a:rPr sz="1200" b="0" i="0">
+              <a:rPr sz="1200" b="0" i="0" dirty="0">
                 <a:solidFill>
                   <a:srgbClr val="36454F"/>
                 </a:solidFill>
                 <a:latin typeface="Calibri"/>
               </a:rPr>
-              <a:t>query:    [h_i ; 0]</a:t>
+              <a:t>query:    [</a:t>
+            </a:r>
+            <a:r>
+              <a:rPr sz="1200" b="0" i="0" dirty="0" err="1">
+                <a:solidFill>
+                  <a:srgbClr val="36454F"/>
+                </a:solidFill>
+                <a:latin typeface="Calibri"/>
+              </a:rPr>
+              <a:t>h_i</a:t>
+            </a:r>
+            <a:r>
+              <a:rPr sz="1200" b="0" i="0" dirty="0">
+                <a:solidFill>
+                  <a:srgbClr val="36454F"/>
+                </a:solidFill>
+                <a:latin typeface="Calibri"/>
+              </a:rPr>
+              <a:t> ; 0]</a:t>
             </a:r>
           </a:p>
           <a:p>
@@ -11008,7 +10396,7 @@
               </a:spcAft>
             </a:pPr>
             <a:r>
-              <a:rPr sz="1200" b="1" i="0">
+              <a:rPr sz="1200" b="1" i="0" dirty="0">
                 <a:solidFill>
                   <a:srgbClr val="1E2761"/>
                 </a:solidFill>
@@ -11017,7 +10405,7 @@
               <a:t>●  </a:t>
             </a:r>
             <a:r>
-              <a:rPr sz="1200" b="0" i="0">
+              <a:rPr sz="1200" b="0" i="0" dirty="0">
                 <a:solidFill>
                   <a:srgbClr val="36454F"/>
                 </a:solidFill>
@@ -11037,7 +10425,7 @@
           <p:nvPr/>
         </p:nvPicPr>
         <p:blipFill>
-          <a:blip r:embed="rId6"/>
+          <a:blip r:embed="rId7"/>
           <a:stretch>
             <a:fillRect/>
           </a:stretch>
@@ -11061,7 +10449,7 @@
 </file>
 
 <file path=ppt/slides/slide7.xml><?xml version="1.0" encoding="utf-8"?>
-<p:sld xmlns:a="http://schemas.openxmlformats.org/drawingml/2006/main" xmlns:p="http://schemas.openxmlformats.org/presentationml/2006/main" xmlns:r="http://schemas.openxmlformats.org/officeDocument/2006/relationships">
+<p:sld xmlns:a="http://schemas.openxmlformats.org/drawingml/2006/main" xmlns:r="http://schemas.openxmlformats.org/officeDocument/2006/relationships" xmlns:p="http://schemas.openxmlformats.org/presentationml/2006/main">
   <p:cSld>
     <p:bg>
       <p:bgPr>
@@ -11077,7 +10465,14 @@
         <p:cNvGrpSpPr/>
         <p:nvPr/>
       </p:nvGrpSpPr>
-      <p:grpSpPr/>
+      <p:grpSpPr>
+        <a:xfrm>
+          <a:off x="0" y="0"/>
+          <a:ext cx="0" cy="0"/>
+          <a:chOff x="0" y="0"/>
+          <a:chExt cx="0" cy="0"/>
+        </a:xfrm>
+      </p:grpSpPr>
       <p:sp>
         <p:nvSpPr>
           <p:cNvPr id="2" name="Rectangle 1"/>
@@ -11115,10 +10510,11 @@
           </a:fontRef>
         </p:style>
         <p:txBody>
-          <a:bodyPr rtlCol="0" anchor="ctr" lIns="45720" rIns="45720" tIns="27432" bIns="27432" wrap="square"/>
+          <a:bodyPr wrap="square" lIns="45720" tIns="27432" rIns="45720" bIns="27432" rtlCol="0" anchor="ctr"/>
           <a:lstStyle/>
           <a:p>
             <a:pPr algn="ctr"/>
+            <a:endParaRPr/>
           </a:p>
         </p:txBody>
       </p:sp>
@@ -11159,7 +10555,7 @@
           </a:fontRef>
         </p:style>
         <p:txBody>
-          <a:bodyPr rtlCol="0" anchor="ctr" lIns="45720" rIns="45720" tIns="27432" bIns="27432" wrap="square"/>
+          <a:bodyPr wrap="square" lIns="45720" tIns="27432" rIns="45720" bIns="27432" rtlCol="0" anchor="ctr"/>
           <a:lstStyle/>
           <a:p>
             <a:pPr algn="ctr"/>
@@ -11192,7 +10588,7 @@
           <a:noFill/>
         </p:spPr>
         <p:txBody>
-          <a:bodyPr wrap="square" lIns="45720" rIns="45720" tIns="27432" bIns="27432" anchor="t">
+          <a:bodyPr wrap="square" lIns="45720" tIns="27432" rIns="45720" bIns="27432" anchor="t">
             <a:spAutoFit/>
           </a:bodyPr>
           <a:lstStyle/>
@@ -11227,7 +10623,7 @@
           <a:noFill/>
         </p:spPr>
         <p:txBody>
-          <a:bodyPr wrap="square" lIns="45720" rIns="45720" tIns="27432" bIns="27432" anchor="t">
+          <a:bodyPr wrap="square" lIns="45720" tIns="27432" rIns="45720" bIns="27432" anchor="t">
             <a:spAutoFit/>
           </a:bodyPr>
           <a:lstStyle/>
@@ -11262,7 +10658,7 @@
           <a:noFill/>
         </p:spPr>
         <p:txBody>
-          <a:bodyPr wrap="square" lIns="45720" rIns="45720" tIns="27432" bIns="27432" anchor="t">
+          <a:bodyPr wrap="square" lIns="45720" tIns="27432" rIns="45720" bIns="27432" anchor="t">
             <a:spAutoFit/>
           </a:bodyPr>
           <a:lstStyle/>
@@ -11317,7 +10713,7 @@
           </a:fontRef>
         </p:style>
         <p:txBody>
-          <a:bodyPr rtlCol="0" anchor="ctr" lIns="228600" rIns="228600" tIns="27432" bIns="27432" wrap="square"/>
+          <a:bodyPr wrap="square" lIns="228600" tIns="27432" rIns="228600" bIns="27432" rtlCol="0" anchor="ctr"/>
           <a:lstStyle/>
           <a:p>
             <a:pPr algn="l"/>
@@ -11517,7 +10913,7 @@
           <p:nvPr/>
         </p:nvPicPr>
         <p:blipFill>
-          <a:blip r:embed="rId2"/>
+          <a:blip r:embed="rId3"/>
           <a:stretch>
             <a:fillRect/>
           </a:stretch>
@@ -11541,7 +10937,7 @@
           <p:nvPr/>
         </p:nvPicPr>
         <p:blipFill>
-          <a:blip r:embed="rId3"/>
+          <a:blip r:embed="rId4"/>
           <a:stretch>
             <a:fillRect/>
           </a:stretch>
@@ -11593,7 +10989,7 @@
           </a:fontRef>
         </p:style>
         <p:txBody>
-          <a:bodyPr rtlCol="0" anchor="ctr" lIns="45720" rIns="45720" tIns="27432" bIns="27432" wrap="square"/>
+          <a:bodyPr wrap="square" lIns="45720" tIns="27432" rIns="45720" bIns="27432" rtlCol="0" anchor="ctr"/>
           <a:lstStyle/>
           <a:p>
             <a:pPr algn="ctr"/>
@@ -11658,10 +11054,11 @@
           </a:fontRef>
         </p:style>
         <p:txBody>
-          <a:bodyPr rtlCol="0" anchor="ctr" lIns="45720" rIns="45720" tIns="27432" bIns="27432" wrap="square"/>
+          <a:bodyPr wrap="square" lIns="45720" tIns="27432" rIns="45720" bIns="27432" rtlCol="0" anchor="ctr"/>
           <a:lstStyle/>
           <a:p>
             <a:pPr algn="ctr"/>
+            <a:endParaRPr/>
           </a:p>
         </p:txBody>
       </p:sp>
@@ -11702,7 +11099,7 @@
           </a:fontRef>
         </p:style>
         <p:txBody>
-          <a:bodyPr rtlCol="0" anchor="ctr" lIns="45720" rIns="45720" tIns="27432" bIns="27432" wrap="square"/>
+          <a:bodyPr wrap="square" lIns="45720" tIns="27432" rIns="45720" bIns="27432" rtlCol="0" anchor="ctr"/>
           <a:lstStyle/>
           <a:p>
             <a:pPr algn="ctr"/>
@@ -11739,7 +11136,7 @@
 </file>
 
 <file path=ppt/slides/slide8.xml><?xml version="1.0" encoding="utf-8"?>
-<p:sld xmlns:a="http://schemas.openxmlformats.org/drawingml/2006/main" xmlns:p="http://schemas.openxmlformats.org/presentationml/2006/main" xmlns:r="http://schemas.openxmlformats.org/officeDocument/2006/relationships">
+<p:sld xmlns:a="http://schemas.openxmlformats.org/drawingml/2006/main" xmlns:r="http://schemas.openxmlformats.org/officeDocument/2006/relationships" xmlns:p="http://schemas.openxmlformats.org/presentationml/2006/main">
   <p:cSld>
     <p:bg>
       <p:bgPr>
@@ -11755,7 +11152,14 @@
         <p:cNvGrpSpPr/>
         <p:nvPr/>
       </p:nvGrpSpPr>
-      <p:grpSpPr/>
+      <p:grpSpPr>
+        <a:xfrm>
+          <a:off x="0" y="0"/>
+          <a:ext cx="0" cy="0"/>
+          <a:chOff x="0" y="0"/>
+          <a:chExt cx="0" cy="0"/>
+        </a:xfrm>
+      </p:grpSpPr>
       <p:sp>
         <p:nvSpPr>
           <p:cNvPr id="2" name="Rectangle 1"/>
@@ -11771,7 +11175,7 @@
             <a:avLst/>
           </a:prstGeom>
           <a:solidFill>
-            <a:srgbClr val="F96167"/>
+            <a:srgbClr val="1E2761"/>
           </a:solidFill>
           <a:ln>
             <a:noFill/>
@@ -11793,10 +11197,11 @@
           </a:fontRef>
         </p:style>
         <p:txBody>
-          <a:bodyPr rtlCol="0" anchor="ctr" lIns="45720" rIns="45720" tIns="27432" bIns="27432" wrap="square"/>
+          <a:bodyPr wrap="square" lIns="45720" tIns="27432" rIns="45720" bIns="27432" rtlCol="0" anchor="ctr"/>
           <a:lstStyle/>
           <a:p>
             <a:pPr algn="ctr"/>
+            <a:endParaRPr/>
           </a:p>
         </p:txBody>
       </p:sp>
@@ -11837,7 +11242,7 @@
           </a:fontRef>
         </p:style>
         <p:txBody>
-          <a:bodyPr rtlCol="0" anchor="ctr" lIns="45720" rIns="45720" tIns="27432" bIns="27432" wrap="square"/>
+          <a:bodyPr wrap="square" lIns="45720" tIns="27432" rIns="45720" bIns="27432" rtlCol="0" anchor="ctr"/>
           <a:lstStyle/>
           <a:p>
             <a:pPr algn="ctr"/>
@@ -11848,7 +11253,7 @@
                 </a:solidFill>
                 <a:latin typeface="Calibri"/>
               </a:rPr>
-              <a:t>RESULTS</a:t>
+              <a:t>APPROACH</a:t>
             </a:r>
           </a:p>
         </p:txBody>
@@ -11870,7 +11275,7 @@
           <a:noFill/>
         </p:spPr>
         <p:txBody>
-          <a:bodyPr wrap="square" lIns="45720" rIns="45720" tIns="27432" bIns="27432" anchor="t">
+          <a:bodyPr wrap="square" lIns="45720" tIns="27432" rIns="45720" bIns="27432" anchor="t">
             <a:spAutoFit/>
           </a:bodyPr>
           <a:lstStyle/>
@@ -11883,7 +11288,7 @@
                 </a:solidFill>
                 <a:latin typeface="Calibri"/>
               </a:rPr>
-              <a:t>Main Results — 1000 meta-test episodes</a:t>
+              <a:t>Episodic Formulation &amp; Task Pool</a:t>
             </a:r>
           </a:p>
         </p:txBody>
@@ -11905,7 +11310,7 @@
           <a:noFill/>
         </p:spPr>
         <p:txBody>
-          <a:bodyPr wrap="square" lIns="45720" rIns="45720" tIns="27432" bIns="27432" anchor="t">
+          <a:bodyPr wrap="square" lIns="45720" tIns="27432" rIns="45720" bIns="27432" anchor="t">
             <a:spAutoFit/>
           </a:bodyPr>
           <a:lstStyle/>
@@ -11918,7 +11323,7 @@
                 </a:solidFill>
                 <a:latin typeface="Calibri"/>
               </a:rPr>
-              <a:t>8 / 12</a:t>
+              <a:t>3 / 12</a:t>
             </a:r>
           </a:p>
         </p:txBody>
@@ -11940,7 +11345,7 @@
           <a:noFill/>
         </p:spPr>
         <p:txBody>
-          <a:bodyPr wrap="square" lIns="45720" rIns="45720" tIns="27432" bIns="27432" anchor="t">
+          <a:bodyPr wrap="square" lIns="45720" tIns="27432" rIns="45720" bIns="27432" anchor="t">
             <a:spAutoFit/>
           </a:bodyPr>
           <a:lstStyle/>
@@ -11958,119 +11363,16 @@
           </a:p>
         </p:txBody>
       </p:sp>
-      <p:pic>
-        <p:nvPicPr>
-          <p:cNvPr id="7" name="Picture 6" descr="fig2_main.png"/>
-          <p:cNvPicPr>
-            <a:picLocks noChangeAspect="1"/>
-          </p:cNvPicPr>
-          <p:nvPr/>
-        </p:nvPicPr>
-        <p:blipFill>
-          <a:blip r:embed="rId2"/>
-          <a:stretch>
-            <a:fillRect/>
-          </a:stretch>
-        </p:blipFill>
-        <p:spPr>
-          <a:xfrm>
-            <a:off x="502920" y="1691640"/>
-            <a:ext cx="7589520" cy="4231526"/>
-          </a:xfrm>
-          <a:prstGeom prst="rect">
-            <a:avLst/>
-          </a:prstGeom>
-        </p:spPr>
-      </p:pic>
-      <p:sp>
-        <p:nvSpPr>
-          <p:cNvPr id="8" name="Rounded Rectangle 7"/>
-          <p:cNvSpPr/>
-          <p:nvPr/>
-        </p:nvSpPr>
-        <p:spPr>
-          <a:xfrm>
-            <a:off x="8321040" y="1737360"/>
-            <a:ext cx="3474720" cy="4114800"/>
-          </a:xfrm>
-          <a:prstGeom prst="roundRect">
-            <a:avLst/>
-          </a:prstGeom>
-          <a:solidFill>
-            <a:srgbClr val="F5F7FA"/>
-          </a:solidFill>
-          <a:ln>
-            <a:noFill/>
-          </a:ln>
-          <a:effectLst/>
-        </p:spPr>
-        <p:style>
-          <a:lnRef idx="1">
-            <a:schemeClr val="accent1"/>
-          </a:lnRef>
-          <a:fillRef idx="3">
-            <a:schemeClr val="accent1"/>
-          </a:fillRef>
-          <a:effectRef idx="2">
-            <a:schemeClr val="accent1"/>
-          </a:effectRef>
-          <a:fontRef idx="minor">
-            <a:schemeClr val="lt1"/>
-          </a:fontRef>
-        </p:style>
-        <p:txBody>
-          <a:bodyPr rtlCol="0" anchor="ctr" lIns="45720" rIns="45720" tIns="27432" bIns="27432" wrap="square"/>
-          <a:lstStyle/>
-          <a:p>
-            <a:pPr algn="ctr"/>
-          </a:p>
-        </p:txBody>
-      </p:sp>
-      <p:sp>
-        <p:nvSpPr>
-          <p:cNvPr id="9" name="TextBox 8"/>
+      <p:sp>
+        <p:nvSpPr>
+          <p:cNvPr id="7" name="TextBox 6"/>
           <p:cNvSpPr txBox="1"/>
           <p:nvPr/>
         </p:nvSpPr>
         <p:spPr>
           <a:xfrm>
-            <a:off x="8458200" y="1874519"/>
-            <a:ext cx="3200400" cy="365760"/>
-          </a:xfrm>
-          <a:prstGeom prst="rect">
-            <a:avLst/>
-          </a:prstGeom>
-          <a:noFill/>
-        </p:spPr>
-        <p:txBody>
-          <a:bodyPr wrap="square" lIns="45720" rIns="45720" tIns="27432" bIns="27432" anchor="t">
-            <a:spAutoFit/>
-          </a:bodyPr>
-          <a:lstStyle/>
-          <a:p>
-            <a:pPr algn="l"/>
-            <a:r>
-              <a:rPr sz="1200" b="1" i="0">
-                <a:solidFill>
-                  <a:srgbClr val="F96167"/>
-                </a:solidFill>
-                <a:latin typeface="Calibri"/>
-              </a:rPr>
-              <a:t>TAKEAWAYS</a:t>
-            </a:r>
-          </a:p>
-        </p:txBody>
-      </p:sp>
-      <p:sp>
-        <p:nvSpPr>
-          <p:cNvPr id="10" name="TextBox 9"/>
-          <p:cNvSpPr txBox="1"/>
-          <p:nvPr/>
-        </p:nvSpPr>
-        <p:spPr>
-          <a:xfrm>
-            <a:off x="8458200" y="2331720"/>
-            <a:ext cx="3200400" cy="3474720"/>
+            <a:off x="502920" y="1737360"/>
+            <a:ext cx="7132320" cy="2926080"/>
           </a:xfrm>
           <a:prstGeom prst="rect">
             <a:avLst/>
@@ -12092,7 +11394,7 @@
               </a:spcAft>
             </a:pPr>
             <a:r>
-              <a:rPr sz="1200" b="1" i="0">
+              <a:rPr sz="1500" b="1" i="0" dirty="0">
                 <a:solidFill>
                   <a:srgbClr val="1E2761"/>
                 </a:solidFill>
@@ -12101,13 +11403,13 @@
               <a:t>●  </a:t>
             </a:r>
             <a:r>
-              <a:rPr sz="1200" b="0" i="0">
+              <a:rPr sz="1500" b="0" i="0" dirty="0">
                 <a:solidFill>
                   <a:srgbClr val="36454F"/>
                 </a:solidFill>
                 <a:latin typeface="Calibri"/>
               </a:rPr>
-              <a:t>ProtoNet strongest: 0.701 @ 5w5s.</a:t>
+              <a:t>Meta-learning: train across many small tasks that simulate few-shot test conditions.</a:t>
             </a:r>
           </a:p>
           <a:p>
@@ -12120,7 +11422,7 @@
               </a:spcAft>
             </a:pPr>
             <a:r>
-              <a:rPr sz="1200" b="1" i="0">
+              <a:rPr sz="1500" b="1" i="0" dirty="0">
                 <a:solidFill>
                   <a:srgbClr val="1E2761"/>
                 </a:solidFill>
@@ -12129,13 +11431,31 @@
               <a:t>●  </a:t>
             </a:r>
             <a:r>
-              <a:rPr sz="1200" b="0" i="0">
+              <a:rPr sz="1500" b="0" i="0" dirty="0">
                 <a:solidFill>
                   <a:srgbClr val="36454F"/>
                 </a:solidFill>
                 <a:latin typeface="Calibri"/>
               </a:rPr>
-              <a:t>GoS 2nd — +6 pp over MAML.</a:t>
+              <a:t>Split at the TASK level (not molecule level), with strict label </a:t>
+            </a:r>
+            <a:r>
+              <a:rPr sz="1500" b="0" i="0" dirty="0" err="1">
+                <a:solidFill>
+                  <a:srgbClr val="36454F"/>
+                </a:solidFill>
+                <a:latin typeface="Calibri"/>
+              </a:rPr>
+              <a:t>disjointness</a:t>
+            </a:r>
+            <a:r>
+              <a:rPr sz="1500" b="0" i="0" dirty="0">
+                <a:solidFill>
+                  <a:srgbClr val="36454F"/>
+                </a:solidFill>
+                <a:latin typeface="Calibri"/>
+              </a:rPr>
+              <a:t>.</a:t>
             </a:r>
           </a:p>
           <a:p>
@@ -12148,7 +11468,7 @@
               </a:spcAft>
             </a:pPr>
             <a:r>
-              <a:rPr sz="1200" b="1" i="0">
+              <a:rPr sz="1500" b="1" i="0" dirty="0">
                 <a:solidFill>
                   <a:srgbClr val="1E2761"/>
                 </a:solidFill>
@@ -12157,13 +11477,13 @@
               <a:t>●  </a:t>
             </a:r>
             <a:r>
-              <a:rPr sz="1200" b="0" i="0">
+              <a:rPr sz="1500" b="0" i="0" dirty="0">
                 <a:solidFill>
                   <a:srgbClr val="36454F"/>
                 </a:solidFill>
                 <a:latin typeface="Calibri"/>
               </a:rPr>
-              <a:t>MAML ~ chance.</a:t>
+              <a:t>Episode τ draws N classes × K support + query set.</a:t>
             </a:r>
           </a:p>
           <a:p>
@@ -12176,7 +11496,7 @@
               </a:spcAft>
             </a:pPr>
             <a:r>
-              <a:rPr sz="1200" b="1" i="0">
+              <a:rPr sz="1500" b="1" i="0" dirty="0">
                 <a:solidFill>
                   <a:srgbClr val="1E2761"/>
                 </a:solidFill>
@@ -12185,14 +11505,107 @@
               <a:t>●  </a:t>
             </a:r>
             <a:r>
-              <a:rPr sz="1200" b="0" i="0">
+              <a:rPr sz="1500" b="0" i="0" dirty="0">
                 <a:solidFill>
                   <a:srgbClr val="36454F"/>
                 </a:solidFill>
                 <a:latin typeface="Calibri"/>
               </a:rPr>
-              <a:t>GoS does NOT yet beat ProtoNet.</a:t>
-            </a:r>
+              <a:t>Configs: 5-way 1-shot · 5-way 5-shot · 10-way 5-shot.</a:t>
+            </a:r>
+          </a:p>
+        </p:txBody>
+      </p:sp>
+      <p:pic>
+        <p:nvPicPr>
+          <p:cNvPr id="8" name="Picture 7" descr="f05_1.png"/>
+          <p:cNvPicPr>
+            <a:picLocks noChangeAspect="1"/>
+          </p:cNvPicPr>
+          <p:nvPr/>
+        </p:nvPicPr>
+        <p:blipFill>
+          <a:blip r:embed="rId3"/>
+          <a:stretch>
+            <a:fillRect/>
+          </a:stretch>
+        </p:blipFill>
+        <p:spPr>
+          <a:xfrm>
+            <a:off x="731520" y="4480560"/>
+            <a:ext cx="4572000" cy="649140"/>
+          </a:xfrm>
+          <a:prstGeom prst="rect">
+            <a:avLst/>
+          </a:prstGeom>
+        </p:spPr>
+      </p:pic>
+      <p:pic>
+        <p:nvPicPr>
+          <p:cNvPr id="9" name="Picture 8" descr="f05_2.png"/>
+          <p:cNvPicPr>
+            <a:picLocks noChangeAspect="1"/>
+          </p:cNvPicPr>
+          <p:nvPr/>
+        </p:nvPicPr>
+        <p:blipFill>
+          <a:blip r:embed="rId4"/>
+          <a:stretch>
+            <a:fillRect/>
+          </a:stretch>
+        </p:blipFill>
+        <p:spPr>
+          <a:xfrm>
+            <a:off x="731520" y="5394960"/>
+            <a:ext cx="3291840" cy="467381"/>
+          </a:xfrm>
+          <a:prstGeom prst="rect">
+            <a:avLst/>
+          </a:prstGeom>
+        </p:spPr>
+      </p:pic>
+      <p:sp>
+        <p:nvSpPr>
+          <p:cNvPr id="10" name="Rounded Rectangle 9"/>
+          <p:cNvSpPr/>
+          <p:nvPr/>
+        </p:nvSpPr>
+        <p:spPr>
+          <a:xfrm>
+            <a:off x="8046720" y="1737360"/>
+            <a:ext cx="3749039" cy="4480560"/>
+          </a:xfrm>
+          <a:prstGeom prst="roundRect">
+            <a:avLst/>
+          </a:prstGeom>
+          <a:solidFill>
+            <a:srgbClr val="F5F7FA"/>
+          </a:solidFill>
+          <a:ln>
+            <a:noFill/>
+          </a:ln>
+          <a:effectLst/>
+        </p:spPr>
+        <p:style>
+          <a:lnRef idx="1">
+            <a:schemeClr val="accent1"/>
+          </a:lnRef>
+          <a:fillRef idx="3">
+            <a:schemeClr val="accent1"/>
+          </a:fillRef>
+          <a:effectRef idx="2">
+            <a:schemeClr val="accent1"/>
+          </a:effectRef>
+          <a:fontRef idx="minor">
+            <a:schemeClr val="lt1"/>
+          </a:fontRef>
+        </p:style>
+        <p:txBody>
+          <a:bodyPr wrap="square" lIns="45720" tIns="27432" rIns="45720" bIns="27432" rtlCol="0" anchor="ctr"/>
+          <a:lstStyle/>
+          <a:p>
+            <a:pPr algn="ctr"/>
+            <a:endParaRPr/>
           </a:p>
         </p:txBody>
       </p:sp>
@@ -12204,8 +11617,8 @@
         </p:nvSpPr>
         <p:spPr>
           <a:xfrm>
-            <a:off x="502920" y="6035040"/>
-            <a:ext cx="11185855" cy="365760"/>
+            <a:off x="8183879" y="1874519"/>
+            <a:ext cx="3566160" cy="365760"/>
           </a:xfrm>
           <a:prstGeom prst="rect">
             <a:avLst/>
@@ -12213,20 +11626,510 @@
           <a:noFill/>
         </p:spPr>
         <p:txBody>
-          <a:bodyPr wrap="square" lIns="45720" rIns="45720" tIns="27432" bIns="27432" anchor="t">
+          <a:bodyPr wrap="square" lIns="45720" tIns="27432" rIns="45720" bIns="27432" anchor="t">
             <a:spAutoFit/>
           </a:bodyPr>
           <a:lstStyle/>
           <a:p>
-            <a:pPr algn="ctr"/>
-            <a:r>
-              <a:rPr sz="1100" b="0" i="1">
-                <a:solidFill>
-                  <a:srgbClr val="888A90"/>
-                </a:solidFill>
-                <a:latin typeface="Calibri"/>
-              </a:rPr>
-              <a:t>Merged pool: Tox21 + ToxCast + MUV + SIDER, 673 tasks, 405 / 134 / 134 split.</a:t>
+            <a:pPr algn="l"/>
+            <a:r>
+              <a:rPr sz="1200" b="1" i="0">
+                <a:solidFill>
+                  <a:srgbClr val="1E2761"/>
+                </a:solidFill>
+                <a:latin typeface="Calibri"/>
+              </a:rPr>
+              <a:t>MERGED TASK POOL</a:t>
+            </a:r>
+          </a:p>
+        </p:txBody>
+      </p:sp>
+      <p:sp>
+        <p:nvSpPr>
+          <p:cNvPr id="12" name="TextBox 11"/>
+          <p:cNvSpPr txBox="1"/>
+          <p:nvPr/>
+        </p:nvSpPr>
+        <p:spPr>
+          <a:xfrm>
+            <a:off x="8183879" y="2331720"/>
+            <a:ext cx="1645920" cy="320040"/>
+          </a:xfrm>
+          <a:prstGeom prst="rect">
+            <a:avLst/>
+          </a:prstGeom>
+          <a:noFill/>
+        </p:spPr>
+        <p:txBody>
+          <a:bodyPr wrap="square" lIns="45720" tIns="27432" rIns="45720" bIns="27432" anchor="t">
+            <a:spAutoFit/>
+          </a:bodyPr>
+          <a:lstStyle/>
+          <a:p>
+            <a:pPr algn="l"/>
+            <a:r>
+              <a:rPr sz="1300" b="0" i="0">
+                <a:solidFill>
+                  <a:srgbClr val="1E2761"/>
+                </a:solidFill>
+                <a:latin typeface="Calibri"/>
+              </a:rPr>
+              <a:t>Tox21</a:t>
+            </a:r>
+          </a:p>
+        </p:txBody>
+      </p:sp>
+      <p:sp>
+        <p:nvSpPr>
+          <p:cNvPr id="13" name="TextBox 12"/>
+          <p:cNvSpPr txBox="1"/>
+          <p:nvPr/>
+        </p:nvSpPr>
+        <p:spPr>
+          <a:xfrm>
+            <a:off x="9784080" y="2331720"/>
+            <a:ext cx="2103120" cy="320040"/>
+          </a:xfrm>
+          <a:prstGeom prst="rect">
+            <a:avLst/>
+          </a:prstGeom>
+          <a:noFill/>
+        </p:spPr>
+        <p:txBody>
+          <a:bodyPr wrap="square" lIns="45720" tIns="27432" rIns="45720" bIns="27432" anchor="t">
+            <a:spAutoFit/>
+          </a:bodyPr>
+          <a:lstStyle/>
+          <a:p>
+            <a:pPr algn="l"/>
+            <a:r>
+              <a:rPr sz="1300" b="0" i="0">
+                <a:solidFill>
+                  <a:srgbClr val="36454F"/>
+                </a:solidFill>
+                <a:latin typeface="Calibri"/>
+              </a:rPr>
+              <a:t>12</a:t>
+            </a:r>
+          </a:p>
+        </p:txBody>
+      </p:sp>
+      <p:sp>
+        <p:nvSpPr>
+          <p:cNvPr id="14" name="TextBox 13"/>
+          <p:cNvSpPr txBox="1"/>
+          <p:nvPr/>
+        </p:nvSpPr>
+        <p:spPr>
+          <a:xfrm>
+            <a:off x="8183879" y="2788920"/>
+            <a:ext cx="1645920" cy="320040"/>
+          </a:xfrm>
+          <a:prstGeom prst="rect">
+            <a:avLst/>
+          </a:prstGeom>
+          <a:noFill/>
+        </p:spPr>
+        <p:txBody>
+          <a:bodyPr wrap="square" lIns="45720" tIns="27432" rIns="45720" bIns="27432" anchor="t">
+            <a:spAutoFit/>
+          </a:bodyPr>
+          <a:lstStyle/>
+          <a:p>
+            <a:pPr algn="l"/>
+            <a:r>
+              <a:rPr sz="1300" b="0" i="0">
+                <a:solidFill>
+                  <a:srgbClr val="1E2761"/>
+                </a:solidFill>
+                <a:latin typeface="Calibri"/>
+              </a:rPr>
+              <a:t>ToxCast</a:t>
+            </a:r>
+          </a:p>
+        </p:txBody>
+      </p:sp>
+      <p:sp>
+        <p:nvSpPr>
+          <p:cNvPr id="15" name="TextBox 14"/>
+          <p:cNvSpPr txBox="1"/>
+          <p:nvPr/>
+        </p:nvSpPr>
+        <p:spPr>
+          <a:xfrm>
+            <a:off x="9784080" y="2788920"/>
+            <a:ext cx="2103120" cy="320040"/>
+          </a:xfrm>
+          <a:prstGeom prst="rect">
+            <a:avLst/>
+          </a:prstGeom>
+          <a:noFill/>
+        </p:spPr>
+        <p:txBody>
+          <a:bodyPr wrap="square" lIns="45720" tIns="27432" rIns="45720" bIns="27432" anchor="t">
+            <a:spAutoFit/>
+          </a:bodyPr>
+          <a:lstStyle/>
+          <a:p>
+            <a:pPr algn="l"/>
+            <a:r>
+              <a:rPr sz="1300" b="0" i="0">
+                <a:solidFill>
+                  <a:srgbClr val="36454F"/>
+                </a:solidFill>
+                <a:latin typeface="Calibri"/>
+              </a:rPr>
+              <a:t>617</a:t>
+            </a:r>
+          </a:p>
+        </p:txBody>
+      </p:sp>
+      <p:sp>
+        <p:nvSpPr>
+          <p:cNvPr id="16" name="TextBox 15"/>
+          <p:cNvSpPr txBox="1"/>
+          <p:nvPr/>
+        </p:nvSpPr>
+        <p:spPr>
+          <a:xfrm>
+            <a:off x="8183879" y="3246120"/>
+            <a:ext cx="1645920" cy="320040"/>
+          </a:xfrm>
+          <a:prstGeom prst="rect">
+            <a:avLst/>
+          </a:prstGeom>
+          <a:noFill/>
+        </p:spPr>
+        <p:txBody>
+          <a:bodyPr wrap="square" lIns="45720" tIns="27432" rIns="45720" bIns="27432" anchor="t">
+            <a:spAutoFit/>
+          </a:bodyPr>
+          <a:lstStyle/>
+          <a:p>
+            <a:pPr algn="l"/>
+            <a:r>
+              <a:rPr sz="1300" b="0" i="0">
+                <a:solidFill>
+                  <a:srgbClr val="1E2761"/>
+                </a:solidFill>
+                <a:latin typeface="Calibri"/>
+              </a:rPr>
+              <a:t>MUV</a:t>
+            </a:r>
+          </a:p>
+        </p:txBody>
+      </p:sp>
+      <p:sp>
+        <p:nvSpPr>
+          <p:cNvPr id="17" name="TextBox 16"/>
+          <p:cNvSpPr txBox="1"/>
+          <p:nvPr/>
+        </p:nvSpPr>
+        <p:spPr>
+          <a:xfrm>
+            <a:off x="9784080" y="3246120"/>
+            <a:ext cx="2103120" cy="320040"/>
+          </a:xfrm>
+          <a:prstGeom prst="rect">
+            <a:avLst/>
+          </a:prstGeom>
+          <a:noFill/>
+        </p:spPr>
+        <p:txBody>
+          <a:bodyPr wrap="square" lIns="45720" tIns="27432" rIns="45720" bIns="27432" anchor="t">
+            <a:spAutoFit/>
+          </a:bodyPr>
+          <a:lstStyle/>
+          <a:p>
+            <a:pPr algn="l"/>
+            <a:r>
+              <a:rPr sz="1300" b="0" i="0">
+                <a:solidFill>
+                  <a:srgbClr val="36454F"/>
+                </a:solidFill>
+                <a:latin typeface="Calibri"/>
+              </a:rPr>
+              <a:t>17</a:t>
+            </a:r>
+          </a:p>
+        </p:txBody>
+      </p:sp>
+      <p:sp>
+        <p:nvSpPr>
+          <p:cNvPr id="18" name="TextBox 17"/>
+          <p:cNvSpPr txBox="1"/>
+          <p:nvPr/>
+        </p:nvSpPr>
+        <p:spPr>
+          <a:xfrm>
+            <a:off x="8183879" y="3703320"/>
+            <a:ext cx="1645920" cy="320040"/>
+          </a:xfrm>
+          <a:prstGeom prst="rect">
+            <a:avLst/>
+          </a:prstGeom>
+          <a:noFill/>
+        </p:spPr>
+        <p:txBody>
+          <a:bodyPr wrap="square" lIns="45720" tIns="27432" rIns="45720" bIns="27432" anchor="t">
+            <a:spAutoFit/>
+          </a:bodyPr>
+          <a:lstStyle/>
+          <a:p>
+            <a:pPr algn="l"/>
+            <a:r>
+              <a:rPr sz="1300" b="0" i="0">
+                <a:solidFill>
+                  <a:srgbClr val="1E2761"/>
+                </a:solidFill>
+                <a:latin typeface="Calibri"/>
+              </a:rPr>
+              <a:t>SIDER</a:t>
+            </a:r>
+          </a:p>
+        </p:txBody>
+      </p:sp>
+      <p:sp>
+        <p:nvSpPr>
+          <p:cNvPr id="19" name="TextBox 18"/>
+          <p:cNvSpPr txBox="1"/>
+          <p:nvPr/>
+        </p:nvSpPr>
+        <p:spPr>
+          <a:xfrm>
+            <a:off x="9784080" y="3703320"/>
+            <a:ext cx="2103120" cy="320040"/>
+          </a:xfrm>
+          <a:prstGeom prst="rect">
+            <a:avLst/>
+          </a:prstGeom>
+          <a:noFill/>
+        </p:spPr>
+        <p:txBody>
+          <a:bodyPr wrap="square" lIns="45720" tIns="27432" rIns="45720" bIns="27432" anchor="t">
+            <a:spAutoFit/>
+          </a:bodyPr>
+          <a:lstStyle/>
+          <a:p>
+            <a:pPr algn="l"/>
+            <a:r>
+              <a:rPr sz="1300" b="0" i="0">
+                <a:solidFill>
+                  <a:srgbClr val="36454F"/>
+                </a:solidFill>
+                <a:latin typeface="Calibri"/>
+              </a:rPr>
+              <a:t>27</a:t>
+            </a:r>
+          </a:p>
+        </p:txBody>
+      </p:sp>
+      <p:sp>
+        <p:nvSpPr>
+          <p:cNvPr id="20" name="TextBox 19"/>
+          <p:cNvSpPr txBox="1"/>
+          <p:nvPr/>
+        </p:nvSpPr>
+        <p:spPr>
+          <a:xfrm>
+            <a:off x="8183879" y="4160520"/>
+            <a:ext cx="1645920" cy="320040"/>
+          </a:xfrm>
+          <a:prstGeom prst="rect">
+            <a:avLst/>
+          </a:prstGeom>
+          <a:noFill/>
+        </p:spPr>
+        <p:txBody>
+          <a:bodyPr wrap="square" lIns="45720" tIns="27432" rIns="45720" bIns="27432" anchor="t">
+            <a:spAutoFit/>
+          </a:bodyPr>
+          <a:lstStyle/>
+          <a:p>
+            <a:pPr algn="l"/>
+            <a:r>
+              <a:rPr sz="1300" b="0" i="0">
+                <a:solidFill>
+                  <a:srgbClr val="1E2761"/>
+                </a:solidFill>
+                <a:latin typeface="Calibri"/>
+              </a:rPr>
+              <a:t>—</a:t>
+            </a:r>
+          </a:p>
+        </p:txBody>
+      </p:sp>
+      <p:sp>
+        <p:nvSpPr>
+          <p:cNvPr id="21" name="TextBox 20"/>
+          <p:cNvSpPr txBox="1"/>
+          <p:nvPr/>
+        </p:nvSpPr>
+        <p:spPr>
+          <a:xfrm>
+            <a:off x="9784080" y="4160520"/>
+            <a:ext cx="2103120" cy="320040"/>
+          </a:xfrm>
+          <a:prstGeom prst="rect">
+            <a:avLst/>
+          </a:prstGeom>
+          <a:noFill/>
+        </p:spPr>
+        <p:txBody>
+          <a:bodyPr wrap="square" lIns="45720" tIns="27432" rIns="45720" bIns="27432" anchor="t">
+            <a:spAutoFit/>
+          </a:bodyPr>
+          <a:lstStyle/>
+          <a:p>
+            <a:pPr algn="l"/>
+            <a:r>
+              <a:rPr sz="1300" b="0" i="0">
+                <a:solidFill>
+                  <a:srgbClr val="36454F"/>
+                </a:solidFill>
+                <a:latin typeface="Calibri"/>
+              </a:rPr>
+              <a:t>—</a:t>
+            </a:r>
+          </a:p>
+        </p:txBody>
+      </p:sp>
+      <p:sp>
+        <p:nvSpPr>
+          <p:cNvPr id="22" name="TextBox 21"/>
+          <p:cNvSpPr txBox="1"/>
+          <p:nvPr/>
+        </p:nvSpPr>
+        <p:spPr>
+          <a:xfrm>
+            <a:off x="8183879" y="4617720"/>
+            <a:ext cx="1645920" cy="320040"/>
+          </a:xfrm>
+          <a:prstGeom prst="rect">
+            <a:avLst/>
+          </a:prstGeom>
+          <a:noFill/>
+        </p:spPr>
+        <p:txBody>
+          <a:bodyPr wrap="square" lIns="45720" tIns="27432" rIns="45720" bIns="27432" anchor="t">
+            <a:spAutoFit/>
+          </a:bodyPr>
+          <a:lstStyle/>
+          <a:p>
+            <a:pPr algn="l"/>
+            <a:r>
+              <a:rPr sz="1300" b="1" i="0">
+                <a:solidFill>
+                  <a:srgbClr val="1E2761"/>
+                </a:solidFill>
+                <a:latin typeface="Calibri"/>
+              </a:rPr>
+              <a:t>Total</a:t>
+            </a:r>
+          </a:p>
+        </p:txBody>
+      </p:sp>
+      <p:sp>
+        <p:nvSpPr>
+          <p:cNvPr id="23" name="TextBox 22"/>
+          <p:cNvSpPr txBox="1"/>
+          <p:nvPr/>
+        </p:nvSpPr>
+        <p:spPr>
+          <a:xfrm>
+            <a:off x="9784080" y="4617720"/>
+            <a:ext cx="2103120" cy="320040"/>
+          </a:xfrm>
+          <a:prstGeom prst="rect">
+            <a:avLst/>
+          </a:prstGeom>
+          <a:noFill/>
+        </p:spPr>
+        <p:txBody>
+          <a:bodyPr wrap="square" lIns="45720" tIns="27432" rIns="45720" bIns="27432" anchor="t">
+            <a:spAutoFit/>
+          </a:bodyPr>
+          <a:lstStyle/>
+          <a:p>
+            <a:pPr algn="l"/>
+            <a:r>
+              <a:rPr sz="1300" b="1" i="0">
+                <a:solidFill>
+                  <a:srgbClr val="36454F"/>
+                </a:solidFill>
+                <a:latin typeface="Calibri"/>
+              </a:rPr>
+              <a:t>673</a:t>
+            </a:r>
+          </a:p>
+        </p:txBody>
+      </p:sp>
+      <p:sp>
+        <p:nvSpPr>
+          <p:cNvPr id="24" name="TextBox 23"/>
+          <p:cNvSpPr txBox="1"/>
+          <p:nvPr/>
+        </p:nvSpPr>
+        <p:spPr>
+          <a:xfrm>
+            <a:off x="8183879" y="5074920"/>
+            <a:ext cx="1645920" cy="320040"/>
+          </a:xfrm>
+          <a:prstGeom prst="rect">
+            <a:avLst/>
+          </a:prstGeom>
+          <a:noFill/>
+        </p:spPr>
+        <p:txBody>
+          <a:bodyPr wrap="square" lIns="45720" tIns="27432" rIns="45720" bIns="27432" anchor="t">
+            <a:spAutoFit/>
+          </a:bodyPr>
+          <a:lstStyle/>
+          <a:p>
+            <a:pPr algn="l"/>
+            <a:r>
+              <a:rPr sz="1300" b="1" i="0">
+                <a:solidFill>
+                  <a:srgbClr val="1E2761"/>
+                </a:solidFill>
+                <a:latin typeface="Calibri"/>
+              </a:rPr>
+              <a:t>Split</a:t>
+            </a:r>
+          </a:p>
+        </p:txBody>
+      </p:sp>
+      <p:sp>
+        <p:nvSpPr>
+          <p:cNvPr id="25" name="TextBox 24"/>
+          <p:cNvSpPr txBox="1"/>
+          <p:nvPr/>
+        </p:nvSpPr>
+        <p:spPr>
+          <a:xfrm>
+            <a:off x="9784080" y="5074920"/>
+            <a:ext cx="2103120" cy="320040"/>
+          </a:xfrm>
+          <a:prstGeom prst="rect">
+            <a:avLst/>
+          </a:prstGeom>
+          <a:noFill/>
+        </p:spPr>
+        <p:txBody>
+          <a:bodyPr wrap="square" lIns="45720" tIns="27432" rIns="45720" bIns="27432" anchor="t">
+            <a:spAutoFit/>
+          </a:bodyPr>
+          <a:lstStyle/>
+          <a:p>
+            <a:pPr algn="l"/>
+            <a:r>
+              <a:rPr sz="1300" b="1" i="0">
+                <a:solidFill>
+                  <a:srgbClr val="36454F"/>
+                </a:solidFill>
+                <a:latin typeface="Calibri"/>
+              </a:rPr>
+              <a:t>405 / 134 / 134</a:t>
             </a:r>
           </a:p>
         </p:txBody>
@@ -12240,7 +12143,7 @@
 </file>
 
 <file path=ppt/slides/slide9.xml><?xml version="1.0" encoding="utf-8"?>
-<p:sld xmlns:a="http://schemas.openxmlformats.org/drawingml/2006/main" xmlns:p="http://schemas.openxmlformats.org/presentationml/2006/main" xmlns:r="http://schemas.openxmlformats.org/officeDocument/2006/relationships">
+<p:sld xmlns:a="http://schemas.openxmlformats.org/drawingml/2006/main" xmlns:r="http://schemas.openxmlformats.org/officeDocument/2006/relationships" xmlns:p="http://schemas.openxmlformats.org/presentationml/2006/main">
   <p:cSld>
     <p:bg>
       <p:bgPr>
@@ -12256,7 +12159,14 @@
         <p:cNvGrpSpPr/>
         <p:nvPr/>
       </p:nvGrpSpPr>
-      <p:grpSpPr/>
+      <p:grpSpPr>
+        <a:xfrm>
+          <a:off x="0" y="0"/>
+          <a:ext cx="0" cy="0"/>
+          <a:chOff x="0" y="0"/>
+          <a:chExt cx="0" cy="0"/>
+        </a:xfrm>
+      </p:grpSpPr>
       <p:sp>
         <p:nvSpPr>
           <p:cNvPr id="2" name="Rectangle 1"/>
@@ -12294,10 +12204,11 @@
           </a:fontRef>
         </p:style>
         <p:txBody>
-          <a:bodyPr rtlCol="0" anchor="ctr" lIns="45720" rIns="45720" tIns="27432" bIns="27432" wrap="square"/>
+          <a:bodyPr wrap="square" lIns="45720" tIns="27432" rIns="45720" bIns="27432" rtlCol="0" anchor="ctr"/>
           <a:lstStyle/>
           <a:p>
             <a:pPr algn="ctr"/>
+            <a:endParaRPr/>
           </a:p>
         </p:txBody>
       </p:sp>
@@ -12338,7 +12249,7 @@
           </a:fontRef>
         </p:style>
         <p:txBody>
-          <a:bodyPr rtlCol="0" anchor="ctr" lIns="45720" rIns="45720" tIns="27432" bIns="27432" wrap="square"/>
+          <a:bodyPr wrap="square" lIns="45720" tIns="27432" rIns="45720" bIns="27432" rtlCol="0" anchor="ctr"/>
           <a:lstStyle/>
           <a:p>
             <a:pPr algn="ctr"/>
@@ -12371,7 +12282,7 @@
           <a:noFill/>
         </p:spPr>
         <p:txBody>
-          <a:bodyPr wrap="square" lIns="45720" rIns="45720" tIns="27432" bIns="27432" anchor="t">
+          <a:bodyPr wrap="square" lIns="45720" tIns="27432" rIns="45720" bIns="27432" anchor="t">
             <a:spAutoFit/>
           </a:bodyPr>
           <a:lstStyle/>
@@ -12384,7 +12295,7 @@
                 </a:solidFill>
                 <a:latin typeface="Calibri"/>
               </a:rPr>
-              <a:t>Ablations &amp; Sample Efficiency</a:t>
+              <a:t>Main Results — 1000 meta-test episodes</a:t>
             </a:r>
           </a:p>
         </p:txBody>
@@ -12406,7 +12317,7 @@
           <a:noFill/>
         </p:spPr>
         <p:txBody>
-          <a:bodyPr wrap="square" lIns="45720" rIns="45720" tIns="27432" bIns="27432" anchor="t">
+          <a:bodyPr wrap="square" lIns="45720" tIns="27432" rIns="45720" bIns="27432" anchor="t">
             <a:spAutoFit/>
           </a:bodyPr>
           <a:lstStyle/>
@@ -12419,7 +12330,7 @@
                 </a:solidFill>
                 <a:latin typeface="Calibri"/>
               </a:rPr>
-              <a:t>9 / 12</a:t>
+              <a:t>8 / 12</a:t>
             </a:r>
           </a:p>
         </p:txBody>
@@ -12441,7 +12352,7 @@
           <a:noFill/>
         </p:spPr>
         <p:txBody>
-          <a:bodyPr wrap="square" lIns="45720" rIns="45720" tIns="27432" bIns="27432" anchor="t">
+          <a:bodyPr wrap="square" lIns="45720" tIns="27432" rIns="45720" bIns="27432" anchor="t">
             <a:spAutoFit/>
           </a:bodyPr>
           <a:lstStyle/>
@@ -12461,31 +12372,7 @@
       </p:sp>
       <p:pic>
         <p:nvPicPr>
-          <p:cNvPr id="7" name="Picture 6" descr="fig3_ablations.png"/>
-          <p:cNvPicPr>
-            <a:picLocks noChangeAspect="1"/>
-          </p:cNvPicPr>
-          <p:nvPr/>
-        </p:nvPicPr>
-        <p:blipFill>
-          <a:blip r:embed="rId2"/>
-          <a:stretch>
-            <a:fillRect/>
-          </a:stretch>
-        </p:blipFill>
-        <p:spPr>
-          <a:xfrm>
-            <a:off x="457200" y="1645920"/>
-            <a:ext cx="6858000" cy="3130207"/>
-          </a:xfrm>
-          <a:prstGeom prst="rect">
-            <a:avLst/>
-          </a:prstGeom>
-        </p:spPr>
-      </p:pic>
-      <p:pic>
-        <p:nvPicPr>
-          <p:cNvPr id="8" name="Picture 7" descr="fig4_sample_eff.png"/>
+          <p:cNvPr id="7" name="Picture 6" descr="fig2_main.png"/>
           <p:cNvPicPr>
             <a:picLocks noChangeAspect="1"/>
           </p:cNvPicPr>
@@ -12499,8 +12386,8 @@
         </p:blipFill>
         <p:spPr>
           <a:xfrm>
-            <a:off x="7315200" y="1645920"/>
-            <a:ext cx="4572000" cy="2989531"/>
+            <a:off x="502920" y="1691640"/>
+            <a:ext cx="7589520" cy="4231526"/>
           </a:xfrm>
           <a:prstGeom prst="rect">
             <a:avLst/>
@@ -12509,14 +12396,14 @@
       </p:pic>
       <p:sp>
         <p:nvSpPr>
-          <p:cNvPr id="9" name="Rounded Rectangle 8"/>
+          <p:cNvPr id="8" name="Rounded Rectangle 7"/>
           <p:cNvSpPr/>
           <p:nvPr/>
         </p:nvSpPr>
         <p:spPr>
           <a:xfrm>
-            <a:off x="502920" y="5303520"/>
-            <a:ext cx="11185855" cy="1005840"/>
+            <a:off x="8321040" y="1737360"/>
+            <a:ext cx="3474720" cy="4114800"/>
           </a:xfrm>
           <a:prstGeom prst="roundRect">
             <a:avLst/>
@@ -12544,10 +12431,46 @@
           </a:fontRef>
         </p:style>
         <p:txBody>
-          <a:bodyPr rtlCol="0" anchor="ctr" lIns="45720" rIns="45720" tIns="27432" bIns="27432" wrap="square"/>
+          <a:bodyPr wrap="square" lIns="45720" tIns="27432" rIns="45720" bIns="27432" rtlCol="0" anchor="ctr"/>
           <a:lstStyle/>
           <a:p>
             <a:pPr algn="ctr"/>
+            <a:endParaRPr/>
+          </a:p>
+        </p:txBody>
+      </p:sp>
+      <p:sp>
+        <p:nvSpPr>
+          <p:cNvPr id="9" name="TextBox 8"/>
+          <p:cNvSpPr txBox="1"/>
+          <p:nvPr/>
+        </p:nvSpPr>
+        <p:spPr>
+          <a:xfrm>
+            <a:off x="8458200" y="1874519"/>
+            <a:ext cx="3200400" cy="365760"/>
+          </a:xfrm>
+          <a:prstGeom prst="rect">
+            <a:avLst/>
+          </a:prstGeom>
+          <a:noFill/>
+        </p:spPr>
+        <p:txBody>
+          <a:bodyPr wrap="square" lIns="45720" tIns="27432" rIns="45720" bIns="27432" anchor="t">
+            <a:spAutoFit/>
+          </a:bodyPr>
+          <a:lstStyle/>
+          <a:p>
+            <a:pPr algn="l"/>
+            <a:r>
+              <a:rPr sz="1200" b="1" i="0">
+                <a:solidFill>
+                  <a:srgbClr val="F96167"/>
+                </a:solidFill>
+                <a:latin typeface="Calibri"/>
+              </a:rPr>
+              <a:t>TAKEAWAYS</a:t>
+            </a:r>
           </a:p>
         </p:txBody>
       </p:sp>
@@ -12559,8 +12482,8 @@
         </p:nvSpPr>
         <p:spPr>
           <a:xfrm>
-            <a:off x="731520" y="5394960"/>
-            <a:ext cx="11185855" cy="365760"/>
+            <a:off x="8458200" y="2331720"/>
+            <a:ext cx="3200400" cy="3474720"/>
           </a:xfrm>
           <a:prstGeom prst="rect">
             <a:avLst/>
@@ -12568,20 +12491,120 @@
           <a:noFill/>
         </p:spPr>
         <p:txBody>
-          <a:bodyPr wrap="square" lIns="45720" rIns="45720" tIns="27432" bIns="27432" anchor="t">
+          <a:bodyPr wrap="square" lIns="45720" rIns="45720">
             <a:spAutoFit/>
           </a:bodyPr>
           <a:lstStyle/>
           <a:p>
-            <a:pPr algn="l"/>
+            <a:pPr algn="l">
+              <a:lnSpc>
+                <a:spcPct val="120000"/>
+              </a:lnSpc>
+              <a:spcAft>
+                <a:spcPts val="300"/>
+              </a:spcAft>
+            </a:pPr>
             <a:r>
               <a:rPr sz="1200" b="1" i="0">
                 <a:solidFill>
-                  <a:srgbClr val="F96167"/>
-                </a:solidFill>
-                <a:latin typeface="Calibri"/>
-              </a:rPr>
-              <a:t>KEY FINDINGS</a:t>
+                  <a:srgbClr val="1E2761"/>
+                </a:solidFill>
+                <a:latin typeface="Calibri"/>
+              </a:rPr>
+              <a:t>●  </a:t>
+            </a:r>
+            <a:r>
+              <a:rPr sz="1200" b="0" i="0">
+                <a:solidFill>
+                  <a:srgbClr val="36454F"/>
+                </a:solidFill>
+                <a:latin typeface="Calibri"/>
+              </a:rPr>
+              <a:t>ProtoNet strongest: 0.701 @ 5w5s.</a:t>
+            </a:r>
+          </a:p>
+          <a:p>
+            <a:pPr algn="l">
+              <a:lnSpc>
+                <a:spcPct val="120000"/>
+              </a:lnSpc>
+              <a:spcAft>
+                <a:spcPts val="300"/>
+              </a:spcAft>
+            </a:pPr>
+            <a:r>
+              <a:rPr sz="1200" b="1" i="0">
+                <a:solidFill>
+                  <a:srgbClr val="1E2761"/>
+                </a:solidFill>
+                <a:latin typeface="Calibri"/>
+              </a:rPr>
+              <a:t>●  </a:t>
+            </a:r>
+            <a:r>
+              <a:rPr sz="1200" b="0" i="0">
+                <a:solidFill>
+                  <a:srgbClr val="36454F"/>
+                </a:solidFill>
+                <a:latin typeface="Calibri"/>
+              </a:rPr>
+              <a:t>GoS 2nd — +6 pp over MAML.</a:t>
+            </a:r>
+          </a:p>
+          <a:p>
+            <a:pPr algn="l">
+              <a:lnSpc>
+                <a:spcPct val="120000"/>
+              </a:lnSpc>
+              <a:spcAft>
+                <a:spcPts val="300"/>
+              </a:spcAft>
+            </a:pPr>
+            <a:r>
+              <a:rPr sz="1200" b="1" i="0">
+                <a:solidFill>
+                  <a:srgbClr val="1E2761"/>
+                </a:solidFill>
+                <a:latin typeface="Calibri"/>
+              </a:rPr>
+              <a:t>●  </a:t>
+            </a:r>
+            <a:r>
+              <a:rPr sz="1200" b="0" i="0">
+                <a:solidFill>
+                  <a:srgbClr val="36454F"/>
+                </a:solidFill>
+                <a:latin typeface="Calibri"/>
+              </a:rPr>
+              <a:t>MAML ~ chance.</a:t>
+            </a:r>
+          </a:p>
+          <a:p>
+            <a:pPr algn="l">
+              <a:lnSpc>
+                <a:spcPct val="120000"/>
+              </a:lnSpc>
+              <a:spcAft>
+                <a:spcPts val="300"/>
+              </a:spcAft>
+            </a:pPr>
+            <a:r>
+              <a:rPr sz="1200" b="1" i="0">
+                <a:solidFill>
+                  <a:srgbClr val="1E2761"/>
+                </a:solidFill>
+                <a:latin typeface="Calibri"/>
+              </a:rPr>
+              <a:t>●  </a:t>
+            </a:r>
+            <a:r>
+              <a:rPr sz="1200" b="0" i="0">
+                <a:solidFill>
+                  <a:srgbClr val="36454F"/>
+                </a:solidFill>
+                <a:latin typeface="Calibri"/>
+              </a:rPr>
+              <a:t>GoS does NOT yet beat ProtoNet.</a:t>
             </a:r>
           </a:p>
         </p:txBody>
@@ -12594,8 +12617,8 @@
         </p:nvSpPr>
         <p:spPr>
           <a:xfrm>
-            <a:off x="731520" y="5760720"/>
-            <a:ext cx="10728655" cy="548640"/>
+            <a:off x="502920" y="6035040"/>
+            <a:ext cx="11185855" cy="365760"/>
           </a:xfrm>
           <a:prstGeom prst="rect">
             <a:avLst/>
@@ -12603,20 +12626,20 @@
           <a:noFill/>
         </p:spPr>
         <p:txBody>
-          <a:bodyPr wrap="square" lIns="45720" rIns="45720" tIns="27432" bIns="27432" anchor="t">
+          <a:bodyPr wrap="square" lIns="45720" tIns="27432" rIns="45720" bIns="27432" anchor="t">
             <a:spAutoFit/>
           </a:bodyPr>
           <a:lstStyle/>
           <a:p>
-            <a:pPr algn="l"/>
-            <a:r>
-              <a:rPr sz="1200" b="0" i="1">
-                <a:solidFill>
-                  <a:srgbClr val="36454F"/>
-                </a:solidFill>
-                <a:latin typeface="Calibri"/>
-              </a:rPr>
-              <a:t>Affinity barely matters (≤ 2 pp).    kNN matters a lot — k=3 &gt; k=5 &gt; k=10 &gt; dense (over-smoothing).    Both methods scale with K, but ProtoNet scales faster.</a:t>
+            <a:pPr algn="ctr"/>
+            <a:r>
+              <a:rPr sz="1100" b="0" i="1">
+                <a:solidFill>
+                  <a:srgbClr val="888A90"/>
+                </a:solidFill>
+                <a:latin typeface="Calibri"/>
+              </a:rPr>
+              <a:t>Merged pool: Tox21 + ToxCast + MUV + SIDER, 673 tasks, 405 / 134 / 134 split.</a:t>
             </a:r>
           </a:p>
         </p:txBody>
@@ -12950,7 +12973,7 @@
 </file>
 
 <file path=ppt/theme/theme2.xml><?xml version="1.0" encoding="utf-8"?>
-<a:theme xmlns:a="http://schemas.openxmlformats.org/drawingml/2006/main" name="Office Theme">
+<a:theme xmlns:a="http://schemas.openxmlformats.org/drawingml/2006/main" name="Office 主题​​">
   <a:themeElements>
     <a:clrScheme name="Office">
       <a:dk1>
@@ -12960,44 +12983,44 @@
         <a:sysClr val="window" lastClr="FFFFFF"/>
       </a:lt1>
       <a:dk2>
-        <a:srgbClr val="1F497D"/>
+        <a:srgbClr val="0E2841"/>
       </a:dk2>
       <a:lt2>
-        <a:srgbClr val="EEECE1"/>
+        <a:srgbClr val="E8E8E8"/>
       </a:lt2>
       <a:accent1>
-        <a:srgbClr val="4F81BD"/>
+        <a:srgbClr val="156082"/>
       </a:accent1>
       <a:accent2>
-        <a:srgbClr val="C0504D"/>
+        <a:srgbClr val="E97132"/>
       </a:accent2>
       <a:accent3>
-        <a:srgbClr val="9BBB59"/>
+        <a:srgbClr val="196B24"/>
       </a:accent3>
       <a:accent4>
-        <a:srgbClr val="8064A2"/>
+        <a:srgbClr val="0F9ED5"/>
       </a:accent4>
       <a:accent5>
-        <a:srgbClr val="4BACC6"/>
+        <a:srgbClr val="A02B93"/>
       </a:accent5>
       <a:accent6>
-        <a:srgbClr val="F79646"/>
+        <a:srgbClr val="4EA72E"/>
       </a:accent6>
       <a:hlink>
-        <a:srgbClr val="0000FF"/>
+        <a:srgbClr val="467886"/>
       </a:hlink>
       <a:folHlink>
-        <a:srgbClr val="800080"/>
+        <a:srgbClr val="96607D"/>
       </a:folHlink>
     </a:clrScheme>
     <a:fontScheme name="Office">
       <a:majorFont>
-        <a:latin typeface="Calibri"/>
+        <a:latin typeface="等线 Light" panose="02110004020202020204"/>
         <a:ea typeface=""/>
         <a:cs typeface=""/>
-        <a:font script="Jpan" typeface="ＭＳ Ｐゴシック"/>
+        <a:font script="Jpan" typeface="游ゴシック Light"/>
         <a:font script="Hang" typeface="맑은 고딕"/>
-        <a:font script="Hans" typeface="宋体"/>
+        <a:font script="Hans" typeface="等线 Light"/>
         <a:font script="Hant" typeface="新細明體"/>
         <a:font script="Arab" typeface="Times New Roman"/>
         <a:font script="Hebr" typeface="Times New Roman"/>
@@ -13025,14 +13048,31 @@
         <a:font script="Viet" typeface="Times New Roman"/>
         <a:font script="Uigh" typeface="Microsoft Uighur"/>
         <a:font script="Geor" typeface="Sylfaen"/>
+        <a:font script="Armn" typeface="Arial"/>
+        <a:font script="Bugi" typeface="Leelawadee UI"/>
+        <a:font script="Bopo" typeface="Microsoft JhengHei"/>
+        <a:font script="Java" typeface="Javanese Text"/>
+        <a:font script="Lisu" typeface="Segoe UI"/>
+        <a:font script="Mymr" typeface="Myanmar Text"/>
+        <a:font script="Nkoo" typeface="Ebrima"/>
+        <a:font script="Olck" typeface="Nirmala UI"/>
+        <a:font script="Osma" typeface="Ebrima"/>
+        <a:font script="Phag" typeface="Phagspa"/>
+        <a:font script="Syrn" typeface="Estrangelo Edessa"/>
+        <a:font script="Syrj" typeface="Estrangelo Edessa"/>
+        <a:font script="Syre" typeface="Estrangelo Edessa"/>
+        <a:font script="Sora" typeface="Nirmala UI"/>
+        <a:font script="Tale" typeface="Microsoft Tai Le"/>
+        <a:font script="Talu" typeface="Microsoft New Tai Lue"/>
+        <a:font script="Tfng" typeface="Ebrima"/>
       </a:majorFont>
       <a:minorFont>
-        <a:latin typeface="Calibri"/>
+        <a:latin typeface="等线" panose="02110004020202020204"/>
         <a:ea typeface=""/>
         <a:cs typeface=""/>
-        <a:font script="Jpan" typeface="ＭＳ Ｐゴシック"/>
+        <a:font script="Jpan" typeface="游ゴシック"/>
         <a:font script="Hang" typeface="맑은 고딕"/>
-        <a:font script="Hans" typeface="宋体"/>
+        <a:font script="Hans" typeface="等线"/>
         <a:font script="Hant" typeface="新細明體"/>
         <a:font script="Arab" typeface="Arial"/>
         <a:font script="Hebr" typeface="Arial"/>
@@ -13060,6 +13100,23 @@
         <a:font script="Viet" typeface="Arial"/>
         <a:font script="Uigh" typeface="Microsoft Uighur"/>
         <a:font script="Geor" typeface="Sylfaen"/>
+        <a:font script="Armn" typeface="Arial"/>
+        <a:font script="Bugi" typeface="Leelawadee UI"/>
+        <a:font script="Bopo" typeface="Microsoft JhengHei"/>
+        <a:font script="Java" typeface="Javanese Text"/>
+        <a:font script="Lisu" typeface="Segoe UI"/>
+        <a:font script="Mymr" typeface="Myanmar Text"/>
+        <a:font script="Nkoo" typeface="Ebrima"/>
+        <a:font script="Olck" typeface="Nirmala UI"/>
+        <a:font script="Osma" typeface="Ebrima"/>
+        <a:font script="Phag" typeface="Phagspa"/>
+        <a:font script="Syrn" typeface="Estrangelo Edessa"/>
+        <a:font script="Syrj" typeface="Estrangelo Edessa"/>
+        <a:font script="Syre" typeface="Estrangelo Edessa"/>
+        <a:font script="Sora" typeface="Nirmala UI"/>
+        <a:font script="Tale" typeface="Microsoft Tai Le"/>
+        <a:font script="Talu" typeface="Microsoft New Tai Lue"/>
+        <a:font script="Tfng" typeface="Ebrima"/>
       </a:minorFont>
     </a:fontScheme>
     <a:fmtScheme name="Office">
@@ -13071,180 +13128,136 @@
           <a:gsLst>
             <a:gs pos="0">
               <a:schemeClr val="phClr">
-                <a:tint val="50000"/>
-                <a:satMod val="300000"/>
+                <a:lumMod val="110000"/>
+                <a:satMod val="105000"/>
+                <a:tint val="67000"/>
               </a:schemeClr>
             </a:gs>
-            <a:gs pos="35000">
+            <a:gs pos="50000">
               <a:schemeClr val="phClr">
-                <a:tint val="37000"/>
-                <a:satMod val="300000"/>
+                <a:lumMod val="105000"/>
+                <a:satMod val="103000"/>
+                <a:tint val="73000"/>
               </a:schemeClr>
             </a:gs>
             <a:gs pos="100000">
               <a:schemeClr val="phClr">
-                <a:tint val="15000"/>
-                <a:satMod val="350000"/>
+                <a:lumMod val="105000"/>
+                <a:satMod val="109000"/>
+                <a:tint val="81000"/>
               </a:schemeClr>
             </a:gs>
           </a:gsLst>
-          <a:lin ang="16200000" scaled="1"/>
+          <a:lin ang="5400000" scaled="0"/>
         </a:gradFill>
         <a:gradFill rotWithShape="1">
           <a:gsLst>
             <a:gs pos="0">
               <a:schemeClr val="phClr">
-                <a:tint val="100000"/>
+                <a:satMod val="103000"/>
+                <a:lumMod val="102000"/>
+                <a:tint val="94000"/>
+              </a:schemeClr>
+            </a:gs>
+            <a:gs pos="50000">
+              <a:schemeClr val="phClr">
+                <a:satMod val="110000"/>
+                <a:lumMod val="100000"/>
                 <a:shade val="100000"/>
-                <a:satMod val="130000"/>
               </a:schemeClr>
             </a:gs>
             <a:gs pos="100000">
               <a:schemeClr val="phClr">
-                <a:tint val="50000"/>
-                <a:shade val="100000"/>
-                <a:satMod val="350000"/>
+                <a:lumMod val="99000"/>
+                <a:satMod val="120000"/>
+                <a:shade val="78000"/>
               </a:schemeClr>
             </a:gs>
           </a:gsLst>
-          <a:lin ang="16200000" scaled="0"/>
+          <a:lin ang="5400000" scaled="0"/>
         </a:gradFill>
       </a:fillStyleLst>
       <a:lnStyleLst>
-        <a:ln w="9525" cap="flat" cmpd="sng" algn="ctr">
+        <a:ln w="12700" cap="flat" cmpd="sng" algn="ctr">
           <a:solidFill>
-            <a:schemeClr val="phClr">
-              <a:shade val="95000"/>
-              <a:satMod val="105000"/>
-            </a:schemeClr>
+            <a:schemeClr val="phClr"/>
           </a:solidFill>
           <a:prstDash val="solid"/>
+          <a:miter lim="800000"/>
+        </a:ln>
+        <a:ln w="19050" cap="flat" cmpd="sng" algn="ctr">
+          <a:solidFill>
+            <a:schemeClr val="phClr"/>
+          </a:solidFill>
+          <a:prstDash val="solid"/>
+          <a:miter lim="800000"/>
         </a:ln>
         <a:ln w="25400" cap="flat" cmpd="sng" algn="ctr">
           <a:solidFill>
             <a:schemeClr val="phClr"/>
           </a:solidFill>
           <a:prstDash val="solid"/>
-        </a:ln>
-        <a:ln w="38100" cap="flat" cmpd="sng" algn="ctr">
-          <a:solidFill>
-            <a:schemeClr val="phClr"/>
-          </a:solidFill>
-          <a:prstDash val="solid"/>
+          <a:miter lim="800000"/>
         </a:ln>
       </a:lnStyleLst>
       <a:effectStyleLst>
         <a:effectStyle>
+          <a:effectLst/>
+        </a:effectStyle>
+        <a:effectStyle>
+          <a:effectLst/>
+        </a:effectStyle>
+        <a:effectStyle>
           <a:effectLst>
-            <a:outerShdw blurRad="40000" dist="20000" dir="5400000" rotWithShape="0">
+            <a:outerShdw blurRad="57150" dist="19050" dir="5400000" algn="ctr" rotWithShape="0">
               <a:srgbClr val="000000">
-                <a:alpha val="38000"/>
+                <a:alpha val="63000"/>
               </a:srgbClr>
             </a:outerShdw>
           </a:effectLst>
-        </a:effectStyle>
-        <a:effectStyle>
-          <a:effectLst>
-            <a:outerShdw blurRad="40000" dist="23000" dir="5400000" rotWithShape="0">
-              <a:srgbClr val="000000">
-                <a:alpha val="35000"/>
-              </a:srgbClr>
-            </a:outerShdw>
-          </a:effectLst>
-        </a:effectStyle>
-        <a:effectStyle>
-          <a:effectLst>
-            <a:outerShdw blurRad="40000" dist="23000" dir="5400000" rotWithShape="0">
-              <a:srgbClr val="000000">
-                <a:alpha val="35000"/>
-              </a:srgbClr>
-            </a:outerShdw>
-          </a:effectLst>
-          <a:scene3d>
-            <a:camera prst="orthographicFront">
-              <a:rot lat="0" lon="0" rev="0"/>
-            </a:camera>
-            <a:lightRig rig="threePt" dir="t">
-              <a:rot lat="0" lon="0" rev="1200000"/>
-            </a:lightRig>
-          </a:scene3d>
-          <a:sp3d>
-            <a:bevelT w="63500" h="25400"/>
-          </a:sp3d>
         </a:effectStyle>
       </a:effectStyleLst>
       <a:bgFillStyleLst>
         <a:solidFill>
           <a:schemeClr val="phClr"/>
         </a:solidFill>
+        <a:solidFill>
+          <a:schemeClr val="phClr">
+            <a:tint val="95000"/>
+            <a:satMod val="170000"/>
+          </a:schemeClr>
+        </a:solidFill>
         <a:gradFill rotWithShape="1">
           <a:gsLst>
             <a:gs pos="0">
               <a:schemeClr val="phClr">
-                <a:tint val="40000"/>
-                <a:satMod val="350000"/>
+                <a:tint val="93000"/>
+                <a:satMod val="150000"/>
+                <a:shade val="98000"/>
+                <a:lumMod val="102000"/>
               </a:schemeClr>
             </a:gs>
-            <a:gs pos="40000">
+            <a:gs pos="50000">
               <a:schemeClr val="phClr">
-                <a:tint val="45000"/>
-                <a:shade val="99000"/>
-                <a:satMod val="350000"/>
+                <a:tint val="98000"/>
+                <a:satMod val="130000"/>
+                <a:shade val="90000"/>
+                <a:lumMod val="103000"/>
               </a:schemeClr>
             </a:gs>
             <a:gs pos="100000">
               <a:schemeClr val="phClr">
-                <a:shade val="20000"/>
-                <a:satMod val="255000"/>
+                <a:shade val="63000"/>
+                <a:satMod val="120000"/>
               </a:schemeClr>
             </a:gs>
           </a:gsLst>
-          <a:path path="circle">
-            <a:fillToRect l="50000" t="-80000" r="50000" b="180000"/>
-          </a:path>
-        </a:gradFill>
-        <a:gradFill rotWithShape="1">
-          <a:gsLst>
-            <a:gs pos="0">
-              <a:schemeClr val="phClr">
-                <a:tint val="80000"/>
-                <a:satMod val="300000"/>
-              </a:schemeClr>
-            </a:gs>
-            <a:gs pos="100000">
-              <a:schemeClr val="phClr">
-                <a:shade val="30000"/>
-                <a:satMod val="200000"/>
-              </a:schemeClr>
-            </a:gs>
-          </a:gsLst>
-          <a:path path="circle">
-            <a:fillToRect l="50000" t="50000" r="50000" b="50000"/>
-          </a:path>
+          <a:lin ang="5400000" scaled="0"/>
         </a:gradFill>
       </a:bgFillStyleLst>
     </a:fmtScheme>
   </a:themeElements>
   <a:objectDefaults>
-    <a:spDef>
-      <a:spPr/>
-      <a:bodyPr/>
-      <a:lstStyle/>
-      <a:style>
-        <a:lnRef idx="1">
-          <a:schemeClr val="accent1"/>
-        </a:lnRef>
-        <a:fillRef idx="3">
-          <a:schemeClr val="accent1"/>
-        </a:fillRef>
-        <a:effectRef idx="2">
-          <a:schemeClr val="accent1"/>
-        </a:effectRef>
-        <a:fontRef idx="minor">
-          <a:schemeClr val="lt1"/>
-        </a:fontRef>
-      </a:style>
-    </a:spDef>
     <a:lnDef>
       <a:spPr/>
       <a:bodyPr/>
@@ -13266,5 +13279,10 @@
     </a:lnDef>
   </a:objectDefaults>
   <a:extraClrSchemeLst/>
+  <a:extLst>
+    <a:ext uri="{05A4C25C-085E-4340-85A3-A5531E510DB2}">
+      <thm15:themeFamily xmlns:thm15="http://schemas.microsoft.com/office/thememl/2012/main" name="Office Theme" id="{2E142A2C-CD16-42D6-873A-C26D2A0506FA}" vid="{1BDDFF52-6CD6-40A5-AB3C-68EB2F1E4D0A}"/>
+    </a:ext>
+  </a:extLst>
 </a:theme>
 </file>
--- a/presentation/Graph-of-Shots_new.pptx
+++ b/presentation/Graph-of-Shots_new.pptx
@@ -514,7 +514,7 @@
           <a:lstStyle/>
           <a:p>
             <a:r>
-              <a:t>Good afternoon — thanks for coming. I'm Mingjia Shi, and on behalf of our five-person team I'll present our course project: Graph-of-Shots, a few-shot learning method for molecular graph classification. I'll spend about 15 minutes walking through the motivation, our approach, the main result, and a few takeaways.</a:t>
+              <a:t>Opening. 15 minutes + 2–3 min Q&amp;A.</a:t>
             </a:r>
           </a:p>
         </p:txBody>
@@ -584,7 +584,7 @@
           <a:lstStyle/>
           <a:p>
             <a:r>
-              <a:t>Remaining three. A3: bipartite masking gives +0.6 over the full meta-graph. A4: lambda 0.1 is the sweet spot for the contrastive auxiliary loss. A5: SSL fine-tune is +2.2, but FREEZING the encoder loses 10 points. Don't freeze.</a:t>
+              <a:t>A3/A4/A5 each validate M3/M4/M5.</a:t>
             </a:r>
           </a:p>
         </p:txBody>
@@ -654,7 +654,7 @@
           <a:lstStyle/>
           <a:p>
             <a:r>
-              <a:t>Five takeaways. Motivation is real, ProtoNet is a strong starter, v1 lost to over-smoothing, v2 beats ProtoNet by 1-2 points across all three configs, and the two biggest levers are M1 residual and M5 SSL. Three transferable lessons: sparsification over expressivity; never use shared classifier heads in episodic training; at 0.70, the encoder is the bottleneck.</a:t>
+              <a:t>Summary.</a:t>
             </a:r>
           </a:p>
         </p:txBody>
@@ -724,7 +724,7 @@
           <a:lstStyle/>
           <a:p>
             <a:r>
-              <a:t>Thank you — questions welcome.</a:t>
+              <a:t>Q&amp;A.</a:t>
             </a:r>
           </a:p>
         </p:txBody>
@@ -794,7 +794,7 @@
           <a:lstStyle/>
           <a:p>
             <a:r>
-              <a:t>References used in the talk.</a:t>
+              <a:t>References.</a:t>
             </a:r>
           </a:p>
         </p:txBody>
@@ -864,7 +864,7 @@
           <a:lstStyle/>
           <a:p>
             <a:r>
-              <a:t>A typical bioassay has only a few hundred labeled molecules. Supervised GNNs overfit and don't transfer. Few-shot is the rule, not the exception. Our goal is to classify the rest given just K labels on a new assay.</a:t>
+              <a:t>Set the stage: label scarcity, supervised fails, few-shot natural.</a:t>
             </a:r>
           </a:p>
         </p:txBody>
@@ -934,7 +934,7 @@
           <a:lstStyle/>
           <a:p>
             <a:r>
-              <a:t>Standard episodic meta-learning. We split at the task level — 673 assays from merged MoleculeNet, 405/134/134 train/val/test — and sample N-way K-shot episodes.</a:t>
+              <a:t>673 tasks, task-level split.</a:t>
             </a:r>
           </a:p>
         </p:txBody>
@@ -1004,7 +1004,7 @@
           <a:lstStyle/>
           <a:p>
             <a:r>
-              <a:t>Two baselines. ProtoNet: mean-embedding prototypes, no persistent per-class params — episode-agnostic classifier. FOMAML: first-order MAML, learn a good init that adapts in a few SGD steps. Both use the same GINE encoder we'll introduce on the next slide so the comparison is fair.</a:t>
+              <a:t>Two baselines, shared encoder.</a:t>
             </a:r>
           </a:p>
         </p:txBody>
@@ -1074,7 +1074,7 @@
           <a:lstStyle/>
           <a:p>
             <a:r>
-              <a:t>Here is what GoS v1 does, stage by stage. Stage one: the MPNN encoder — three GINEConv layers plus global mean pooling — maps every episode molecule to a 128-d vector. That gives us M = N·K + Q node embeddings.  Stage two: we compute a full M-by-M affinity matrix W from those embeddings using cosine similarity, a bilinear kernel, or scaled dot-product attention.  Stage three: we sparsify — keep only each node's k = 5 strongest outgoing edges — because dense meta-graphs over-smooth and are computationally wasteful.  Stage four: we inject the support labels directly into the node features — support nodes get [h_i ; one-hot(y_i)], query nodes get [h_i ; 0].  Stage five: a two-layer weighted GCN propagates messages along the kNN edges, diffusing support labels to queries.  Stage six: a prototype head — scatter-mean the refined support embeddings per class, then classify queries by negative Euclidean distance to the prototypes. The encoder, the affinity module, and the meta-GNN are all trained jointly end-to-end. No per-class parameters anywhere.</a:t>
+              <a:t>GoS v1 stage by stage, with dimensions. Input is an episode of N·K support + Q query molecules. Stage 1, MPNN encoder: 3 × GINEConv plus global mean pool plus Linear — each molecule becomes a 128-dim vector. Concatenating support and query gives h_all of shape M by 128, where M = N·K + Q (about 41 in our 5w5s setting). Stage 2, pairwise affinity produces an M by M matrix — cosine, bilinear, or scaled dot-product attention. Stage 3, kNN sparsification keeps only the top-k edges per node — with k=5 and M=41 that's about 250 directed edges after mirroring. Stage 4, label injection: support nodes get their label as a one-hot vector concatenated to h; query nodes get zeros — so the node feature becomes [M, d + N]. Stage 5, a two-layer weighted GCN propagates: support labels diffuse to queries along high-similarity edges. Output z^L is [M, 128]. Stage 6, the prototype head: scatter-mean the support portion by class to get [N, 128] prototypes; classify queries by negative Euclidean distance, shape [Q, N], softmax. All trained end-to-end with cross-entropy on query labels.</a:t>
             </a:r>
           </a:p>
         </p:txBody>
@@ -1144,7 +1144,7 @@
           <a:lstStyle/>
           <a:p>
             <a:r>
-              <a:t>GoS v1 did not beat ProtoNet — trailed by 13 points at 5w5s. Three independent signals point at the same cause. kNN sparsification monotonically helps. ProtoNet on the bare encoder outperforms v1 — meaning the meta-GNN actively hurts. And changing the affinity kernel barely moves the number. Conclusion: the 2-layer weighted GCN over-smooths the encoder signal that ProtoNet could already separate. This gave us the checklist for v2: safety net, structural over-smoothing fix, stronger encoder.</a:t>
+              <a:t>v1 trailed ProtoNet by 13 pp. Three signals → over-smoothing destroys encoder signal.</a:t>
             </a:r>
           </a:p>
         </p:txBody>
@@ -1214,7 +1214,7 @@
           <a:lstStyle/>
           <a:p>
             <a:r>
-              <a:t>Now what v2 does. Same backbone, with five targeted modifications — red boxes. M5 at the top: before we even start episodic training, we pretrain the encoder with MolCLR-style contrastive self-supervision on all 110 000 meta-train molecules. Two random graph augmentations per molecule, InfoNCE objective. This gives phi a strong starting point. M3 inside the pipeline: we mask edges so that query nodes do NOT send messages — supports can refine each other and supports can send messages to queries, but query-originated edges are noise. M2 further along: replace the 2-layer GCN with a 1-layer GAT. Attention is self-normalising, so one hop is enough and over-smoothing is structurally prevented. The bottom row is the key design change, M1: compute TWO prototype sets — one from the raw encoder embeddings, one from the meta-GNN outputs — and mix with a learnable alpha. At alpha equals one, v2 recovers ProtoNet exactly — safety net. Finally, M4 is an auxiliary InfoNCE loss on support-query pairs, added to cross-entropy with a small weight lambda.</a:t>
+              <a:t>v2 is five targeted modifications, one per diagnosed failure. M5, top banner: MolCLR self-supervised pretraining before episodic training, because at 0.70 AUC the encoder is the bottleneck. +2.2 pp — our single biggest lever. M3, inside the pipeline: mask all edges originating from query nodes, because queries have no labels so their messages are pure noise. M2, further down: replace the 2-layer GCN with a 1-layer GAT — attention is self-normalising and resists over-smoothing, and one hop is enough for 40-node meta-graphs. M1, bottom row — the key design change: compute two prototype sets, one from the raw encoder and one from the meta-GNN, mix with learnable alpha. At α equals 1, v2 recovers ProtoNet exactly — so v2 is mathematically lower-bounded by ProtoNet; everything else is upside. Finally M4: add a small InfoNCE auxiliary loss on support-query pairs to directly shape embedding geometry. λ = 0.1 optimal.</a:t>
             </a:r>
           </a:p>
         </p:txBody>
@@ -1284,7 +1284,7 @@
           <a:lstStyle/>
           <a:p>
             <a:r>
-              <a:t>The main result. v2 plus SSL beats ProtoNet on every episodic configuration: +1.7 pp at 5w1s, +1.2 pp at 5w5s, +1.2 pp at 10w5s. Modest in absolute terms but consistent. SSL alone is responsible for 2.2 of those points. MAML stays at chance.</a:t>
+              <a:t>v2+SSL +1.2 to +1.7 pp over ProtoNet.</a:t>
             </a:r>
           </a:p>
         </p:txBody>
@@ -1354,7 +1354,7 @@
           <a:lstStyle/>
           <a:p>
             <a:r>
-              <a:t>Two ablations. A1 sweeps the residual alpha: α=0 drops to chance 0.500, while α in [0.3, 1.0] all sit around 0.72. Exactly the failure we diagnosed. A2 varies meta-GNN depth and type: 1-layer GAT wins at 0.7330. Deeper layers degrade, consistent with over-smoothing.</a:t>
+              <a:t>A1 validates M1, A2 validates M2.</a:t>
             </a:r>
           </a:p>
         </p:txBody>
@@ -6895,7 +6895,7 @@
                 </a:solidFill>
                 <a:latin typeface="Calibri"/>
               </a:rPr>
-              <a:t>screening assays typically have only 10² – 10³ labeled molecules, many missing.</a:t>
+              <a:t>bioassays typically have only 10² – 10³ labeled molecules, many missing.</a:t>
             </a:r>
           </a:p>
           <a:p>
@@ -9160,7 +9160,7 @@
                 </a:solidFill>
                 <a:latin typeface="Calibri"/>
               </a:rPr>
-              <a:t>GoS v1 — What the Pipeline Does</a:t>
+              <a:t>GoS v1 — What the Pipeline Does (with dimensions)</a:t>
             </a:r>
           </a:p>
         </p:txBody>
@@ -9251,8 +9251,8 @@
         </p:blipFill>
         <p:spPr>
           <a:xfrm>
-            <a:off x="182880" y="1554480"/>
-            <a:ext cx="11795760" cy="5239961"/>
+            <a:off x="182880" y="1508760"/>
+            <a:ext cx="11795760" cy="5403710"/>
           </a:xfrm>
           <a:prstGeom prst="rect">
             <a:avLst/>
@@ -9267,7 +9267,7 @@
         </p:nvSpPr>
         <p:spPr>
           <a:xfrm>
-            <a:off x="502920" y="6172200"/>
+            <a:off x="502920" y="6263640"/>
             <a:ext cx="11185855" cy="365760"/>
           </a:xfrm>
           <a:prstGeom prst="rect">
@@ -9289,7 +9289,7 @@
                 </a:solidFill>
                 <a:latin typeface="Calibri"/>
               </a:rPr>
-              <a:t>Six stages, trained end-to-end with cross-entropy on query predictions. Nodes in the meta-graph are MOLECULES (not atoms).</a:t>
+              <a:t>All modules trained jointly end-to-end.  Nodes in the meta-graph are MOLECULES (not atoms).  No persistent per-class parameters.</a:t>
             </a:r>
           </a:p>
         </p:txBody>
@@ -10049,7 +10049,7 @@
                 </a:solidFill>
                 <a:latin typeface="Calibri"/>
               </a:rPr>
-              <a:t>GoS v2 — What Changed</a:t>
+              <a:t>GoS v2 — What Changed, and Why</a:t>
             </a:r>
           </a:p>
         </p:txBody>
@@ -10156,7 +10156,7 @@
         </p:nvSpPr>
         <p:spPr>
           <a:xfrm>
-            <a:off x="502920" y="6309360"/>
+            <a:off x="502920" y="6355080"/>
             <a:ext cx="11185855" cy="365760"/>
           </a:xfrm>
           <a:prstGeom prst="rect">
@@ -10178,7 +10178,7 @@
                 </a:solidFill>
                 <a:latin typeface="Calibri"/>
               </a:rPr>
-              <a:t>Red boxes = the five modifications (M1 residual · M2 GAT · M3 bipartite · M4 contrastive · M5 SSL).  At α → 1, v2 recovers ProtoNet exactly.</a:t>
+              <a:t>Red boxes = the five modifications (M1 residual · M2 GAT · M3 bipartite · M4 contrastive · M5 SSL).  Each targets one failure mode diagnosed in slide 6.</a:t>
             </a:r>
           </a:p>
         </p:txBody>

--- a/presentation/Graph-of-Shots_new.pptx
+++ b/presentation/Graph-of-Shots_new.pptx
@@ -539,286 +539,6 @@
 </p:notes>
 </file>
 
-<file path=ppt/notesSlides/notesSlide10.xml><?xml version="1.0" encoding="utf-8"?>
-<p:notes xmlns:a="http://schemas.openxmlformats.org/drawingml/2006/main" xmlns:p="http://schemas.openxmlformats.org/presentationml/2006/main" xmlns:r="http://schemas.openxmlformats.org/officeDocument/2006/relationships">
-  <p:cSld>
-    <p:spTree>
-      <p:nvGrpSpPr>
-        <p:cNvPr id="1" name=""/>
-        <p:cNvGrpSpPr/>
-        <p:nvPr/>
-      </p:nvGrpSpPr>
-      <p:grpSpPr>
-        <a:xfrm>
-          <a:off x="0" y="0"/>
-          <a:ext cx="0" cy="0"/>
-          <a:chOff x="0" y="0"/>
-          <a:chExt cx="0" cy="0"/>
-        </a:xfrm>
-      </p:grpSpPr>
-      <p:sp>
-        <p:nvSpPr>
-          <p:cNvPr id="2" name="Slide Image Placeholder 1"/>
-          <p:cNvSpPr>
-            <a:spLocks noGrp="1"/>
-          </p:cNvSpPr>
-          <p:nvPr>
-            <p:ph type="sldImg" idx="2"/>
-          </p:nvPr>
-        </p:nvSpPr>
-        <p:spPr/>
-      </p:sp>
-      <p:sp>
-        <p:nvSpPr>
-          <p:cNvPr id="3" name="Notes Placeholder 2"/>
-          <p:cNvSpPr>
-            <a:spLocks noGrp="1"/>
-          </p:cNvSpPr>
-          <p:nvPr>
-            <p:ph type="body" idx="3" sz="quarter"/>
-          </p:nvPr>
-        </p:nvSpPr>
-        <p:spPr/>
-        <p:txBody>
-          <a:bodyPr/>
-          <a:lstStyle/>
-          <a:p>
-            <a:r>
-              <a:t>A3/A4/A5 each validate M3/M4/M5.</a:t>
-            </a:r>
-          </a:p>
-        </p:txBody>
-      </p:sp>
-      <p:sp>
-        <p:nvSpPr>
-          <p:cNvPr id="4" name="Slide Number Placeholder 3"/>
-          <p:cNvSpPr>
-            <a:spLocks noGrp="1"/>
-          </p:cNvSpPr>
-          <p:nvPr>
-            <p:ph type="sldNum" idx="5" sz="quarter"/>
-          </p:nvPr>
-        </p:nvSpPr>
-        <p:spPr/>
-      </p:sp>
-    </p:spTree>
-  </p:cSld>
-  <p:clrMapOvr>
-    <a:masterClrMapping/>
-  </p:clrMapOvr>
-</p:notes>
-</file>
-
-<file path=ppt/notesSlides/notesSlide11.xml><?xml version="1.0" encoding="utf-8"?>
-<p:notes xmlns:a="http://schemas.openxmlformats.org/drawingml/2006/main" xmlns:p="http://schemas.openxmlformats.org/presentationml/2006/main" xmlns:r="http://schemas.openxmlformats.org/officeDocument/2006/relationships">
-  <p:cSld>
-    <p:spTree>
-      <p:nvGrpSpPr>
-        <p:cNvPr id="1" name=""/>
-        <p:cNvGrpSpPr/>
-        <p:nvPr/>
-      </p:nvGrpSpPr>
-      <p:grpSpPr>
-        <a:xfrm>
-          <a:off x="0" y="0"/>
-          <a:ext cx="0" cy="0"/>
-          <a:chOff x="0" y="0"/>
-          <a:chExt cx="0" cy="0"/>
-        </a:xfrm>
-      </p:grpSpPr>
-      <p:sp>
-        <p:nvSpPr>
-          <p:cNvPr id="2" name="Slide Image Placeholder 1"/>
-          <p:cNvSpPr>
-            <a:spLocks noGrp="1"/>
-          </p:cNvSpPr>
-          <p:nvPr>
-            <p:ph type="sldImg" idx="2"/>
-          </p:nvPr>
-        </p:nvSpPr>
-        <p:spPr/>
-      </p:sp>
-      <p:sp>
-        <p:nvSpPr>
-          <p:cNvPr id="3" name="Notes Placeholder 2"/>
-          <p:cNvSpPr>
-            <a:spLocks noGrp="1"/>
-          </p:cNvSpPr>
-          <p:nvPr>
-            <p:ph type="body" idx="3" sz="quarter"/>
-          </p:nvPr>
-        </p:nvSpPr>
-        <p:spPr/>
-        <p:txBody>
-          <a:bodyPr/>
-          <a:lstStyle/>
-          <a:p>
-            <a:r>
-              <a:t>Summary.</a:t>
-            </a:r>
-          </a:p>
-        </p:txBody>
-      </p:sp>
-      <p:sp>
-        <p:nvSpPr>
-          <p:cNvPr id="4" name="Slide Number Placeholder 3"/>
-          <p:cNvSpPr>
-            <a:spLocks noGrp="1"/>
-          </p:cNvSpPr>
-          <p:nvPr>
-            <p:ph type="sldNum" idx="5" sz="quarter"/>
-          </p:nvPr>
-        </p:nvSpPr>
-        <p:spPr/>
-      </p:sp>
-    </p:spTree>
-  </p:cSld>
-  <p:clrMapOvr>
-    <a:masterClrMapping/>
-  </p:clrMapOvr>
-</p:notes>
-</file>
-
-<file path=ppt/notesSlides/notesSlide12.xml><?xml version="1.0" encoding="utf-8"?>
-<p:notes xmlns:a="http://schemas.openxmlformats.org/drawingml/2006/main" xmlns:p="http://schemas.openxmlformats.org/presentationml/2006/main" xmlns:r="http://schemas.openxmlformats.org/officeDocument/2006/relationships">
-  <p:cSld>
-    <p:spTree>
-      <p:nvGrpSpPr>
-        <p:cNvPr id="1" name=""/>
-        <p:cNvGrpSpPr/>
-        <p:nvPr/>
-      </p:nvGrpSpPr>
-      <p:grpSpPr>
-        <a:xfrm>
-          <a:off x="0" y="0"/>
-          <a:ext cx="0" cy="0"/>
-          <a:chOff x="0" y="0"/>
-          <a:chExt cx="0" cy="0"/>
-        </a:xfrm>
-      </p:grpSpPr>
-      <p:sp>
-        <p:nvSpPr>
-          <p:cNvPr id="2" name="Slide Image Placeholder 1"/>
-          <p:cNvSpPr>
-            <a:spLocks noGrp="1"/>
-          </p:cNvSpPr>
-          <p:nvPr>
-            <p:ph type="sldImg" idx="2"/>
-          </p:nvPr>
-        </p:nvSpPr>
-        <p:spPr/>
-      </p:sp>
-      <p:sp>
-        <p:nvSpPr>
-          <p:cNvPr id="3" name="Notes Placeholder 2"/>
-          <p:cNvSpPr>
-            <a:spLocks noGrp="1"/>
-          </p:cNvSpPr>
-          <p:nvPr>
-            <p:ph type="body" idx="3" sz="quarter"/>
-          </p:nvPr>
-        </p:nvSpPr>
-        <p:spPr/>
-        <p:txBody>
-          <a:bodyPr/>
-          <a:lstStyle/>
-          <a:p>
-            <a:r>
-              <a:t>Q&amp;A.</a:t>
-            </a:r>
-          </a:p>
-        </p:txBody>
-      </p:sp>
-      <p:sp>
-        <p:nvSpPr>
-          <p:cNvPr id="4" name="Slide Number Placeholder 3"/>
-          <p:cNvSpPr>
-            <a:spLocks noGrp="1"/>
-          </p:cNvSpPr>
-          <p:nvPr>
-            <p:ph type="sldNum" idx="5" sz="quarter"/>
-          </p:nvPr>
-        </p:nvSpPr>
-        <p:spPr/>
-      </p:sp>
-    </p:spTree>
-  </p:cSld>
-  <p:clrMapOvr>
-    <a:masterClrMapping/>
-  </p:clrMapOvr>
-</p:notes>
-</file>
-
-<file path=ppt/notesSlides/notesSlide13.xml><?xml version="1.0" encoding="utf-8"?>
-<p:notes xmlns:a="http://schemas.openxmlformats.org/drawingml/2006/main" xmlns:p="http://schemas.openxmlformats.org/presentationml/2006/main" xmlns:r="http://schemas.openxmlformats.org/officeDocument/2006/relationships">
-  <p:cSld>
-    <p:spTree>
-      <p:nvGrpSpPr>
-        <p:cNvPr id="1" name=""/>
-        <p:cNvGrpSpPr/>
-        <p:nvPr/>
-      </p:nvGrpSpPr>
-      <p:grpSpPr>
-        <a:xfrm>
-          <a:off x="0" y="0"/>
-          <a:ext cx="0" cy="0"/>
-          <a:chOff x="0" y="0"/>
-          <a:chExt cx="0" cy="0"/>
-        </a:xfrm>
-      </p:grpSpPr>
-      <p:sp>
-        <p:nvSpPr>
-          <p:cNvPr id="2" name="Slide Image Placeholder 1"/>
-          <p:cNvSpPr>
-            <a:spLocks noGrp="1"/>
-          </p:cNvSpPr>
-          <p:nvPr>
-            <p:ph type="sldImg" idx="2"/>
-          </p:nvPr>
-        </p:nvSpPr>
-        <p:spPr/>
-      </p:sp>
-      <p:sp>
-        <p:nvSpPr>
-          <p:cNvPr id="3" name="Notes Placeholder 2"/>
-          <p:cNvSpPr>
-            <a:spLocks noGrp="1"/>
-          </p:cNvSpPr>
-          <p:nvPr>
-            <p:ph type="body" idx="3" sz="quarter"/>
-          </p:nvPr>
-        </p:nvSpPr>
-        <p:spPr/>
-        <p:txBody>
-          <a:bodyPr/>
-          <a:lstStyle/>
-          <a:p>
-            <a:r>
-              <a:t>References.</a:t>
-            </a:r>
-          </a:p>
-        </p:txBody>
-      </p:sp>
-      <p:sp>
-        <p:nvSpPr>
-          <p:cNvPr id="4" name="Slide Number Placeholder 3"/>
-          <p:cNvSpPr>
-            <a:spLocks noGrp="1"/>
-          </p:cNvSpPr>
-          <p:nvPr>
-            <p:ph type="sldNum" idx="5" sz="quarter"/>
-          </p:nvPr>
-        </p:nvSpPr>
-        <p:spPr/>
-      </p:sp>
-    </p:spTree>
-  </p:cSld>
-  <p:clrMapOvr>
-    <a:masterClrMapping/>
-  </p:clrMapOvr>
-</p:notes>
-</file>
-
 <file path=ppt/notesSlides/notesSlide2.xml><?xml version="1.0" encoding="utf-8"?>
 <p:notes xmlns:a="http://schemas.openxmlformats.org/drawingml/2006/main" xmlns:p="http://schemas.openxmlformats.org/presentationml/2006/main" xmlns:r="http://schemas.openxmlformats.org/officeDocument/2006/relationships">
   <p:cSld>
@@ -864,7 +584,7 @@
           <a:lstStyle/>
           <a:p>
             <a:r>
-              <a:t>Set the stage: label scarcity, supervised fails, few-shot natural.</a:t>
+              <a:t>GoS v1 stage by stage with tensor shapes. Input: an episode of N·K support plus Q query molecules. Stage 1, the MPNN encoder produces h_s of shape [N·K, 128] and h_q of [Q, 128]. Stage 2, pairwise affinity gives W of shape [M, M] where M = N·K + Q. Stage 3, kNN keeps top-k edges per node, producing edge_index of shape [2, 2·M·k]. Stage 4, labels are injected: support nodes get [h; one-hot(y)], queries get [h; 0], so z^(0) has shape [M, d + N]. Stage 5, a 2-layer weighted GCN produces z^(L) of [M, 128]. Stage 6, the prototype head: scatter-mean support by class to get [N, 128] prototypes, classify queries by negative Euclidean distance giving logits of [Q, N], softmax to probabilities. End-to-end cross-entropy on query labels.</a:t>
             </a:r>
           </a:p>
         </p:txBody>
@@ -934,427 +654,7 @@
           <a:lstStyle/>
           <a:p>
             <a:r>
-              <a:t>673 tasks, task-level split.</a:t>
-            </a:r>
-          </a:p>
-        </p:txBody>
-      </p:sp>
-      <p:sp>
-        <p:nvSpPr>
-          <p:cNvPr id="4" name="Slide Number Placeholder 3"/>
-          <p:cNvSpPr>
-            <a:spLocks noGrp="1"/>
-          </p:cNvSpPr>
-          <p:nvPr>
-            <p:ph type="sldNum" idx="5" sz="quarter"/>
-          </p:nvPr>
-        </p:nvSpPr>
-        <p:spPr/>
-      </p:sp>
-    </p:spTree>
-  </p:cSld>
-  <p:clrMapOvr>
-    <a:masterClrMapping/>
-  </p:clrMapOvr>
-</p:notes>
-</file>
-
-<file path=ppt/notesSlides/notesSlide4.xml><?xml version="1.0" encoding="utf-8"?>
-<p:notes xmlns:a="http://schemas.openxmlformats.org/drawingml/2006/main" xmlns:p="http://schemas.openxmlformats.org/presentationml/2006/main" xmlns:r="http://schemas.openxmlformats.org/officeDocument/2006/relationships">
-  <p:cSld>
-    <p:spTree>
-      <p:nvGrpSpPr>
-        <p:cNvPr id="1" name=""/>
-        <p:cNvGrpSpPr/>
-        <p:nvPr/>
-      </p:nvGrpSpPr>
-      <p:grpSpPr>
-        <a:xfrm>
-          <a:off x="0" y="0"/>
-          <a:ext cx="0" cy="0"/>
-          <a:chOff x="0" y="0"/>
-          <a:chExt cx="0" cy="0"/>
-        </a:xfrm>
-      </p:grpSpPr>
-      <p:sp>
-        <p:nvSpPr>
-          <p:cNvPr id="2" name="Slide Image Placeholder 1"/>
-          <p:cNvSpPr>
-            <a:spLocks noGrp="1"/>
-          </p:cNvSpPr>
-          <p:nvPr>
-            <p:ph type="sldImg" idx="2"/>
-          </p:nvPr>
-        </p:nvSpPr>
-        <p:spPr/>
-      </p:sp>
-      <p:sp>
-        <p:nvSpPr>
-          <p:cNvPr id="3" name="Notes Placeholder 2"/>
-          <p:cNvSpPr>
-            <a:spLocks noGrp="1"/>
-          </p:cNvSpPr>
-          <p:nvPr>
-            <p:ph type="body" idx="3" sz="quarter"/>
-          </p:nvPr>
-        </p:nvSpPr>
-        <p:spPr/>
-        <p:txBody>
-          <a:bodyPr/>
-          <a:lstStyle/>
-          <a:p>
-            <a:r>
-              <a:t>Two baselines, shared encoder.</a:t>
-            </a:r>
-          </a:p>
-        </p:txBody>
-      </p:sp>
-      <p:sp>
-        <p:nvSpPr>
-          <p:cNvPr id="4" name="Slide Number Placeholder 3"/>
-          <p:cNvSpPr>
-            <a:spLocks noGrp="1"/>
-          </p:cNvSpPr>
-          <p:nvPr>
-            <p:ph type="sldNum" idx="5" sz="quarter"/>
-          </p:nvPr>
-        </p:nvSpPr>
-        <p:spPr/>
-      </p:sp>
-    </p:spTree>
-  </p:cSld>
-  <p:clrMapOvr>
-    <a:masterClrMapping/>
-  </p:clrMapOvr>
-</p:notes>
-</file>
-
-<file path=ppt/notesSlides/notesSlide5.xml><?xml version="1.0" encoding="utf-8"?>
-<p:notes xmlns:a="http://schemas.openxmlformats.org/drawingml/2006/main" xmlns:p="http://schemas.openxmlformats.org/presentationml/2006/main" xmlns:r="http://schemas.openxmlformats.org/officeDocument/2006/relationships">
-  <p:cSld>
-    <p:spTree>
-      <p:nvGrpSpPr>
-        <p:cNvPr id="1" name=""/>
-        <p:cNvGrpSpPr/>
-        <p:nvPr/>
-      </p:nvGrpSpPr>
-      <p:grpSpPr>
-        <a:xfrm>
-          <a:off x="0" y="0"/>
-          <a:ext cx="0" cy="0"/>
-          <a:chOff x="0" y="0"/>
-          <a:chExt cx="0" cy="0"/>
-        </a:xfrm>
-      </p:grpSpPr>
-      <p:sp>
-        <p:nvSpPr>
-          <p:cNvPr id="2" name="Slide Image Placeholder 1"/>
-          <p:cNvSpPr>
-            <a:spLocks noGrp="1"/>
-          </p:cNvSpPr>
-          <p:nvPr>
-            <p:ph type="sldImg" idx="2"/>
-          </p:nvPr>
-        </p:nvSpPr>
-        <p:spPr/>
-      </p:sp>
-      <p:sp>
-        <p:nvSpPr>
-          <p:cNvPr id="3" name="Notes Placeholder 2"/>
-          <p:cNvSpPr>
-            <a:spLocks noGrp="1"/>
-          </p:cNvSpPr>
-          <p:nvPr>
-            <p:ph type="body" idx="3" sz="quarter"/>
-          </p:nvPr>
-        </p:nvSpPr>
-        <p:spPr/>
-        <p:txBody>
-          <a:bodyPr/>
-          <a:lstStyle/>
-          <a:p>
-            <a:r>
-              <a:t>GoS v1 stage by stage, with dimensions. Input is an episode of N·K support + Q query molecules. Stage 1, MPNN encoder: 3 × GINEConv plus global mean pool plus Linear — each molecule becomes a 128-dim vector. Concatenating support and query gives h_all of shape M by 128, where M = N·K + Q (about 41 in our 5w5s setting). Stage 2, pairwise affinity produces an M by M matrix — cosine, bilinear, or scaled dot-product attention. Stage 3, kNN sparsification keeps only the top-k edges per node — with k=5 and M=41 that's about 250 directed edges after mirroring. Stage 4, label injection: support nodes get their label as a one-hot vector concatenated to h; query nodes get zeros — so the node feature becomes [M, d + N]. Stage 5, a two-layer weighted GCN propagates: support labels diffuse to queries along high-similarity edges. Output z^L is [M, 128]. Stage 6, the prototype head: scatter-mean the support portion by class to get [N, 128] prototypes; classify queries by negative Euclidean distance, shape [Q, N], softmax. All trained end-to-end with cross-entropy on query labels.</a:t>
-            </a:r>
-          </a:p>
-        </p:txBody>
-      </p:sp>
-      <p:sp>
-        <p:nvSpPr>
-          <p:cNvPr id="4" name="Slide Number Placeholder 3"/>
-          <p:cNvSpPr>
-            <a:spLocks noGrp="1"/>
-          </p:cNvSpPr>
-          <p:nvPr>
-            <p:ph type="sldNum" idx="5" sz="quarter"/>
-          </p:nvPr>
-        </p:nvSpPr>
-        <p:spPr/>
-      </p:sp>
-    </p:spTree>
-  </p:cSld>
-  <p:clrMapOvr>
-    <a:masterClrMapping/>
-  </p:clrMapOvr>
-</p:notes>
-</file>
-
-<file path=ppt/notesSlides/notesSlide6.xml><?xml version="1.0" encoding="utf-8"?>
-<p:notes xmlns:a="http://schemas.openxmlformats.org/drawingml/2006/main" xmlns:p="http://schemas.openxmlformats.org/presentationml/2006/main" xmlns:r="http://schemas.openxmlformats.org/officeDocument/2006/relationships">
-  <p:cSld>
-    <p:spTree>
-      <p:nvGrpSpPr>
-        <p:cNvPr id="1" name=""/>
-        <p:cNvGrpSpPr/>
-        <p:nvPr/>
-      </p:nvGrpSpPr>
-      <p:grpSpPr>
-        <a:xfrm>
-          <a:off x="0" y="0"/>
-          <a:ext cx="0" cy="0"/>
-          <a:chOff x="0" y="0"/>
-          <a:chExt cx="0" cy="0"/>
-        </a:xfrm>
-      </p:grpSpPr>
-      <p:sp>
-        <p:nvSpPr>
-          <p:cNvPr id="2" name="Slide Image Placeholder 1"/>
-          <p:cNvSpPr>
-            <a:spLocks noGrp="1"/>
-          </p:cNvSpPr>
-          <p:nvPr>
-            <p:ph type="sldImg" idx="2"/>
-          </p:nvPr>
-        </p:nvSpPr>
-        <p:spPr/>
-      </p:sp>
-      <p:sp>
-        <p:nvSpPr>
-          <p:cNvPr id="3" name="Notes Placeholder 2"/>
-          <p:cNvSpPr>
-            <a:spLocks noGrp="1"/>
-          </p:cNvSpPr>
-          <p:nvPr>
-            <p:ph type="body" idx="3" sz="quarter"/>
-          </p:nvPr>
-        </p:nvSpPr>
-        <p:spPr/>
-        <p:txBody>
-          <a:bodyPr/>
-          <a:lstStyle/>
-          <a:p>
-            <a:r>
-              <a:t>v1 trailed ProtoNet by 13 pp. Three signals → over-smoothing destroys encoder signal.</a:t>
-            </a:r>
-          </a:p>
-        </p:txBody>
-      </p:sp>
-      <p:sp>
-        <p:nvSpPr>
-          <p:cNvPr id="4" name="Slide Number Placeholder 3"/>
-          <p:cNvSpPr>
-            <a:spLocks noGrp="1"/>
-          </p:cNvSpPr>
-          <p:nvPr>
-            <p:ph type="sldNum" idx="5" sz="quarter"/>
-          </p:nvPr>
-        </p:nvSpPr>
-        <p:spPr/>
-      </p:sp>
-    </p:spTree>
-  </p:cSld>
-  <p:clrMapOvr>
-    <a:masterClrMapping/>
-  </p:clrMapOvr>
-</p:notes>
-</file>
-
-<file path=ppt/notesSlides/notesSlide7.xml><?xml version="1.0" encoding="utf-8"?>
-<p:notes xmlns:a="http://schemas.openxmlformats.org/drawingml/2006/main" xmlns:p="http://schemas.openxmlformats.org/presentationml/2006/main" xmlns:r="http://schemas.openxmlformats.org/officeDocument/2006/relationships">
-  <p:cSld>
-    <p:spTree>
-      <p:nvGrpSpPr>
-        <p:cNvPr id="1" name=""/>
-        <p:cNvGrpSpPr/>
-        <p:nvPr/>
-      </p:nvGrpSpPr>
-      <p:grpSpPr>
-        <a:xfrm>
-          <a:off x="0" y="0"/>
-          <a:ext cx="0" cy="0"/>
-          <a:chOff x="0" y="0"/>
-          <a:chExt cx="0" cy="0"/>
-        </a:xfrm>
-      </p:grpSpPr>
-      <p:sp>
-        <p:nvSpPr>
-          <p:cNvPr id="2" name="Slide Image Placeholder 1"/>
-          <p:cNvSpPr>
-            <a:spLocks noGrp="1"/>
-          </p:cNvSpPr>
-          <p:nvPr>
-            <p:ph type="sldImg" idx="2"/>
-          </p:nvPr>
-        </p:nvSpPr>
-        <p:spPr/>
-      </p:sp>
-      <p:sp>
-        <p:nvSpPr>
-          <p:cNvPr id="3" name="Notes Placeholder 2"/>
-          <p:cNvSpPr>
-            <a:spLocks noGrp="1"/>
-          </p:cNvSpPr>
-          <p:nvPr>
-            <p:ph type="body" idx="3" sz="quarter"/>
-          </p:nvPr>
-        </p:nvSpPr>
-        <p:spPr/>
-        <p:txBody>
-          <a:bodyPr/>
-          <a:lstStyle/>
-          <a:p>
-            <a:r>
-              <a:t>v2 is five targeted modifications, one per diagnosed failure. M5, top banner: MolCLR self-supervised pretraining before episodic training, because at 0.70 AUC the encoder is the bottleneck. +2.2 pp — our single biggest lever. M3, inside the pipeline: mask all edges originating from query nodes, because queries have no labels so their messages are pure noise. M2, further down: replace the 2-layer GCN with a 1-layer GAT — attention is self-normalising and resists over-smoothing, and one hop is enough for 40-node meta-graphs. M1, bottom row — the key design change: compute two prototype sets, one from the raw encoder and one from the meta-GNN, mix with learnable alpha. At α equals 1, v2 recovers ProtoNet exactly — so v2 is mathematically lower-bounded by ProtoNet; everything else is upside. Finally M4: add a small InfoNCE auxiliary loss on support-query pairs to directly shape embedding geometry. λ = 0.1 optimal.</a:t>
-            </a:r>
-          </a:p>
-        </p:txBody>
-      </p:sp>
-      <p:sp>
-        <p:nvSpPr>
-          <p:cNvPr id="4" name="Slide Number Placeholder 3"/>
-          <p:cNvSpPr>
-            <a:spLocks noGrp="1"/>
-          </p:cNvSpPr>
-          <p:nvPr>
-            <p:ph type="sldNum" idx="5" sz="quarter"/>
-          </p:nvPr>
-        </p:nvSpPr>
-        <p:spPr/>
-      </p:sp>
-    </p:spTree>
-  </p:cSld>
-  <p:clrMapOvr>
-    <a:masterClrMapping/>
-  </p:clrMapOvr>
-</p:notes>
-</file>
-
-<file path=ppt/notesSlides/notesSlide8.xml><?xml version="1.0" encoding="utf-8"?>
-<p:notes xmlns:a="http://schemas.openxmlformats.org/drawingml/2006/main" xmlns:p="http://schemas.openxmlformats.org/presentationml/2006/main" xmlns:r="http://schemas.openxmlformats.org/officeDocument/2006/relationships">
-  <p:cSld>
-    <p:spTree>
-      <p:nvGrpSpPr>
-        <p:cNvPr id="1" name=""/>
-        <p:cNvGrpSpPr/>
-        <p:nvPr/>
-      </p:nvGrpSpPr>
-      <p:grpSpPr>
-        <a:xfrm>
-          <a:off x="0" y="0"/>
-          <a:ext cx="0" cy="0"/>
-          <a:chOff x="0" y="0"/>
-          <a:chExt cx="0" cy="0"/>
-        </a:xfrm>
-      </p:grpSpPr>
-      <p:sp>
-        <p:nvSpPr>
-          <p:cNvPr id="2" name="Slide Image Placeholder 1"/>
-          <p:cNvSpPr>
-            <a:spLocks noGrp="1"/>
-          </p:cNvSpPr>
-          <p:nvPr>
-            <p:ph type="sldImg" idx="2"/>
-          </p:nvPr>
-        </p:nvSpPr>
-        <p:spPr/>
-      </p:sp>
-      <p:sp>
-        <p:nvSpPr>
-          <p:cNvPr id="3" name="Notes Placeholder 2"/>
-          <p:cNvSpPr>
-            <a:spLocks noGrp="1"/>
-          </p:cNvSpPr>
-          <p:nvPr>
-            <p:ph type="body" idx="3" sz="quarter"/>
-          </p:nvPr>
-        </p:nvSpPr>
-        <p:spPr/>
-        <p:txBody>
-          <a:bodyPr/>
-          <a:lstStyle/>
-          <a:p>
-            <a:r>
-              <a:t>v2+SSL +1.2 to +1.7 pp over ProtoNet.</a:t>
-            </a:r>
-          </a:p>
-        </p:txBody>
-      </p:sp>
-      <p:sp>
-        <p:nvSpPr>
-          <p:cNvPr id="4" name="Slide Number Placeholder 3"/>
-          <p:cNvSpPr>
-            <a:spLocks noGrp="1"/>
-          </p:cNvSpPr>
-          <p:nvPr>
-            <p:ph type="sldNum" idx="5" sz="quarter"/>
-          </p:nvPr>
-        </p:nvSpPr>
-        <p:spPr/>
-      </p:sp>
-    </p:spTree>
-  </p:cSld>
-  <p:clrMapOvr>
-    <a:masterClrMapping/>
-  </p:clrMapOvr>
-</p:notes>
-</file>
-
-<file path=ppt/notesSlides/notesSlide9.xml><?xml version="1.0" encoding="utf-8"?>
-<p:notes xmlns:a="http://schemas.openxmlformats.org/drawingml/2006/main" xmlns:p="http://schemas.openxmlformats.org/presentationml/2006/main" xmlns:r="http://schemas.openxmlformats.org/officeDocument/2006/relationships">
-  <p:cSld>
-    <p:spTree>
-      <p:nvGrpSpPr>
-        <p:cNvPr id="1" name=""/>
-        <p:cNvGrpSpPr/>
-        <p:nvPr/>
-      </p:nvGrpSpPr>
-      <p:grpSpPr>
-        <a:xfrm>
-          <a:off x="0" y="0"/>
-          <a:ext cx="0" cy="0"/>
-          <a:chOff x="0" y="0"/>
-          <a:chExt cx="0" cy="0"/>
-        </a:xfrm>
-      </p:grpSpPr>
-      <p:sp>
-        <p:nvSpPr>
-          <p:cNvPr id="2" name="Slide Image Placeholder 1"/>
-          <p:cNvSpPr>
-            <a:spLocks noGrp="1"/>
-          </p:cNvSpPr>
-          <p:nvPr>
-            <p:ph type="sldImg" idx="2"/>
-          </p:nvPr>
-        </p:nvSpPr>
-        <p:spPr/>
-      </p:sp>
-      <p:sp>
-        <p:nvSpPr>
-          <p:cNvPr id="3" name="Notes Placeholder 2"/>
-          <p:cNvSpPr>
-            <a:spLocks noGrp="1"/>
-          </p:cNvSpPr>
-          <p:nvPr>
-            <p:ph type="body" idx="3" sz="quarter"/>
-          </p:nvPr>
-        </p:nvSpPr>
-        <p:spPr/>
-        <p:txBody>
-          <a:bodyPr/>
-          <a:lstStyle/>
-          <a:p>
-            <a:r>
-              <a:t>A1 validates M1, A2 validates M2.</a:t>
+              <a:t>v2 is five targeted modifications. M5 up top: MolCLR-style SSL pretrain the encoder before episodic training; motivation is that at 0.71 ProtoNet, the encoder is the bottleneck. +2.2 pp. M3 in the middle: drop all edges originating from query nodes since queries have no labels and their messages are pure noise. M2 next to it: one GAT layer replaces two GCN layers because attention's softmax bounds message mass and prevents over-smoothing. M1 on the bottom — the safety net: compute two prototype sets, one from raw encoder, one from meta-GNN, mix with learnable alpha. At alpha equals 1, v2 recovers ProtoNet exactly, so v2 cannot do worse than ProtoNet. Finally M4: a small auxiliary InfoNCE contrastive loss on support-query pairs, λ=0.1, which directly shapes embedding geometry.</a:t>
             </a:r>
           </a:p>
         </p:txBody>
@@ -4429,7 +3729,7 @@
           <a:noFill/>
         </p:spPr>
         <p:txBody>
-          <a:bodyPr wrap="square" lIns="45720" rIns="45720" tIns="27432" bIns="27432" anchor="t">
+          <a:bodyPr wrap="square" lIns="27432" rIns="27432" tIns="18288" bIns="18288" anchor="t">
             <a:spAutoFit/>
           </a:bodyPr>
           <a:lstStyle/>
@@ -4464,7 +3764,7 @@
           <a:noFill/>
         </p:spPr>
         <p:txBody>
-          <a:bodyPr wrap="square" lIns="45720" rIns="45720" tIns="27432" bIns="27432" anchor="t">
+          <a:bodyPr wrap="square" lIns="27432" rIns="27432" tIns="18288" bIns="18288" anchor="t">
             <a:spAutoFit/>
           </a:bodyPr>
           <a:lstStyle/>
@@ -4499,7 +3799,7 @@
           <a:noFill/>
         </p:spPr>
         <p:txBody>
-          <a:bodyPr wrap="square" lIns="45720" rIns="45720" tIns="27432" bIns="27432" anchor="t">
+          <a:bodyPr wrap="square" lIns="27432" rIns="27432" tIns="18288" bIns="18288" anchor="t">
             <a:spAutoFit/>
           </a:bodyPr>
           <a:lstStyle/>
@@ -4534,7 +3834,7 @@
           <a:noFill/>
         </p:spPr>
         <p:txBody>
-          <a:bodyPr wrap="square" lIns="45720" rIns="45720" tIns="27432" bIns="27432" anchor="t">
+          <a:bodyPr wrap="square" lIns="27432" rIns="27432" tIns="18288" bIns="18288" anchor="t">
             <a:spAutoFit/>
           </a:bodyPr>
           <a:lstStyle/>
@@ -4569,7 +3869,7 @@
           <a:noFill/>
         </p:spPr>
         <p:txBody>
-          <a:bodyPr wrap="square" lIns="45720" rIns="45720" tIns="27432" bIns="27432" anchor="t">
+          <a:bodyPr wrap="square" lIns="27432" rIns="27432" tIns="18288" bIns="18288" anchor="t">
             <a:spAutoFit/>
           </a:bodyPr>
           <a:lstStyle/>
@@ -4604,7 +3904,7 @@
           <a:noFill/>
         </p:spPr>
         <p:txBody>
-          <a:bodyPr wrap="square" lIns="45720" rIns="45720" tIns="27432" bIns="27432" anchor="t">
+          <a:bodyPr wrap="square" lIns="27432" rIns="27432" tIns="18288" bIns="18288" anchor="t">
             <a:spAutoFit/>
           </a:bodyPr>
           <a:lstStyle/>
@@ -4639,7 +3939,7 @@
           <a:noFill/>
         </p:spPr>
         <p:txBody>
-          <a:bodyPr wrap="square" lIns="45720" rIns="45720" tIns="27432" bIns="27432" anchor="t">
+          <a:bodyPr wrap="square" lIns="27432" rIns="27432" tIns="18288" bIns="18288" anchor="t">
             <a:spAutoFit/>
           </a:bodyPr>
           <a:lstStyle/>
@@ -4797,7 +4097,7 @@
           <a:noFill/>
         </p:spPr>
         <p:txBody>
-          <a:bodyPr wrap="square" lIns="45720" rIns="45720" tIns="27432" bIns="27432" anchor="t">
+          <a:bodyPr wrap="square" lIns="27432" rIns="27432" tIns="18288" bIns="18288" anchor="t">
             <a:spAutoFit/>
           </a:bodyPr>
           <a:lstStyle/>
@@ -4832,7 +4132,7 @@
           <a:noFill/>
         </p:spPr>
         <p:txBody>
-          <a:bodyPr wrap="square" lIns="45720" rIns="45720" tIns="27432" bIns="27432" anchor="t">
+          <a:bodyPr wrap="square" lIns="27432" rIns="27432" tIns="18288" bIns="18288" anchor="t">
             <a:spAutoFit/>
           </a:bodyPr>
           <a:lstStyle/>
@@ -4867,7 +4167,7 @@
           <a:noFill/>
         </p:spPr>
         <p:txBody>
-          <a:bodyPr wrap="square" lIns="45720" rIns="45720" tIns="27432" bIns="27432" anchor="t">
+          <a:bodyPr wrap="square" lIns="27432" rIns="27432" tIns="18288" bIns="18288" anchor="t">
             <a:spAutoFit/>
           </a:bodyPr>
           <a:lstStyle/>
@@ -5018,7 +4318,7 @@
           <a:noFill/>
         </p:spPr>
         <p:txBody>
-          <a:bodyPr wrap="square" lIns="45720" rIns="45720" tIns="27432" bIns="27432" anchor="t">
+          <a:bodyPr wrap="square" lIns="27432" rIns="27432" tIns="18288" bIns="18288" anchor="t">
             <a:spAutoFit/>
           </a:bodyPr>
           <a:lstStyle/>
@@ -5053,7 +4353,7 @@
           <a:noFill/>
         </p:spPr>
         <p:txBody>
-          <a:bodyPr wrap="square" lIns="45720" rIns="45720" tIns="27432" bIns="27432" anchor="t">
+          <a:bodyPr wrap="square" lIns="27432" rIns="27432" tIns="18288" bIns="18288" anchor="t">
             <a:spAutoFit/>
           </a:bodyPr>
           <a:lstStyle/>
@@ -5211,7 +4511,7 @@
           <a:noFill/>
         </p:spPr>
         <p:txBody>
-          <a:bodyPr wrap="square" lIns="45720" rIns="45720" tIns="27432" bIns="27432" anchor="t">
+          <a:bodyPr wrap="square" lIns="27432" rIns="27432" tIns="18288" bIns="18288" anchor="t">
             <a:spAutoFit/>
           </a:bodyPr>
           <a:lstStyle/>
@@ -5246,7 +4546,7 @@
           <a:noFill/>
         </p:spPr>
         <p:txBody>
-          <a:bodyPr wrap="square" lIns="45720" rIns="45720" tIns="27432" bIns="27432" anchor="t">
+          <a:bodyPr wrap="square" lIns="27432" rIns="27432" tIns="18288" bIns="18288" anchor="t">
             <a:spAutoFit/>
           </a:bodyPr>
           <a:lstStyle/>
@@ -5281,7 +4581,7 @@
           <a:noFill/>
         </p:spPr>
         <p:txBody>
-          <a:bodyPr wrap="square" lIns="45720" rIns="45720" tIns="27432" bIns="27432" anchor="t">
+          <a:bodyPr wrap="square" lIns="27432" rIns="27432" tIns="18288" bIns="18288" anchor="t">
             <a:spAutoFit/>
           </a:bodyPr>
           <a:lstStyle/>
@@ -5717,7 +5017,7 @@
           <a:noFill/>
         </p:spPr>
         <p:txBody>
-          <a:bodyPr wrap="square" lIns="45720" rIns="45720" tIns="27432" bIns="27432" anchor="t">
+          <a:bodyPr wrap="square" lIns="27432" rIns="27432" tIns="18288" bIns="18288" anchor="t">
             <a:spAutoFit/>
           </a:bodyPr>
           <a:lstStyle/>
@@ -5752,7 +5052,7 @@
           <a:noFill/>
         </p:spPr>
         <p:txBody>
-          <a:bodyPr wrap="square" lIns="45720" rIns="45720" tIns="27432" bIns="27432" anchor="t">
+          <a:bodyPr wrap="square" lIns="27432" rIns="27432" tIns="18288" bIns="18288" anchor="t">
             <a:spAutoFit/>
           </a:bodyPr>
           <a:lstStyle/>
@@ -5787,7 +5087,7 @@
           <a:noFill/>
         </p:spPr>
         <p:txBody>
-          <a:bodyPr wrap="square" lIns="45720" rIns="45720" tIns="27432" bIns="27432" anchor="t">
+          <a:bodyPr wrap="square" lIns="27432" rIns="27432" tIns="18288" bIns="18288" anchor="t">
             <a:spAutoFit/>
           </a:bodyPr>
           <a:lstStyle/>
@@ -5822,7 +5122,7 @@
           <a:noFill/>
         </p:spPr>
         <p:txBody>
-          <a:bodyPr wrap="square" lIns="45720" rIns="45720" tIns="27432" bIns="27432" anchor="t">
+          <a:bodyPr wrap="square" lIns="27432" rIns="27432" tIns="18288" bIns="18288" anchor="t">
             <a:spAutoFit/>
           </a:bodyPr>
           <a:lstStyle/>
@@ -5857,7 +5157,7 @@
           <a:noFill/>
         </p:spPr>
         <p:txBody>
-          <a:bodyPr wrap="square" lIns="45720" rIns="45720" tIns="27432" bIns="27432" anchor="t">
+          <a:bodyPr wrap="square" lIns="27432" rIns="27432" tIns="18288" bIns="18288" anchor="t">
             <a:spAutoFit/>
           </a:bodyPr>
           <a:lstStyle/>
@@ -6015,7 +5315,7 @@
           <a:noFill/>
         </p:spPr>
         <p:txBody>
-          <a:bodyPr wrap="square" lIns="45720" rIns="45720" tIns="27432" bIns="27432" anchor="t">
+          <a:bodyPr wrap="square" lIns="27432" rIns="27432" tIns="18288" bIns="18288" anchor="t">
             <a:spAutoFit/>
           </a:bodyPr>
           <a:lstStyle/>
@@ -6050,7 +5350,7 @@
           <a:noFill/>
         </p:spPr>
         <p:txBody>
-          <a:bodyPr wrap="square" lIns="45720" rIns="45720" tIns="27432" bIns="27432" anchor="t">
+          <a:bodyPr wrap="square" lIns="27432" rIns="27432" tIns="18288" bIns="18288" anchor="t">
             <a:spAutoFit/>
           </a:bodyPr>
           <a:lstStyle/>
@@ -6085,7 +5385,7 @@
           <a:noFill/>
         </p:spPr>
         <p:txBody>
-          <a:bodyPr wrap="square" lIns="45720" rIns="45720" tIns="27432" bIns="27432" anchor="t">
+          <a:bodyPr wrap="square" lIns="27432" rIns="27432" tIns="18288" bIns="18288" anchor="t">
             <a:spAutoFit/>
           </a:bodyPr>
           <a:lstStyle/>
@@ -6120,7 +5420,7 @@
           <a:noFill/>
         </p:spPr>
         <p:txBody>
-          <a:bodyPr wrap="square" lIns="45720" rIns="45720" tIns="27432" bIns="27432" anchor="t">
+          <a:bodyPr wrap="square" lIns="27432" rIns="27432" tIns="18288" bIns="18288" anchor="t">
             <a:spAutoFit/>
           </a:bodyPr>
           <a:lstStyle/>
@@ -6155,7 +5455,7 @@
           <a:noFill/>
         </p:spPr>
         <p:txBody>
-          <a:bodyPr wrap="square" lIns="45720" rIns="45720" tIns="27432" bIns="27432" anchor="t">
+          <a:bodyPr wrap="square" lIns="27432" rIns="27432" tIns="18288" bIns="18288" anchor="t">
             <a:spAutoFit/>
           </a:bodyPr>
           <a:lstStyle/>
@@ -6190,7 +5490,7 @@
           <a:noFill/>
         </p:spPr>
         <p:txBody>
-          <a:bodyPr wrap="square" lIns="45720" rIns="45720" tIns="27432" bIns="27432" anchor="t">
+          <a:bodyPr wrap="square" lIns="27432" rIns="27432" tIns="18288" bIns="18288" anchor="t">
             <a:spAutoFit/>
           </a:bodyPr>
           <a:lstStyle/>
@@ -6225,7 +5525,7 @@
           <a:noFill/>
         </p:spPr>
         <p:txBody>
-          <a:bodyPr wrap="square" lIns="45720" rIns="45720" tIns="27432" bIns="27432" anchor="t">
+          <a:bodyPr wrap="square" lIns="27432" rIns="27432" tIns="18288" bIns="18288" anchor="t">
             <a:spAutoFit/>
           </a:bodyPr>
           <a:lstStyle/>
@@ -6260,7 +5560,7 @@
           <a:noFill/>
         </p:spPr>
         <p:txBody>
-          <a:bodyPr wrap="square" lIns="45720" rIns="45720" tIns="27432" bIns="27432" anchor="t">
+          <a:bodyPr wrap="square" lIns="27432" rIns="27432" tIns="18288" bIns="18288" anchor="t">
             <a:spAutoFit/>
           </a:bodyPr>
           <a:lstStyle/>
@@ -6295,7 +5595,7 @@
           <a:noFill/>
         </p:spPr>
         <p:txBody>
-          <a:bodyPr wrap="square" lIns="45720" rIns="45720" tIns="27432" bIns="27432" anchor="t">
+          <a:bodyPr wrap="square" lIns="27432" rIns="27432" tIns="18288" bIns="18288" anchor="t">
             <a:spAutoFit/>
           </a:bodyPr>
           <a:lstStyle/>
@@ -6330,7 +5630,7 @@
           <a:noFill/>
         </p:spPr>
         <p:txBody>
-          <a:bodyPr wrap="square" lIns="45720" rIns="45720" tIns="27432" bIns="27432" anchor="t">
+          <a:bodyPr wrap="square" lIns="27432" rIns="27432" tIns="18288" bIns="18288" anchor="t">
             <a:spAutoFit/>
           </a:bodyPr>
           <a:lstStyle/>
@@ -6365,7 +5665,7 @@
           <a:noFill/>
         </p:spPr>
         <p:txBody>
-          <a:bodyPr wrap="square" lIns="45720" rIns="45720" tIns="27432" bIns="27432" anchor="t">
+          <a:bodyPr wrap="square" lIns="27432" rIns="27432" tIns="18288" bIns="18288" anchor="t">
             <a:spAutoFit/>
           </a:bodyPr>
           <a:lstStyle/>
@@ -6400,7 +5700,7 @@
           <a:noFill/>
         </p:spPr>
         <p:txBody>
-          <a:bodyPr wrap="square" lIns="45720" rIns="45720" tIns="27432" bIns="27432" anchor="t">
+          <a:bodyPr wrap="square" lIns="27432" rIns="27432" tIns="18288" bIns="18288" anchor="t">
             <a:spAutoFit/>
           </a:bodyPr>
           <a:lstStyle/>
@@ -6435,7 +5735,7 @@
           <a:noFill/>
         </p:spPr>
         <p:txBody>
-          <a:bodyPr wrap="square" lIns="45720" rIns="45720" tIns="27432" bIns="27432" anchor="t">
+          <a:bodyPr wrap="square" lIns="27432" rIns="27432" tIns="18288" bIns="18288" anchor="t">
             <a:spAutoFit/>
           </a:bodyPr>
           <a:lstStyle/>
@@ -6470,7 +5770,7 @@
           <a:noFill/>
         </p:spPr>
         <p:txBody>
-          <a:bodyPr wrap="square" lIns="45720" rIns="45720" tIns="27432" bIns="27432" anchor="t">
+          <a:bodyPr wrap="square" lIns="27432" rIns="27432" tIns="18288" bIns="18288" anchor="t">
             <a:spAutoFit/>
           </a:bodyPr>
           <a:lstStyle/>
@@ -6505,7 +5805,7 @@
           <a:noFill/>
         </p:spPr>
         <p:txBody>
-          <a:bodyPr wrap="square" lIns="45720" rIns="45720" tIns="27432" bIns="27432" anchor="t">
+          <a:bodyPr wrap="square" lIns="27432" rIns="27432" tIns="18288" bIns="18288" anchor="t">
             <a:spAutoFit/>
           </a:bodyPr>
           <a:lstStyle/>
@@ -6540,7 +5840,7 @@
           <a:noFill/>
         </p:spPr>
         <p:txBody>
-          <a:bodyPr wrap="square" lIns="45720" rIns="45720" tIns="27432" bIns="27432" anchor="t">
+          <a:bodyPr wrap="square" lIns="27432" rIns="27432" tIns="18288" bIns="18288" anchor="t">
             <a:spAutoFit/>
           </a:bodyPr>
           <a:lstStyle/>
@@ -6575,7 +5875,7 @@
           <a:noFill/>
         </p:spPr>
         <p:txBody>
-          <a:bodyPr wrap="square" lIns="45720" rIns="45720" tIns="27432" bIns="27432" anchor="t">
+          <a:bodyPr wrap="square" lIns="27432" rIns="27432" tIns="18288" bIns="18288" anchor="t">
             <a:spAutoFit/>
           </a:bodyPr>
           <a:lstStyle/>
@@ -6733,7 +6033,7 @@
           <a:noFill/>
         </p:spPr>
         <p:txBody>
-          <a:bodyPr wrap="square" lIns="45720" rIns="45720" tIns="27432" bIns="27432" anchor="t">
+          <a:bodyPr wrap="square" lIns="27432" rIns="27432" tIns="18288" bIns="18288" anchor="t">
             <a:spAutoFit/>
           </a:bodyPr>
           <a:lstStyle/>
@@ -6768,7 +6068,7 @@
           <a:noFill/>
         </p:spPr>
         <p:txBody>
-          <a:bodyPr wrap="square" lIns="45720" rIns="45720" tIns="27432" bIns="27432" anchor="t">
+          <a:bodyPr wrap="square" lIns="27432" rIns="27432" tIns="18288" bIns="18288" anchor="t">
             <a:spAutoFit/>
           </a:bodyPr>
           <a:lstStyle/>
@@ -6803,7 +6103,7 @@
           <a:noFill/>
         </p:spPr>
         <p:txBody>
-          <a:bodyPr wrap="square" lIns="45720" rIns="45720" tIns="27432" bIns="27432" anchor="t">
+          <a:bodyPr wrap="square" lIns="27432" rIns="27432" tIns="18288" bIns="18288" anchor="t">
             <a:spAutoFit/>
           </a:bodyPr>
           <a:lstStyle/>
@@ -7129,7 +6429,7 @@
           <a:noFill/>
         </p:spPr>
         <p:txBody>
-          <a:bodyPr wrap="square" lIns="45720" rIns="45720" tIns="27432" bIns="27432" anchor="t">
+          <a:bodyPr wrap="square" lIns="27432" rIns="27432" tIns="18288" bIns="18288" anchor="t">
             <a:spAutoFit/>
           </a:bodyPr>
           <a:lstStyle/>
@@ -7164,7 +6464,7 @@
           <a:noFill/>
         </p:spPr>
         <p:txBody>
-          <a:bodyPr wrap="square" lIns="45720" rIns="45720" tIns="27432" bIns="27432" anchor="ctr">
+          <a:bodyPr wrap="square" lIns="27432" rIns="27432" tIns="18288" bIns="18288" anchor="ctr">
             <a:spAutoFit/>
           </a:bodyPr>
           <a:lstStyle/>
@@ -7199,7 +6499,7 @@
           <a:noFill/>
         </p:spPr>
         <p:txBody>
-          <a:bodyPr wrap="square" lIns="45720" rIns="45720" tIns="27432" bIns="27432" anchor="t">
+          <a:bodyPr wrap="square" lIns="27432" rIns="27432" tIns="18288" bIns="18288" anchor="t">
             <a:spAutoFit/>
           </a:bodyPr>
           <a:lstStyle/>
@@ -7278,7 +6578,7 @@
           <a:noFill/>
         </p:spPr>
         <p:txBody>
-          <a:bodyPr wrap="square" lIns="45720" rIns="45720" tIns="27432" bIns="27432" anchor="t">
+          <a:bodyPr wrap="square" lIns="27432" rIns="27432" tIns="18288" bIns="18288" anchor="t">
             <a:spAutoFit/>
           </a:bodyPr>
           <a:lstStyle/>
@@ -7313,7 +6613,7 @@
           <a:noFill/>
         </p:spPr>
         <p:txBody>
-          <a:bodyPr wrap="square" lIns="45720" rIns="45720" tIns="27432" bIns="27432" anchor="t">
+          <a:bodyPr wrap="square" lIns="27432" rIns="27432" tIns="18288" bIns="18288" anchor="t">
             <a:spAutoFit/>
           </a:bodyPr>
           <a:lstStyle/>
@@ -7471,7 +6771,7 @@
           <a:noFill/>
         </p:spPr>
         <p:txBody>
-          <a:bodyPr wrap="square" lIns="45720" rIns="45720" tIns="27432" bIns="27432" anchor="t">
+          <a:bodyPr wrap="square" lIns="27432" rIns="27432" tIns="18288" bIns="18288" anchor="t">
             <a:spAutoFit/>
           </a:bodyPr>
           <a:lstStyle/>
@@ -7506,7 +6806,7 @@
           <a:noFill/>
         </p:spPr>
         <p:txBody>
-          <a:bodyPr wrap="square" lIns="45720" rIns="45720" tIns="27432" bIns="27432" anchor="t">
+          <a:bodyPr wrap="square" lIns="27432" rIns="27432" tIns="18288" bIns="18288" anchor="t">
             <a:spAutoFit/>
           </a:bodyPr>
           <a:lstStyle/>
@@ -7541,7 +6841,7 @@
           <a:noFill/>
         </p:spPr>
         <p:txBody>
-          <a:bodyPr wrap="square" lIns="45720" rIns="45720" tIns="27432" bIns="27432" anchor="t">
+          <a:bodyPr wrap="square" lIns="27432" rIns="27432" tIns="18288" bIns="18288" anchor="t">
             <a:spAutoFit/>
           </a:bodyPr>
           <a:lstStyle/>
@@ -7803,7 +7103,7 @@
           <a:noFill/>
         </p:spPr>
         <p:txBody>
-          <a:bodyPr wrap="square" lIns="45720" rIns="45720" tIns="27432" bIns="27432" anchor="t">
+          <a:bodyPr wrap="square" lIns="27432" rIns="27432" tIns="18288" bIns="18288" anchor="t">
             <a:spAutoFit/>
           </a:bodyPr>
           <a:lstStyle/>
@@ -7838,7 +7138,7 @@
           <a:noFill/>
         </p:spPr>
         <p:txBody>
-          <a:bodyPr wrap="square" lIns="45720" rIns="45720" tIns="27432" bIns="27432" anchor="t">
+          <a:bodyPr wrap="square" lIns="27432" rIns="27432" tIns="18288" bIns="18288" anchor="t">
             <a:spAutoFit/>
           </a:bodyPr>
           <a:lstStyle/>
@@ -7873,7 +7173,7 @@
           <a:noFill/>
         </p:spPr>
         <p:txBody>
-          <a:bodyPr wrap="square" lIns="45720" rIns="45720" tIns="27432" bIns="27432" anchor="t">
+          <a:bodyPr wrap="square" lIns="27432" rIns="27432" tIns="18288" bIns="18288" anchor="t">
             <a:spAutoFit/>
           </a:bodyPr>
           <a:lstStyle/>
@@ -7908,7 +7208,7 @@
           <a:noFill/>
         </p:spPr>
         <p:txBody>
-          <a:bodyPr wrap="square" lIns="45720" rIns="45720" tIns="27432" bIns="27432" anchor="t">
+          <a:bodyPr wrap="square" lIns="27432" rIns="27432" tIns="18288" bIns="18288" anchor="t">
             <a:spAutoFit/>
           </a:bodyPr>
           <a:lstStyle/>
@@ -7943,7 +7243,7 @@
           <a:noFill/>
         </p:spPr>
         <p:txBody>
-          <a:bodyPr wrap="square" lIns="45720" rIns="45720" tIns="27432" bIns="27432" anchor="t">
+          <a:bodyPr wrap="square" lIns="27432" rIns="27432" tIns="18288" bIns="18288" anchor="t">
             <a:spAutoFit/>
           </a:bodyPr>
           <a:lstStyle/>
@@ -7978,7 +7278,7 @@
           <a:noFill/>
         </p:spPr>
         <p:txBody>
-          <a:bodyPr wrap="square" lIns="45720" rIns="45720" tIns="27432" bIns="27432" anchor="t">
+          <a:bodyPr wrap="square" lIns="27432" rIns="27432" tIns="18288" bIns="18288" anchor="t">
             <a:spAutoFit/>
           </a:bodyPr>
           <a:lstStyle/>
@@ -8013,7 +7313,7 @@
           <a:noFill/>
         </p:spPr>
         <p:txBody>
-          <a:bodyPr wrap="square" lIns="45720" rIns="45720" tIns="27432" bIns="27432" anchor="t">
+          <a:bodyPr wrap="square" lIns="27432" rIns="27432" tIns="18288" bIns="18288" anchor="t">
             <a:spAutoFit/>
           </a:bodyPr>
           <a:lstStyle/>
@@ -8048,7 +7348,7 @@
           <a:noFill/>
         </p:spPr>
         <p:txBody>
-          <a:bodyPr wrap="square" lIns="45720" rIns="45720" tIns="27432" bIns="27432" anchor="t">
+          <a:bodyPr wrap="square" lIns="27432" rIns="27432" tIns="18288" bIns="18288" anchor="t">
             <a:spAutoFit/>
           </a:bodyPr>
           <a:lstStyle/>
@@ -8083,7 +7383,7 @@
           <a:noFill/>
         </p:spPr>
         <p:txBody>
-          <a:bodyPr wrap="square" lIns="45720" rIns="45720" tIns="27432" bIns="27432" anchor="t">
+          <a:bodyPr wrap="square" lIns="27432" rIns="27432" tIns="18288" bIns="18288" anchor="t">
             <a:spAutoFit/>
           </a:bodyPr>
           <a:lstStyle/>
@@ -8118,7 +7418,7 @@
           <a:noFill/>
         </p:spPr>
         <p:txBody>
-          <a:bodyPr wrap="square" lIns="45720" rIns="45720" tIns="27432" bIns="27432" anchor="t">
+          <a:bodyPr wrap="square" lIns="27432" rIns="27432" tIns="18288" bIns="18288" anchor="t">
             <a:spAutoFit/>
           </a:bodyPr>
           <a:lstStyle/>
@@ -8153,7 +7453,7 @@
           <a:noFill/>
         </p:spPr>
         <p:txBody>
-          <a:bodyPr wrap="square" lIns="45720" rIns="45720" tIns="27432" bIns="27432" anchor="t">
+          <a:bodyPr wrap="square" lIns="27432" rIns="27432" tIns="18288" bIns="18288" anchor="t">
             <a:spAutoFit/>
           </a:bodyPr>
           <a:lstStyle/>
@@ -8188,7 +7488,7 @@
           <a:noFill/>
         </p:spPr>
         <p:txBody>
-          <a:bodyPr wrap="square" lIns="45720" rIns="45720" tIns="27432" bIns="27432" anchor="t">
+          <a:bodyPr wrap="square" lIns="27432" rIns="27432" tIns="18288" bIns="18288" anchor="t">
             <a:spAutoFit/>
           </a:bodyPr>
           <a:lstStyle/>
@@ -8223,7 +7523,7 @@
           <a:noFill/>
         </p:spPr>
         <p:txBody>
-          <a:bodyPr wrap="square" lIns="45720" rIns="45720" tIns="27432" bIns="27432" anchor="t">
+          <a:bodyPr wrap="square" lIns="27432" rIns="27432" tIns="18288" bIns="18288" anchor="t">
             <a:spAutoFit/>
           </a:bodyPr>
           <a:lstStyle/>
@@ -8258,7 +7558,7 @@
           <a:noFill/>
         </p:spPr>
         <p:txBody>
-          <a:bodyPr wrap="square" lIns="45720" rIns="45720" tIns="27432" bIns="27432" anchor="t">
+          <a:bodyPr wrap="square" lIns="27432" rIns="27432" tIns="18288" bIns="18288" anchor="t">
             <a:spAutoFit/>
           </a:bodyPr>
           <a:lstStyle/>
@@ -8293,7 +7593,7 @@
           <a:noFill/>
         </p:spPr>
         <p:txBody>
-          <a:bodyPr wrap="square" lIns="45720" rIns="45720" tIns="27432" bIns="27432" anchor="t">
+          <a:bodyPr wrap="square" lIns="27432" rIns="27432" tIns="18288" bIns="18288" anchor="t">
             <a:spAutoFit/>
           </a:bodyPr>
           <a:lstStyle/>
@@ -8451,7 +7751,7 @@
           <a:noFill/>
         </p:spPr>
         <p:txBody>
-          <a:bodyPr wrap="square" lIns="45720" rIns="45720" tIns="27432" bIns="27432" anchor="t">
+          <a:bodyPr wrap="square" lIns="27432" rIns="27432" tIns="18288" bIns="18288" anchor="t">
             <a:spAutoFit/>
           </a:bodyPr>
           <a:lstStyle/>
@@ -8486,7 +7786,7 @@
           <a:noFill/>
         </p:spPr>
         <p:txBody>
-          <a:bodyPr wrap="square" lIns="45720" rIns="45720" tIns="27432" bIns="27432" anchor="t">
+          <a:bodyPr wrap="square" lIns="27432" rIns="27432" tIns="18288" bIns="18288" anchor="t">
             <a:spAutoFit/>
           </a:bodyPr>
           <a:lstStyle/>
@@ -8521,7 +7821,7 @@
           <a:noFill/>
         </p:spPr>
         <p:txBody>
-          <a:bodyPr wrap="square" lIns="45720" rIns="45720" tIns="27432" bIns="27432" anchor="t">
+          <a:bodyPr wrap="square" lIns="27432" rIns="27432" tIns="18288" bIns="18288" anchor="t">
             <a:spAutoFit/>
           </a:bodyPr>
           <a:lstStyle/>
@@ -8600,7 +7900,7 @@
           <a:noFill/>
         </p:spPr>
         <p:txBody>
-          <a:bodyPr wrap="square" lIns="45720" rIns="45720" tIns="27432" bIns="27432" anchor="t">
+          <a:bodyPr wrap="square" lIns="27432" rIns="27432" tIns="18288" bIns="18288" anchor="t">
             <a:spAutoFit/>
           </a:bodyPr>
           <a:lstStyle/>
@@ -8834,7 +8134,7 @@
           <a:noFill/>
         </p:spPr>
         <p:txBody>
-          <a:bodyPr wrap="square" lIns="45720" rIns="45720" tIns="27432" bIns="27432" anchor="t">
+          <a:bodyPr wrap="square" lIns="27432" rIns="27432" tIns="18288" bIns="18288" anchor="t">
             <a:spAutoFit/>
           </a:bodyPr>
           <a:lstStyle/>
@@ -9147,7 +8447,7 @@
           <a:noFill/>
         </p:spPr>
         <p:txBody>
-          <a:bodyPr wrap="square" lIns="45720" rIns="45720" tIns="27432" bIns="27432" anchor="t">
+          <a:bodyPr wrap="square" lIns="27432" rIns="27432" tIns="18288" bIns="18288" anchor="t">
             <a:spAutoFit/>
           </a:bodyPr>
           <a:lstStyle/>
@@ -9160,7 +8460,7 @@
                 </a:solidFill>
                 <a:latin typeface="Calibri"/>
               </a:rPr>
-              <a:t>GoS v1 — What the Pipeline Does (with dimensions)</a:t>
+              <a:t>GoS v1 — Pipeline with Dimensions</a:t>
             </a:r>
           </a:p>
         </p:txBody>
@@ -9182,7 +8482,7 @@
           <a:noFill/>
         </p:spPr>
         <p:txBody>
-          <a:bodyPr wrap="square" lIns="45720" rIns="45720" tIns="27432" bIns="27432" anchor="t">
+          <a:bodyPr wrap="square" lIns="27432" rIns="27432" tIns="18288" bIns="18288" anchor="t">
             <a:spAutoFit/>
           </a:bodyPr>
           <a:lstStyle/>
@@ -9217,7 +8517,7 @@
           <a:noFill/>
         </p:spPr>
         <p:txBody>
-          <a:bodyPr wrap="square" lIns="45720" rIns="45720" tIns="27432" bIns="27432" anchor="t">
+          <a:bodyPr wrap="square" lIns="27432" rIns="27432" tIns="18288" bIns="18288" anchor="t">
             <a:spAutoFit/>
           </a:bodyPr>
           <a:lstStyle/>
@@ -9235,9 +8535,459 @@
           </a:p>
         </p:txBody>
       </p:sp>
+      <p:sp>
+        <p:nvSpPr>
+          <p:cNvPr id="7" name="TextBox 6"/>
+          <p:cNvSpPr txBox="1"/>
+          <p:nvPr/>
+        </p:nvSpPr>
+        <p:spPr>
+          <a:xfrm>
+            <a:off x="502920" y="1325880"/>
+            <a:ext cx="11185855" cy="320040"/>
+          </a:xfrm>
+          <a:prstGeom prst="rect">
+            <a:avLst/>
+          </a:prstGeom>
+          <a:noFill/>
+        </p:spPr>
+        <p:txBody>
+          <a:bodyPr wrap="square" lIns="27432" rIns="27432" tIns="18288" bIns="18288" anchor="t">
+            <a:spAutoFit/>
+          </a:bodyPr>
+          <a:lstStyle/>
+          <a:p>
+            <a:pPr algn="ctr"/>
+            <a:r>
+              <a:rPr sz="1100" b="0" i="1">
+                <a:solidFill>
+                  <a:srgbClr val="888A90"/>
+                </a:solidFill>
+                <a:latin typeface="Calibri"/>
+              </a:rPr>
+              <a:t>M = N·K + Q,   d = 128   (example: N=5, K=5, Q=16  ⇒  M=41)</a:t>
+            </a:r>
+          </a:p>
+        </p:txBody>
+      </p:sp>
+      <p:sp>
+        <p:nvSpPr>
+          <p:cNvPr id="8" name="Rounded Rectangle 7"/>
+          <p:cNvSpPr/>
+          <p:nvPr/>
+        </p:nvSpPr>
+        <p:spPr>
+          <a:xfrm>
+            <a:off x="502920" y="1783080"/>
+            <a:ext cx="1737360" cy="1691640"/>
+          </a:xfrm>
+          <a:prstGeom prst="roundRect">
+            <a:avLst/>
+          </a:prstGeom>
+          <a:solidFill>
+            <a:srgbClr val="CADCFC"/>
+          </a:solidFill>
+          <a:ln>
+            <a:noFill/>
+          </a:ln>
+          <a:effectLst/>
+        </p:spPr>
+        <p:style>
+          <a:lnRef idx="1">
+            <a:schemeClr val="accent1"/>
+          </a:lnRef>
+          <a:fillRef idx="3">
+            <a:schemeClr val="accent1"/>
+          </a:fillRef>
+          <a:effectRef idx="2">
+            <a:schemeClr val="accent1"/>
+          </a:effectRef>
+          <a:fontRef idx="minor">
+            <a:schemeClr val="lt1"/>
+          </a:fontRef>
+        </p:style>
+        <p:txBody>
+          <a:bodyPr rtlCol="0" anchor="ctr" lIns="45720" rIns="45720" tIns="27432" bIns="27432" wrap="square"/>
+          <a:lstStyle/>
+          <a:p>
+            <a:pPr algn="ctr"/>
+          </a:p>
+        </p:txBody>
+      </p:sp>
+      <p:sp>
+        <p:nvSpPr>
+          <p:cNvPr id="9" name="TextBox 8"/>
+          <p:cNvSpPr txBox="1"/>
+          <p:nvPr/>
+        </p:nvSpPr>
+        <p:spPr>
+          <a:xfrm>
+            <a:off x="502920" y="1856232"/>
+            <a:ext cx="1737360" cy="320040"/>
+          </a:xfrm>
+          <a:prstGeom prst="rect">
+            <a:avLst/>
+          </a:prstGeom>
+          <a:noFill/>
+        </p:spPr>
+        <p:txBody>
+          <a:bodyPr wrap="square" lIns="27432" rIns="27432" tIns="18288" bIns="18288" anchor="t">
+            <a:spAutoFit/>
+          </a:bodyPr>
+          <a:lstStyle/>
+          <a:p>
+            <a:pPr algn="ctr"/>
+            <a:r>
+              <a:rPr sz="1100" b="1" i="0">
+                <a:solidFill>
+                  <a:srgbClr val="1E2761"/>
+                </a:solidFill>
+                <a:latin typeface="Calibri"/>
+              </a:rPr>
+              <a:t>Episode input</a:t>
+            </a:r>
+          </a:p>
+        </p:txBody>
+      </p:sp>
+      <p:sp>
+        <p:nvSpPr>
+          <p:cNvPr id="10" name="Oval 9"/>
+          <p:cNvSpPr/>
+          <p:nvPr/>
+        </p:nvSpPr>
+        <p:spPr>
+          <a:xfrm>
+            <a:off x="777240" y="1920240"/>
+            <a:ext cx="109728" cy="109728"/>
+          </a:xfrm>
+          <a:prstGeom prst="ellipse">
+            <a:avLst/>
+          </a:prstGeom>
+          <a:solidFill>
+            <a:srgbClr val="1E2761"/>
+          </a:solidFill>
+          <a:ln>
+            <a:noFill/>
+          </a:ln>
+          <a:effectLst/>
+        </p:spPr>
+        <p:style>
+          <a:lnRef idx="1">
+            <a:schemeClr val="accent1"/>
+          </a:lnRef>
+          <a:fillRef idx="3">
+            <a:schemeClr val="accent1"/>
+          </a:fillRef>
+          <a:effectRef idx="2">
+            <a:schemeClr val="accent1"/>
+          </a:effectRef>
+          <a:fontRef idx="minor">
+            <a:schemeClr val="lt1"/>
+          </a:fontRef>
+        </p:style>
+        <p:txBody>
+          <a:bodyPr rtlCol="0" anchor="ctr" lIns="45720" rIns="45720" tIns="27432" bIns="27432" wrap="square"/>
+          <a:lstStyle/>
+          <a:p>
+            <a:pPr algn="ctr"/>
+          </a:p>
+        </p:txBody>
+      </p:sp>
+      <p:sp>
+        <p:nvSpPr>
+          <p:cNvPr id="11" name="Oval 10"/>
+          <p:cNvSpPr/>
+          <p:nvPr/>
+        </p:nvSpPr>
+        <p:spPr>
+          <a:xfrm>
+            <a:off x="1051560" y="1920240"/>
+            <a:ext cx="109728" cy="109728"/>
+          </a:xfrm>
+          <a:prstGeom prst="ellipse">
+            <a:avLst/>
+          </a:prstGeom>
+          <a:solidFill>
+            <a:srgbClr val="1E2761"/>
+          </a:solidFill>
+          <a:ln>
+            <a:noFill/>
+          </a:ln>
+          <a:effectLst/>
+        </p:spPr>
+        <p:style>
+          <a:lnRef idx="1">
+            <a:schemeClr val="accent1"/>
+          </a:lnRef>
+          <a:fillRef idx="3">
+            <a:schemeClr val="accent1"/>
+          </a:fillRef>
+          <a:effectRef idx="2">
+            <a:schemeClr val="accent1"/>
+          </a:effectRef>
+          <a:fontRef idx="minor">
+            <a:schemeClr val="lt1"/>
+          </a:fontRef>
+        </p:style>
+        <p:txBody>
+          <a:bodyPr rtlCol="0" anchor="ctr" lIns="45720" rIns="45720" tIns="27432" bIns="27432" wrap="square"/>
+          <a:lstStyle/>
+          <a:p>
+            <a:pPr algn="ctr"/>
+          </a:p>
+        </p:txBody>
+      </p:sp>
+      <p:sp>
+        <p:nvSpPr>
+          <p:cNvPr id="12" name="Oval 11"/>
+          <p:cNvSpPr/>
+          <p:nvPr/>
+        </p:nvSpPr>
+        <p:spPr>
+          <a:xfrm>
+            <a:off x="1325880" y="1920240"/>
+            <a:ext cx="109728" cy="109728"/>
+          </a:xfrm>
+          <a:prstGeom prst="ellipse">
+            <a:avLst/>
+          </a:prstGeom>
+          <a:solidFill>
+            <a:srgbClr val="1E2761"/>
+          </a:solidFill>
+          <a:ln>
+            <a:noFill/>
+          </a:ln>
+          <a:effectLst/>
+        </p:spPr>
+        <p:style>
+          <a:lnRef idx="1">
+            <a:schemeClr val="accent1"/>
+          </a:lnRef>
+          <a:fillRef idx="3">
+            <a:schemeClr val="accent1"/>
+          </a:fillRef>
+          <a:effectRef idx="2">
+            <a:schemeClr val="accent1"/>
+          </a:effectRef>
+          <a:fontRef idx="minor">
+            <a:schemeClr val="lt1"/>
+          </a:fontRef>
+        </p:style>
+        <p:txBody>
+          <a:bodyPr rtlCol="0" anchor="ctr" lIns="45720" rIns="45720" tIns="27432" bIns="27432" wrap="square"/>
+          <a:lstStyle/>
+          <a:p>
+            <a:pPr algn="ctr"/>
+          </a:p>
+        </p:txBody>
+      </p:sp>
+      <p:sp>
+        <p:nvSpPr>
+          <p:cNvPr id="13" name="Oval 12"/>
+          <p:cNvSpPr/>
+          <p:nvPr/>
+        </p:nvSpPr>
+        <p:spPr>
+          <a:xfrm>
+            <a:off x="1600200" y="1920240"/>
+            <a:ext cx="109728" cy="109728"/>
+          </a:xfrm>
+          <a:prstGeom prst="ellipse">
+            <a:avLst/>
+          </a:prstGeom>
+          <a:solidFill>
+            <a:srgbClr val="F96167"/>
+          </a:solidFill>
+          <a:ln>
+            <a:noFill/>
+          </a:ln>
+          <a:effectLst/>
+        </p:spPr>
+        <p:style>
+          <a:lnRef idx="1">
+            <a:schemeClr val="accent1"/>
+          </a:lnRef>
+          <a:fillRef idx="3">
+            <a:schemeClr val="accent1"/>
+          </a:fillRef>
+          <a:effectRef idx="2">
+            <a:schemeClr val="accent1"/>
+          </a:effectRef>
+          <a:fontRef idx="minor">
+            <a:schemeClr val="lt1"/>
+          </a:fontRef>
+        </p:style>
+        <p:txBody>
+          <a:bodyPr rtlCol="0" anchor="ctr" lIns="45720" rIns="45720" tIns="27432" bIns="27432" wrap="square"/>
+          <a:lstStyle/>
+          <a:p>
+            <a:pPr algn="ctr"/>
+          </a:p>
+        </p:txBody>
+      </p:sp>
+      <p:sp>
+        <p:nvSpPr>
+          <p:cNvPr id="14" name="Oval 13"/>
+          <p:cNvSpPr/>
+          <p:nvPr/>
+        </p:nvSpPr>
+        <p:spPr>
+          <a:xfrm>
+            <a:off x="1874520" y="1920240"/>
+            <a:ext cx="109728" cy="109728"/>
+          </a:xfrm>
+          <a:prstGeom prst="ellipse">
+            <a:avLst/>
+          </a:prstGeom>
+          <a:solidFill>
+            <a:srgbClr val="F96167"/>
+          </a:solidFill>
+          <a:ln>
+            <a:noFill/>
+          </a:ln>
+          <a:effectLst/>
+        </p:spPr>
+        <p:style>
+          <a:lnRef idx="1">
+            <a:schemeClr val="accent1"/>
+          </a:lnRef>
+          <a:fillRef idx="3">
+            <a:schemeClr val="accent1"/>
+          </a:fillRef>
+          <a:effectRef idx="2">
+            <a:schemeClr val="accent1"/>
+          </a:effectRef>
+          <a:fontRef idx="minor">
+            <a:schemeClr val="lt1"/>
+          </a:fontRef>
+        </p:style>
+        <p:txBody>
+          <a:bodyPr rtlCol="0" anchor="ctr" lIns="45720" rIns="45720" tIns="27432" bIns="27432" wrap="square"/>
+          <a:lstStyle/>
+          <a:p>
+            <a:pPr algn="ctr"/>
+          </a:p>
+        </p:txBody>
+      </p:sp>
+      <p:sp>
+        <p:nvSpPr>
+          <p:cNvPr id="15" name="TextBox 14"/>
+          <p:cNvSpPr txBox="1"/>
+          <p:nvPr/>
+        </p:nvSpPr>
+        <p:spPr>
+          <a:xfrm>
+            <a:off x="502920" y="2377440"/>
+            <a:ext cx="1737360" cy="731520"/>
+          </a:xfrm>
+          <a:prstGeom prst="rect">
+            <a:avLst/>
+          </a:prstGeom>
+          <a:noFill/>
+        </p:spPr>
+        <p:txBody>
+          <a:bodyPr wrap="square" lIns="27432" rIns="27432" tIns="18288" bIns="18288" anchor="t">
+            <a:spAutoFit/>
+          </a:bodyPr>
+          <a:lstStyle/>
+          <a:p>
+            <a:pPr algn="ctr"/>
+            <a:r>
+              <a:rPr sz="1000" b="0" i="1">
+                <a:solidFill>
+                  <a:srgbClr val="36454F"/>
+                </a:solidFill>
+                <a:latin typeface="Calibri"/>
+              </a:rPr>
+              <a:t>N·K support
++ Q query
+molecules</a:t>
+            </a:r>
+          </a:p>
+        </p:txBody>
+      </p:sp>
+      <p:sp>
+        <p:nvSpPr>
+          <p:cNvPr id="16" name="Rounded Rectangle 15"/>
+          <p:cNvSpPr/>
+          <p:nvPr/>
+        </p:nvSpPr>
+        <p:spPr>
+          <a:xfrm>
+            <a:off x="2468880" y="1783080"/>
+            <a:ext cx="1737360" cy="1691640"/>
+          </a:xfrm>
+          <a:prstGeom prst="roundRect">
+            <a:avLst/>
+          </a:prstGeom>
+          <a:solidFill>
+            <a:srgbClr val="F5F7FA"/>
+          </a:solidFill>
+          <a:ln>
+            <a:noFill/>
+          </a:ln>
+          <a:effectLst/>
+        </p:spPr>
+        <p:style>
+          <a:lnRef idx="1">
+            <a:schemeClr val="accent1"/>
+          </a:lnRef>
+          <a:fillRef idx="3">
+            <a:schemeClr val="accent1"/>
+          </a:fillRef>
+          <a:effectRef idx="2">
+            <a:schemeClr val="accent1"/>
+          </a:effectRef>
+          <a:fontRef idx="minor">
+            <a:schemeClr val="lt1"/>
+          </a:fontRef>
+        </p:style>
+        <p:txBody>
+          <a:bodyPr rtlCol="0" anchor="ctr" lIns="45720" rIns="45720" tIns="27432" bIns="27432" wrap="square"/>
+          <a:lstStyle/>
+          <a:p>
+            <a:pPr algn="ctr"/>
+          </a:p>
+        </p:txBody>
+      </p:sp>
+      <p:sp>
+        <p:nvSpPr>
+          <p:cNvPr id="17" name="TextBox 16"/>
+          <p:cNvSpPr txBox="1"/>
+          <p:nvPr/>
+        </p:nvSpPr>
+        <p:spPr>
+          <a:xfrm>
+            <a:off x="2468880" y="1856232"/>
+            <a:ext cx="1737360" cy="320040"/>
+          </a:xfrm>
+          <a:prstGeom prst="rect">
+            <a:avLst/>
+          </a:prstGeom>
+          <a:noFill/>
+        </p:spPr>
+        <p:txBody>
+          <a:bodyPr wrap="square" lIns="27432" rIns="27432" tIns="18288" bIns="18288" anchor="t">
+            <a:spAutoFit/>
+          </a:bodyPr>
+          <a:lstStyle/>
+          <a:p>
+            <a:pPr algn="ctr"/>
+            <a:r>
+              <a:rPr sz="1100" b="1" i="0">
+                <a:solidFill>
+                  <a:srgbClr val="1E2761"/>
+                </a:solidFill>
+                <a:latin typeface="Calibri"/>
+              </a:rPr>
+              <a:t>① Encoder φ</a:t>
+            </a:r>
+          </a:p>
+        </p:txBody>
+      </p:sp>
       <p:pic>
         <p:nvPicPr>
-          <p:cNvPr id="7" name="Picture 6" descr="fig_v1_flow.png"/>
+          <p:cNvPr id="18" name="Picture 17" descr="flow_encoder.png"/>
           <p:cNvPicPr>
             <a:picLocks noChangeAspect="1"/>
           </p:cNvPicPr>
@@ -9251,8 +9001,8 @@
         </p:blipFill>
         <p:spPr>
           <a:xfrm>
-            <a:off x="182880" y="1508760"/>
-            <a:ext cx="11795760" cy="5403710"/>
+            <a:off x="2514600" y="2377440"/>
+            <a:ext cx="1645920" cy="109649"/>
           </a:xfrm>
           <a:prstGeom prst="rect">
             <a:avLst/>
@@ -9261,14 +9011,58 @@
       </p:pic>
       <p:sp>
         <p:nvSpPr>
-          <p:cNvPr id="8" name="TextBox 7"/>
+          <p:cNvPr id="19" name="Rounded Rectangle 18"/>
+          <p:cNvSpPr/>
+          <p:nvPr/>
+        </p:nvSpPr>
+        <p:spPr>
+          <a:xfrm>
+            <a:off x="4434840" y="1783080"/>
+            <a:ext cx="1737360" cy="1691640"/>
+          </a:xfrm>
+          <a:prstGeom prst="roundRect">
+            <a:avLst/>
+          </a:prstGeom>
+          <a:solidFill>
+            <a:srgbClr val="F5F7FA"/>
+          </a:solidFill>
+          <a:ln>
+            <a:noFill/>
+          </a:ln>
+          <a:effectLst/>
+        </p:spPr>
+        <p:style>
+          <a:lnRef idx="1">
+            <a:schemeClr val="accent1"/>
+          </a:lnRef>
+          <a:fillRef idx="3">
+            <a:schemeClr val="accent1"/>
+          </a:fillRef>
+          <a:effectRef idx="2">
+            <a:schemeClr val="accent1"/>
+          </a:effectRef>
+          <a:fontRef idx="minor">
+            <a:schemeClr val="lt1"/>
+          </a:fontRef>
+        </p:style>
+        <p:txBody>
+          <a:bodyPr rtlCol="0" anchor="ctr" lIns="45720" rIns="45720" tIns="27432" bIns="27432" wrap="square"/>
+          <a:lstStyle/>
+          <a:p>
+            <a:pPr algn="ctr"/>
+          </a:p>
+        </p:txBody>
+      </p:sp>
+      <p:sp>
+        <p:nvSpPr>
+          <p:cNvPr id="20" name="TextBox 19"/>
           <p:cNvSpPr txBox="1"/>
           <p:nvPr/>
         </p:nvSpPr>
         <p:spPr>
           <a:xfrm>
-            <a:off x="502920" y="6263640"/>
-            <a:ext cx="11185855" cy="365760"/>
+            <a:off x="4434840" y="1856232"/>
+            <a:ext cx="1737360" cy="320040"/>
           </a:xfrm>
           <a:prstGeom prst="rect">
             <a:avLst/>
@@ -9276,20 +9070,1280 @@
           <a:noFill/>
         </p:spPr>
         <p:txBody>
-          <a:bodyPr wrap="square" lIns="45720" rIns="45720" tIns="27432" bIns="27432" anchor="t">
+          <a:bodyPr wrap="square" lIns="27432" rIns="27432" tIns="18288" bIns="18288" anchor="t">
             <a:spAutoFit/>
           </a:bodyPr>
           <a:lstStyle/>
           <a:p>
             <a:pPr algn="ctr"/>
             <a:r>
-              <a:rPr sz="1100" b="0" i="1">
+              <a:rPr sz="1100" b="1" i="0">
+                <a:solidFill>
+                  <a:srgbClr val="1E2761"/>
+                </a:solidFill>
+                <a:latin typeface="Calibri"/>
+              </a:rPr>
+              <a:t>② Affinity</a:t>
+            </a:r>
+          </a:p>
+        </p:txBody>
+      </p:sp>
+      <p:pic>
+        <p:nvPicPr>
+          <p:cNvPr id="21" name="Picture 20" descr="flow_affinity.png"/>
+          <p:cNvPicPr>
+            <a:picLocks noChangeAspect="1"/>
+          </p:cNvPicPr>
+          <p:nvPr/>
+        </p:nvPicPr>
+        <p:blipFill>
+          <a:blip r:embed="rId3"/>
+          <a:stretch>
+            <a:fillRect/>
+          </a:stretch>
+        </p:blipFill>
+        <p:spPr>
+          <a:xfrm>
+            <a:off x="4480560" y="2377440"/>
+            <a:ext cx="1645920" cy="120178"/>
+          </a:xfrm>
+          <a:prstGeom prst="rect">
+            <a:avLst/>
+          </a:prstGeom>
+        </p:spPr>
+      </p:pic>
+      <p:sp>
+        <p:nvSpPr>
+          <p:cNvPr id="22" name="Rounded Rectangle 21"/>
+          <p:cNvSpPr/>
+          <p:nvPr/>
+        </p:nvSpPr>
+        <p:spPr>
+          <a:xfrm>
+            <a:off x="6400800" y="1783080"/>
+            <a:ext cx="1737360" cy="1691640"/>
+          </a:xfrm>
+          <a:prstGeom prst="roundRect">
+            <a:avLst/>
+          </a:prstGeom>
+          <a:solidFill>
+            <a:srgbClr val="F5F7FA"/>
+          </a:solidFill>
+          <a:ln>
+            <a:noFill/>
+          </a:ln>
+          <a:effectLst/>
+        </p:spPr>
+        <p:style>
+          <a:lnRef idx="1">
+            <a:schemeClr val="accent1"/>
+          </a:lnRef>
+          <a:fillRef idx="3">
+            <a:schemeClr val="accent1"/>
+          </a:fillRef>
+          <a:effectRef idx="2">
+            <a:schemeClr val="accent1"/>
+          </a:effectRef>
+          <a:fontRef idx="minor">
+            <a:schemeClr val="lt1"/>
+          </a:fontRef>
+        </p:style>
+        <p:txBody>
+          <a:bodyPr rtlCol="0" anchor="ctr" lIns="45720" rIns="45720" tIns="27432" bIns="27432" wrap="square"/>
+          <a:lstStyle/>
+          <a:p>
+            <a:pPr algn="ctr"/>
+          </a:p>
+        </p:txBody>
+      </p:sp>
+      <p:sp>
+        <p:nvSpPr>
+          <p:cNvPr id="23" name="TextBox 22"/>
+          <p:cNvSpPr txBox="1"/>
+          <p:nvPr/>
+        </p:nvSpPr>
+        <p:spPr>
+          <a:xfrm>
+            <a:off x="6400800" y="1856232"/>
+            <a:ext cx="1737360" cy="320040"/>
+          </a:xfrm>
+          <a:prstGeom prst="rect">
+            <a:avLst/>
+          </a:prstGeom>
+          <a:noFill/>
+        </p:spPr>
+        <p:txBody>
+          <a:bodyPr wrap="square" lIns="27432" rIns="27432" tIns="18288" bIns="18288" anchor="t">
+            <a:spAutoFit/>
+          </a:bodyPr>
+          <a:lstStyle/>
+          <a:p>
+            <a:pPr algn="ctr"/>
+            <a:r>
+              <a:rPr sz="1100" b="1" i="0">
+                <a:solidFill>
+                  <a:srgbClr val="1E2761"/>
+                </a:solidFill>
+                <a:latin typeface="Calibri"/>
+              </a:rPr>
+              <a:t>③ kNN sparsify</a:t>
+            </a:r>
+          </a:p>
+        </p:txBody>
+      </p:sp>
+      <p:pic>
+        <p:nvPicPr>
+          <p:cNvPr id="24" name="Picture 23" descr="flow_knn.png"/>
+          <p:cNvPicPr>
+            <a:picLocks noChangeAspect="1"/>
+          </p:cNvPicPr>
+          <p:nvPr/>
+        </p:nvPicPr>
+        <p:blipFill>
+          <a:blip r:embed="rId4"/>
+          <a:stretch>
+            <a:fillRect/>
+          </a:stretch>
+        </p:blipFill>
+        <p:spPr>
+          <a:xfrm>
+            <a:off x="6446520" y="2377440"/>
+            <a:ext cx="1645920" cy="232246"/>
+          </a:xfrm>
+          <a:prstGeom prst="rect">
+            <a:avLst/>
+          </a:prstGeom>
+        </p:spPr>
+      </p:pic>
+      <p:sp>
+        <p:nvSpPr>
+          <p:cNvPr id="25" name="Rounded Rectangle 24"/>
+          <p:cNvSpPr/>
+          <p:nvPr/>
+        </p:nvSpPr>
+        <p:spPr>
+          <a:xfrm>
+            <a:off x="8366760" y="1783080"/>
+            <a:ext cx="1737360" cy="1691640"/>
+          </a:xfrm>
+          <a:prstGeom prst="roundRect">
+            <a:avLst/>
+          </a:prstGeom>
+          <a:solidFill>
+            <a:srgbClr val="F5F7FA"/>
+          </a:solidFill>
+          <a:ln>
+            <a:noFill/>
+          </a:ln>
+          <a:effectLst/>
+        </p:spPr>
+        <p:style>
+          <a:lnRef idx="1">
+            <a:schemeClr val="accent1"/>
+          </a:lnRef>
+          <a:fillRef idx="3">
+            <a:schemeClr val="accent1"/>
+          </a:fillRef>
+          <a:effectRef idx="2">
+            <a:schemeClr val="accent1"/>
+          </a:effectRef>
+          <a:fontRef idx="minor">
+            <a:schemeClr val="lt1"/>
+          </a:fontRef>
+        </p:style>
+        <p:txBody>
+          <a:bodyPr rtlCol="0" anchor="ctr" lIns="45720" rIns="45720" tIns="27432" bIns="27432" wrap="square"/>
+          <a:lstStyle/>
+          <a:p>
+            <a:pPr algn="ctr"/>
+          </a:p>
+        </p:txBody>
+      </p:sp>
+      <p:sp>
+        <p:nvSpPr>
+          <p:cNvPr id="26" name="TextBox 25"/>
+          <p:cNvSpPr txBox="1"/>
+          <p:nvPr/>
+        </p:nvSpPr>
+        <p:spPr>
+          <a:xfrm>
+            <a:off x="8366760" y="1856232"/>
+            <a:ext cx="1737360" cy="320040"/>
+          </a:xfrm>
+          <a:prstGeom prst="rect">
+            <a:avLst/>
+          </a:prstGeom>
+          <a:noFill/>
+        </p:spPr>
+        <p:txBody>
+          <a:bodyPr wrap="square" lIns="27432" rIns="27432" tIns="18288" bIns="18288" anchor="t">
+            <a:spAutoFit/>
+          </a:bodyPr>
+          <a:lstStyle/>
+          <a:p>
+            <a:pPr algn="ctr"/>
+            <a:r>
+              <a:rPr sz="1100" b="1" i="0">
+                <a:solidFill>
+                  <a:srgbClr val="1E2761"/>
+                </a:solidFill>
+                <a:latin typeface="Calibri"/>
+              </a:rPr>
+              <a:t>④ Inject labels</a:t>
+            </a:r>
+          </a:p>
+        </p:txBody>
+      </p:sp>
+      <p:pic>
+        <p:nvPicPr>
+          <p:cNvPr id="27" name="Picture 26" descr="flow_label_s.png"/>
+          <p:cNvPicPr>
+            <a:picLocks noChangeAspect="1"/>
+          </p:cNvPicPr>
+          <p:nvPr/>
+        </p:nvPicPr>
+        <p:blipFill>
+          <a:blip r:embed="rId5"/>
+          <a:stretch>
+            <a:fillRect/>
+          </a:stretch>
+        </p:blipFill>
+        <p:spPr>
+          <a:xfrm>
+            <a:off x="8412480" y="2423160"/>
+            <a:ext cx="1645920" cy="196146"/>
+          </a:xfrm>
+          <a:prstGeom prst="rect">
+            <a:avLst/>
+          </a:prstGeom>
+        </p:spPr>
+      </p:pic>
+      <p:pic>
+        <p:nvPicPr>
+          <p:cNvPr id="28" name="Picture 27" descr="flow_label_q.png"/>
+          <p:cNvPicPr>
+            <a:picLocks noChangeAspect="1"/>
+          </p:cNvPicPr>
+          <p:nvPr/>
+        </p:nvPicPr>
+        <p:blipFill>
+          <a:blip r:embed="rId6"/>
+          <a:stretch>
+            <a:fillRect/>
+          </a:stretch>
+        </p:blipFill>
+        <p:spPr>
+          <a:xfrm>
+            <a:off x="8412480" y="2834640"/>
+            <a:ext cx="1645920" cy="232246"/>
+          </a:xfrm>
+          <a:prstGeom prst="rect">
+            <a:avLst/>
+          </a:prstGeom>
+        </p:spPr>
+      </p:pic>
+      <p:sp>
+        <p:nvSpPr>
+          <p:cNvPr id="29" name="Rounded Rectangle 28"/>
+          <p:cNvSpPr/>
+          <p:nvPr/>
+        </p:nvSpPr>
+        <p:spPr>
+          <a:xfrm>
+            <a:off x="10332720" y="1783080"/>
+            <a:ext cx="1737360" cy="1691640"/>
+          </a:xfrm>
+          <a:prstGeom prst="roundRect">
+            <a:avLst/>
+          </a:prstGeom>
+          <a:solidFill>
+            <a:srgbClr val="F5F7FA"/>
+          </a:solidFill>
+          <a:ln>
+            <a:noFill/>
+          </a:ln>
+          <a:effectLst/>
+        </p:spPr>
+        <p:style>
+          <a:lnRef idx="1">
+            <a:schemeClr val="accent1"/>
+          </a:lnRef>
+          <a:fillRef idx="3">
+            <a:schemeClr val="accent1"/>
+          </a:fillRef>
+          <a:effectRef idx="2">
+            <a:schemeClr val="accent1"/>
+          </a:effectRef>
+          <a:fontRef idx="minor">
+            <a:schemeClr val="lt1"/>
+          </a:fontRef>
+        </p:style>
+        <p:txBody>
+          <a:bodyPr rtlCol="0" anchor="ctr" lIns="45720" rIns="45720" tIns="27432" bIns="27432" wrap="square"/>
+          <a:lstStyle/>
+          <a:p>
+            <a:pPr algn="ctr"/>
+          </a:p>
+        </p:txBody>
+      </p:sp>
+      <p:sp>
+        <p:nvSpPr>
+          <p:cNvPr id="30" name="TextBox 29"/>
+          <p:cNvSpPr txBox="1"/>
+          <p:nvPr/>
+        </p:nvSpPr>
+        <p:spPr>
+          <a:xfrm>
+            <a:off x="10332720" y="1856232"/>
+            <a:ext cx="1737360" cy="320040"/>
+          </a:xfrm>
+          <a:prstGeom prst="rect">
+            <a:avLst/>
+          </a:prstGeom>
+          <a:noFill/>
+        </p:spPr>
+        <p:txBody>
+          <a:bodyPr wrap="square" lIns="27432" rIns="27432" tIns="18288" bIns="18288" anchor="t">
+            <a:spAutoFit/>
+          </a:bodyPr>
+          <a:lstStyle/>
+          <a:p>
+            <a:pPr algn="ctr"/>
+            <a:r>
+              <a:rPr sz="1100" b="1" i="0">
+                <a:solidFill>
+                  <a:srgbClr val="1E2761"/>
+                </a:solidFill>
+                <a:latin typeface="Calibri"/>
+              </a:rPr>
+              <a:t>⑤ Meta-GNN</a:t>
+            </a:r>
+          </a:p>
+        </p:txBody>
+      </p:sp>
+      <p:pic>
+        <p:nvPicPr>
+          <p:cNvPr id="31" name="Picture 30" descr="flow_gcn_v1.png"/>
+          <p:cNvPicPr>
+            <a:picLocks noChangeAspect="1"/>
+          </p:cNvPicPr>
+          <p:nvPr/>
+        </p:nvPicPr>
+        <p:blipFill>
+          <a:blip r:embed="rId7"/>
+          <a:stretch>
+            <a:fillRect/>
+          </a:stretch>
+        </p:blipFill>
+        <p:spPr>
+          <a:xfrm>
+            <a:off x="10378440" y="2377440"/>
+            <a:ext cx="1645920" cy="350392"/>
+          </a:xfrm>
+          <a:prstGeom prst="rect">
+            <a:avLst/>
+          </a:prstGeom>
+        </p:spPr>
+      </p:pic>
+      <p:sp>
+        <p:nvSpPr>
+          <p:cNvPr id="32" name="TextBox 31"/>
+          <p:cNvSpPr txBox="1"/>
+          <p:nvPr/>
+        </p:nvSpPr>
+        <p:spPr>
+          <a:xfrm>
+            <a:off x="10332720" y="3063240"/>
+            <a:ext cx="1737360" cy="320040"/>
+          </a:xfrm>
+          <a:prstGeom prst="rect">
+            <a:avLst/>
+          </a:prstGeom>
+          <a:noFill/>
+        </p:spPr>
+        <p:txBody>
+          <a:bodyPr wrap="square" lIns="27432" rIns="27432" tIns="18288" bIns="18288" anchor="t">
+            <a:spAutoFit/>
+          </a:bodyPr>
+          <a:lstStyle/>
+          <a:p>
+            <a:pPr algn="ctr"/>
+            <a:r>
+              <a:rPr sz="900" b="0" i="1">
+                <a:solidFill>
+                  <a:srgbClr val="36454F"/>
+                </a:solidFill>
+                <a:latin typeface="Calibri"/>
+              </a:rPr>
+              <a:t>2-layer weighted GCN</a:t>
+            </a:r>
+          </a:p>
+        </p:txBody>
+      </p:sp>
+      <p:sp>
+        <p:nvSpPr>
+          <p:cNvPr id="33" name="Right Arrow 32"/>
+          <p:cNvSpPr/>
+          <p:nvPr/>
+        </p:nvSpPr>
+        <p:spPr>
+          <a:xfrm>
+            <a:off x="2258568" y="2537460"/>
+            <a:ext cx="192024" cy="201168"/>
+          </a:xfrm>
+          <a:prstGeom prst="rightArrow">
+            <a:avLst/>
+          </a:prstGeom>
+          <a:solidFill>
+            <a:srgbClr val="1E2761"/>
+          </a:solidFill>
+          <a:ln>
+            <a:noFill/>
+          </a:ln>
+          <a:effectLst/>
+        </p:spPr>
+        <p:style>
+          <a:lnRef idx="1">
+            <a:schemeClr val="accent1"/>
+          </a:lnRef>
+          <a:fillRef idx="3">
+            <a:schemeClr val="accent1"/>
+          </a:fillRef>
+          <a:effectRef idx="2">
+            <a:schemeClr val="accent1"/>
+          </a:effectRef>
+          <a:fontRef idx="minor">
+            <a:schemeClr val="lt1"/>
+          </a:fontRef>
+        </p:style>
+        <p:txBody>
+          <a:bodyPr rtlCol="0" anchor="ctr" lIns="45720" rIns="45720" tIns="27432" bIns="27432" wrap="square"/>
+          <a:lstStyle/>
+          <a:p>
+            <a:pPr algn="ctr"/>
+          </a:p>
+        </p:txBody>
+      </p:sp>
+      <p:sp>
+        <p:nvSpPr>
+          <p:cNvPr id="34" name="Right Arrow 33"/>
+          <p:cNvSpPr/>
+          <p:nvPr/>
+        </p:nvSpPr>
+        <p:spPr>
+          <a:xfrm>
+            <a:off x="4224528" y="2537460"/>
+            <a:ext cx="192024" cy="201168"/>
+          </a:xfrm>
+          <a:prstGeom prst="rightArrow">
+            <a:avLst/>
+          </a:prstGeom>
+          <a:solidFill>
+            <a:srgbClr val="1E2761"/>
+          </a:solidFill>
+          <a:ln>
+            <a:noFill/>
+          </a:ln>
+          <a:effectLst/>
+        </p:spPr>
+        <p:style>
+          <a:lnRef idx="1">
+            <a:schemeClr val="accent1"/>
+          </a:lnRef>
+          <a:fillRef idx="3">
+            <a:schemeClr val="accent1"/>
+          </a:fillRef>
+          <a:effectRef idx="2">
+            <a:schemeClr val="accent1"/>
+          </a:effectRef>
+          <a:fontRef idx="minor">
+            <a:schemeClr val="lt1"/>
+          </a:fontRef>
+        </p:style>
+        <p:txBody>
+          <a:bodyPr rtlCol="0" anchor="ctr" lIns="45720" rIns="45720" tIns="27432" bIns="27432" wrap="square"/>
+          <a:lstStyle/>
+          <a:p>
+            <a:pPr algn="ctr"/>
+          </a:p>
+        </p:txBody>
+      </p:sp>
+      <p:sp>
+        <p:nvSpPr>
+          <p:cNvPr id="35" name="Right Arrow 34"/>
+          <p:cNvSpPr/>
+          <p:nvPr/>
+        </p:nvSpPr>
+        <p:spPr>
+          <a:xfrm>
+            <a:off x="6190488" y="2537460"/>
+            <a:ext cx="192024" cy="201168"/>
+          </a:xfrm>
+          <a:prstGeom prst="rightArrow">
+            <a:avLst/>
+          </a:prstGeom>
+          <a:solidFill>
+            <a:srgbClr val="1E2761"/>
+          </a:solidFill>
+          <a:ln>
+            <a:noFill/>
+          </a:ln>
+          <a:effectLst/>
+        </p:spPr>
+        <p:style>
+          <a:lnRef idx="1">
+            <a:schemeClr val="accent1"/>
+          </a:lnRef>
+          <a:fillRef idx="3">
+            <a:schemeClr val="accent1"/>
+          </a:fillRef>
+          <a:effectRef idx="2">
+            <a:schemeClr val="accent1"/>
+          </a:effectRef>
+          <a:fontRef idx="minor">
+            <a:schemeClr val="lt1"/>
+          </a:fontRef>
+        </p:style>
+        <p:txBody>
+          <a:bodyPr rtlCol="0" anchor="ctr" lIns="45720" rIns="45720" tIns="27432" bIns="27432" wrap="square"/>
+          <a:lstStyle/>
+          <a:p>
+            <a:pPr algn="ctr"/>
+          </a:p>
+        </p:txBody>
+      </p:sp>
+      <p:sp>
+        <p:nvSpPr>
+          <p:cNvPr id="36" name="Right Arrow 35"/>
+          <p:cNvSpPr/>
+          <p:nvPr/>
+        </p:nvSpPr>
+        <p:spPr>
+          <a:xfrm>
+            <a:off x="8156448" y="2537460"/>
+            <a:ext cx="192024" cy="201168"/>
+          </a:xfrm>
+          <a:prstGeom prst="rightArrow">
+            <a:avLst/>
+          </a:prstGeom>
+          <a:solidFill>
+            <a:srgbClr val="1E2761"/>
+          </a:solidFill>
+          <a:ln>
+            <a:noFill/>
+          </a:ln>
+          <a:effectLst/>
+        </p:spPr>
+        <p:style>
+          <a:lnRef idx="1">
+            <a:schemeClr val="accent1"/>
+          </a:lnRef>
+          <a:fillRef idx="3">
+            <a:schemeClr val="accent1"/>
+          </a:fillRef>
+          <a:effectRef idx="2">
+            <a:schemeClr val="accent1"/>
+          </a:effectRef>
+          <a:fontRef idx="minor">
+            <a:schemeClr val="lt1"/>
+          </a:fontRef>
+        </p:style>
+        <p:txBody>
+          <a:bodyPr rtlCol="0" anchor="ctr" lIns="45720" rIns="45720" tIns="27432" bIns="27432" wrap="square"/>
+          <a:lstStyle/>
+          <a:p>
+            <a:pPr algn="ctr"/>
+          </a:p>
+        </p:txBody>
+      </p:sp>
+      <p:sp>
+        <p:nvSpPr>
+          <p:cNvPr id="37" name="Right Arrow 36"/>
+          <p:cNvSpPr/>
+          <p:nvPr/>
+        </p:nvSpPr>
+        <p:spPr>
+          <a:xfrm>
+            <a:off x="10122408" y="2537460"/>
+            <a:ext cx="192024" cy="201168"/>
+          </a:xfrm>
+          <a:prstGeom prst="rightArrow">
+            <a:avLst/>
+          </a:prstGeom>
+          <a:solidFill>
+            <a:srgbClr val="1E2761"/>
+          </a:solidFill>
+          <a:ln>
+            <a:noFill/>
+          </a:ln>
+          <a:effectLst/>
+        </p:spPr>
+        <p:style>
+          <a:lnRef idx="1">
+            <a:schemeClr val="accent1"/>
+          </a:lnRef>
+          <a:fillRef idx="3">
+            <a:schemeClr val="accent1"/>
+          </a:fillRef>
+          <a:effectRef idx="2">
+            <a:schemeClr val="accent1"/>
+          </a:effectRef>
+          <a:fontRef idx="minor">
+            <a:schemeClr val="lt1"/>
+          </a:fontRef>
+        </p:style>
+        <p:txBody>
+          <a:bodyPr rtlCol="0" anchor="ctr" lIns="45720" rIns="45720" tIns="27432" bIns="27432" wrap="square"/>
+          <a:lstStyle/>
+          <a:p>
+            <a:pPr algn="ctr"/>
+          </a:p>
+        </p:txBody>
+      </p:sp>
+      <p:sp>
+        <p:nvSpPr>
+          <p:cNvPr id="38" name="TextBox 37"/>
+          <p:cNvSpPr txBox="1"/>
+          <p:nvPr/>
+        </p:nvSpPr>
+        <p:spPr>
+          <a:xfrm>
+            <a:off x="1984248" y="3520440"/>
+            <a:ext cx="777240" cy="548640"/>
+          </a:xfrm>
+          <a:prstGeom prst="rect">
+            <a:avLst/>
+          </a:prstGeom>
+          <a:noFill/>
+        </p:spPr>
+        <p:txBody>
+          <a:bodyPr wrap="square" lIns="36576" rIns="36576" tIns="27432" bIns="27432">
+            <a:spAutoFit/>
+          </a:bodyPr>
+          <a:lstStyle/>
+          <a:p>
+            <a:pPr algn="ctr"/>
+            <a:r>
+              <a:rPr sz="900" b="1">
+                <a:solidFill>
+                  <a:srgbClr val="1E2761"/>
+                </a:solidFill>
+                <a:latin typeface="Consolas"/>
+              </a:rPr>
+              <a:t>[atoms, 9]
+[bonds, 3]</a:t>
+            </a:r>
+          </a:p>
+        </p:txBody>
+      </p:sp>
+      <p:sp>
+        <p:nvSpPr>
+          <p:cNvPr id="39" name="TextBox 38"/>
+          <p:cNvSpPr txBox="1"/>
+          <p:nvPr/>
+        </p:nvSpPr>
+        <p:spPr>
+          <a:xfrm>
+            <a:off x="3950208" y="3520440"/>
+            <a:ext cx="777240" cy="548640"/>
+          </a:xfrm>
+          <a:prstGeom prst="rect">
+            <a:avLst/>
+          </a:prstGeom>
+          <a:noFill/>
+        </p:spPr>
+        <p:txBody>
+          <a:bodyPr wrap="square" lIns="36576" rIns="36576" tIns="27432" bIns="27432">
+            <a:spAutoFit/>
+          </a:bodyPr>
+          <a:lstStyle/>
+          <a:p>
+            <a:pPr algn="ctr"/>
+            <a:r>
+              <a:rPr sz="900" b="1">
+                <a:solidFill>
+                  <a:srgbClr val="1E2761"/>
+                </a:solidFill>
+                <a:latin typeface="Consolas"/>
+              </a:rPr>
+              <a:t>h_s [N·K,128]
+h_q [Q,128]</a:t>
+            </a:r>
+          </a:p>
+        </p:txBody>
+      </p:sp>
+      <p:sp>
+        <p:nvSpPr>
+          <p:cNvPr id="40" name="TextBox 39"/>
+          <p:cNvSpPr txBox="1"/>
+          <p:nvPr/>
+        </p:nvSpPr>
+        <p:spPr>
+          <a:xfrm>
+            <a:off x="5916168" y="3520440"/>
+            <a:ext cx="777240" cy="548640"/>
+          </a:xfrm>
+          <a:prstGeom prst="rect">
+            <a:avLst/>
+          </a:prstGeom>
+          <a:noFill/>
+        </p:spPr>
+        <p:txBody>
+          <a:bodyPr wrap="square" lIns="36576" rIns="36576" tIns="27432" bIns="27432">
+            <a:spAutoFit/>
+          </a:bodyPr>
+          <a:lstStyle/>
+          <a:p>
+            <a:pPr algn="ctr"/>
+            <a:r>
+              <a:rPr sz="900" b="1">
+                <a:solidFill>
+                  <a:srgbClr val="1E2761"/>
+                </a:solidFill>
+                <a:latin typeface="Consolas"/>
+              </a:rPr>
+              <a:t>W [M,M]
+M=N·K+Q</a:t>
+            </a:r>
+          </a:p>
+        </p:txBody>
+      </p:sp>
+      <p:sp>
+        <p:nvSpPr>
+          <p:cNvPr id="41" name="TextBox 40"/>
+          <p:cNvSpPr txBox="1"/>
+          <p:nvPr/>
+        </p:nvSpPr>
+        <p:spPr>
+          <a:xfrm>
+            <a:off x="7882128" y="3520440"/>
+            <a:ext cx="777240" cy="548640"/>
+          </a:xfrm>
+          <a:prstGeom prst="rect">
+            <a:avLst/>
+          </a:prstGeom>
+          <a:noFill/>
+        </p:spPr>
+        <p:txBody>
+          <a:bodyPr wrap="square" lIns="36576" rIns="36576" tIns="27432" bIns="27432">
+            <a:spAutoFit/>
+          </a:bodyPr>
+          <a:lstStyle/>
+          <a:p>
+            <a:pPr algn="ctr"/>
+            <a:r>
+              <a:rPr sz="900" b="1">
+                <a:solidFill>
+                  <a:srgbClr val="1E2761"/>
+                </a:solidFill>
+                <a:latin typeface="Consolas"/>
+              </a:rPr>
+              <a:t>edge_index
+[2, 2·M·k]</a:t>
+            </a:r>
+          </a:p>
+        </p:txBody>
+      </p:sp>
+      <p:sp>
+        <p:nvSpPr>
+          <p:cNvPr id="42" name="TextBox 41"/>
+          <p:cNvSpPr txBox="1"/>
+          <p:nvPr/>
+        </p:nvSpPr>
+        <p:spPr>
+          <a:xfrm>
+            <a:off x="9848088" y="3520440"/>
+            <a:ext cx="777240" cy="548640"/>
+          </a:xfrm>
+          <a:prstGeom prst="rect">
+            <a:avLst/>
+          </a:prstGeom>
+          <a:noFill/>
+        </p:spPr>
+        <p:txBody>
+          <a:bodyPr wrap="square" lIns="36576" rIns="36576" tIns="27432" bIns="27432">
+            <a:spAutoFit/>
+          </a:bodyPr>
+          <a:lstStyle/>
+          <a:p>
+            <a:pPr algn="ctr"/>
+            <a:r>
+              <a:rPr sz="900" b="1">
+                <a:solidFill>
+                  <a:srgbClr val="1E2761"/>
+                </a:solidFill>
+                <a:latin typeface="Consolas"/>
+              </a:rPr>
+              <a:t>z⁽⁰⁾ [M, d+N]
+[41, 133]</a:t>
+            </a:r>
+          </a:p>
+        </p:txBody>
+      </p:sp>
+      <p:sp>
+        <p:nvSpPr>
+          <p:cNvPr id="43" name="Down Arrow 42"/>
+          <p:cNvSpPr/>
+          <p:nvPr/>
+        </p:nvSpPr>
+        <p:spPr>
+          <a:xfrm>
+            <a:off x="11091672" y="3474720"/>
+            <a:ext cx="219456" cy="274320"/>
+          </a:xfrm>
+          <a:prstGeom prst="downArrow">
+            <a:avLst/>
+          </a:prstGeom>
+          <a:solidFill>
+            <a:srgbClr val="1E2761"/>
+          </a:solidFill>
+          <a:ln>
+            <a:noFill/>
+          </a:ln>
+          <a:effectLst/>
+        </p:spPr>
+        <p:style>
+          <a:lnRef idx="1">
+            <a:schemeClr val="accent1"/>
+          </a:lnRef>
+          <a:fillRef idx="3">
+            <a:schemeClr val="accent1"/>
+          </a:fillRef>
+          <a:effectRef idx="2">
+            <a:schemeClr val="accent1"/>
+          </a:effectRef>
+          <a:fontRef idx="minor">
+            <a:schemeClr val="lt1"/>
+          </a:fontRef>
+        </p:style>
+        <p:txBody>
+          <a:bodyPr rtlCol="0" anchor="ctr" lIns="45720" rIns="45720" tIns="27432" bIns="27432" wrap="square"/>
+          <a:lstStyle/>
+          <a:p>
+            <a:pPr algn="ctr"/>
+          </a:p>
+        </p:txBody>
+      </p:sp>
+      <p:sp>
+        <p:nvSpPr>
+          <p:cNvPr id="44" name="TextBox 43"/>
+          <p:cNvSpPr txBox="1"/>
+          <p:nvPr/>
+        </p:nvSpPr>
+        <p:spPr>
+          <a:xfrm>
+            <a:off x="9966960" y="3794760"/>
+            <a:ext cx="2560320" cy="274320"/>
+          </a:xfrm>
+          <a:prstGeom prst="rect">
+            <a:avLst/>
+          </a:prstGeom>
+          <a:noFill/>
+        </p:spPr>
+        <p:txBody>
+          <a:bodyPr wrap="square" lIns="36576" rIns="36576" tIns="27432" bIns="27432">
+            <a:spAutoFit/>
+          </a:bodyPr>
+          <a:lstStyle/>
+          <a:p>
+            <a:pPr algn="ctr"/>
+            <a:r>
+              <a:rPr sz="900" b="1">
+                <a:solidFill>
+                  <a:srgbClr val="1E2761"/>
+                </a:solidFill>
+                <a:latin typeface="Consolas"/>
+              </a:rPr>
+              <a:t>z⁽ᴸ⁾ [M, 128]  →  z_s, z_q</a:t>
+            </a:r>
+          </a:p>
+        </p:txBody>
+      </p:sp>
+      <p:sp>
+        <p:nvSpPr>
+          <p:cNvPr id="45" name="Rounded Rectangle 44"/>
+          <p:cNvSpPr/>
+          <p:nvPr/>
+        </p:nvSpPr>
+        <p:spPr>
+          <a:xfrm>
+            <a:off x="6400800" y="4572000"/>
+            <a:ext cx="3200400" cy="1554480"/>
+          </a:xfrm>
+          <a:prstGeom prst="roundRect">
+            <a:avLst/>
+          </a:prstGeom>
+          <a:solidFill>
+            <a:srgbClr val="F5F7FA"/>
+          </a:solidFill>
+          <a:ln>
+            <a:noFill/>
+          </a:ln>
+          <a:effectLst/>
+        </p:spPr>
+        <p:style>
+          <a:lnRef idx="1">
+            <a:schemeClr val="accent1"/>
+          </a:lnRef>
+          <a:fillRef idx="3">
+            <a:schemeClr val="accent1"/>
+          </a:fillRef>
+          <a:effectRef idx="2">
+            <a:schemeClr val="accent1"/>
+          </a:effectRef>
+          <a:fontRef idx="minor">
+            <a:schemeClr val="lt1"/>
+          </a:fontRef>
+        </p:style>
+        <p:txBody>
+          <a:bodyPr rtlCol="0" anchor="ctr" lIns="45720" rIns="45720" tIns="27432" bIns="27432" wrap="square"/>
+          <a:lstStyle/>
+          <a:p>
+            <a:pPr algn="ctr"/>
+          </a:p>
+        </p:txBody>
+      </p:sp>
+      <p:sp>
+        <p:nvSpPr>
+          <p:cNvPr id="46" name="TextBox 45"/>
+          <p:cNvSpPr txBox="1"/>
+          <p:nvPr/>
+        </p:nvSpPr>
+        <p:spPr>
+          <a:xfrm>
+            <a:off x="6400800" y="4645152"/>
+            <a:ext cx="3200400" cy="320040"/>
+          </a:xfrm>
+          <a:prstGeom prst="rect">
+            <a:avLst/>
+          </a:prstGeom>
+          <a:noFill/>
+        </p:spPr>
+        <p:txBody>
+          <a:bodyPr wrap="square" lIns="27432" rIns="27432" tIns="18288" bIns="18288" anchor="t">
+            <a:spAutoFit/>
+          </a:bodyPr>
+          <a:lstStyle/>
+          <a:p>
+            <a:pPr algn="ctr"/>
+            <a:r>
+              <a:rPr sz="1100" b="1" i="0">
+                <a:solidFill>
+                  <a:srgbClr val="1E2761"/>
+                </a:solidFill>
+                <a:latin typeface="Calibri"/>
+              </a:rPr>
+              <a:t>⑥ Prototype head</a:t>
+            </a:r>
+          </a:p>
+        </p:txBody>
+      </p:sp>
+      <p:pic>
+        <p:nvPicPr>
+          <p:cNvPr id="47" name="Picture 46" descr="flow_proto.png"/>
+          <p:cNvPicPr>
+            <a:picLocks noChangeAspect="1"/>
+          </p:cNvPicPr>
+          <p:nvPr/>
+        </p:nvPicPr>
+        <p:blipFill>
+          <a:blip r:embed="rId8"/>
+          <a:stretch>
+            <a:fillRect/>
+          </a:stretch>
+        </p:blipFill>
+        <p:spPr>
+          <a:xfrm>
+            <a:off x="6583680" y="5074920"/>
+            <a:ext cx="2834640" cy="626055"/>
+          </a:xfrm>
+          <a:prstGeom prst="rect">
+            <a:avLst/>
+          </a:prstGeom>
+        </p:spPr>
+      </p:pic>
+      <p:pic>
+        <p:nvPicPr>
+          <p:cNvPr id="48" name="Picture 47" descr="flow_logits.png"/>
+          <p:cNvPicPr>
+            <a:picLocks noChangeAspect="1"/>
+          </p:cNvPicPr>
+          <p:nvPr/>
+        </p:nvPicPr>
+        <p:blipFill>
+          <a:blip r:embed="rId9"/>
+          <a:stretch>
+            <a:fillRect/>
+          </a:stretch>
+        </p:blipFill>
+        <p:spPr>
+          <a:xfrm>
+            <a:off x="6583680" y="5440680"/>
+            <a:ext cx="2834640" cy="399980"/>
+          </a:xfrm>
+          <a:prstGeom prst="rect">
+            <a:avLst/>
+          </a:prstGeom>
+        </p:spPr>
+      </p:pic>
+      <p:pic>
+        <p:nvPicPr>
+          <p:cNvPr id="49" name="Picture 48" descr="flow_softmax.png"/>
+          <p:cNvPicPr>
+            <a:picLocks noChangeAspect="1"/>
+          </p:cNvPicPr>
+          <p:nvPr/>
+        </p:nvPicPr>
+        <p:blipFill>
+          <a:blip r:embed="rId10"/>
+          <a:stretch>
+            <a:fillRect/>
+          </a:stretch>
+        </p:blipFill>
+        <p:spPr>
+          <a:xfrm>
+            <a:off x="6583680" y="5760720"/>
+            <a:ext cx="2834640" cy="337370"/>
+          </a:xfrm>
+          <a:prstGeom prst="rect">
+            <a:avLst/>
+          </a:prstGeom>
+        </p:spPr>
+      </p:pic>
+      <p:sp>
+        <p:nvSpPr>
+          <p:cNvPr id="50" name="Right Arrow 49"/>
+          <p:cNvSpPr/>
+          <p:nvPr/>
+        </p:nvSpPr>
+        <p:spPr>
+          <a:xfrm>
+            <a:off x="11183112" y="5257800"/>
+            <a:ext cx="-4782312" cy="201168"/>
+          </a:xfrm>
+          <a:prstGeom prst="rightArrow">
+            <a:avLst/>
+          </a:prstGeom>
+          <a:solidFill>
+            <a:srgbClr val="1E2761"/>
+          </a:solidFill>
+          <a:ln>
+            <a:noFill/>
+          </a:ln>
+          <a:effectLst/>
+        </p:spPr>
+        <p:style>
+          <a:lnRef idx="1">
+            <a:schemeClr val="accent1"/>
+          </a:lnRef>
+          <a:fillRef idx="3">
+            <a:schemeClr val="accent1"/>
+          </a:fillRef>
+          <a:effectRef idx="2">
+            <a:schemeClr val="accent1"/>
+          </a:effectRef>
+          <a:fontRef idx="minor">
+            <a:schemeClr val="lt1"/>
+          </a:fontRef>
+        </p:style>
+        <p:txBody>
+          <a:bodyPr rtlCol="0" anchor="ctr" lIns="45720" rIns="45720" tIns="27432" bIns="27432" wrap="square"/>
+          <a:lstStyle/>
+          <a:p>
+            <a:pPr algn="ctr"/>
+          </a:p>
+        </p:txBody>
+      </p:sp>
+      <p:sp>
+        <p:nvSpPr>
+          <p:cNvPr id="51" name="Rounded Rectangle 50"/>
+          <p:cNvSpPr/>
+          <p:nvPr/>
+        </p:nvSpPr>
+        <p:spPr>
+          <a:xfrm>
+            <a:off x="9784080" y="4572000"/>
+            <a:ext cx="2103120" cy="1554480"/>
+          </a:xfrm>
+          <a:prstGeom prst="roundRect">
+            <a:avLst/>
+          </a:prstGeom>
+          <a:solidFill>
+            <a:srgbClr val="CADCFC"/>
+          </a:solidFill>
+          <a:ln>
+            <a:noFill/>
+          </a:ln>
+          <a:effectLst/>
+        </p:spPr>
+        <p:style>
+          <a:lnRef idx="1">
+            <a:schemeClr val="accent1"/>
+          </a:lnRef>
+          <a:fillRef idx="3">
+            <a:schemeClr val="accent1"/>
+          </a:fillRef>
+          <a:effectRef idx="2">
+            <a:schemeClr val="accent1"/>
+          </a:effectRef>
+          <a:fontRef idx="minor">
+            <a:schemeClr val="lt1"/>
+          </a:fontRef>
+        </p:style>
+        <p:txBody>
+          <a:bodyPr rtlCol="0" anchor="ctr" lIns="45720" rIns="45720" tIns="27432" bIns="27432" wrap="square"/>
+          <a:lstStyle/>
+          <a:p>
+            <a:pPr algn="ctr"/>
+          </a:p>
+        </p:txBody>
+      </p:sp>
+      <p:sp>
+        <p:nvSpPr>
+          <p:cNvPr id="52" name="TextBox 51"/>
+          <p:cNvSpPr txBox="1"/>
+          <p:nvPr/>
+        </p:nvSpPr>
+        <p:spPr>
+          <a:xfrm>
+            <a:off x="9784080" y="4645152"/>
+            <a:ext cx="2103120" cy="320040"/>
+          </a:xfrm>
+          <a:prstGeom prst="rect">
+            <a:avLst/>
+          </a:prstGeom>
+          <a:noFill/>
+        </p:spPr>
+        <p:txBody>
+          <a:bodyPr wrap="square" lIns="27432" rIns="27432" tIns="18288" bIns="18288" anchor="t">
+            <a:spAutoFit/>
+          </a:bodyPr>
+          <a:lstStyle/>
+          <a:p>
+            <a:pPr algn="ctr"/>
+            <a:r>
+              <a:rPr sz="1100" b="1" i="0">
+                <a:solidFill>
+                  <a:srgbClr val="1E2761"/>
+                </a:solidFill>
+                <a:latin typeface="Calibri"/>
+              </a:rPr>
+              <a:t>Query probs</a:t>
+            </a:r>
+          </a:p>
+        </p:txBody>
+      </p:sp>
+      <p:sp>
+        <p:nvSpPr>
+          <p:cNvPr id="53" name="TextBox 52"/>
+          <p:cNvSpPr txBox="1"/>
+          <p:nvPr/>
+        </p:nvSpPr>
+        <p:spPr>
+          <a:xfrm>
+            <a:off x="9784080" y="5212080"/>
+            <a:ext cx="2103120" cy="822960"/>
+          </a:xfrm>
+          <a:prstGeom prst="rect">
+            <a:avLst/>
+          </a:prstGeom>
+          <a:noFill/>
+        </p:spPr>
+        <p:txBody>
+          <a:bodyPr wrap="square" lIns="27432" rIns="27432" tIns="18288" bIns="18288" anchor="t">
+            <a:spAutoFit/>
+          </a:bodyPr>
+          <a:lstStyle/>
+          <a:p>
+            <a:pPr algn="ctr"/>
+            <a:r>
+              <a:rPr sz="1200" b="0" i="1">
+                <a:solidFill>
+                  <a:srgbClr val="1E2761"/>
+                </a:solidFill>
+                <a:latin typeface="Calibri"/>
+              </a:rPr>
+              <a:t>p(y|G_q) ∈ R^N
+shape [Q, N]</a:t>
+            </a:r>
+          </a:p>
+        </p:txBody>
+      </p:sp>
+      <p:sp>
+        <p:nvSpPr>
+          <p:cNvPr id="54" name="Right Arrow 53"/>
+          <p:cNvSpPr/>
+          <p:nvPr/>
+        </p:nvSpPr>
+        <p:spPr>
+          <a:xfrm>
+            <a:off x="9619488" y="5257800"/>
+            <a:ext cx="146304" cy="201168"/>
+          </a:xfrm>
+          <a:prstGeom prst="rightArrow">
+            <a:avLst/>
+          </a:prstGeom>
+          <a:solidFill>
+            <a:srgbClr val="1E2761"/>
+          </a:solidFill>
+          <a:ln>
+            <a:noFill/>
+          </a:ln>
+          <a:effectLst/>
+        </p:spPr>
+        <p:style>
+          <a:lnRef idx="1">
+            <a:schemeClr val="accent1"/>
+          </a:lnRef>
+          <a:fillRef idx="3">
+            <a:schemeClr val="accent1"/>
+          </a:fillRef>
+          <a:effectRef idx="2">
+            <a:schemeClr val="accent1"/>
+          </a:effectRef>
+          <a:fontRef idx="minor">
+            <a:schemeClr val="lt1"/>
+          </a:fontRef>
+        </p:style>
+        <p:txBody>
+          <a:bodyPr rtlCol="0" anchor="ctr" lIns="45720" rIns="45720" tIns="27432" bIns="27432" wrap="square"/>
+          <a:lstStyle/>
+          <a:p>
+            <a:pPr algn="ctr"/>
+          </a:p>
+        </p:txBody>
+      </p:sp>
+      <p:sp>
+        <p:nvSpPr>
+          <p:cNvPr id="55" name="TextBox 54"/>
+          <p:cNvSpPr txBox="1"/>
+          <p:nvPr/>
+        </p:nvSpPr>
+        <p:spPr>
+          <a:xfrm>
+            <a:off x="502920" y="6172200"/>
+            <a:ext cx="11185855" cy="320040"/>
+          </a:xfrm>
+          <a:prstGeom prst="rect">
+            <a:avLst/>
+          </a:prstGeom>
+          <a:noFill/>
+        </p:spPr>
+        <p:txBody>
+          <a:bodyPr wrap="square" lIns="27432" rIns="27432" tIns="18288" bIns="18288" anchor="t">
+            <a:spAutoFit/>
+          </a:bodyPr>
+          <a:lstStyle/>
+          <a:p>
+            <a:pPr algn="ctr"/>
+            <a:r>
+              <a:rPr sz="1000" b="0" i="1">
                 <a:solidFill>
                   <a:srgbClr val="888A90"/>
                 </a:solidFill>
                 <a:latin typeface="Calibri"/>
               </a:rPr>
-              <a:t>All modules trained jointly end-to-end.  Nodes in the meta-graph are MOLECULES (not atoms).  No persistent per-class parameters.</a:t>
+              <a:t>All modules trained end-to-end with cross-entropy on query labels.  No per-class parameters anywhere.</a:t>
             </a:r>
           </a:p>
         </p:txBody>
@@ -9434,7 +10488,7 @@
           <a:noFill/>
         </p:spPr>
         <p:txBody>
-          <a:bodyPr wrap="square" lIns="45720" rIns="45720" tIns="27432" bIns="27432" anchor="t">
+          <a:bodyPr wrap="square" lIns="27432" rIns="27432" tIns="18288" bIns="18288" anchor="t">
             <a:spAutoFit/>
           </a:bodyPr>
           <a:lstStyle/>
@@ -9469,7 +10523,7 @@
           <a:noFill/>
         </p:spPr>
         <p:txBody>
-          <a:bodyPr wrap="square" lIns="45720" rIns="45720" tIns="27432" bIns="27432" anchor="t">
+          <a:bodyPr wrap="square" lIns="27432" rIns="27432" tIns="18288" bIns="18288" anchor="t">
             <a:spAutoFit/>
           </a:bodyPr>
           <a:lstStyle/>
@@ -9504,7 +10558,7 @@
           <a:noFill/>
         </p:spPr>
         <p:txBody>
-          <a:bodyPr wrap="square" lIns="45720" rIns="45720" tIns="27432" bIns="27432" anchor="t">
+          <a:bodyPr wrap="square" lIns="27432" rIns="27432" tIns="18288" bIns="18288" anchor="t">
             <a:spAutoFit/>
           </a:bodyPr>
           <a:lstStyle/>
@@ -9583,7 +10637,7 @@
           <a:noFill/>
         </p:spPr>
         <p:txBody>
-          <a:bodyPr wrap="square" lIns="45720" rIns="45720" tIns="27432" bIns="27432" anchor="t">
+          <a:bodyPr wrap="square" lIns="27432" rIns="27432" tIns="18288" bIns="18288" anchor="t">
             <a:spAutoFit/>
           </a:bodyPr>
           <a:lstStyle/>
@@ -9878,7 +10932,7 @@
           <a:noFill/>
         </p:spPr>
         <p:txBody>
-          <a:bodyPr wrap="square" lIns="45720" rIns="45720" tIns="27432" bIns="27432" anchor="t">
+          <a:bodyPr wrap="square" lIns="27432" rIns="27432" tIns="18288" bIns="18288" anchor="t">
             <a:spAutoFit/>
           </a:bodyPr>
           <a:lstStyle/>
@@ -10036,7 +11090,7 @@
           <a:noFill/>
         </p:spPr>
         <p:txBody>
-          <a:bodyPr wrap="square" lIns="45720" rIns="45720" tIns="27432" bIns="27432" anchor="t">
+          <a:bodyPr wrap="square" lIns="27432" rIns="27432" tIns="18288" bIns="18288" anchor="t">
             <a:spAutoFit/>
           </a:bodyPr>
           <a:lstStyle/>
@@ -10049,7 +11103,7 @@
                 </a:solidFill>
                 <a:latin typeface="Calibri"/>
               </a:rPr>
-              <a:t>GoS v2 — What Changed, and Why</a:t>
+              <a:t>GoS v2 — Five Modifications with Motivations</a:t>
             </a:r>
           </a:p>
         </p:txBody>
@@ -10071,7 +11125,7 @@
           <a:noFill/>
         </p:spPr>
         <p:txBody>
-          <a:bodyPr wrap="square" lIns="45720" rIns="45720" tIns="27432" bIns="27432" anchor="t">
+          <a:bodyPr wrap="square" lIns="27432" rIns="27432" tIns="18288" bIns="18288" anchor="t">
             <a:spAutoFit/>
           </a:bodyPr>
           <a:lstStyle/>
@@ -10106,7 +11160,7 @@
           <a:noFill/>
         </p:spPr>
         <p:txBody>
-          <a:bodyPr wrap="square" lIns="45720" rIns="45720" tIns="27432" bIns="27432" anchor="t">
+          <a:bodyPr wrap="square" lIns="27432" rIns="27432" tIns="18288" bIns="18288" anchor="t">
             <a:spAutoFit/>
           </a:bodyPr>
           <a:lstStyle/>
@@ -10124,9 +11178,88 @@
           </a:p>
         </p:txBody>
       </p:sp>
+      <p:sp>
+        <p:nvSpPr>
+          <p:cNvPr id="7" name="Rounded Rectangle 6"/>
+          <p:cNvSpPr/>
+          <p:nvPr/>
+        </p:nvSpPr>
+        <p:spPr>
+          <a:xfrm>
+            <a:off x="502920" y="1280160"/>
+            <a:ext cx="5029200" cy="1005840"/>
+          </a:xfrm>
+          <a:prstGeom prst="roundRect">
+            <a:avLst/>
+          </a:prstGeom>
+          <a:solidFill>
+            <a:srgbClr val="F96167"/>
+          </a:solidFill>
+          <a:ln>
+            <a:noFill/>
+          </a:ln>
+          <a:effectLst/>
+        </p:spPr>
+        <p:style>
+          <a:lnRef idx="1">
+            <a:schemeClr val="accent1"/>
+          </a:lnRef>
+          <a:fillRef idx="3">
+            <a:schemeClr val="accent1"/>
+          </a:fillRef>
+          <a:effectRef idx="2">
+            <a:schemeClr val="accent1"/>
+          </a:effectRef>
+          <a:fontRef idx="minor">
+            <a:schemeClr val="lt1"/>
+          </a:fontRef>
+        </p:style>
+        <p:txBody>
+          <a:bodyPr rtlCol="0" anchor="ctr" lIns="45720" rIns="45720" tIns="27432" bIns="27432" wrap="square"/>
+          <a:lstStyle/>
+          <a:p>
+            <a:pPr algn="ctr"/>
+          </a:p>
+        </p:txBody>
+      </p:sp>
+      <p:sp>
+        <p:nvSpPr>
+          <p:cNvPr id="8" name="TextBox 7"/>
+          <p:cNvSpPr txBox="1"/>
+          <p:nvPr/>
+        </p:nvSpPr>
+        <p:spPr>
+          <a:xfrm>
+            <a:off x="502920" y="1353312"/>
+            <a:ext cx="5029200" cy="320040"/>
+          </a:xfrm>
+          <a:prstGeom prst="rect">
+            <a:avLst/>
+          </a:prstGeom>
+          <a:noFill/>
+        </p:spPr>
+        <p:txBody>
+          <a:bodyPr wrap="square" lIns="27432" rIns="27432" tIns="18288" bIns="18288" anchor="t">
+            <a:spAutoFit/>
+          </a:bodyPr>
+          <a:lstStyle/>
+          <a:p>
+            <a:pPr algn="ctr"/>
+            <a:r>
+              <a:rPr sz="1100" b="1" i="0">
+                <a:solidFill>
+                  <a:srgbClr val="FFFFFF"/>
+                </a:solidFill>
+                <a:latin typeface="Calibri"/>
+              </a:rPr>
+              <a:t>M5 · SSL pretrain  (before episodic training)</a:t>
+            </a:r>
+          </a:p>
+        </p:txBody>
+      </p:sp>
       <p:pic>
         <p:nvPicPr>
-          <p:cNvPr id="7" name="Picture 6" descr="fig_v2_flow.png"/>
+          <p:cNvPr id="9" name="Picture 8" descr="flow_ssl.png"/>
           <p:cNvPicPr>
             <a:picLocks noChangeAspect="1"/>
           </p:cNvPicPr>
@@ -10140,8 +11273,8 @@
         </p:blipFill>
         <p:spPr>
           <a:xfrm>
-            <a:off x="182880" y="1417320"/>
-            <a:ext cx="11795760" cy="6456380"/>
+            <a:off x="685800" y="1691640"/>
+            <a:ext cx="4663440" cy="282261"/>
           </a:xfrm>
           <a:prstGeom prst="rect">
             <a:avLst/>
@@ -10150,14 +11283,14 @@
       </p:pic>
       <p:sp>
         <p:nvSpPr>
-          <p:cNvPr id="8" name="TextBox 7"/>
+          <p:cNvPr id="10" name="TextBox 9"/>
           <p:cNvSpPr txBox="1"/>
           <p:nvPr/>
         </p:nvSpPr>
         <p:spPr>
           <a:xfrm>
-            <a:off x="502920" y="6355080"/>
-            <a:ext cx="11185855" cy="365760"/>
+            <a:off x="502920" y="1993392"/>
+            <a:ext cx="5029200" cy="274320"/>
           </a:xfrm>
           <a:prstGeom prst="rect">
             <a:avLst/>
@@ -10165,20 +11298,2181 @@
           <a:noFill/>
         </p:spPr>
         <p:txBody>
-          <a:bodyPr wrap="square" lIns="45720" rIns="45720" tIns="27432" bIns="27432" anchor="t">
+          <a:bodyPr wrap="square" lIns="27432" rIns="27432" tIns="18288" bIns="18288" anchor="t">
             <a:spAutoFit/>
           </a:bodyPr>
           <a:lstStyle/>
           <a:p>
             <a:pPr algn="ctr"/>
             <a:r>
-              <a:rPr sz="1100" b="0" i="1">
+              <a:rPr sz="900" b="0" i="1">
+                <a:solidFill>
+                  <a:srgbClr val="FFFFFF"/>
+                </a:solidFill>
+                <a:latin typeface="Calibri"/>
+              </a:rPr>
+              <a:t>motivation:  baseline already 0.71  →  encoder is the bottleneck</a:t>
+            </a:r>
+          </a:p>
+        </p:txBody>
+      </p:sp>
+      <p:sp>
+        <p:nvSpPr>
+          <p:cNvPr id="11" name="TextBox 10"/>
+          <p:cNvSpPr txBox="1"/>
+          <p:nvPr/>
+        </p:nvSpPr>
+        <p:spPr>
+          <a:xfrm>
+            <a:off x="5715000" y="1600200"/>
+            <a:ext cx="4572000" cy="365760"/>
+          </a:xfrm>
+          <a:prstGeom prst="rect">
+            <a:avLst/>
+          </a:prstGeom>
+          <a:noFill/>
+        </p:spPr>
+        <p:txBody>
+          <a:bodyPr wrap="square" lIns="27432" rIns="27432" tIns="18288" bIns="18288" anchor="t">
+            <a:spAutoFit/>
+          </a:bodyPr>
+          <a:lstStyle/>
+          <a:p>
+            <a:pPr algn="l"/>
+            <a:r>
+              <a:rPr sz="1100" b="1" i="1">
                 <a:solidFill>
                   <a:srgbClr val="F96167"/>
                 </a:solidFill>
                 <a:latin typeface="Calibri"/>
               </a:rPr>
-              <a:t>Red boxes = the five modifications (M1 residual · M2 GAT · M3 bipartite · M4 contrastive · M5 SSL).  Each targets one failure mode diagnosed in slide 6.</a:t>
+              <a:t>+2.2 pp  (largest single lever)</a:t>
+            </a:r>
+          </a:p>
+        </p:txBody>
+      </p:sp>
+      <p:sp>
+        <p:nvSpPr>
+          <p:cNvPr id="12" name="Rounded Rectangle 11"/>
+          <p:cNvSpPr/>
+          <p:nvPr/>
+        </p:nvSpPr>
+        <p:spPr>
+          <a:xfrm>
+            <a:off x="502920" y="2606040"/>
+            <a:ext cx="1737360" cy="1600200"/>
+          </a:xfrm>
+          <a:prstGeom prst="roundRect">
+            <a:avLst/>
+          </a:prstGeom>
+          <a:solidFill>
+            <a:srgbClr val="CADCFC"/>
+          </a:solidFill>
+          <a:ln>
+            <a:noFill/>
+          </a:ln>
+          <a:effectLst/>
+        </p:spPr>
+        <p:style>
+          <a:lnRef idx="1">
+            <a:schemeClr val="accent1"/>
+          </a:lnRef>
+          <a:fillRef idx="3">
+            <a:schemeClr val="accent1"/>
+          </a:fillRef>
+          <a:effectRef idx="2">
+            <a:schemeClr val="accent1"/>
+          </a:effectRef>
+          <a:fontRef idx="minor">
+            <a:schemeClr val="lt1"/>
+          </a:fontRef>
+        </p:style>
+        <p:txBody>
+          <a:bodyPr rtlCol="0" anchor="ctr" lIns="45720" rIns="45720" tIns="27432" bIns="27432" wrap="square"/>
+          <a:lstStyle/>
+          <a:p>
+            <a:pPr algn="ctr"/>
+          </a:p>
+        </p:txBody>
+      </p:sp>
+      <p:sp>
+        <p:nvSpPr>
+          <p:cNvPr id="13" name="TextBox 12"/>
+          <p:cNvSpPr txBox="1"/>
+          <p:nvPr/>
+        </p:nvSpPr>
+        <p:spPr>
+          <a:xfrm>
+            <a:off x="502920" y="2679192"/>
+            <a:ext cx="1737360" cy="320040"/>
+          </a:xfrm>
+          <a:prstGeom prst="rect">
+            <a:avLst/>
+          </a:prstGeom>
+          <a:noFill/>
+        </p:spPr>
+        <p:txBody>
+          <a:bodyPr wrap="square" lIns="27432" rIns="27432" tIns="18288" bIns="18288" anchor="t">
+            <a:spAutoFit/>
+          </a:bodyPr>
+          <a:lstStyle/>
+          <a:p>
+            <a:pPr algn="ctr"/>
+            <a:r>
+              <a:rPr sz="1100" b="1" i="0">
+                <a:solidFill>
+                  <a:srgbClr val="1E2761"/>
+                </a:solidFill>
+                <a:latin typeface="Calibri"/>
+              </a:rPr>
+              <a:t>Episode input</a:t>
+            </a:r>
+          </a:p>
+        </p:txBody>
+      </p:sp>
+      <p:sp>
+        <p:nvSpPr>
+          <p:cNvPr id="14" name="TextBox 13"/>
+          <p:cNvSpPr txBox="1"/>
+          <p:nvPr/>
+        </p:nvSpPr>
+        <p:spPr>
+          <a:xfrm>
+            <a:off x="502920" y="3200400"/>
+            <a:ext cx="1737360" cy="548640"/>
+          </a:xfrm>
+          <a:prstGeom prst="rect">
+            <a:avLst/>
+          </a:prstGeom>
+          <a:noFill/>
+        </p:spPr>
+        <p:txBody>
+          <a:bodyPr wrap="square" lIns="27432" rIns="27432" tIns="18288" bIns="18288" anchor="t">
+            <a:spAutoFit/>
+          </a:bodyPr>
+          <a:lstStyle/>
+          <a:p>
+            <a:pPr algn="ctr"/>
+            <a:r>
+              <a:rPr sz="1000" b="0" i="1">
+                <a:solidFill>
+                  <a:srgbClr val="1E2761"/>
+                </a:solidFill>
+                <a:latin typeface="Calibri"/>
+              </a:rPr>
+              <a:t>N·K support
++ Q query</a:t>
+            </a:r>
+          </a:p>
+        </p:txBody>
+      </p:sp>
+      <p:sp>
+        <p:nvSpPr>
+          <p:cNvPr id="15" name="Rounded Rectangle 14"/>
+          <p:cNvSpPr/>
+          <p:nvPr/>
+        </p:nvSpPr>
+        <p:spPr>
+          <a:xfrm>
+            <a:off x="2468880" y="2606040"/>
+            <a:ext cx="1737360" cy="1600200"/>
+          </a:xfrm>
+          <a:prstGeom prst="roundRect">
+            <a:avLst/>
+          </a:prstGeom>
+          <a:solidFill>
+            <a:srgbClr val="F5F7FA"/>
+          </a:solidFill>
+          <a:ln>
+            <a:noFill/>
+          </a:ln>
+          <a:effectLst/>
+        </p:spPr>
+        <p:style>
+          <a:lnRef idx="1">
+            <a:schemeClr val="accent1"/>
+          </a:lnRef>
+          <a:fillRef idx="3">
+            <a:schemeClr val="accent1"/>
+          </a:fillRef>
+          <a:effectRef idx="2">
+            <a:schemeClr val="accent1"/>
+          </a:effectRef>
+          <a:fontRef idx="minor">
+            <a:schemeClr val="lt1"/>
+          </a:fontRef>
+        </p:style>
+        <p:txBody>
+          <a:bodyPr rtlCol="0" anchor="ctr" lIns="45720" rIns="45720" tIns="27432" bIns="27432" wrap="square"/>
+          <a:lstStyle/>
+          <a:p>
+            <a:pPr algn="ctr"/>
+          </a:p>
+        </p:txBody>
+      </p:sp>
+      <p:sp>
+        <p:nvSpPr>
+          <p:cNvPr id="16" name="TextBox 15"/>
+          <p:cNvSpPr txBox="1"/>
+          <p:nvPr/>
+        </p:nvSpPr>
+        <p:spPr>
+          <a:xfrm>
+            <a:off x="2468880" y="2679192"/>
+            <a:ext cx="1737360" cy="320040"/>
+          </a:xfrm>
+          <a:prstGeom prst="rect">
+            <a:avLst/>
+          </a:prstGeom>
+          <a:noFill/>
+        </p:spPr>
+        <p:txBody>
+          <a:bodyPr wrap="square" lIns="27432" rIns="27432" tIns="18288" bIns="18288" anchor="t">
+            <a:spAutoFit/>
+          </a:bodyPr>
+          <a:lstStyle/>
+          <a:p>
+            <a:pPr algn="ctr"/>
+            <a:r>
+              <a:rPr sz="1100" b="1" i="0">
+                <a:solidFill>
+                  <a:srgbClr val="1E2761"/>
+                </a:solidFill>
+                <a:latin typeface="Calibri"/>
+              </a:rPr>
+              <a:t>① Encoder φ</a:t>
+            </a:r>
+          </a:p>
+        </p:txBody>
+      </p:sp>
+      <p:pic>
+        <p:nvPicPr>
+          <p:cNvPr id="17" name="Picture 16" descr="flow_encoder.png"/>
+          <p:cNvPicPr>
+            <a:picLocks noChangeAspect="1"/>
+          </p:cNvPicPr>
+          <p:nvPr/>
+        </p:nvPicPr>
+        <p:blipFill>
+          <a:blip r:embed="rId3"/>
+          <a:stretch>
+            <a:fillRect/>
+          </a:stretch>
+        </p:blipFill>
+        <p:spPr>
+          <a:xfrm>
+            <a:off x="2514600" y="3108960"/>
+            <a:ext cx="1645920" cy="109649"/>
+          </a:xfrm>
+          <a:prstGeom prst="rect">
+            <a:avLst/>
+          </a:prstGeom>
+        </p:spPr>
+      </p:pic>
+      <p:sp>
+        <p:nvSpPr>
+          <p:cNvPr id="18" name="TextBox 17"/>
+          <p:cNvSpPr txBox="1"/>
+          <p:nvPr/>
+        </p:nvSpPr>
+        <p:spPr>
+          <a:xfrm>
+            <a:off x="2468880" y="3794760"/>
+            <a:ext cx="1737360" cy="320040"/>
+          </a:xfrm>
+          <a:prstGeom prst="rect">
+            <a:avLst/>
+          </a:prstGeom>
+          <a:noFill/>
+        </p:spPr>
+        <p:txBody>
+          <a:bodyPr wrap="square" lIns="27432" rIns="27432" tIns="18288" bIns="18288" anchor="t">
+            <a:spAutoFit/>
+          </a:bodyPr>
+          <a:lstStyle/>
+          <a:p>
+            <a:pPr algn="ctr"/>
+            <a:r>
+              <a:rPr sz="900" b="0" i="1">
+                <a:solidFill>
+                  <a:srgbClr val="36454F"/>
+                </a:solidFill>
+                <a:latin typeface="Calibri"/>
+              </a:rPr>
+              <a:t>SSL-init from M5</a:t>
+            </a:r>
+          </a:p>
+        </p:txBody>
+      </p:sp>
+      <p:sp>
+        <p:nvSpPr>
+          <p:cNvPr id="19" name="Rounded Rectangle 18"/>
+          <p:cNvSpPr/>
+          <p:nvPr/>
+        </p:nvSpPr>
+        <p:spPr>
+          <a:xfrm>
+            <a:off x="4434840" y="2606040"/>
+            <a:ext cx="1737360" cy="1600200"/>
+          </a:xfrm>
+          <a:prstGeom prst="roundRect">
+            <a:avLst/>
+          </a:prstGeom>
+          <a:solidFill>
+            <a:srgbClr val="F5F7FA"/>
+          </a:solidFill>
+          <a:ln>
+            <a:noFill/>
+          </a:ln>
+          <a:effectLst/>
+        </p:spPr>
+        <p:style>
+          <a:lnRef idx="1">
+            <a:schemeClr val="accent1"/>
+          </a:lnRef>
+          <a:fillRef idx="3">
+            <a:schemeClr val="accent1"/>
+          </a:fillRef>
+          <a:effectRef idx="2">
+            <a:schemeClr val="accent1"/>
+          </a:effectRef>
+          <a:fontRef idx="minor">
+            <a:schemeClr val="lt1"/>
+          </a:fontRef>
+        </p:style>
+        <p:txBody>
+          <a:bodyPr rtlCol="0" anchor="ctr" lIns="45720" rIns="45720" tIns="27432" bIns="27432" wrap="square"/>
+          <a:lstStyle/>
+          <a:p>
+            <a:pPr algn="ctr"/>
+          </a:p>
+        </p:txBody>
+      </p:sp>
+      <p:sp>
+        <p:nvSpPr>
+          <p:cNvPr id="20" name="TextBox 19"/>
+          <p:cNvSpPr txBox="1"/>
+          <p:nvPr/>
+        </p:nvSpPr>
+        <p:spPr>
+          <a:xfrm>
+            <a:off x="4434840" y="2679192"/>
+            <a:ext cx="1737360" cy="320040"/>
+          </a:xfrm>
+          <a:prstGeom prst="rect">
+            <a:avLst/>
+          </a:prstGeom>
+          <a:noFill/>
+        </p:spPr>
+        <p:txBody>
+          <a:bodyPr wrap="square" lIns="27432" rIns="27432" tIns="18288" bIns="18288" anchor="t">
+            <a:spAutoFit/>
+          </a:bodyPr>
+          <a:lstStyle/>
+          <a:p>
+            <a:pPr algn="ctr"/>
+            <a:r>
+              <a:rPr sz="1100" b="1" i="0">
+                <a:solidFill>
+                  <a:srgbClr val="1E2761"/>
+                </a:solidFill>
+                <a:latin typeface="Calibri"/>
+              </a:rPr>
+              <a:t>② Affinity+kNN</a:t>
+            </a:r>
+          </a:p>
+        </p:txBody>
+      </p:sp>
+      <p:pic>
+        <p:nvPicPr>
+          <p:cNvPr id="21" name="Picture 20" descr="flow_affinity.png"/>
+          <p:cNvPicPr>
+            <a:picLocks noChangeAspect="1"/>
+          </p:cNvPicPr>
+          <p:nvPr/>
+        </p:nvPicPr>
+        <p:blipFill>
+          <a:blip r:embed="rId4"/>
+          <a:stretch>
+            <a:fillRect/>
+          </a:stretch>
+        </p:blipFill>
+        <p:spPr>
+          <a:xfrm>
+            <a:off x="4480560" y="3108960"/>
+            <a:ext cx="1645920" cy="120178"/>
+          </a:xfrm>
+          <a:prstGeom prst="rect">
+            <a:avLst/>
+          </a:prstGeom>
+        </p:spPr>
+      </p:pic>
+      <p:sp>
+        <p:nvSpPr>
+          <p:cNvPr id="22" name="Rounded Rectangle 21"/>
+          <p:cNvSpPr/>
+          <p:nvPr/>
+        </p:nvSpPr>
+        <p:spPr>
+          <a:xfrm>
+            <a:off x="6400800" y="2606040"/>
+            <a:ext cx="1737360" cy="1600200"/>
+          </a:xfrm>
+          <a:prstGeom prst="roundRect">
+            <a:avLst/>
+          </a:prstGeom>
+          <a:solidFill>
+            <a:srgbClr val="F96167"/>
+          </a:solidFill>
+          <a:ln>
+            <a:noFill/>
+          </a:ln>
+          <a:effectLst/>
+        </p:spPr>
+        <p:style>
+          <a:lnRef idx="1">
+            <a:schemeClr val="accent1"/>
+          </a:lnRef>
+          <a:fillRef idx="3">
+            <a:schemeClr val="accent1"/>
+          </a:fillRef>
+          <a:effectRef idx="2">
+            <a:schemeClr val="accent1"/>
+          </a:effectRef>
+          <a:fontRef idx="minor">
+            <a:schemeClr val="lt1"/>
+          </a:fontRef>
+        </p:style>
+        <p:txBody>
+          <a:bodyPr rtlCol="0" anchor="ctr" lIns="45720" rIns="45720" tIns="27432" bIns="27432" wrap="square"/>
+          <a:lstStyle/>
+          <a:p>
+            <a:pPr algn="ctr"/>
+          </a:p>
+        </p:txBody>
+      </p:sp>
+      <p:sp>
+        <p:nvSpPr>
+          <p:cNvPr id="23" name="TextBox 22"/>
+          <p:cNvSpPr txBox="1"/>
+          <p:nvPr/>
+        </p:nvSpPr>
+        <p:spPr>
+          <a:xfrm>
+            <a:off x="6400800" y="2679192"/>
+            <a:ext cx="1737360" cy="320040"/>
+          </a:xfrm>
+          <a:prstGeom prst="rect">
+            <a:avLst/>
+          </a:prstGeom>
+          <a:noFill/>
+        </p:spPr>
+        <p:txBody>
+          <a:bodyPr wrap="square" lIns="27432" rIns="27432" tIns="18288" bIns="18288" anchor="t">
+            <a:spAutoFit/>
+          </a:bodyPr>
+          <a:lstStyle/>
+          <a:p>
+            <a:pPr algn="ctr"/>
+            <a:r>
+              <a:rPr sz="1100" b="1" i="0">
+                <a:solidFill>
+                  <a:srgbClr val="FFFFFF"/>
+                </a:solidFill>
+                <a:latin typeface="Calibri"/>
+              </a:rPr>
+              <a:t>③ M3 · Bipartite</a:t>
+            </a:r>
+          </a:p>
+        </p:txBody>
+      </p:sp>
+      <p:pic>
+        <p:nvPicPr>
+          <p:cNvPr id="24" name="Picture 23" descr="flow_bipartite.png"/>
+          <p:cNvPicPr>
+            <a:picLocks noChangeAspect="1"/>
+          </p:cNvPicPr>
+          <p:nvPr/>
+        </p:nvPicPr>
+        <p:blipFill>
+          <a:blip r:embed="rId5"/>
+          <a:stretch>
+            <a:fillRect/>
+          </a:stretch>
+        </p:blipFill>
+        <p:spPr>
+          <a:xfrm>
+            <a:off x="6446520" y="3108960"/>
+            <a:ext cx="1645920" cy="156108"/>
+          </a:xfrm>
+          <a:prstGeom prst="rect">
+            <a:avLst/>
+          </a:prstGeom>
+        </p:spPr>
+      </p:pic>
+      <p:sp>
+        <p:nvSpPr>
+          <p:cNvPr id="25" name="TextBox 24"/>
+          <p:cNvSpPr txBox="1"/>
+          <p:nvPr/>
+        </p:nvSpPr>
+        <p:spPr>
+          <a:xfrm>
+            <a:off x="6400800" y="3794760"/>
+            <a:ext cx="1737360" cy="320040"/>
+          </a:xfrm>
+          <a:prstGeom prst="rect">
+            <a:avLst/>
+          </a:prstGeom>
+          <a:noFill/>
+        </p:spPr>
+        <p:txBody>
+          <a:bodyPr wrap="square" lIns="27432" rIns="27432" tIns="18288" bIns="18288" anchor="t">
+            <a:spAutoFit/>
+          </a:bodyPr>
+          <a:lstStyle/>
+          <a:p>
+            <a:pPr algn="ctr"/>
+            <a:r>
+              <a:rPr sz="900" b="0" i="1">
+                <a:solidFill>
+                  <a:srgbClr val="FFFFFF"/>
+                </a:solidFill>
+                <a:latin typeface="Calibri"/>
+              </a:rPr>
+              <a:t>Q-sent msg = noise</a:t>
+            </a:r>
+          </a:p>
+        </p:txBody>
+      </p:sp>
+      <p:sp>
+        <p:nvSpPr>
+          <p:cNvPr id="26" name="Rounded Rectangle 25"/>
+          <p:cNvSpPr/>
+          <p:nvPr/>
+        </p:nvSpPr>
+        <p:spPr>
+          <a:xfrm>
+            <a:off x="8366760" y="2606040"/>
+            <a:ext cx="1737360" cy="1600200"/>
+          </a:xfrm>
+          <a:prstGeom prst="roundRect">
+            <a:avLst/>
+          </a:prstGeom>
+          <a:solidFill>
+            <a:srgbClr val="F96167"/>
+          </a:solidFill>
+          <a:ln>
+            <a:noFill/>
+          </a:ln>
+          <a:effectLst/>
+        </p:spPr>
+        <p:style>
+          <a:lnRef idx="1">
+            <a:schemeClr val="accent1"/>
+          </a:lnRef>
+          <a:fillRef idx="3">
+            <a:schemeClr val="accent1"/>
+          </a:fillRef>
+          <a:effectRef idx="2">
+            <a:schemeClr val="accent1"/>
+          </a:effectRef>
+          <a:fontRef idx="minor">
+            <a:schemeClr val="lt1"/>
+          </a:fontRef>
+        </p:style>
+        <p:txBody>
+          <a:bodyPr rtlCol="0" anchor="ctr" lIns="45720" rIns="45720" tIns="27432" bIns="27432" wrap="square"/>
+          <a:lstStyle/>
+          <a:p>
+            <a:pPr algn="ctr"/>
+          </a:p>
+        </p:txBody>
+      </p:sp>
+      <p:sp>
+        <p:nvSpPr>
+          <p:cNvPr id="27" name="TextBox 26"/>
+          <p:cNvSpPr txBox="1"/>
+          <p:nvPr/>
+        </p:nvSpPr>
+        <p:spPr>
+          <a:xfrm>
+            <a:off x="8366760" y="2679192"/>
+            <a:ext cx="1737360" cy="320040"/>
+          </a:xfrm>
+          <a:prstGeom prst="rect">
+            <a:avLst/>
+          </a:prstGeom>
+          <a:noFill/>
+        </p:spPr>
+        <p:txBody>
+          <a:bodyPr wrap="square" lIns="27432" rIns="27432" tIns="18288" bIns="18288" anchor="t">
+            <a:spAutoFit/>
+          </a:bodyPr>
+          <a:lstStyle/>
+          <a:p>
+            <a:pPr algn="ctr"/>
+            <a:r>
+              <a:rPr sz="1100" b="1" i="0">
+                <a:solidFill>
+                  <a:srgbClr val="FFFFFF"/>
+                </a:solidFill>
+                <a:latin typeface="Calibri"/>
+              </a:rPr>
+              <a:t>④ M2 · 1-layer GAT</a:t>
+            </a:r>
+          </a:p>
+        </p:txBody>
+      </p:sp>
+      <p:pic>
+        <p:nvPicPr>
+          <p:cNvPr id="28" name="Picture 27" descr="flow_gat.png"/>
+          <p:cNvPicPr>
+            <a:picLocks noChangeAspect="1"/>
+          </p:cNvPicPr>
+          <p:nvPr/>
+        </p:nvPicPr>
+        <p:blipFill>
+          <a:blip r:embed="rId6"/>
+          <a:stretch>
+            <a:fillRect/>
+          </a:stretch>
+        </p:blipFill>
+        <p:spPr>
+          <a:xfrm>
+            <a:off x="8412480" y="3108960"/>
+            <a:ext cx="1645920" cy="141916"/>
+          </a:xfrm>
+          <a:prstGeom prst="rect">
+            <a:avLst/>
+          </a:prstGeom>
+        </p:spPr>
+      </p:pic>
+      <p:sp>
+        <p:nvSpPr>
+          <p:cNvPr id="29" name="TextBox 28"/>
+          <p:cNvSpPr txBox="1"/>
+          <p:nvPr/>
+        </p:nvSpPr>
+        <p:spPr>
+          <a:xfrm>
+            <a:off x="8366760" y="3794760"/>
+            <a:ext cx="1737360" cy="320040"/>
+          </a:xfrm>
+          <a:prstGeom prst="rect">
+            <a:avLst/>
+          </a:prstGeom>
+          <a:noFill/>
+        </p:spPr>
+        <p:txBody>
+          <a:bodyPr wrap="square" lIns="27432" rIns="27432" tIns="18288" bIns="18288" anchor="t">
+            <a:spAutoFit/>
+          </a:bodyPr>
+          <a:lstStyle/>
+          <a:p>
+            <a:pPr algn="ctr"/>
+            <a:r>
+              <a:rPr sz="900" b="0" i="1">
+                <a:solidFill>
+                  <a:srgbClr val="FFFFFF"/>
+                </a:solidFill>
+                <a:latin typeface="Calibri"/>
+              </a:rPr>
+              <a:t>softmax: no over-smoothing</a:t>
+            </a:r>
+          </a:p>
+        </p:txBody>
+      </p:sp>
+      <p:sp>
+        <p:nvSpPr>
+          <p:cNvPr id="30" name="Rounded Rectangle 29"/>
+          <p:cNvSpPr/>
+          <p:nvPr/>
+        </p:nvSpPr>
+        <p:spPr>
+          <a:xfrm>
+            <a:off x="10332720" y="2606040"/>
+            <a:ext cx="1737360" cy="1600200"/>
+          </a:xfrm>
+          <a:prstGeom prst="roundRect">
+            <a:avLst/>
+          </a:prstGeom>
+          <a:solidFill>
+            <a:srgbClr val="F5F7FA"/>
+          </a:solidFill>
+          <a:ln>
+            <a:noFill/>
+          </a:ln>
+          <a:effectLst/>
+        </p:spPr>
+        <p:style>
+          <a:lnRef idx="1">
+            <a:schemeClr val="accent1"/>
+          </a:lnRef>
+          <a:fillRef idx="3">
+            <a:schemeClr val="accent1"/>
+          </a:fillRef>
+          <a:effectRef idx="2">
+            <a:schemeClr val="accent1"/>
+          </a:effectRef>
+          <a:fontRef idx="minor">
+            <a:schemeClr val="lt1"/>
+          </a:fontRef>
+        </p:style>
+        <p:txBody>
+          <a:bodyPr rtlCol="0" anchor="ctr" lIns="45720" rIns="45720" tIns="27432" bIns="27432" wrap="square"/>
+          <a:lstStyle/>
+          <a:p>
+            <a:pPr algn="ctr"/>
+          </a:p>
+        </p:txBody>
+      </p:sp>
+      <p:sp>
+        <p:nvSpPr>
+          <p:cNvPr id="31" name="TextBox 30"/>
+          <p:cNvSpPr txBox="1"/>
+          <p:nvPr/>
+        </p:nvSpPr>
+        <p:spPr>
+          <a:xfrm>
+            <a:off x="10332720" y="2679192"/>
+            <a:ext cx="1737360" cy="320040"/>
+          </a:xfrm>
+          <a:prstGeom prst="rect">
+            <a:avLst/>
+          </a:prstGeom>
+          <a:noFill/>
+        </p:spPr>
+        <p:txBody>
+          <a:bodyPr wrap="square" lIns="27432" rIns="27432" tIns="18288" bIns="18288" anchor="t">
+            <a:spAutoFit/>
+          </a:bodyPr>
+          <a:lstStyle/>
+          <a:p>
+            <a:pPr algn="ctr"/>
+            <a:r>
+              <a:rPr sz="1100" b="1" i="0">
+                <a:solidFill>
+                  <a:srgbClr val="1E2761"/>
+                </a:solidFill>
+                <a:latin typeface="Calibri"/>
+              </a:rPr>
+              <a:t>Refined z⁽ᴸ⁾</a:t>
+            </a:r>
+          </a:p>
+        </p:txBody>
+      </p:sp>
+      <p:sp>
+        <p:nvSpPr>
+          <p:cNvPr id="32" name="TextBox 31"/>
+          <p:cNvSpPr txBox="1"/>
+          <p:nvPr/>
+        </p:nvSpPr>
+        <p:spPr>
+          <a:xfrm>
+            <a:off x="10332720" y="3794760"/>
+            <a:ext cx="1737360" cy="320040"/>
+          </a:xfrm>
+          <a:prstGeom prst="rect">
+            <a:avLst/>
+          </a:prstGeom>
+          <a:noFill/>
+        </p:spPr>
+        <p:txBody>
+          <a:bodyPr wrap="square" lIns="27432" rIns="27432" tIns="18288" bIns="18288" anchor="t">
+            <a:spAutoFit/>
+          </a:bodyPr>
+          <a:lstStyle/>
+          <a:p>
+            <a:pPr algn="ctr"/>
+            <a:r>
+              <a:rPr sz="900" b="0" i="1">
+                <a:solidFill>
+                  <a:srgbClr val="36454F"/>
+                </a:solidFill>
+                <a:latin typeface="Calibri"/>
+              </a:rPr>
+              <a:t>[M, 128]</a:t>
+            </a:r>
+          </a:p>
+        </p:txBody>
+      </p:sp>
+      <p:sp>
+        <p:nvSpPr>
+          <p:cNvPr id="33" name="Right Arrow 32"/>
+          <p:cNvSpPr/>
+          <p:nvPr/>
+        </p:nvSpPr>
+        <p:spPr>
+          <a:xfrm>
+            <a:off x="2258568" y="3314700"/>
+            <a:ext cx="192024" cy="201168"/>
+          </a:xfrm>
+          <a:prstGeom prst="rightArrow">
+            <a:avLst/>
+          </a:prstGeom>
+          <a:solidFill>
+            <a:srgbClr val="1E2761"/>
+          </a:solidFill>
+          <a:ln>
+            <a:noFill/>
+          </a:ln>
+          <a:effectLst/>
+        </p:spPr>
+        <p:style>
+          <a:lnRef idx="1">
+            <a:schemeClr val="accent1"/>
+          </a:lnRef>
+          <a:fillRef idx="3">
+            <a:schemeClr val="accent1"/>
+          </a:fillRef>
+          <a:effectRef idx="2">
+            <a:schemeClr val="accent1"/>
+          </a:effectRef>
+          <a:fontRef idx="minor">
+            <a:schemeClr val="lt1"/>
+          </a:fontRef>
+        </p:style>
+        <p:txBody>
+          <a:bodyPr rtlCol="0" anchor="ctr" lIns="45720" rIns="45720" tIns="27432" bIns="27432" wrap="square"/>
+          <a:lstStyle/>
+          <a:p>
+            <a:pPr algn="ctr"/>
+          </a:p>
+        </p:txBody>
+      </p:sp>
+      <p:sp>
+        <p:nvSpPr>
+          <p:cNvPr id="34" name="Right Arrow 33"/>
+          <p:cNvSpPr/>
+          <p:nvPr/>
+        </p:nvSpPr>
+        <p:spPr>
+          <a:xfrm>
+            <a:off x="4224528" y="3314700"/>
+            <a:ext cx="192024" cy="201168"/>
+          </a:xfrm>
+          <a:prstGeom prst="rightArrow">
+            <a:avLst/>
+          </a:prstGeom>
+          <a:solidFill>
+            <a:srgbClr val="1E2761"/>
+          </a:solidFill>
+          <a:ln>
+            <a:noFill/>
+          </a:ln>
+          <a:effectLst/>
+        </p:spPr>
+        <p:style>
+          <a:lnRef idx="1">
+            <a:schemeClr val="accent1"/>
+          </a:lnRef>
+          <a:fillRef idx="3">
+            <a:schemeClr val="accent1"/>
+          </a:fillRef>
+          <a:effectRef idx="2">
+            <a:schemeClr val="accent1"/>
+          </a:effectRef>
+          <a:fontRef idx="minor">
+            <a:schemeClr val="lt1"/>
+          </a:fontRef>
+        </p:style>
+        <p:txBody>
+          <a:bodyPr rtlCol="0" anchor="ctr" lIns="45720" rIns="45720" tIns="27432" bIns="27432" wrap="square"/>
+          <a:lstStyle/>
+          <a:p>
+            <a:pPr algn="ctr"/>
+          </a:p>
+        </p:txBody>
+      </p:sp>
+      <p:sp>
+        <p:nvSpPr>
+          <p:cNvPr id="35" name="Right Arrow 34"/>
+          <p:cNvSpPr/>
+          <p:nvPr/>
+        </p:nvSpPr>
+        <p:spPr>
+          <a:xfrm>
+            <a:off x="6190488" y="3314700"/>
+            <a:ext cx="192024" cy="201168"/>
+          </a:xfrm>
+          <a:prstGeom prst="rightArrow">
+            <a:avLst/>
+          </a:prstGeom>
+          <a:solidFill>
+            <a:srgbClr val="1E2761"/>
+          </a:solidFill>
+          <a:ln>
+            <a:noFill/>
+          </a:ln>
+          <a:effectLst/>
+        </p:spPr>
+        <p:style>
+          <a:lnRef idx="1">
+            <a:schemeClr val="accent1"/>
+          </a:lnRef>
+          <a:fillRef idx="3">
+            <a:schemeClr val="accent1"/>
+          </a:fillRef>
+          <a:effectRef idx="2">
+            <a:schemeClr val="accent1"/>
+          </a:effectRef>
+          <a:fontRef idx="minor">
+            <a:schemeClr val="lt1"/>
+          </a:fontRef>
+        </p:style>
+        <p:txBody>
+          <a:bodyPr rtlCol="0" anchor="ctr" lIns="45720" rIns="45720" tIns="27432" bIns="27432" wrap="square"/>
+          <a:lstStyle/>
+          <a:p>
+            <a:pPr algn="ctr"/>
+          </a:p>
+        </p:txBody>
+      </p:sp>
+      <p:sp>
+        <p:nvSpPr>
+          <p:cNvPr id="36" name="Right Arrow 35"/>
+          <p:cNvSpPr/>
+          <p:nvPr/>
+        </p:nvSpPr>
+        <p:spPr>
+          <a:xfrm>
+            <a:off x="8156448" y="3314700"/>
+            <a:ext cx="192024" cy="201168"/>
+          </a:xfrm>
+          <a:prstGeom prst="rightArrow">
+            <a:avLst/>
+          </a:prstGeom>
+          <a:solidFill>
+            <a:srgbClr val="1E2761"/>
+          </a:solidFill>
+          <a:ln>
+            <a:noFill/>
+          </a:ln>
+          <a:effectLst/>
+        </p:spPr>
+        <p:style>
+          <a:lnRef idx="1">
+            <a:schemeClr val="accent1"/>
+          </a:lnRef>
+          <a:fillRef idx="3">
+            <a:schemeClr val="accent1"/>
+          </a:fillRef>
+          <a:effectRef idx="2">
+            <a:schemeClr val="accent1"/>
+          </a:effectRef>
+          <a:fontRef idx="minor">
+            <a:schemeClr val="lt1"/>
+          </a:fontRef>
+        </p:style>
+        <p:txBody>
+          <a:bodyPr rtlCol="0" anchor="ctr" lIns="45720" rIns="45720" tIns="27432" bIns="27432" wrap="square"/>
+          <a:lstStyle/>
+          <a:p>
+            <a:pPr algn="ctr"/>
+          </a:p>
+        </p:txBody>
+      </p:sp>
+      <p:sp>
+        <p:nvSpPr>
+          <p:cNvPr id="37" name="Right Arrow 36"/>
+          <p:cNvSpPr/>
+          <p:nvPr/>
+        </p:nvSpPr>
+        <p:spPr>
+          <a:xfrm>
+            <a:off x="10122408" y="3314700"/>
+            <a:ext cx="192024" cy="201168"/>
+          </a:xfrm>
+          <a:prstGeom prst="rightArrow">
+            <a:avLst/>
+          </a:prstGeom>
+          <a:solidFill>
+            <a:srgbClr val="1E2761"/>
+          </a:solidFill>
+          <a:ln>
+            <a:noFill/>
+          </a:ln>
+          <a:effectLst/>
+        </p:spPr>
+        <p:style>
+          <a:lnRef idx="1">
+            <a:schemeClr val="accent1"/>
+          </a:lnRef>
+          <a:fillRef idx="3">
+            <a:schemeClr val="accent1"/>
+          </a:fillRef>
+          <a:effectRef idx="2">
+            <a:schemeClr val="accent1"/>
+          </a:effectRef>
+          <a:fontRef idx="minor">
+            <a:schemeClr val="lt1"/>
+          </a:fontRef>
+        </p:style>
+        <p:txBody>
+          <a:bodyPr rtlCol="0" anchor="ctr" lIns="45720" rIns="45720" tIns="27432" bIns="27432" wrap="square"/>
+          <a:lstStyle/>
+          <a:p>
+            <a:pPr algn="ctr"/>
+          </a:p>
+        </p:txBody>
+      </p:sp>
+      <p:sp>
+        <p:nvSpPr>
+          <p:cNvPr id="38" name="TextBox 37"/>
+          <p:cNvSpPr txBox="1"/>
+          <p:nvPr/>
+        </p:nvSpPr>
+        <p:spPr>
+          <a:xfrm>
+            <a:off x="1984248" y="4224528"/>
+            <a:ext cx="777240" cy="502920"/>
+          </a:xfrm>
+          <a:prstGeom prst="rect">
+            <a:avLst/>
+          </a:prstGeom>
+          <a:noFill/>
+        </p:spPr>
+        <p:txBody>
+          <a:bodyPr wrap="square" lIns="36576" rIns="36576" tIns="27432" bIns="27432">
+            <a:spAutoFit/>
+          </a:bodyPr>
+          <a:lstStyle/>
+          <a:p>
+            <a:pPr algn="ctr"/>
+            <a:r>
+              <a:rPr sz="900" b="1">
+                <a:solidFill>
+                  <a:srgbClr val="1E2761"/>
+                </a:solidFill>
+                <a:latin typeface="Consolas"/>
+              </a:rPr>
+              <a:t>[atoms,9]
+[bonds,3]</a:t>
+            </a:r>
+          </a:p>
+        </p:txBody>
+      </p:sp>
+      <p:sp>
+        <p:nvSpPr>
+          <p:cNvPr id="39" name="TextBox 38"/>
+          <p:cNvSpPr txBox="1"/>
+          <p:nvPr/>
+        </p:nvSpPr>
+        <p:spPr>
+          <a:xfrm>
+            <a:off x="3950208" y="4224528"/>
+            <a:ext cx="777240" cy="502920"/>
+          </a:xfrm>
+          <a:prstGeom prst="rect">
+            <a:avLst/>
+          </a:prstGeom>
+          <a:noFill/>
+        </p:spPr>
+        <p:txBody>
+          <a:bodyPr wrap="square" lIns="36576" rIns="36576" tIns="27432" bIns="27432">
+            <a:spAutoFit/>
+          </a:bodyPr>
+          <a:lstStyle/>
+          <a:p>
+            <a:pPr algn="ctr"/>
+            <a:r>
+              <a:rPr sz="900" b="1">
+                <a:solidFill>
+                  <a:srgbClr val="1E2761"/>
+                </a:solidFill>
+                <a:latin typeface="Consolas"/>
+              </a:rPr>
+              <a:t>h [M, 128]</a:t>
+            </a:r>
+          </a:p>
+        </p:txBody>
+      </p:sp>
+      <p:sp>
+        <p:nvSpPr>
+          <p:cNvPr id="40" name="TextBox 39"/>
+          <p:cNvSpPr txBox="1"/>
+          <p:nvPr/>
+        </p:nvSpPr>
+        <p:spPr>
+          <a:xfrm>
+            <a:off x="5916168" y="4224528"/>
+            <a:ext cx="777240" cy="502920"/>
+          </a:xfrm>
+          <a:prstGeom prst="rect">
+            <a:avLst/>
+          </a:prstGeom>
+          <a:noFill/>
+        </p:spPr>
+        <p:txBody>
+          <a:bodyPr wrap="square" lIns="36576" rIns="36576" tIns="27432" bIns="27432">
+            <a:spAutoFit/>
+          </a:bodyPr>
+          <a:lstStyle/>
+          <a:p>
+            <a:pPr algn="ctr"/>
+            <a:r>
+              <a:rPr sz="900" b="1">
+                <a:solidFill>
+                  <a:srgbClr val="1E2761"/>
+                </a:solidFill>
+                <a:latin typeface="Consolas"/>
+              </a:rPr>
+              <a:t>W [M, M]</a:t>
+            </a:r>
+          </a:p>
+        </p:txBody>
+      </p:sp>
+      <p:sp>
+        <p:nvSpPr>
+          <p:cNvPr id="41" name="TextBox 40"/>
+          <p:cNvSpPr txBox="1"/>
+          <p:nvPr/>
+        </p:nvSpPr>
+        <p:spPr>
+          <a:xfrm>
+            <a:off x="7882128" y="4224528"/>
+            <a:ext cx="777240" cy="502920"/>
+          </a:xfrm>
+          <a:prstGeom prst="rect">
+            <a:avLst/>
+          </a:prstGeom>
+          <a:noFill/>
+        </p:spPr>
+        <p:txBody>
+          <a:bodyPr wrap="square" lIns="36576" rIns="36576" tIns="27432" bIns="27432">
+            <a:spAutoFit/>
+          </a:bodyPr>
+          <a:lstStyle/>
+          <a:p>
+            <a:pPr algn="ctr"/>
+            <a:r>
+              <a:rPr sz="900" b="1">
+                <a:solidFill>
+                  <a:srgbClr val="1E2761"/>
+                </a:solidFill>
+                <a:latin typeface="Consolas"/>
+              </a:rPr>
+              <a:t>E_full
+[2, 2·M·k]</a:t>
+            </a:r>
+          </a:p>
+        </p:txBody>
+      </p:sp>
+      <p:sp>
+        <p:nvSpPr>
+          <p:cNvPr id="42" name="TextBox 41"/>
+          <p:cNvSpPr txBox="1"/>
+          <p:nvPr/>
+        </p:nvSpPr>
+        <p:spPr>
+          <a:xfrm>
+            <a:off x="9848088" y="4224528"/>
+            <a:ext cx="777240" cy="502920"/>
+          </a:xfrm>
+          <a:prstGeom prst="rect">
+            <a:avLst/>
+          </a:prstGeom>
+          <a:noFill/>
+        </p:spPr>
+        <p:txBody>
+          <a:bodyPr wrap="square" lIns="36576" rIns="36576" tIns="27432" bIns="27432">
+            <a:spAutoFit/>
+          </a:bodyPr>
+          <a:lstStyle/>
+          <a:p>
+            <a:pPr algn="ctr"/>
+            <a:r>
+              <a:rPr sz="900" b="1">
+                <a:solidFill>
+                  <a:srgbClr val="1E2761"/>
+                </a:solidFill>
+                <a:latin typeface="Consolas"/>
+              </a:rPr>
+              <a:t>E_kept
+[2, 2·N·K·k]</a:t>
+            </a:r>
+          </a:p>
+        </p:txBody>
+      </p:sp>
+      <p:sp>
+        <p:nvSpPr>
+          <p:cNvPr id="43" name="Down Arrow 42"/>
+          <p:cNvSpPr/>
+          <p:nvPr/>
+        </p:nvSpPr>
+        <p:spPr>
+          <a:xfrm>
+            <a:off x="3227832" y="4663440"/>
+            <a:ext cx="219456" cy="274320"/>
+          </a:xfrm>
+          <a:prstGeom prst="downArrow">
+            <a:avLst/>
+          </a:prstGeom>
+          <a:solidFill>
+            <a:srgbClr val="1E2761"/>
+          </a:solidFill>
+          <a:ln>
+            <a:noFill/>
+          </a:ln>
+          <a:effectLst/>
+        </p:spPr>
+        <p:style>
+          <a:lnRef idx="1">
+            <a:schemeClr val="accent1"/>
+          </a:lnRef>
+          <a:fillRef idx="3">
+            <a:schemeClr val="accent1"/>
+          </a:fillRef>
+          <a:effectRef idx="2">
+            <a:schemeClr val="accent1"/>
+          </a:effectRef>
+          <a:fontRef idx="minor">
+            <a:schemeClr val="lt1"/>
+          </a:fontRef>
+        </p:style>
+        <p:txBody>
+          <a:bodyPr rtlCol="0" anchor="ctr" lIns="45720" rIns="45720" tIns="27432" bIns="27432" wrap="square"/>
+          <a:lstStyle/>
+          <a:p>
+            <a:pPr algn="ctr"/>
+          </a:p>
+        </p:txBody>
+      </p:sp>
+      <p:sp>
+        <p:nvSpPr>
+          <p:cNvPr id="44" name="Down Arrow 43"/>
+          <p:cNvSpPr/>
+          <p:nvPr/>
+        </p:nvSpPr>
+        <p:spPr>
+          <a:xfrm>
+            <a:off x="11091672" y="4663440"/>
+            <a:ext cx="219456" cy="274320"/>
+          </a:xfrm>
+          <a:prstGeom prst="downArrow">
+            <a:avLst/>
+          </a:prstGeom>
+          <a:solidFill>
+            <a:srgbClr val="1E2761"/>
+          </a:solidFill>
+          <a:ln>
+            <a:noFill/>
+          </a:ln>
+          <a:effectLst/>
+        </p:spPr>
+        <p:style>
+          <a:lnRef idx="1">
+            <a:schemeClr val="accent1"/>
+          </a:lnRef>
+          <a:fillRef idx="3">
+            <a:schemeClr val="accent1"/>
+          </a:fillRef>
+          <a:effectRef idx="2">
+            <a:schemeClr val="accent1"/>
+          </a:effectRef>
+          <a:fontRef idx="minor">
+            <a:schemeClr val="lt1"/>
+          </a:fontRef>
+        </p:style>
+        <p:txBody>
+          <a:bodyPr rtlCol="0" anchor="ctr" lIns="45720" rIns="45720" tIns="27432" bIns="27432" wrap="square"/>
+          <a:lstStyle/>
+          <a:p>
+            <a:pPr algn="ctr"/>
+          </a:p>
+        </p:txBody>
+      </p:sp>
+      <p:sp>
+        <p:nvSpPr>
+          <p:cNvPr id="45" name="Rounded Rectangle 44"/>
+          <p:cNvSpPr/>
+          <p:nvPr/>
+        </p:nvSpPr>
+        <p:spPr>
+          <a:xfrm>
+            <a:off x="502920" y="4846320"/>
+            <a:ext cx="2286000" cy="1645920"/>
+          </a:xfrm>
+          <a:prstGeom prst="roundRect">
+            <a:avLst/>
+          </a:prstGeom>
+          <a:solidFill>
+            <a:srgbClr val="F5F7FA"/>
+          </a:solidFill>
+          <a:ln>
+            <a:noFill/>
+          </a:ln>
+          <a:effectLst/>
+        </p:spPr>
+        <p:style>
+          <a:lnRef idx="1">
+            <a:schemeClr val="accent1"/>
+          </a:lnRef>
+          <a:fillRef idx="3">
+            <a:schemeClr val="accent1"/>
+          </a:fillRef>
+          <a:effectRef idx="2">
+            <a:schemeClr val="accent1"/>
+          </a:effectRef>
+          <a:fontRef idx="minor">
+            <a:schemeClr val="lt1"/>
+          </a:fontRef>
+        </p:style>
+        <p:txBody>
+          <a:bodyPr rtlCol="0" anchor="ctr" lIns="45720" rIns="45720" tIns="27432" bIns="27432" wrap="square"/>
+          <a:lstStyle/>
+          <a:p>
+            <a:pPr algn="ctr"/>
+          </a:p>
+        </p:txBody>
+      </p:sp>
+      <p:sp>
+        <p:nvSpPr>
+          <p:cNvPr id="46" name="TextBox 45"/>
+          <p:cNvSpPr txBox="1"/>
+          <p:nvPr/>
+        </p:nvSpPr>
+        <p:spPr>
+          <a:xfrm>
+            <a:off x="502920" y="4919472"/>
+            <a:ext cx="2286000" cy="320040"/>
+          </a:xfrm>
+          <a:prstGeom prst="rect">
+            <a:avLst/>
+          </a:prstGeom>
+          <a:noFill/>
+        </p:spPr>
+        <p:txBody>
+          <a:bodyPr wrap="square" lIns="27432" rIns="27432" tIns="18288" bIns="18288" anchor="t">
+            <a:spAutoFit/>
+          </a:bodyPr>
+          <a:lstStyle/>
+          <a:p>
+            <a:pPr algn="ctr"/>
+            <a:r>
+              <a:rPr sz="1100" b="1" i="0">
+                <a:solidFill>
+                  <a:srgbClr val="1E2761"/>
+                </a:solidFill>
+                <a:latin typeface="Calibri"/>
+              </a:rPr>
+              <a:t>c⁽ᵉⁿᶜ⁾_n (from φ)</a:t>
+            </a:r>
+          </a:p>
+        </p:txBody>
+      </p:sp>
+      <p:pic>
+        <p:nvPicPr>
+          <p:cNvPr id="47" name="Picture 46" descr="flow_proto.png"/>
+          <p:cNvPicPr>
+            <a:picLocks noChangeAspect="1"/>
+          </p:cNvPicPr>
+          <p:nvPr/>
+        </p:nvPicPr>
+        <p:blipFill>
+          <a:blip r:embed="rId7"/>
+          <a:stretch>
+            <a:fillRect/>
+          </a:stretch>
+        </p:blipFill>
+        <p:spPr>
+          <a:xfrm>
+            <a:off x="685800" y="5394960"/>
+            <a:ext cx="1920240" cy="424102"/>
+          </a:xfrm>
+          <a:prstGeom prst="rect">
+            <a:avLst/>
+          </a:prstGeom>
+        </p:spPr>
+      </p:pic>
+      <p:sp>
+        <p:nvSpPr>
+          <p:cNvPr id="48" name="TextBox 47"/>
+          <p:cNvSpPr txBox="1"/>
+          <p:nvPr/>
+        </p:nvSpPr>
+        <p:spPr>
+          <a:xfrm>
+            <a:off x="502920" y="5897880"/>
+            <a:ext cx="2286000" cy="502920"/>
+          </a:xfrm>
+          <a:prstGeom prst="rect">
+            <a:avLst/>
+          </a:prstGeom>
+          <a:noFill/>
+        </p:spPr>
+        <p:txBody>
+          <a:bodyPr wrap="square" lIns="27432" rIns="27432" tIns="18288" bIns="18288" anchor="t">
+            <a:spAutoFit/>
+          </a:bodyPr>
+          <a:lstStyle/>
+          <a:p>
+            <a:pPr algn="ctr"/>
+            <a:r>
+              <a:rPr sz="1000" b="0" i="1">
+                <a:solidFill>
+                  <a:srgbClr val="36454F"/>
+                </a:solidFill>
+                <a:latin typeface="Calibri"/>
+              </a:rPr>
+              <a:t>replace z⁽ᴸ⁾ with h
+[N, 128]</a:t>
+            </a:r>
+          </a:p>
+        </p:txBody>
+      </p:sp>
+      <p:sp>
+        <p:nvSpPr>
+          <p:cNvPr id="49" name="Rounded Rectangle 48"/>
+          <p:cNvSpPr/>
+          <p:nvPr/>
+        </p:nvSpPr>
+        <p:spPr>
+          <a:xfrm>
+            <a:off x="2926080" y="4846320"/>
+            <a:ext cx="2286000" cy="1645920"/>
+          </a:xfrm>
+          <a:prstGeom prst="roundRect">
+            <a:avLst/>
+          </a:prstGeom>
+          <a:solidFill>
+            <a:srgbClr val="F5F7FA"/>
+          </a:solidFill>
+          <a:ln>
+            <a:noFill/>
+          </a:ln>
+          <a:effectLst/>
+        </p:spPr>
+        <p:style>
+          <a:lnRef idx="1">
+            <a:schemeClr val="accent1"/>
+          </a:lnRef>
+          <a:fillRef idx="3">
+            <a:schemeClr val="accent1"/>
+          </a:fillRef>
+          <a:effectRef idx="2">
+            <a:schemeClr val="accent1"/>
+          </a:effectRef>
+          <a:fontRef idx="minor">
+            <a:schemeClr val="lt1"/>
+          </a:fontRef>
+        </p:style>
+        <p:txBody>
+          <a:bodyPr rtlCol="0" anchor="ctr" lIns="45720" rIns="45720" tIns="27432" bIns="27432" wrap="square"/>
+          <a:lstStyle/>
+          <a:p>
+            <a:pPr algn="ctr"/>
+          </a:p>
+        </p:txBody>
+      </p:sp>
+      <p:sp>
+        <p:nvSpPr>
+          <p:cNvPr id="50" name="TextBox 49"/>
+          <p:cNvSpPr txBox="1"/>
+          <p:nvPr/>
+        </p:nvSpPr>
+        <p:spPr>
+          <a:xfrm>
+            <a:off x="2926080" y="4919472"/>
+            <a:ext cx="2286000" cy="320040"/>
+          </a:xfrm>
+          <a:prstGeom prst="rect">
+            <a:avLst/>
+          </a:prstGeom>
+          <a:noFill/>
+        </p:spPr>
+        <p:txBody>
+          <a:bodyPr wrap="square" lIns="27432" rIns="27432" tIns="18288" bIns="18288" anchor="t">
+            <a:spAutoFit/>
+          </a:bodyPr>
+          <a:lstStyle/>
+          <a:p>
+            <a:pPr algn="ctr"/>
+            <a:r>
+              <a:rPr sz="1100" b="1" i="0">
+                <a:solidFill>
+                  <a:srgbClr val="1E2761"/>
+                </a:solidFill>
+                <a:latin typeface="Calibri"/>
+              </a:rPr>
+              <a:t>c⁽ᵍⁿⁿ⁾_n (meta-GNN)</a:t>
+            </a:r>
+          </a:p>
+        </p:txBody>
+      </p:sp>
+      <p:pic>
+        <p:nvPicPr>
+          <p:cNvPr id="51" name="Picture 50" descr="flow_proto.png"/>
+          <p:cNvPicPr>
+            <a:picLocks noChangeAspect="1"/>
+          </p:cNvPicPr>
+          <p:nvPr/>
+        </p:nvPicPr>
+        <p:blipFill>
+          <a:blip r:embed="rId7"/>
+          <a:stretch>
+            <a:fillRect/>
+          </a:stretch>
+        </p:blipFill>
+        <p:spPr>
+          <a:xfrm>
+            <a:off x="3108960" y="5394960"/>
+            <a:ext cx="1920240" cy="424102"/>
+          </a:xfrm>
+          <a:prstGeom prst="rect">
+            <a:avLst/>
+          </a:prstGeom>
+        </p:spPr>
+      </p:pic>
+      <p:sp>
+        <p:nvSpPr>
+          <p:cNvPr id="52" name="TextBox 51"/>
+          <p:cNvSpPr txBox="1"/>
+          <p:nvPr/>
+        </p:nvSpPr>
+        <p:spPr>
+          <a:xfrm>
+            <a:off x="2926080" y="5897880"/>
+            <a:ext cx="2286000" cy="502920"/>
+          </a:xfrm>
+          <a:prstGeom prst="rect">
+            <a:avLst/>
+          </a:prstGeom>
+          <a:noFill/>
+        </p:spPr>
+        <p:txBody>
+          <a:bodyPr wrap="square" lIns="27432" rIns="27432" tIns="18288" bIns="18288" anchor="t">
+            <a:spAutoFit/>
+          </a:bodyPr>
+          <a:lstStyle/>
+          <a:p>
+            <a:pPr algn="ctr"/>
+            <a:r>
+              <a:rPr sz="1000" b="0" i="1">
+                <a:solidFill>
+                  <a:srgbClr val="36454F"/>
+                </a:solidFill>
+                <a:latin typeface="Calibri"/>
+              </a:rPr>
+              <a:t>uses z⁽ᴸ⁾
+[N, 128]</a:t>
+            </a:r>
+          </a:p>
+        </p:txBody>
+      </p:sp>
+      <p:sp>
+        <p:nvSpPr>
+          <p:cNvPr id="53" name="Rounded Rectangle 52"/>
+          <p:cNvSpPr/>
+          <p:nvPr/>
+        </p:nvSpPr>
+        <p:spPr>
+          <a:xfrm>
+            <a:off x="5486400" y="4846320"/>
+            <a:ext cx="2743200" cy="1645920"/>
+          </a:xfrm>
+          <a:prstGeom prst="roundRect">
+            <a:avLst/>
+          </a:prstGeom>
+          <a:solidFill>
+            <a:srgbClr val="F96167"/>
+          </a:solidFill>
+          <a:ln>
+            <a:noFill/>
+          </a:ln>
+          <a:effectLst/>
+        </p:spPr>
+        <p:style>
+          <a:lnRef idx="1">
+            <a:schemeClr val="accent1"/>
+          </a:lnRef>
+          <a:fillRef idx="3">
+            <a:schemeClr val="accent1"/>
+          </a:fillRef>
+          <a:effectRef idx="2">
+            <a:schemeClr val="accent1"/>
+          </a:effectRef>
+          <a:fontRef idx="minor">
+            <a:schemeClr val="lt1"/>
+          </a:fontRef>
+        </p:style>
+        <p:txBody>
+          <a:bodyPr rtlCol="0" anchor="ctr" lIns="45720" rIns="45720" tIns="27432" bIns="27432" wrap="square"/>
+          <a:lstStyle/>
+          <a:p>
+            <a:pPr algn="ctr"/>
+          </a:p>
+        </p:txBody>
+      </p:sp>
+      <p:sp>
+        <p:nvSpPr>
+          <p:cNvPr id="54" name="TextBox 53"/>
+          <p:cNvSpPr txBox="1"/>
+          <p:nvPr/>
+        </p:nvSpPr>
+        <p:spPr>
+          <a:xfrm>
+            <a:off x="5486400" y="4919472"/>
+            <a:ext cx="2743200" cy="320040"/>
+          </a:xfrm>
+          <a:prstGeom prst="rect">
+            <a:avLst/>
+          </a:prstGeom>
+          <a:noFill/>
+        </p:spPr>
+        <p:txBody>
+          <a:bodyPr wrap="square" lIns="27432" rIns="27432" tIns="18288" bIns="18288" anchor="t">
+            <a:spAutoFit/>
+          </a:bodyPr>
+          <a:lstStyle/>
+          <a:p>
+            <a:pPr algn="ctr"/>
+            <a:r>
+              <a:rPr sz="1100" b="1" i="0">
+                <a:solidFill>
+                  <a:srgbClr val="FFFFFF"/>
+                </a:solidFill>
+                <a:latin typeface="Calibri"/>
+              </a:rPr>
+              <a:t>M1 · Residual prototype</a:t>
+            </a:r>
+          </a:p>
+        </p:txBody>
+      </p:sp>
+      <p:pic>
+        <p:nvPicPr>
+          <p:cNvPr id="55" name="Picture 54" descr="flow_residual.png"/>
+          <p:cNvPicPr>
+            <a:picLocks noChangeAspect="1"/>
+          </p:cNvPicPr>
+          <p:nvPr/>
+        </p:nvPicPr>
+        <p:blipFill>
+          <a:blip r:embed="rId8"/>
+          <a:stretch>
+            <a:fillRect/>
+          </a:stretch>
+        </p:blipFill>
+        <p:spPr>
+          <a:xfrm>
+            <a:off x="5623560" y="5349240"/>
+            <a:ext cx="2468880" cy="332558"/>
+          </a:xfrm>
+          <a:prstGeom prst="rect">
+            <a:avLst/>
+          </a:prstGeom>
+        </p:spPr>
+      </p:pic>
+      <p:sp>
+        <p:nvSpPr>
+          <p:cNvPr id="56" name="TextBox 55"/>
+          <p:cNvSpPr txBox="1"/>
+          <p:nvPr/>
+        </p:nvSpPr>
+        <p:spPr>
+          <a:xfrm>
+            <a:off x="5486400" y="5806440"/>
+            <a:ext cx="2743200" cy="640080"/>
+          </a:xfrm>
+          <a:prstGeom prst="rect">
+            <a:avLst/>
+          </a:prstGeom>
+          <a:noFill/>
+        </p:spPr>
+        <p:txBody>
+          <a:bodyPr wrap="square" lIns="27432" rIns="27432" tIns="18288" bIns="18288" anchor="t">
+            <a:spAutoFit/>
+          </a:bodyPr>
+          <a:lstStyle/>
+          <a:p>
+            <a:pPr algn="ctr"/>
+            <a:r>
+              <a:rPr sz="1000" b="0" i="1">
+                <a:solidFill>
+                  <a:srgbClr val="FFFFFF"/>
+                </a:solidFill>
+                <a:latin typeface="Calibri"/>
+              </a:rPr>
+              <a:t>α learnable ∈ [0,1]
+α → 1  ⇒  ProtoNet (safety net)</a:t>
+            </a:r>
+          </a:p>
+        </p:txBody>
+      </p:sp>
+      <p:sp>
+        <p:nvSpPr>
+          <p:cNvPr id="57" name="Right Arrow 56"/>
+          <p:cNvSpPr/>
+          <p:nvPr/>
+        </p:nvSpPr>
+        <p:spPr>
+          <a:xfrm>
+            <a:off x="2807208" y="5577840"/>
+            <a:ext cx="2660904" cy="201168"/>
+          </a:xfrm>
+          <a:prstGeom prst="rightArrow">
+            <a:avLst/>
+          </a:prstGeom>
+          <a:solidFill>
+            <a:srgbClr val="F96167"/>
+          </a:solidFill>
+          <a:ln>
+            <a:noFill/>
+          </a:ln>
+          <a:effectLst/>
+        </p:spPr>
+        <p:style>
+          <a:lnRef idx="1">
+            <a:schemeClr val="accent1"/>
+          </a:lnRef>
+          <a:fillRef idx="3">
+            <a:schemeClr val="accent1"/>
+          </a:fillRef>
+          <a:effectRef idx="2">
+            <a:schemeClr val="accent1"/>
+          </a:effectRef>
+          <a:fontRef idx="minor">
+            <a:schemeClr val="lt1"/>
+          </a:fontRef>
+        </p:style>
+        <p:txBody>
+          <a:bodyPr rtlCol="0" anchor="ctr" lIns="45720" rIns="45720" tIns="27432" bIns="27432" wrap="square"/>
+          <a:lstStyle/>
+          <a:p>
+            <a:pPr algn="ctr"/>
+          </a:p>
+        </p:txBody>
+      </p:sp>
+      <p:sp>
+        <p:nvSpPr>
+          <p:cNvPr id="58" name="Right Arrow 57"/>
+          <p:cNvSpPr/>
+          <p:nvPr/>
+        </p:nvSpPr>
+        <p:spPr>
+          <a:xfrm>
+            <a:off x="5230368" y="5349240"/>
+            <a:ext cx="237744" cy="201168"/>
+          </a:xfrm>
+          <a:prstGeom prst="rightArrow">
+            <a:avLst/>
+          </a:prstGeom>
+          <a:solidFill>
+            <a:srgbClr val="F96167"/>
+          </a:solidFill>
+          <a:ln>
+            <a:noFill/>
+          </a:ln>
+          <a:effectLst/>
+        </p:spPr>
+        <p:style>
+          <a:lnRef idx="1">
+            <a:schemeClr val="accent1"/>
+          </a:lnRef>
+          <a:fillRef idx="3">
+            <a:schemeClr val="accent1"/>
+          </a:fillRef>
+          <a:effectRef idx="2">
+            <a:schemeClr val="accent1"/>
+          </a:effectRef>
+          <a:fontRef idx="minor">
+            <a:schemeClr val="lt1"/>
+          </a:fontRef>
+        </p:style>
+        <p:txBody>
+          <a:bodyPr rtlCol="0" anchor="ctr" lIns="45720" rIns="45720" tIns="27432" bIns="27432" wrap="square"/>
+          <a:lstStyle/>
+          <a:p>
+            <a:pPr algn="ctr"/>
+          </a:p>
+        </p:txBody>
+      </p:sp>
+      <p:sp>
+        <p:nvSpPr>
+          <p:cNvPr id="59" name="Rounded Rectangle 58"/>
+          <p:cNvSpPr/>
+          <p:nvPr/>
+        </p:nvSpPr>
+        <p:spPr>
+          <a:xfrm>
+            <a:off x="8503920" y="4846320"/>
+            <a:ext cx="1554480" cy="1645920"/>
+          </a:xfrm>
+          <a:prstGeom prst="roundRect">
+            <a:avLst/>
+          </a:prstGeom>
+          <a:solidFill>
+            <a:srgbClr val="F5F7FA"/>
+          </a:solidFill>
+          <a:ln>
+            <a:noFill/>
+          </a:ln>
+          <a:effectLst/>
+        </p:spPr>
+        <p:style>
+          <a:lnRef idx="1">
+            <a:schemeClr val="accent1"/>
+          </a:lnRef>
+          <a:fillRef idx="3">
+            <a:schemeClr val="accent1"/>
+          </a:fillRef>
+          <a:effectRef idx="2">
+            <a:schemeClr val="accent1"/>
+          </a:effectRef>
+          <a:fontRef idx="minor">
+            <a:schemeClr val="lt1"/>
+          </a:fontRef>
+        </p:style>
+        <p:txBody>
+          <a:bodyPr rtlCol="0" anchor="ctr" lIns="45720" rIns="45720" tIns="27432" bIns="27432" wrap="square"/>
+          <a:lstStyle/>
+          <a:p>
+            <a:pPr algn="ctr"/>
+          </a:p>
+        </p:txBody>
+      </p:sp>
+      <p:sp>
+        <p:nvSpPr>
+          <p:cNvPr id="60" name="TextBox 59"/>
+          <p:cNvSpPr txBox="1"/>
+          <p:nvPr/>
+        </p:nvSpPr>
+        <p:spPr>
+          <a:xfrm>
+            <a:off x="8503920" y="4919472"/>
+            <a:ext cx="1554480" cy="320040"/>
+          </a:xfrm>
+          <a:prstGeom prst="rect">
+            <a:avLst/>
+          </a:prstGeom>
+          <a:noFill/>
+        </p:spPr>
+        <p:txBody>
+          <a:bodyPr wrap="square" lIns="27432" rIns="27432" tIns="18288" bIns="18288" anchor="t">
+            <a:spAutoFit/>
+          </a:bodyPr>
+          <a:lstStyle/>
+          <a:p>
+            <a:pPr algn="ctr"/>
+            <a:r>
+              <a:rPr sz="1100" b="1" i="0">
+                <a:solidFill>
+                  <a:srgbClr val="1E2761"/>
+                </a:solidFill>
+                <a:latin typeface="Calibri"/>
+              </a:rPr>
+              <a:t>Classify</a:t>
+            </a:r>
+          </a:p>
+        </p:txBody>
+      </p:sp>
+      <p:pic>
+        <p:nvPicPr>
+          <p:cNvPr id="61" name="Picture 60" descr="flow_logits.png"/>
+          <p:cNvPicPr>
+            <a:picLocks noChangeAspect="1"/>
+          </p:cNvPicPr>
+          <p:nvPr/>
+        </p:nvPicPr>
+        <p:blipFill>
+          <a:blip r:embed="rId9"/>
+          <a:stretch>
+            <a:fillRect/>
+          </a:stretch>
+        </p:blipFill>
+        <p:spPr>
+          <a:xfrm>
+            <a:off x="8595360" y="5349240"/>
+            <a:ext cx="1371600" cy="193539"/>
+          </a:xfrm>
+          <a:prstGeom prst="rect">
+            <a:avLst/>
+          </a:prstGeom>
+        </p:spPr>
+      </p:pic>
+      <p:pic>
+        <p:nvPicPr>
+          <p:cNvPr id="62" name="Picture 61" descr="flow_softmax.png"/>
+          <p:cNvPicPr>
+            <a:picLocks noChangeAspect="1"/>
+          </p:cNvPicPr>
+          <p:nvPr/>
+        </p:nvPicPr>
+        <p:blipFill>
+          <a:blip r:embed="rId10"/>
+          <a:stretch>
+            <a:fillRect/>
+          </a:stretch>
+        </p:blipFill>
+        <p:spPr>
+          <a:xfrm>
+            <a:off x="8595360" y="5760720"/>
+            <a:ext cx="1371600" cy="163243"/>
+          </a:xfrm>
+          <a:prstGeom prst="rect">
+            <a:avLst/>
+          </a:prstGeom>
+        </p:spPr>
+      </p:pic>
+      <p:sp>
+        <p:nvSpPr>
+          <p:cNvPr id="63" name="Right Arrow 62"/>
+          <p:cNvSpPr/>
+          <p:nvPr/>
+        </p:nvSpPr>
+        <p:spPr>
+          <a:xfrm>
+            <a:off x="8247888" y="5577840"/>
+            <a:ext cx="237744" cy="201168"/>
+          </a:xfrm>
+          <a:prstGeom prst="rightArrow">
+            <a:avLst/>
+          </a:prstGeom>
+          <a:solidFill>
+            <a:srgbClr val="1E2761"/>
+          </a:solidFill>
+          <a:ln>
+            <a:noFill/>
+          </a:ln>
+          <a:effectLst/>
+        </p:spPr>
+        <p:style>
+          <a:lnRef idx="1">
+            <a:schemeClr val="accent1"/>
+          </a:lnRef>
+          <a:fillRef idx="3">
+            <a:schemeClr val="accent1"/>
+          </a:fillRef>
+          <a:effectRef idx="2">
+            <a:schemeClr val="accent1"/>
+          </a:effectRef>
+          <a:fontRef idx="minor">
+            <a:schemeClr val="lt1"/>
+          </a:fontRef>
+        </p:style>
+        <p:txBody>
+          <a:bodyPr rtlCol="0" anchor="ctr" lIns="45720" rIns="45720" tIns="27432" bIns="27432" wrap="square"/>
+          <a:lstStyle/>
+          <a:p>
+            <a:pPr algn="ctr"/>
+          </a:p>
+        </p:txBody>
+      </p:sp>
+      <p:sp>
+        <p:nvSpPr>
+          <p:cNvPr id="64" name="Rounded Rectangle 63"/>
+          <p:cNvSpPr/>
+          <p:nvPr/>
+        </p:nvSpPr>
+        <p:spPr>
+          <a:xfrm>
+            <a:off x="10332720" y="4846320"/>
+            <a:ext cx="1737360" cy="1645920"/>
+          </a:xfrm>
+          <a:prstGeom prst="roundRect">
+            <a:avLst/>
+          </a:prstGeom>
+          <a:solidFill>
+            <a:srgbClr val="F96167"/>
+          </a:solidFill>
+          <a:ln>
+            <a:noFill/>
+          </a:ln>
+          <a:effectLst/>
+        </p:spPr>
+        <p:style>
+          <a:lnRef idx="1">
+            <a:schemeClr val="accent1"/>
+          </a:lnRef>
+          <a:fillRef idx="3">
+            <a:schemeClr val="accent1"/>
+          </a:fillRef>
+          <a:effectRef idx="2">
+            <a:schemeClr val="accent1"/>
+          </a:effectRef>
+          <a:fontRef idx="minor">
+            <a:schemeClr val="lt1"/>
+          </a:fontRef>
+        </p:style>
+        <p:txBody>
+          <a:bodyPr rtlCol="0" anchor="ctr" lIns="45720" rIns="45720" tIns="27432" bIns="27432" wrap="square"/>
+          <a:lstStyle/>
+          <a:p>
+            <a:pPr algn="ctr"/>
+          </a:p>
+        </p:txBody>
+      </p:sp>
+      <p:sp>
+        <p:nvSpPr>
+          <p:cNvPr id="65" name="TextBox 64"/>
+          <p:cNvSpPr txBox="1"/>
+          <p:nvPr/>
+        </p:nvSpPr>
+        <p:spPr>
+          <a:xfrm>
+            <a:off x="10332720" y="4919472"/>
+            <a:ext cx="1737360" cy="320040"/>
+          </a:xfrm>
+          <a:prstGeom prst="rect">
+            <a:avLst/>
+          </a:prstGeom>
+          <a:noFill/>
+        </p:spPr>
+        <p:txBody>
+          <a:bodyPr wrap="square" lIns="27432" rIns="27432" tIns="18288" bIns="18288" anchor="t">
+            <a:spAutoFit/>
+          </a:bodyPr>
+          <a:lstStyle/>
+          <a:p>
+            <a:pPr algn="ctr"/>
+            <a:r>
+              <a:rPr sz="1100" b="1" i="0">
+                <a:solidFill>
+                  <a:srgbClr val="FFFFFF"/>
+                </a:solidFill>
+                <a:latin typeface="Calibri"/>
+              </a:rPr>
+              <a:t>M4 · Total loss</a:t>
+            </a:r>
+          </a:p>
+        </p:txBody>
+      </p:sp>
+      <p:pic>
+        <p:nvPicPr>
+          <p:cNvPr id="66" name="Picture 65" descr="flow_total_loss.png"/>
+          <p:cNvPicPr>
+            <a:picLocks noChangeAspect="1"/>
+          </p:cNvPicPr>
+          <p:nvPr/>
+        </p:nvPicPr>
+        <p:blipFill>
+          <a:blip r:embed="rId11"/>
+          <a:stretch>
+            <a:fillRect/>
+          </a:stretch>
+        </p:blipFill>
+        <p:spPr>
+          <a:xfrm>
+            <a:off x="10424160" y="5349240"/>
+            <a:ext cx="1554480" cy="219344"/>
+          </a:xfrm>
+          <a:prstGeom prst="rect">
+            <a:avLst/>
+          </a:prstGeom>
+        </p:spPr>
+      </p:pic>
+      <p:sp>
+        <p:nvSpPr>
+          <p:cNvPr id="67" name="TextBox 66"/>
+          <p:cNvSpPr txBox="1"/>
+          <p:nvPr/>
+        </p:nvSpPr>
+        <p:spPr>
+          <a:xfrm>
+            <a:off x="10332720" y="5852160"/>
+            <a:ext cx="1737360" cy="548640"/>
+          </a:xfrm>
+          <a:prstGeom prst="rect">
+            <a:avLst/>
+          </a:prstGeom>
+          <a:noFill/>
+        </p:spPr>
+        <p:txBody>
+          <a:bodyPr wrap="square" lIns="27432" rIns="27432" tIns="18288" bIns="18288" anchor="t">
+            <a:spAutoFit/>
+          </a:bodyPr>
+          <a:lstStyle/>
+          <a:p>
+            <a:pPr algn="ctr"/>
+            <a:r>
+              <a:rPr sz="900" b="0" i="1">
+                <a:solidFill>
+                  <a:srgbClr val="FFFFFF"/>
+                </a:solidFill>
+                <a:latin typeface="Calibri"/>
+              </a:rPr>
+              <a:t>λ = 0.1 optimal
+InfoNCE on S–Q</a:t>
+            </a:r>
+          </a:p>
+        </p:txBody>
+      </p:sp>
+      <p:sp>
+        <p:nvSpPr>
+          <p:cNvPr id="68" name="Right Arrow 67"/>
+          <p:cNvSpPr/>
+          <p:nvPr/>
+        </p:nvSpPr>
+        <p:spPr>
+          <a:xfrm>
+            <a:off x="10076688" y="5577840"/>
+            <a:ext cx="237744" cy="201168"/>
+          </a:xfrm>
+          <a:prstGeom prst="rightArrow">
+            <a:avLst/>
+          </a:prstGeom>
+          <a:solidFill>
+            <a:srgbClr val="F96167"/>
+          </a:solidFill>
+          <a:ln>
+            <a:noFill/>
+          </a:ln>
+          <a:effectLst/>
+        </p:spPr>
+        <p:style>
+          <a:lnRef idx="1">
+            <a:schemeClr val="accent1"/>
+          </a:lnRef>
+          <a:fillRef idx="3">
+            <a:schemeClr val="accent1"/>
+          </a:fillRef>
+          <a:effectRef idx="2">
+            <a:schemeClr val="accent1"/>
+          </a:effectRef>
+          <a:fontRef idx="minor">
+            <a:schemeClr val="lt1"/>
+          </a:fontRef>
+        </p:style>
+        <p:txBody>
+          <a:bodyPr rtlCol="0" anchor="ctr" lIns="45720" rIns="45720" tIns="27432" bIns="27432" wrap="square"/>
+          <a:lstStyle/>
+          <a:p>
+            <a:pPr algn="ctr"/>
+          </a:p>
+        </p:txBody>
+      </p:sp>
+      <p:sp>
+        <p:nvSpPr>
+          <p:cNvPr id="69" name="TextBox 68"/>
+          <p:cNvSpPr txBox="1"/>
+          <p:nvPr/>
+        </p:nvSpPr>
+        <p:spPr>
+          <a:xfrm>
+            <a:off x="502920" y="6172200"/>
+            <a:ext cx="11185855" cy="320040"/>
+          </a:xfrm>
+          <a:prstGeom prst="rect">
+            <a:avLst/>
+          </a:prstGeom>
+          <a:noFill/>
+        </p:spPr>
+        <p:txBody>
+          <a:bodyPr wrap="square" lIns="27432" rIns="27432" tIns="18288" bIns="18288" anchor="t">
+            <a:spAutoFit/>
+          </a:bodyPr>
+          <a:lstStyle/>
+          <a:p>
+            <a:pPr algn="ctr"/>
+            <a:r>
+              <a:rPr sz="1000" b="0" i="1">
+                <a:solidFill>
+                  <a:srgbClr val="F96167"/>
+                </a:solidFill>
+                <a:latin typeface="Calibri"/>
+              </a:rPr>
+              <a:t>Red = v2 modifications.  M1 lower-bounds v2 by ProtoNet.  Composed v2 + SSL beats ProtoNet by +1.2 – 1.7 pp.</a:t>
             </a:r>
           </a:p>
         </p:txBody>
@@ -10323,7 +13617,7 @@
           <a:noFill/>
         </p:spPr>
         <p:txBody>
-          <a:bodyPr wrap="square" lIns="45720" rIns="45720" tIns="27432" bIns="27432" anchor="t">
+          <a:bodyPr wrap="square" lIns="27432" rIns="27432" tIns="18288" bIns="18288" anchor="t">
             <a:spAutoFit/>
           </a:bodyPr>
           <a:lstStyle/>
@@ -10358,7 +13652,7 @@
           <a:noFill/>
         </p:spPr>
         <p:txBody>
-          <a:bodyPr wrap="square" lIns="45720" rIns="45720" tIns="27432" bIns="27432" anchor="t">
+          <a:bodyPr wrap="square" lIns="27432" rIns="27432" tIns="18288" bIns="18288" anchor="t">
             <a:spAutoFit/>
           </a:bodyPr>
           <a:lstStyle/>
@@ -10393,7 +13687,7 @@
           <a:noFill/>
         </p:spPr>
         <p:txBody>
-          <a:bodyPr wrap="square" lIns="45720" rIns="45720" tIns="27432" bIns="27432" anchor="t">
+          <a:bodyPr wrap="square" lIns="27432" rIns="27432" tIns="18288" bIns="18288" anchor="t">
             <a:spAutoFit/>
           </a:bodyPr>
           <a:lstStyle/>
@@ -10496,7 +13790,7 @@
           <a:noFill/>
         </p:spPr>
         <p:txBody>
-          <a:bodyPr wrap="square" lIns="45720" rIns="45720" tIns="27432" bIns="27432" anchor="t">
+          <a:bodyPr wrap="square" lIns="27432" rIns="27432" tIns="18288" bIns="18288" anchor="t">
             <a:spAutoFit/>
           </a:bodyPr>
           <a:lstStyle/>
@@ -10722,7 +14016,7 @@
           <a:noFill/>
         </p:spPr>
         <p:txBody>
-          <a:bodyPr wrap="square" lIns="45720" rIns="45720" tIns="27432" bIns="27432" anchor="t">
+          <a:bodyPr wrap="square" lIns="27432" rIns="27432" tIns="18288" bIns="18288" anchor="t">
             <a:spAutoFit/>
           </a:bodyPr>
           <a:lstStyle/>
@@ -10735,7 +14029,7 @@
                 </a:solidFill>
                 <a:latin typeface="Calibri"/>
               </a:rPr>
-              <a:t>Merged pool (Tox21 + ToxCast + MUV + SIDER, 673 tasks, 405 / 134 / 134 split).  Meta-val AUC at best checkpoint.</a:t>
+              <a:t>Merged pool (673 tasks, 405 / 134 / 134 split).  Meta-val AUC at best checkpoint.</a:t>
             </a:r>
           </a:p>
         </p:txBody>
@@ -10880,7 +14174,7 @@
           <a:noFill/>
         </p:spPr>
         <p:txBody>
-          <a:bodyPr wrap="square" lIns="45720" rIns="45720" tIns="27432" bIns="27432" anchor="t">
+          <a:bodyPr wrap="square" lIns="27432" rIns="27432" tIns="18288" bIns="18288" anchor="t">
             <a:spAutoFit/>
           </a:bodyPr>
           <a:lstStyle/>
@@ -10915,7 +14209,7 @@
           <a:noFill/>
         </p:spPr>
         <p:txBody>
-          <a:bodyPr wrap="square" lIns="45720" rIns="45720" tIns="27432" bIns="27432" anchor="t">
+          <a:bodyPr wrap="square" lIns="27432" rIns="27432" tIns="18288" bIns="18288" anchor="t">
             <a:spAutoFit/>
           </a:bodyPr>
           <a:lstStyle/>
@@ -10950,7 +14244,7 @@
           <a:noFill/>
         </p:spPr>
         <p:txBody>
-          <a:bodyPr wrap="square" lIns="45720" rIns="45720" tIns="27432" bIns="27432" anchor="t">
+          <a:bodyPr wrap="square" lIns="27432" rIns="27432" tIns="18288" bIns="18288" anchor="t">
             <a:spAutoFit/>
           </a:bodyPr>
           <a:lstStyle/>
@@ -11077,7 +14371,7 @@
           <a:noFill/>
         </p:spPr>
         <p:txBody>
-          <a:bodyPr wrap="square" lIns="45720" rIns="45720" tIns="27432" bIns="27432" anchor="t">
+          <a:bodyPr wrap="square" lIns="27432" rIns="27432" tIns="18288" bIns="18288" anchor="t">
             <a:spAutoFit/>
           </a:bodyPr>
           <a:lstStyle/>
@@ -11112,7 +14406,7 @@
           <a:noFill/>
         </p:spPr>
         <p:txBody>
-          <a:bodyPr wrap="square" lIns="45720" rIns="45720" tIns="27432" bIns="27432" anchor="t">
+          <a:bodyPr wrap="square" lIns="27432" rIns="27432" tIns="18288" bIns="18288" anchor="t">
             <a:spAutoFit/>
           </a:bodyPr>
           <a:lstStyle/>
